--- a/design/templates/film-burn-dark/template.pptx
+++ b/design/templates/film-burn-dark/template.pptx
@@ -320,7 +320,7 @@
             </a:lvl1pPr>
           </a:lstStyle>
           <a:p>
-            <a:fld id="{84563B43-CD3D-4346-947D-64165950A7CF}" type="datetimeFigureOut">
+            <a:fld id="{E74088FC-AB1D-4731-A24C-F46EBDB0C5A7}" type="datetimeFigureOut">
               <a:rPr lang="en-US" smtClean="0"/>
               <a:t>10/3/2026</a:t>
             </a:fld>
@@ -357,7 +357,7 @@
             </a:lvl1pPr>
           </a:lstStyle>
           <a:p>
-            <a:fld id="{691F7126-2246-49A0-8047-430012F919EB}" type="slidenum">
+            <a:fld id="{E4AD76C8-B1EB-4E10-9C29-0B8B3CD29BA6}" type="slidenum">
               <a:rPr lang="en-US" smtClean="0"/>
               <a:t>‹#›</a:t>
             </a:fld>
@@ -368,7 +368,7 @@
     </p:spTree>
     <p:extLst>
       <p:ext uri="{BB962C8B-B14F-4D97-AF65-F5344CB8AC3E}">
-        <p14:creationId xmlns:p14="http://schemas.microsoft.com/office/powerpoint/2010/main" val="4140256218"/>
+        <p14:creationId xmlns:p14="http://schemas.microsoft.com/office/powerpoint/2010/main" val="1172761785"/>
       </p:ext>
     </p:extLst>
   </p:cSld>
@@ -400,7 +400,7 @@
           <p:cNvPr id="6" name="glow">
             <a:extLst>
               <a:ext uri="{FF2B5EF4-FFF2-40B4-BE49-F238E27FC236}">
-                <a16:creationId xmlns:a16="http://schemas.microsoft.com/office/drawing/2014/main" id="{1E587A02-33BC-6A88-03DE-33B9293149CA}"/>
+                <a16:creationId xmlns:a16="http://schemas.microsoft.com/office/drawing/2014/main" id="{3A094AD4-2156-8EBB-D115-0468A92E5126}"/>
               </a:ext>
             </a:extLst>
           </p:cNvPr>
@@ -582,7 +582,7 @@
             </a:lvl1pPr>
           </a:lstStyle>
           <a:p>
-            <a:fld id="{84563B43-CD3D-4346-947D-64165950A7CF}" type="datetimeFigureOut">
+            <a:fld id="{E74088FC-AB1D-4731-A24C-F46EBDB0C5A7}" type="datetimeFigureOut">
               <a:rPr lang="en-US" smtClean="0"/>
               <a:t>10/3/2026</a:t>
             </a:fld>
@@ -619,7 +619,7 @@
             </a:lvl1pPr>
           </a:lstStyle>
           <a:p>
-            <a:fld id="{691F7126-2246-49A0-8047-430012F919EB}" type="slidenum">
+            <a:fld id="{E4AD76C8-B1EB-4E10-9C29-0B8B3CD29BA6}" type="slidenum">
               <a:rPr lang="en-US" smtClean="0"/>
               <a:t>‹#›</a:t>
             </a:fld>
@@ -632,7 +632,7 @@
           <p:cNvPr id="7" name="body">
             <a:extLst>
               <a:ext uri="{FF2B5EF4-FFF2-40B4-BE49-F238E27FC236}">
-                <a16:creationId xmlns:a16="http://schemas.microsoft.com/office/drawing/2014/main" id="{0E9B8C9D-856D-6666-E861-7679EA020C07}"/>
+                <a16:creationId xmlns:a16="http://schemas.microsoft.com/office/drawing/2014/main" id="{CE07A34C-B3B2-A96A-C827-89D5F26EC2A7}"/>
               </a:ext>
             </a:extLst>
           </p:cNvPr>
@@ -674,7 +674,7 @@
           <p:cNvPr id="8" name="source">
             <a:extLst>
               <a:ext uri="{FF2B5EF4-FFF2-40B4-BE49-F238E27FC236}">
-                <a16:creationId xmlns:a16="http://schemas.microsoft.com/office/drawing/2014/main" id="{DC17B754-89F9-42D6-99DB-7D26B93C8F03}"/>
+                <a16:creationId xmlns:a16="http://schemas.microsoft.com/office/drawing/2014/main" id="{47C30BDC-CE8F-8904-BF58-886193DB1B28}"/>
               </a:ext>
             </a:extLst>
           </p:cNvPr>
@@ -729,7 +729,7 @@
     </p:spTree>
     <p:extLst>
       <p:ext uri="{BB962C8B-B14F-4D97-AF65-F5344CB8AC3E}">
-        <p14:creationId xmlns:p14="http://schemas.microsoft.com/office/powerpoint/2010/main" val="3865584041"/>
+        <p14:creationId xmlns:p14="http://schemas.microsoft.com/office/powerpoint/2010/main" val="4085234562"/>
       </p:ext>
     </p:extLst>
   </p:cSld>
@@ -761,7 +761,7 @@
           <p:cNvPr id="6" name="glow">
             <a:extLst>
               <a:ext uri="{FF2B5EF4-FFF2-40B4-BE49-F238E27FC236}">
-                <a16:creationId xmlns:a16="http://schemas.microsoft.com/office/drawing/2014/main" id="{F960716F-47FA-02A1-4904-596D71D1DFF0}"/>
+                <a16:creationId xmlns:a16="http://schemas.microsoft.com/office/drawing/2014/main" id="{B0F1C81A-C8AD-57D4-3CD4-7A0D4D1821E0}"/>
               </a:ext>
             </a:extLst>
           </p:cNvPr>
@@ -943,7 +943,7 @@
             </a:lvl1pPr>
           </a:lstStyle>
           <a:p>
-            <a:fld id="{84563B43-CD3D-4346-947D-64165950A7CF}" type="datetimeFigureOut">
+            <a:fld id="{E74088FC-AB1D-4731-A24C-F46EBDB0C5A7}" type="datetimeFigureOut">
               <a:rPr lang="en-US" smtClean="0"/>
               <a:t>10/3/2026</a:t>
             </a:fld>
@@ -980,7 +980,7 @@
             </a:lvl1pPr>
           </a:lstStyle>
           <a:p>
-            <a:fld id="{691F7126-2246-49A0-8047-430012F919EB}" type="slidenum">
+            <a:fld id="{E4AD76C8-B1EB-4E10-9C29-0B8B3CD29BA6}" type="slidenum">
               <a:rPr lang="en-US" smtClean="0"/>
               <a:t>‹#›</a:t>
             </a:fld>
@@ -993,7 +993,7 @@
           <p:cNvPr id="7" name="body">
             <a:extLst>
               <a:ext uri="{FF2B5EF4-FFF2-40B4-BE49-F238E27FC236}">
-                <a16:creationId xmlns:a16="http://schemas.microsoft.com/office/drawing/2014/main" id="{E7A6604A-32A2-5F18-7A76-CC35E4CCC67F}"/>
+                <a16:creationId xmlns:a16="http://schemas.microsoft.com/office/drawing/2014/main" id="{B8987E70-E38E-EF88-5868-7448A7FB8A4C}"/>
               </a:ext>
             </a:extLst>
           </p:cNvPr>
@@ -1036,7 +1036,7 @@
     </p:spTree>
     <p:extLst>
       <p:ext uri="{BB962C8B-B14F-4D97-AF65-F5344CB8AC3E}">
-        <p14:creationId xmlns:p14="http://schemas.microsoft.com/office/powerpoint/2010/main" val="2145804224"/>
+        <p14:creationId xmlns:p14="http://schemas.microsoft.com/office/powerpoint/2010/main" val="3855178355"/>
       </p:ext>
     </p:extLst>
   </p:cSld>
@@ -1127,7 +1127,7 @@
           <p:cNvPr id="6" name="section_number">
             <a:extLst>
               <a:ext uri="{FF2B5EF4-FFF2-40B4-BE49-F238E27FC236}">
-                <a16:creationId xmlns:a16="http://schemas.microsoft.com/office/drawing/2014/main" id="{89837486-0D63-5AD9-3E05-7359E007D714}"/>
+                <a16:creationId xmlns:a16="http://schemas.microsoft.com/office/drawing/2014/main" id="{BEEACFC8-02F3-2E98-A387-4292DEFE7E81}"/>
               </a:ext>
             </a:extLst>
           </p:cNvPr>
@@ -1180,7 +1180,7 @@
           <p:cNvPr id="7" name="subtitle">
             <a:extLst>
               <a:ext uri="{FF2B5EF4-FFF2-40B4-BE49-F238E27FC236}">
-                <a16:creationId xmlns:a16="http://schemas.microsoft.com/office/drawing/2014/main" id="{EE49675E-E66F-E22B-3468-7B022F8C5146}"/>
+                <a16:creationId xmlns:a16="http://schemas.microsoft.com/office/drawing/2014/main" id="{17AF2EA3-25E0-5FDD-0B44-8CD70B6173D1}"/>
               </a:ext>
             </a:extLst>
           </p:cNvPr>
@@ -1230,7 +1230,7 @@
     </p:spTree>
     <p:extLst>
       <p:ext uri="{BB962C8B-B14F-4D97-AF65-F5344CB8AC3E}">
-        <p14:creationId xmlns:p14="http://schemas.microsoft.com/office/powerpoint/2010/main" val="3814651792"/>
+        <p14:creationId xmlns:p14="http://schemas.microsoft.com/office/powerpoint/2010/main" val="157498087"/>
       </p:ext>
     </p:extLst>
   </p:cSld>
@@ -1262,7 +1262,7 @@
           <p:cNvPr id="6" name="glow">
             <a:extLst>
               <a:ext uri="{FF2B5EF4-FFF2-40B4-BE49-F238E27FC236}">
-                <a16:creationId xmlns:a16="http://schemas.microsoft.com/office/drawing/2014/main" id="{2BD191DB-3F3A-9F31-F4F5-755FB4C53FA8}"/>
+                <a16:creationId xmlns:a16="http://schemas.microsoft.com/office/drawing/2014/main" id="{C79BFA5D-F319-FEA4-9D0C-CB6167D7384F}"/>
               </a:ext>
             </a:extLst>
           </p:cNvPr>
@@ -1444,7 +1444,7 @@
             </a:lvl1pPr>
           </a:lstStyle>
           <a:p>
-            <a:fld id="{84563B43-CD3D-4346-947D-64165950A7CF}" type="datetimeFigureOut">
+            <a:fld id="{E74088FC-AB1D-4731-A24C-F46EBDB0C5A7}" type="datetimeFigureOut">
               <a:rPr lang="en-US" smtClean="0"/>
               <a:t>10/3/2026</a:t>
             </a:fld>
@@ -1481,7 +1481,7 @@
             </a:lvl1pPr>
           </a:lstStyle>
           <a:p>
-            <a:fld id="{691F7126-2246-49A0-8047-430012F919EB}" type="slidenum">
+            <a:fld id="{E4AD76C8-B1EB-4E10-9C29-0B8B3CD29BA6}" type="slidenum">
               <a:rPr lang="en-US" smtClean="0"/>
               <a:t>‹#›</a:t>
             </a:fld>
@@ -1494,7 +1494,7 @@
           <p:cNvPr id="7" name="item_1_title">
             <a:extLst>
               <a:ext uri="{FF2B5EF4-FFF2-40B4-BE49-F238E27FC236}">
-                <a16:creationId xmlns:a16="http://schemas.microsoft.com/office/drawing/2014/main" id="{450D0CA0-0F58-B5CF-08D2-FA54CF5E1801}"/>
+                <a16:creationId xmlns:a16="http://schemas.microsoft.com/office/drawing/2014/main" id="{E7572208-BCFC-3400-D5B7-5F635541DE38}"/>
               </a:ext>
             </a:extLst>
           </p:cNvPr>
@@ -1522,7 +1522,7 @@
               </a:spcBef>
               <a:buFontTx/>
               <a:buNone/>
-              <a:defRPr sz="2200" b="1">
+              <a:defRPr sz="2000" b="1">
                 <a:solidFill>
                   <a:schemeClr val="accent1"/>
                 </a:solidFill>
@@ -1544,7 +1544,7 @@
           <p:cNvPr id="8" name="item_1">
             <a:extLst>
               <a:ext uri="{FF2B5EF4-FFF2-40B4-BE49-F238E27FC236}">
-                <a16:creationId xmlns:a16="http://schemas.microsoft.com/office/drawing/2014/main" id="{3DCDAAD2-76C5-0BC5-549D-9933E532A13B}"/>
+                <a16:creationId xmlns:a16="http://schemas.microsoft.com/office/drawing/2014/main" id="{FF45D06C-D742-F260-EB72-85548D84AA97}"/>
               </a:ext>
             </a:extLst>
           </p:cNvPr>
@@ -1592,7 +1592,7 @@
           <p:cNvPr id="9" name="item_2_title">
             <a:extLst>
               <a:ext uri="{FF2B5EF4-FFF2-40B4-BE49-F238E27FC236}">
-                <a16:creationId xmlns:a16="http://schemas.microsoft.com/office/drawing/2014/main" id="{0A3ECDDB-8D7F-EF01-001F-EACA7E441ADA}"/>
+                <a16:creationId xmlns:a16="http://schemas.microsoft.com/office/drawing/2014/main" id="{80DF1E81-DF29-6845-347E-5CA935305B82}"/>
               </a:ext>
             </a:extLst>
           </p:cNvPr>
@@ -1623,7 +1623,7 @@
               </a:spcBef>
               <a:buFontTx/>
               <a:buNone/>
-              <a:defRPr sz="2200" b="1">
+              <a:defRPr sz="2000" b="1">
                 <a:solidFill>
                   <a:schemeClr val="accent1"/>
                 </a:solidFill>
@@ -1645,7 +1645,7 @@
           <p:cNvPr id="10" name="item_2">
             <a:extLst>
               <a:ext uri="{FF2B5EF4-FFF2-40B4-BE49-F238E27FC236}">
-                <a16:creationId xmlns:a16="http://schemas.microsoft.com/office/drawing/2014/main" id="{965BCFCC-F92F-684B-997A-658E55D36086}"/>
+                <a16:creationId xmlns:a16="http://schemas.microsoft.com/office/drawing/2014/main" id="{74F60BA7-6802-A38E-5FFC-BD682C9527C7}"/>
               </a:ext>
             </a:extLst>
           </p:cNvPr>
@@ -1693,7 +1693,7 @@
           <p:cNvPr id="11" name="item_3_title">
             <a:extLst>
               <a:ext uri="{FF2B5EF4-FFF2-40B4-BE49-F238E27FC236}">
-                <a16:creationId xmlns:a16="http://schemas.microsoft.com/office/drawing/2014/main" id="{6A418E82-1603-E7AF-EF31-783F4311A99B}"/>
+                <a16:creationId xmlns:a16="http://schemas.microsoft.com/office/drawing/2014/main" id="{9CEBB602-D199-BCA8-BEED-B61C25B0CE4F}"/>
               </a:ext>
             </a:extLst>
           </p:cNvPr>
@@ -1724,7 +1724,7 @@
               </a:spcBef>
               <a:buFontTx/>
               <a:buNone/>
-              <a:defRPr sz="2200" b="1">
+              <a:defRPr sz="2000" b="1">
                 <a:solidFill>
                   <a:schemeClr val="accent1"/>
                 </a:solidFill>
@@ -1746,7 +1746,7 @@
           <p:cNvPr id="12" name="item_3">
             <a:extLst>
               <a:ext uri="{FF2B5EF4-FFF2-40B4-BE49-F238E27FC236}">
-                <a16:creationId xmlns:a16="http://schemas.microsoft.com/office/drawing/2014/main" id="{51F54459-13F6-AE58-A97C-98816A33FF8D}"/>
+                <a16:creationId xmlns:a16="http://schemas.microsoft.com/office/drawing/2014/main" id="{6DE693A1-043E-5C80-6B04-171D6858EFCA}"/>
               </a:ext>
             </a:extLst>
           </p:cNvPr>
@@ -1794,7 +1794,7 @@
           <p:cNvPr id="13" name="item_4_title">
             <a:extLst>
               <a:ext uri="{FF2B5EF4-FFF2-40B4-BE49-F238E27FC236}">
-                <a16:creationId xmlns:a16="http://schemas.microsoft.com/office/drawing/2014/main" id="{DCED2561-69BC-9919-FA55-893C432E78B8}"/>
+                <a16:creationId xmlns:a16="http://schemas.microsoft.com/office/drawing/2014/main" id="{E64A0E53-5FC1-5BCA-EB2F-4AACFF04C5D7}"/>
               </a:ext>
             </a:extLst>
           </p:cNvPr>
@@ -1825,7 +1825,7 @@
               </a:spcBef>
               <a:buFontTx/>
               <a:buNone/>
-              <a:defRPr sz="2200" b="1">
+              <a:defRPr sz="2000" b="1">
                 <a:solidFill>
                   <a:schemeClr val="accent1"/>
                 </a:solidFill>
@@ -1847,7 +1847,7 @@
           <p:cNvPr id="14" name="item_4">
             <a:extLst>
               <a:ext uri="{FF2B5EF4-FFF2-40B4-BE49-F238E27FC236}">
-                <a16:creationId xmlns:a16="http://schemas.microsoft.com/office/drawing/2014/main" id="{78D1329E-3B14-3551-C568-EFBCDD8577B9}"/>
+                <a16:creationId xmlns:a16="http://schemas.microsoft.com/office/drawing/2014/main" id="{1957ECA6-1D89-02FC-AEE5-ED1C0DBC3A3C}"/>
               </a:ext>
             </a:extLst>
           </p:cNvPr>
@@ -1895,7 +1895,7 @@
           <p:cNvPr id="15" name="source">
             <a:extLst>
               <a:ext uri="{FF2B5EF4-FFF2-40B4-BE49-F238E27FC236}">
-                <a16:creationId xmlns:a16="http://schemas.microsoft.com/office/drawing/2014/main" id="{AB947EEE-29A7-BD7D-6FED-DBA1580FE296}"/>
+                <a16:creationId xmlns:a16="http://schemas.microsoft.com/office/drawing/2014/main" id="{B3D27D6D-3027-F239-8F00-DFCCD05DE082}"/>
               </a:ext>
             </a:extLst>
           </p:cNvPr>
@@ -1950,7 +1950,7 @@
     </p:spTree>
     <p:extLst>
       <p:ext uri="{BB962C8B-B14F-4D97-AF65-F5344CB8AC3E}">
-        <p14:creationId xmlns:p14="http://schemas.microsoft.com/office/powerpoint/2010/main" val="3620567689"/>
+        <p14:creationId xmlns:p14="http://schemas.microsoft.com/office/powerpoint/2010/main" val="3364329190"/>
       </p:ext>
     </p:extLst>
   </p:cSld>
@@ -1982,7 +1982,7 @@
           <p:cNvPr id="6" name="glow">
             <a:extLst>
               <a:ext uri="{FF2B5EF4-FFF2-40B4-BE49-F238E27FC236}">
-                <a16:creationId xmlns:a16="http://schemas.microsoft.com/office/drawing/2014/main" id="{EEAF7AFE-5C9B-0196-4168-511DA7F1DFA1}"/>
+                <a16:creationId xmlns:a16="http://schemas.microsoft.com/office/drawing/2014/main" id="{FF9921BB-09BF-7C40-7C21-93DF9A7C2B05}"/>
               </a:ext>
             </a:extLst>
           </p:cNvPr>
@@ -2164,7 +2164,7 @@
             </a:lvl1pPr>
           </a:lstStyle>
           <a:p>
-            <a:fld id="{84563B43-CD3D-4346-947D-64165950A7CF}" type="datetimeFigureOut">
+            <a:fld id="{E74088FC-AB1D-4731-A24C-F46EBDB0C5A7}" type="datetimeFigureOut">
               <a:rPr lang="en-US" smtClean="0"/>
               <a:t>10/3/2026</a:t>
             </a:fld>
@@ -2201,7 +2201,7 @@
             </a:lvl1pPr>
           </a:lstStyle>
           <a:p>
-            <a:fld id="{691F7126-2246-49A0-8047-430012F919EB}" type="slidenum">
+            <a:fld id="{E4AD76C8-B1EB-4E10-9C29-0B8B3CD29BA6}" type="slidenum">
               <a:rPr lang="en-US" smtClean="0"/>
               <a:t>‹#›</a:t>
             </a:fld>
@@ -2214,7 +2214,7 @@
           <p:cNvPr id="7" name="body">
             <a:extLst>
               <a:ext uri="{FF2B5EF4-FFF2-40B4-BE49-F238E27FC236}">
-                <a16:creationId xmlns:a16="http://schemas.microsoft.com/office/drawing/2014/main" id="{0B0A821A-3BA3-5761-0625-2A25B88B729A}"/>
+                <a16:creationId xmlns:a16="http://schemas.microsoft.com/office/drawing/2014/main" id="{2F455E0A-E737-A1B2-C885-C5EF8976AE8B}"/>
               </a:ext>
             </a:extLst>
           </p:cNvPr>
@@ -2259,7 +2259,7 @@
           <p:cNvPr id="8" name="source">
             <a:extLst>
               <a:ext uri="{FF2B5EF4-FFF2-40B4-BE49-F238E27FC236}">
-                <a16:creationId xmlns:a16="http://schemas.microsoft.com/office/drawing/2014/main" id="{9393ED1B-7C45-7E11-2FBF-57B909EEAE58}"/>
+                <a16:creationId xmlns:a16="http://schemas.microsoft.com/office/drawing/2014/main" id="{23C9631B-12FD-3B58-123A-A13F20F7301F}"/>
               </a:ext>
             </a:extLst>
           </p:cNvPr>
@@ -2314,7 +2314,7 @@
     </p:spTree>
     <p:extLst>
       <p:ext uri="{BB962C8B-B14F-4D97-AF65-F5344CB8AC3E}">
-        <p14:creationId xmlns:p14="http://schemas.microsoft.com/office/powerpoint/2010/main" val="2385240573"/>
+        <p14:creationId xmlns:p14="http://schemas.microsoft.com/office/powerpoint/2010/main" val="1601994239"/>
       </p:ext>
     </p:extLst>
   </p:cSld>
@@ -2346,7 +2346,7 @@
           <p:cNvPr id="6" name="glow">
             <a:extLst>
               <a:ext uri="{FF2B5EF4-FFF2-40B4-BE49-F238E27FC236}">
-                <a16:creationId xmlns:a16="http://schemas.microsoft.com/office/drawing/2014/main" id="{6BEC4E82-7240-B6C9-8A00-0BBA23F085FB}"/>
+                <a16:creationId xmlns:a16="http://schemas.microsoft.com/office/drawing/2014/main" id="{B873165F-BB2D-7324-2131-845748C1FAB8}"/>
               </a:ext>
             </a:extLst>
           </p:cNvPr>
@@ -2528,7 +2528,7 @@
             </a:lvl1pPr>
           </a:lstStyle>
           <a:p>
-            <a:fld id="{84563B43-CD3D-4346-947D-64165950A7CF}" type="datetimeFigureOut">
+            <a:fld id="{E74088FC-AB1D-4731-A24C-F46EBDB0C5A7}" type="datetimeFigureOut">
               <a:rPr lang="en-US" smtClean="0"/>
               <a:t>10/3/2026</a:t>
             </a:fld>
@@ -2565,7 +2565,7 @@
             </a:lvl1pPr>
           </a:lstStyle>
           <a:p>
-            <a:fld id="{691F7126-2246-49A0-8047-430012F919EB}" type="slidenum">
+            <a:fld id="{E4AD76C8-B1EB-4E10-9C29-0B8B3CD29BA6}" type="slidenum">
               <a:rPr lang="en-US" smtClean="0"/>
               <a:t>‹#›</a:t>
             </a:fld>
@@ -2578,7 +2578,7 @@
           <p:cNvPr id="7" name="item_1_title">
             <a:extLst>
               <a:ext uri="{FF2B5EF4-FFF2-40B4-BE49-F238E27FC236}">
-                <a16:creationId xmlns:a16="http://schemas.microsoft.com/office/drawing/2014/main" id="{E09A65B8-3529-41A2-199D-2ECF50D775AC}"/>
+                <a16:creationId xmlns:a16="http://schemas.microsoft.com/office/drawing/2014/main" id="{1DB1692F-082F-1E51-FC4D-3E8EC7B07519}"/>
               </a:ext>
             </a:extLst>
           </p:cNvPr>
@@ -2591,8 +2591,8 @@
         </p:nvSpPr>
         <p:spPr>
           <a:xfrm>
-            <a:off x="633364" y="2363141"/>
-            <a:ext cx="4461337" cy="400852"/>
+            <a:off x="607870" y="2334448"/>
+            <a:ext cx="4512324" cy="417730"/>
           </a:xfrm>
         </p:spPr>
         <p:txBody>
@@ -2606,7 +2606,7 @@
               </a:spcBef>
               <a:buFontTx/>
               <a:buNone/>
-              <a:defRPr sz="2200" b="1">
+              <a:defRPr sz="2000" b="1">
                 <a:solidFill>
                   <a:schemeClr val="accent1"/>
                 </a:solidFill>
@@ -2628,7 +2628,7 @@
           <p:cNvPr id="8" name="item_1">
             <a:extLst>
               <a:ext uri="{FF2B5EF4-FFF2-40B4-BE49-F238E27FC236}">
-                <a16:creationId xmlns:a16="http://schemas.microsoft.com/office/drawing/2014/main" id="{D86477F4-9DEC-327F-EFEF-08D3C681B9CD}"/>
+                <a16:creationId xmlns:a16="http://schemas.microsoft.com/office/drawing/2014/main" id="{A93A79FC-A465-CFA7-98F1-5FC7DBCC9D43}"/>
               </a:ext>
             </a:extLst>
           </p:cNvPr>
@@ -2641,8 +2641,8 @@
         </p:nvSpPr>
         <p:spPr>
           <a:xfrm>
-            <a:off x="633365" y="2763993"/>
-            <a:ext cx="4461337" cy="962046"/>
+            <a:off x="607870" y="2752180"/>
+            <a:ext cx="4512324" cy="1002553"/>
           </a:xfrm>
           <a:prstGeom prst="rect">
             <a:avLst/>
@@ -2676,7 +2676,7 @@
           <p:cNvPr id="9" name="item_2_title">
             <a:extLst>
               <a:ext uri="{FF2B5EF4-FFF2-40B4-BE49-F238E27FC236}">
-                <a16:creationId xmlns:a16="http://schemas.microsoft.com/office/drawing/2014/main" id="{E85096B1-EEAD-9631-4FC8-B205883DB0DE}"/>
+                <a16:creationId xmlns:a16="http://schemas.microsoft.com/office/drawing/2014/main" id="{01577E30-F995-04E1-69FD-B5530A99D715}"/>
               </a:ext>
             </a:extLst>
           </p:cNvPr>
@@ -2689,8 +2689,8 @@
         </p:nvSpPr>
         <p:spPr>
           <a:xfrm>
-            <a:off x="5706543" y="2363141"/>
-            <a:ext cx="4461337" cy="400852"/>
+            <a:off x="5681048" y="2334448"/>
+            <a:ext cx="4512324" cy="417730"/>
           </a:xfrm>
           <a:prstGeom prst="rect">
             <a:avLst/>
@@ -2707,7 +2707,7 @@
               </a:spcBef>
               <a:buFontTx/>
               <a:buNone/>
-              <a:defRPr sz="2200" b="1">
+              <a:defRPr sz="2000" b="1">
                 <a:solidFill>
                   <a:schemeClr val="accent1"/>
                 </a:solidFill>
@@ -2729,7 +2729,7 @@
           <p:cNvPr id="10" name="item_2">
             <a:extLst>
               <a:ext uri="{FF2B5EF4-FFF2-40B4-BE49-F238E27FC236}">
-                <a16:creationId xmlns:a16="http://schemas.microsoft.com/office/drawing/2014/main" id="{52E86167-65B2-6D5B-6936-AFCB380DA4C6}"/>
+                <a16:creationId xmlns:a16="http://schemas.microsoft.com/office/drawing/2014/main" id="{B066A2C9-C882-105E-4BB9-9D7614E2A911}"/>
               </a:ext>
             </a:extLst>
           </p:cNvPr>
@@ -2742,8 +2742,8 @@
         </p:nvSpPr>
         <p:spPr>
           <a:xfrm>
-            <a:off x="5706543" y="2763993"/>
-            <a:ext cx="4461337" cy="962046"/>
+            <a:off x="5681048" y="2752180"/>
+            <a:ext cx="4512324" cy="1002553"/>
           </a:xfrm>
           <a:prstGeom prst="rect">
             <a:avLst/>
@@ -2777,7 +2777,7 @@
           <p:cNvPr id="11" name="item_3_title">
             <a:extLst>
               <a:ext uri="{FF2B5EF4-FFF2-40B4-BE49-F238E27FC236}">
-                <a16:creationId xmlns:a16="http://schemas.microsoft.com/office/drawing/2014/main" id="{C21222FC-3930-6E83-B138-6F8CE9670AF7}"/>
+                <a16:creationId xmlns:a16="http://schemas.microsoft.com/office/drawing/2014/main" id="{E2404D4D-F4A4-F908-6013-4D6524FDB8B9}"/>
               </a:ext>
             </a:extLst>
           </p:cNvPr>
@@ -2790,8 +2790,8 @@
         </p:nvSpPr>
         <p:spPr>
           <a:xfrm>
-            <a:off x="633365" y="4414661"/>
-            <a:ext cx="4461337" cy="400852"/>
+            <a:off x="607870" y="4385968"/>
+            <a:ext cx="4512324" cy="417730"/>
           </a:xfrm>
           <a:prstGeom prst="rect">
             <a:avLst/>
@@ -2808,7 +2808,7 @@
               </a:spcBef>
               <a:buFontTx/>
               <a:buNone/>
-              <a:defRPr sz="2200" b="1">
+              <a:defRPr sz="2000" b="1">
                 <a:solidFill>
                   <a:schemeClr val="accent1"/>
                 </a:solidFill>
@@ -2830,7 +2830,7 @@
           <p:cNvPr id="12" name="item_3">
             <a:extLst>
               <a:ext uri="{FF2B5EF4-FFF2-40B4-BE49-F238E27FC236}">
-                <a16:creationId xmlns:a16="http://schemas.microsoft.com/office/drawing/2014/main" id="{D90EB345-1D72-0801-F3F7-8F923A86CF44}"/>
+                <a16:creationId xmlns:a16="http://schemas.microsoft.com/office/drawing/2014/main" id="{E0E3A896-93C2-C36D-4156-62D778A11368}"/>
               </a:ext>
             </a:extLst>
           </p:cNvPr>
@@ -2843,8 +2843,8 @@
         </p:nvSpPr>
         <p:spPr>
           <a:xfrm>
-            <a:off x="633365" y="4815513"/>
-            <a:ext cx="4461337" cy="962046"/>
+            <a:off x="607870" y="4803700"/>
+            <a:ext cx="4512324" cy="1002553"/>
           </a:xfrm>
           <a:prstGeom prst="rect">
             <a:avLst/>
@@ -2878,7 +2878,7 @@
           <p:cNvPr id="13" name="item_4_title">
             <a:extLst>
               <a:ext uri="{FF2B5EF4-FFF2-40B4-BE49-F238E27FC236}">
-                <a16:creationId xmlns:a16="http://schemas.microsoft.com/office/drawing/2014/main" id="{5D14E141-40A0-20A5-4B7B-E01FAD8893F0}"/>
+                <a16:creationId xmlns:a16="http://schemas.microsoft.com/office/drawing/2014/main" id="{6B58F933-B0D1-E6E8-BB48-26CE6463E5BB}"/>
               </a:ext>
             </a:extLst>
           </p:cNvPr>
@@ -2891,8 +2891,8 @@
         </p:nvSpPr>
         <p:spPr>
           <a:xfrm>
-            <a:off x="5706543" y="4414661"/>
-            <a:ext cx="4461337" cy="400852"/>
+            <a:off x="5681048" y="4385968"/>
+            <a:ext cx="4512324" cy="417730"/>
           </a:xfrm>
           <a:prstGeom prst="rect">
             <a:avLst/>
@@ -2909,7 +2909,7 @@
               </a:spcBef>
               <a:buFontTx/>
               <a:buNone/>
-              <a:defRPr sz="2200" b="1">
+              <a:defRPr sz="2000" b="1">
                 <a:solidFill>
                   <a:schemeClr val="accent1"/>
                 </a:solidFill>
@@ -2931,7 +2931,7 @@
           <p:cNvPr id="14" name="item_4">
             <a:extLst>
               <a:ext uri="{FF2B5EF4-FFF2-40B4-BE49-F238E27FC236}">
-                <a16:creationId xmlns:a16="http://schemas.microsoft.com/office/drawing/2014/main" id="{EF00F855-DF9F-E909-70D3-6D97D1543E8B}"/>
+                <a16:creationId xmlns:a16="http://schemas.microsoft.com/office/drawing/2014/main" id="{CBF2A7E3-72D5-5AD3-86A1-B13FEF10602A}"/>
               </a:ext>
             </a:extLst>
           </p:cNvPr>
@@ -2944,8 +2944,8 @@
         </p:nvSpPr>
         <p:spPr>
           <a:xfrm>
-            <a:off x="5706543" y="4815513"/>
-            <a:ext cx="4461337" cy="962046"/>
+            <a:off x="5681048" y="4803700"/>
+            <a:ext cx="4512324" cy="1002553"/>
           </a:xfrm>
           <a:prstGeom prst="rect">
             <a:avLst/>
@@ -2979,7 +2979,7 @@
           <p:cNvPr id="15" name="source">
             <a:extLst>
               <a:ext uri="{FF2B5EF4-FFF2-40B4-BE49-F238E27FC236}">
-                <a16:creationId xmlns:a16="http://schemas.microsoft.com/office/drawing/2014/main" id="{B1A294B6-882F-866A-AC58-CD111230F10C}"/>
+                <a16:creationId xmlns:a16="http://schemas.microsoft.com/office/drawing/2014/main" id="{CF4E50A9-7796-9DF0-CC3C-C88A66DAB148}"/>
               </a:ext>
             </a:extLst>
           </p:cNvPr>
@@ -3034,7 +3034,7 @@
     </p:spTree>
     <p:extLst>
       <p:ext uri="{BB962C8B-B14F-4D97-AF65-F5344CB8AC3E}">
-        <p14:creationId xmlns:p14="http://schemas.microsoft.com/office/powerpoint/2010/main" val="1484488996"/>
+        <p14:creationId xmlns:p14="http://schemas.microsoft.com/office/powerpoint/2010/main" val="2140031972"/>
       </p:ext>
     </p:extLst>
   </p:cSld>
@@ -3066,7 +3066,7 @@
           <p:cNvPr id="6" name="glow">
             <a:extLst>
               <a:ext uri="{FF2B5EF4-FFF2-40B4-BE49-F238E27FC236}">
-                <a16:creationId xmlns:a16="http://schemas.microsoft.com/office/drawing/2014/main" id="{F7BACF77-013C-FE26-96F5-A524086B33EA}"/>
+                <a16:creationId xmlns:a16="http://schemas.microsoft.com/office/drawing/2014/main" id="{3ABE3CBA-ECEE-8AE5-036F-83969EBE9991}"/>
               </a:ext>
             </a:extLst>
           </p:cNvPr>
@@ -3248,7 +3248,7 @@
             </a:lvl1pPr>
           </a:lstStyle>
           <a:p>
-            <a:fld id="{84563B43-CD3D-4346-947D-64165950A7CF}" type="datetimeFigureOut">
+            <a:fld id="{E74088FC-AB1D-4731-A24C-F46EBDB0C5A7}" type="datetimeFigureOut">
               <a:rPr lang="en-US" smtClean="0"/>
               <a:t>10/3/2026</a:t>
             </a:fld>
@@ -3285,7 +3285,7 @@
             </a:lvl1pPr>
           </a:lstStyle>
           <a:p>
-            <a:fld id="{691F7126-2246-49A0-8047-430012F919EB}" type="slidenum">
+            <a:fld id="{E4AD76C8-B1EB-4E10-9C29-0B8B3CD29BA6}" type="slidenum">
               <a:rPr lang="en-US" smtClean="0"/>
               <a:t>‹#›</a:t>
             </a:fld>
@@ -3298,7 +3298,7 @@
           <p:cNvPr id="7" name="body">
             <a:extLst>
               <a:ext uri="{FF2B5EF4-FFF2-40B4-BE49-F238E27FC236}">
-                <a16:creationId xmlns:a16="http://schemas.microsoft.com/office/drawing/2014/main" id="{70306900-8D98-D2A9-0A4E-DA673F650DB7}"/>
+                <a16:creationId xmlns:a16="http://schemas.microsoft.com/office/drawing/2014/main" id="{0B9F8482-3F65-EE01-4A89-36A92C8C40A6}"/>
               </a:ext>
             </a:extLst>
           </p:cNvPr>
@@ -3340,7 +3340,7 @@
           <p:cNvPr id="8" name="kpi_value_1">
             <a:extLst>
               <a:ext uri="{FF2B5EF4-FFF2-40B4-BE49-F238E27FC236}">
-                <a16:creationId xmlns:a16="http://schemas.microsoft.com/office/drawing/2014/main" id="{CC46C914-4020-C385-5E58-6EE4E91B2FA2}"/>
+                <a16:creationId xmlns:a16="http://schemas.microsoft.com/office/drawing/2014/main" id="{A1D61CF5-550B-1A52-0E56-FA656C61FAF2}"/>
               </a:ext>
             </a:extLst>
           </p:cNvPr>
@@ -3393,7 +3393,7 @@
           <p:cNvPr id="9" name="kpi_label_1">
             <a:extLst>
               <a:ext uri="{FF2B5EF4-FFF2-40B4-BE49-F238E27FC236}">
-                <a16:creationId xmlns:a16="http://schemas.microsoft.com/office/drawing/2014/main" id="{69C47649-C3C3-F519-F1BD-D1A71B3C4CC1}"/>
+                <a16:creationId xmlns:a16="http://schemas.microsoft.com/office/drawing/2014/main" id="{BA5296B1-55E9-3ABB-F4B7-4E4768A4943A}"/>
               </a:ext>
             </a:extLst>
           </p:cNvPr>
@@ -3424,7 +3424,7 @@
               </a:spcBef>
               <a:buFontTx/>
               <a:buNone/>
-              <a:defRPr sz="1800"/>
+              <a:defRPr sz="2000"/>
             </a:lvl1pPr>
           </a:lstStyle>
           <a:p>
@@ -3441,7 +3441,7 @@
           <p:cNvPr id="10" name="source">
             <a:extLst>
               <a:ext uri="{FF2B5EF4-FFF2-40B4-BE49-F238E27FC236}">
-                <a16:creationId xmlns:a16="http://schemas.microsoft.com/office/drawing/2014/main" id="{15E749EA-E189-3267-29CB-BE42447BCB23}"/>
+                <a16:creationId xmlns:a16="http://schemas.microsoft.com/office/drawing/2014/main" id="{FB0153F9-57AE-EEB4-6A4D-4F9970C39F7F}"/>
               </a:ext>
             </a:extLst>
           </p:cNvPr>
@@ -3496,7 +3496,7 @@
     </p:spTree>
     <p:extLst>
       <p:ext uri="{BB962C8B-B14F-4D97-AF65-F5344CB8AC3E}">
-        <p14:creationId xmlns:p14="http://schemas.microsoft.com/office/powerpoint/2010/main" val="834216021"/>
+        <p14:creationId xmlns:p14="http://schemas.microsoft.com/office/powerpoint/2010/main" val="2179177626"/>
       </p:ext>
     </p:extLst>
   </p:cSld>
@@ -3528,7 +3528,7 @@
           <p:cNvPr id="6" name="glow">
             <a:extLst>
               <a:ext uri="{FF2B5EF4-FFF2-40B4-BE49-F238E27FC236}">
-                <a16:creationId xmlns:a16="http://schemas.microsoft.com/office/drawing/2014/main" id="{B843C99B-C1D4-2C57-B4D6-13A54D96107D}"/>
+                <a16:creationId xmlns:a16="http://schemas.microsoft.com/office/drawing/2014/main" id="{6771B206-371F-3558-641B-A86180B0A663}"/>
               </a:ext>
             </a:extLst>
           </p:cNvPr>
@@ -3710,7 +3710,7 @@
             </a:lvl1pPr>
           </a:lstStyle>
           <a:p>
-            <a:fld id="{84563B43-CD3D-4346-947D-64165950A7CF}" type="datetimeFigureOut">
+            <a:fld id="{E74088FC-AB1D-4731-A24C-F46EBDB0C5A7}" type="datetimeFigureOut">
               <a:rPr lang="en-US" smtClean="0"/>
               <a:t>10/3/2026</a:t>
             </a:fld>
@@ -3747,7 +3747,7 @@
             </a:lvl1pPr>
           </a:lstStyle>
           <a:p>
-            <a:fld id="{691F7126-2246-49A0-8047-430012F919EB}" type="slidenum">
+            <a:fld id="{E4AD76C8-B1EB-4E10-9C29-0B8B3CD29BA6}" type="slidenum">
               <a:rPr lang="en-US" smtClean="0"/>
               <a:t>‹#›</a:t>
             </a:fld>
@@ -3760,7 +3760,7 @@
           <p:cNvPr id="7" name="body">
             <a:extLst>
               <a:ext uri="{FF2B5EF4-FFF2-40B4-BE49-F238E27FC236}">
-                <a16:creationId xmlns:a16="http://schemas.microsoft.com/office/drawing/2014/main" id="{CDF93D96-8692-C905-49E6-84E91F015EE5}"/>
+                <a16:creationId xmlns:a16="http://schemas.microsoft.com/office/drawing/2014/main" id="{37424DB2-F1C5-4A83-2931-B8E2660224BA}"/>
               </a:ext>
             </a:extLst>
           </p:cNvPr>
@@ -3802,7 +3802,7 @@
           <p:cNvPr id="8" name="kpi_value_1">
             <a:extLst>
               <a:ext uri="{FF2B5EF4-FFF2-40B4-BE49-F238E27FC236}">
-                <a16:creationId xmlns:a16="http://schemas.microsoft.com/office/drawing/2014/main" id="{5CCB4E41-CFEA-A031-0516-C8A211F77A8D}"/>
+                <a16:creationId xmlns:a16="http://schemas.microsoft.com/office/drawing/2014/main" id="{000E1729-B7FA-32CA-BE95-2EA037EDF6CB}"/>
               </a:ext>
             </a:extLst>
           </p:cNvPr>
@@ -3815,109 +3815,8 @@
         </p:nvSpPr>
         <p:spPr>
           <a:xfrm>
-            <a:off x="633365" y="2363141"/>
-            <a:ext cx="4563311" cy="1647160"/>
-          </a:xfrm>
-          <a:prstGeom prst="rect">
-            <a:avLst/>
-          </a:prstGeom>
-        </p:spPr>
-        <p:txBody>
-          <a:bodyPr wrap="square" anchor="t">
-            <a:noAutofit/>
-          </a:bodyPr>
-          <a:lstStyle>
-            <a:lvl1pPr marL="0" indent="0">
-              <a:spcBef>
-                <a:spcPts val="0"/>
-              </a:spcBef>
-              <a:buFontTx/>
-              <a:buNone/>
-              <a:defRPr sz="8400" b="1">
-                <a:solidFill>
-                  <a:schemeClr val="accent1"/>
-                </a:solidFill>
-                <a:latin typeface="+mj-lt"/>
-              </a:defRPr>
-            </a:lvl1pPr>
-          </a:lstStyle>
-          <a:p>
-            <a:pPr lvl="0"/>
-            <a:r>
-              <a:rPr lang="en-US"/>
-              <a:t>kpi_value_1</a:t>
-            </a:r>
-          </a:p>
-        </p:txBody>
-      </p:sp>
-      <p:sp>
-        <p:nvSpPr>
-          <p:cNvPr id="9" name="kpi_label_1">
-            <a:extLst>
-              <a:ext uri="{FF2B5EF4-FFF2-40B4-BE49-F238E27FC236}">
-                <a16:creationId xmlns:a16="http://schemas.microsoft.com/office/drawing/2014/main" id="{6EBD058A-1978-5983-D39B-4FA8C0DA9016}"/>
-              </a:ext>
-            </a:extLst>
-          </p:cNvPr>
-          <p:cNvSpPr>
-            <a:spLocks noGrp="1"/>
-          </p:cNvSpPr>
-          <p:nvPr>
-            <p:ph type="body" sz="quarter" idx="15" hasCustomPrompt="1"/>
-          </p:nvPr>
-        </p:nvSpPr>
-        <p:spPr>
-          <a:xfrm>
-            <a:off x="633365" y="4010302"/>
-            <a:ext cx="4563311" cy="915089"/>
-          </a:xfrm>
-          <a:prstGeom prst="rect">
-            <a:avLst/>
-          </a:prstGeom>
-        </p:spPr>
-        <p:txBody>
-          <a:bodyPr wrap="square" anchor="t">
-            <a:noAutofit/>
-          </a:bodyPr>
-          <a:lstStyle>
-            <a:lvl1pPr marL="0" indent="0">
-              <a:spcBef>
-                <a:spcPts val="0"/>
-              </a:spcBef>
-              <a:buFontTx/>
-              <a:buNone/>
-              <a:defRPr sz="1800"/>
-            </a:lvl1pPr>
-          </a:lstStyle>
-          <a:p>
-            <a:pPr lvl="0"/>
-            <a:r>
-              <a:rPr lang="en-US"/>
-              <a:t>kpi_label_1</a:t>
-            </a:r>
-          </a:p>
-        </p:txBody>
-      </p:sp>
-      <p:sp>
-        <p:nvSpPr>
-          <p:cNvPr id="10" name="kpi_value_2">
-            <a:extLst>
-              <a:ext uri="{FF2B5EF4-FFF2-40B4-BE49-F238E27FC236}">
-                <a16:creationId xmlns:a16="http://schemas.microsoft.com/office/drawing/2014/main" id="{4BD2D5F6-CA02-1BA7-F0DF-66755F3CAA2C}"/>
-              </a:ext>
-            </a:extLst>
-          </p:cNvPr>
-          <p:cNvSpPr>
-            <a:spLocks noGrp="1"/>
-          </p:cNvSpPr>
-          <p:nvPr>
-            <p:ph type="body" sz="quarter" idx="16" hasCustomPrompt="1"/>
-          </p:nvPr>
-        </p:nvSpPr>
-        <p:spPr>
-          <a:xfrm>
-            <a:off x="5808515" y="2363142"/>
-            <a:ext cx="4359364" cy="602237"/>
+            <a:off x="607871" y="2334448"/>
+            <a:ext cx="4614297" cy="1684050"/>
           </a:xfrm>
           <a:prstGeom prst="rect">
             <a:avLst/>
@@ -3946,31 +3845,31 @@
             <a:pPr lvl="0"/>
             <a:r>
               <a:rPr lang="en-US"/>
-              <a:t>kpi_value_2</a:t>
-            </a:r>
-          </a:p>
-        </p:txBody>
-      </p:sp>
-      <p:sp>
-        <p:nvSpPr>
-          <p:cNvPr id="11" name="kpi_label_2">
-            <a:extLst>
-              <a:ext uri="{FF2B5EF4-FFF2-40B4-BE49-F238E27FC236}">
-                <a16:creationId xmlns:a16="http://schemas.microsoft.com/office/drawing/2014/main" id="{6A43699F-953B-5250-B9EB-D58B94D66B7B}"/>
-              </a:ext>
-            </a:extLst>
-          </p:cNvPr>
-          <p:cNvSpPr>
-            <a:spLocks noGrp="1"/>
-          </p:cNvSpPr>
-          <p:nvPr>
-            <p:ph type="body" sz="quarter" idx="17" hasCustomPrompt="1"/>
-          </p:nvPr>
-        </p:nvSpPr>
-        <p:spPr>
-          <a:xfrm>
-            <a:off x="5808515" y="2965378"/>
-            <a:ext cx="4359364" cy="334576"/>
+              <a:t>kpi_value_1</a:t>
+            </a:r>
+          </a:p>
+        </p:txBody>
+      </p:sp>
+      <p:sp>
+        <p:nvSpPr>
+          <p:cNvPr id="9" name="kpi_label_1">
+            <a:extLst>
+              <a:ext uri="{FF2B5EF4-FFF2-40B4-BE49-F238E27FC236}">
+                <a16:creationId xmlns:a16="http://schemas.microsoft.com/office/drawing/2014/main" id="{402C51A3-D95C-4FB9-FFED-C90F05ADC8E1}"/>
+              </a:ext>
+            </a:extLst>
+          </p:cNvPr>
+          <p:cNvSpPr>
+            <a:spLocks noGrp="1"/>
+          </p:cNvSpPr>
+          <p:nvPr>
+            <p:ph type="body" sz="quarter" idx="15" hasCustomPrompt="1"/>
+          </p:nvPr>
+        </p:nvSpPr>
+        <p:spPr>
+          <a:xfrm>
+            <a:off x="607871" y="4018500"/>
+            <a:ext cx="4614297" cy="935583"/>
           </a:xfrm>
           <a:prstGeom prst="rect">
             <a:avLst/>
@@ -3987,38 +3886,38 @@
               </a:spcBef>
               <a:buFontTx/>
               <a:buNone/>
-              <a:defRPr sz="1800"/>
-            </a:lvl1pPr>
-          </a:lstStyle>
-          <a:p>
-            <a:pPr lvl="0"/>
-            <a:r>
-              <a:rPr lang="en-US"/>
-              <a:t>kpi_label_2</a:t>
-            </a:r>
-          </a:p>
-        </p:txBody>
-      </p:sp>
-      <p:sp>
-        <p:nvSpPr>
-          <p:cNvPr id="12" name="kpi_value_3">
-            <a:extLst>
-              <a:ext uri="{FF2B5EF4-FFF2-40B4-BE49-F238E27FC236}">
-                <a16:creationId xmlns:a16="http://schemas.microsoft.com/office/drawing/2014/main" id="{8B35DFE9-DA31-B990-CEEB-0191805A0308}"/>
-              </a:ext>
-            </a:extLst>
-          </p:cNvPr>
-          <p:cNvSpPr>
-            <a:spLocks noGrp="1"/>
-          </p:cNvSpPr>
-          <p:nvPr>
-            <p:ph type="body" sz="quarter" idx="18" hasCustomPrompt="1"/>
-          </p:nvPr>
-        </p:nvSpPr>
-        <p:spPr>
-          <a:xfrm>
-            <a:off x="5808515" y="3988577"/>
-            <a:ext cx="1873762" cy="602237"/>
+              <a:defRPr sz="2000"/>
+            </a:lvl1pPr>
+          </a:lstStyle>
+          <a:p>
+            <a:pPr lvl="0"/>
+            <a:r>
+              <a:rPr lang="en-US"/>
+              <a:t>kpi_label_1</a:t>
+            </a:r>
+          </a:p>
+        </p:txBody>
+      </p:sp>
+      <p:sp>
+        <p:nvSpPr>
+          <p:cNvPr id="10" name="kpi_value_2">
+            <a:extLst>
+              <a:ext uri="{FF2B5EF4-FFF2-40B4-BE49-F238E27FC236}">
+                <a16:creationId xmlns:a16="http://schemas.microsoft.com/office/drawing/2014/main" id="{202042B6-370A-B7DE-AE78-BDFC85EDDC63}"/>
+              </a:ext>
+            </a:extLst>
+          </p:cNvPr>
+          <p:cNvSpPr>
+            <a:spLocks noGrp="1"/>
+          </p:cNvSpPr>
+          <p:nvPr>
+            <p:ph type="body" sz="quarter" idx="16" hasCustomPrompt="1"/>
+          </p:nvPr>
+        </p:nvSpPr>
+        <p:spPr>
+          <a:xfrm>
+            <a:off x="5783022" y="2334448"/>
+            <a:ext cx="4410351" cy="639128"/>
           </a:xfrm>
           <a:prstGeom prst="rect">
             <a:avLst/>
@@ -4047,31 +3946,31 @@
             <a:pPr lvl="0"/>
             <a:r>
               <a:rPr lang="en-US"/>
-              <a:t>kpi_value_3</a:t>
-            </a:r>
-          </a:p>
-        </p:txBody>
-      </p:sp>
-      <p:sp>
-        <p:nvSpPr>
-          <p:cNvPr id="13" name="kpi_label_3">
-            <a:extLst>
-              <a:ext uri="{FF2B5EF4-FFF2-40B4-BE49-F238E27FC236}">
-                <a16:creationId xmlns:a16="http://schemas.microsoft.com/office/drawing/2014/main" id="{F9E98DA8-E778-873B-5021-F7031CEE8DBB}"/>
-              </a:ext>
-            </a:extLst>
-          </p:cNvPr>
-          <p:cNvSpPr>
-            <a:spLocks noGrp="1"/>
-          </p:cNvSpPr>
-          <p:nvPr>
-            <p:ph type="body" sz="quarter" idx="19" hasCustomPrompt="1"/>
-          </p:nvPr>
-        </p:nvSpPr>
-        <p:spPr>
-          <a:xfrm>
-            <a:off x="5808515" y="4590813"/>
-            <a:ext cx="1873762" cy="334576"/>
+              <a:t>kpi_value_2</a:t>
+            </a:r>
+          </a:p>
+        </p:txBody>
+      </p:sp>
+      <p:sp>
+        <p:nvSpPr>
+          <p:cNvPr id="11" name="kpi_label_2">
+            <a:extLst>
+              <a:ext uri="{FF2B5EF4-FFF2-40B4-BE49-F238E27FC236}">
+                <a16:creationId xmlns:a16="http://schemas.microsoft.com/office/drawing/2014/main" id="{21B8757E-A524-66BE-94FF-E1DC7C6EDFD4}"/>
+              </a:ext>
+            </a:extLst>
+          </p:cNvPr>
+          <p:cNvSpPr>
+            <a:spLocks noGrp="1"/>
+          </p:cNvSpPr>
+          <p:nvPr>
+            <p:ph type="body" sz="quarter" idx="17" hasCustomPrompt="1"/>
+          </p:nvPr>
+        </p:nvSpPr>
+        <p:spPr>
+          <a:xfrm>
+            <a:off x="5783022" y="2973577"/>
+            <a:ext cx="4410351" cy="355071"/>
           </a:xfrm>
           <a:prstGeom prst="rect">
             <a:avLst/>
@@ -4088,38 +3987,38 @@
               </a:spcBef>
               <a:buFontTx/>
               <a:buNone/>
-              <a:defRPr sz="1800"/>
-            </a:lvl1pPr>
-          </a:lstStyle>
-          <a:p>
-            <a:pPr lvl="0"/>
-            <a:r>
-              <a:rPr lang="en-US"/>
-              <a:t>kpi_label_3</a:t>
-            </a:r>
-          </a:p>
-        </p:txBody>
-      </p:sp>
-      <p:sp>
-        <p:nvSpPr>
-          <p:cNvPr id="14" name="kpi_value_4">
-            <a:extLst>
-              <a:ext uri="{FF2B5EF4-FFF2-40B4-BE49-F238E27FC236}">
-                <a16:creationId xmlns:a16="http://schemas.microsoft.com/office/drawing/2014/main" id="{39C9ECF6-7767-E4DF-5730-2866B0D48B5F}"/>
-              </a:ext>
-            </a:extLst>
-          </p:cNvPr>
-          <p:cNvSpPr>
-            <a:spLocks noGrp="1"/>
-          </p:cNvSpPr>
-          <p:nvPr>
-            <p:ph type="body" sz="quarter" idx="20" hasCustomPrompt="1"/>
-          </p:nvPr>
-        </p:nvSpPr>
-        <p:spPr>
-          <a:xfrm>
-            <a:off x="8294117" y="3988577"/>
-            <a:ext cx="1873762" cy="602237"/>
+              <a:defRPr sz="2000"/>
+            </a:lvl1pPr>
+          </a:lstStyle>
+          <a:p>
+            <a:pPr lvl="0"/>
+            <a:r>
+              <a:rPr lang="en-US"/>
+              <a:t>kpi_label_2</a:t>
+            </a:r>
+          </a:p>
+        </p:txBody>
+      </p:sp>
+      <p:sp>
+        <p:nvSpPr>
+          <p:cNvPr id="12" name="kpi_value_3">
+            <a:extLst>
+              <a:ext uri="{FF2B5EF4-FFF2-40B4-BE49-F238E27FC236}">
+                <a16:creationId xmlns:a16="http://schemas.microsoft.com/office/drawing/2014/main" id="{BBD0A224-3947-5E49-9100-DE1ABB060886}"/>
+              </a:ext>
+            </a:extLst>
+          </p:cNvPr>
+          <p:cNvSpPr>
+            <a:spLocks noGrp="1"/>
+          </p:cNvSpPr>
+          <p:nvPr>
+            <p:ph type="body" sz="quarter" idx="18" hasCustomPrompt="1"/>
+          </p:nvPr>
+        </p:nvSpPr>
+        <p:spPr>
+          <a:xfrm>
+            <a:off x="5783021" y="3959883"/>
+            <a:ext cx="1924748" cy="639128"/>
           </a:xfrm>
           <a:prstGeom prst="rect">
             <a:avLst/>
@@ -4148,31 +4047,31 @@
             <a:pPr lvl="0"/>
             <a:r>
               <a:rPr lang="en-US"/>
-              <a:t>kpi_value_4</a:t>
-            </a:r>
-          </a:p>
-        </p:txBody>
-      </p:sp>
-      <p:sp>
-        <p:nvSpPr>
-          <p:cNvPr id="15" name="kpi_label_4">
-            <a:extLst>
-              <a:ext uri="{FF2B5EF4-FFF2-40B4-BE49-F238E27FC236}">
-                <a16:creationId xmlns:a16="http://schemas.microsoft.com/office/drawing/2014/main" id="{4C90654E-E94F-E070-37C5-BD057EB9A662}"/>
-              </a:ext>
-            </a:extLst>
-          </p:cNvPr>
-          <p:cNvSpPr>
-            <a:spLocks noGrp="1"/>
-          </p:cNvSpPr>
-          <p:nvPr>
-            <p:ph type="body" sz="quarter" idx="21" hasCustomPrompt="1"/>
-          </p:nvPr>
-        </p:nvSpPr>
-        <p:spPr>
-          <a:xfrm>
-            <a:off x="8294117" y="4590813"/>
-            <a:ext cx="1873762" cy="334576"/>
+              <a:t>kpi_value_3</a:t>
+            </a:r>
+          </a:p>
+        </p:txBody>
+      </p:sp>
+      <p:sp>
+        <p:nvSpPr>
+          <p:cNvPr id="13" name="kpi_label_3">
+            <a:extLst>
+              <a:ext uri="{FF2B5EF4-FFF2-40B4-BE49-F238E27FC236}">
+                <a16:creationId xmlns:a16="http://schemas.microsoft.com/office/drawing/2014/main" id="{453B1D1C-C237-772A-7154-7DA2243A1B6B}"/>
+              </a:ext>
+            </a:extLst>
+          </p:cNvPr>
+          <p:cNvSpPr>
+            <a:spLocks noGrp="1"/>
+          </p:cNvSpPr>
+          <p:nvPr>
+            <p:ph type="body" sz="quarter" idx="19" hasCustomPrompt="1"/>
+          </p:nvPr>
+        </p:nvSpPr>
+        <p:spPr>
+          <a:xfrm>
+            <a:off x="5783021" y="4599012"/>
+            <a:ext cx="1924748" cy="355071"/>
           </a:xfrm>
           <a:prstGeom prst="rect">
             <a:avLst/>
@@ -4189,7 +4088,108 @@
               </a:spcBef>
               <a:buFontTx/>
               <a:buNone/>
-              <a:defRPr sz="1800"/>
+              <a:defRPr sz="2000"/>
+            </a:lvl1pPr>
+          </a:lstStyle>
+          <a:p>
+            <a:pPr lvl="0"/>
+            <a:r>
+              <a:rPr lang="en-US"/>
+              <a:t>kpi_label_3</a:t>
+            </a:r>
+          </a:p>
+        </p:txBody>
+      </p:sp>
+      <p:sp>
+        <p:nvSpPr>
+          <p:cNvPr id="14" name="kpi_value_4">
+            <a:extLst>
+              <a:ext uri="{FF2B5EF4-FFF2-40B4-BE49-F238E27FC236}">
+                <a16:creationId xmlns:a16="http://schemas.microsoft.com/office/drawing/2014/main" id="{A4E5999C-31C6-AF65-1EB8-771EA0E973A8}"/>
+              </a:ext>
+            </a:extLst>
+          </p:cNvPr>
+          <p:cNvSpPr>
+            <a:spLocks noGrp="1"/>
+          </p:cNvSpPr>
+          <p:nvPr>
+            <p:ph type="body" sz="quarter" idx="20" hasCustomPrompt="1"/>
+          </p:nvPr>
+        </p:nvSpPr>
+        <p:spPr>
+          <a:xfrm>
+            <a:off x="8268623" y="3959883"/>
+            <a:ext cx="1924748" cy="639128"/>
+          </a:xfrm>
+          <a:prstGeom prst="rect">
+            <a:avLst/>
+          </a:prstGeom>
+        </p:spPr>
+        <p:txBody>
+          <a:bodyPr wrap="square" anchor="t">
+            <a:noAutofit/>
+          </a:bodyPr>
+          <a:lstStyle>
+            <a:lvl1pPr marL="0" indent="0">
+              <a:spcBef>
+                <a:spcPts val="0"/>
+              </a:spcBef>
+              <a:buFontTx/>
+              <a:buNone/>
+              <a:defRPr sz="6000" b="1">
+                <a:solidFill>
+                  <a:schemeClr val="accent1"/>
+                </a:solidFill>
+                <a:latin typeface="+mj-lt"/>
+              </a:defRPr>
+            </a:lvl1pPr>
+          </a:lstStyle>
+          <a:p>
+            <a:pPr lvl="0"/>
+            <a:r>
+              <a:rPr lang="en-US"/>
+              <a:t>kpi_value_4</a:t>
+            </a:r>
+          </a:p>
+        </p:txBody>
+      </p:sp>
+      <p:sp>
+        <p:nvSpPr>
+          <p:cNvPr id="15" name="kpi_label_4">
+            <a:extLst>
+              <a:ext uri="{FF2B5EF4-FFF2-40B4-BE49-F238E27FC236}">
+                <a16:creationId xmlns:a16="http://schemas.microsoft.com/office/drawing/2014/main" id="{E7CE7EB8-5D28-E90B-AD2C-CD082B24CE20}"/>
+              </a:ext>
+            </a:extLst>
+          </p:cNvPr>
+          <p:cNvSpPr>
+            <a:spLocks noGrp="1"/>
+          </p:cNvSpPr>
+          <p:nvPr>
+            <p:ph type="body" sz="quarter" idx="21" hasCustomPrompt="1"/>
+          </p:nvPr>
+        </p:nvSpPr>
+        <p:spPr>
+          <a:xfrm>
+            <a:off x="8268623" y="4599012"/>
+            <a:ext cx="1924748" cy="355071"/>
+          </a:xfrm>
+          <a:prstGeom prst="rect">
+            <a:avLst/>
+          </a:prstGeom>
+        </p:spPr>
+        <p:txBody>
+          <a:bodyPr wrap="square" anchor="t">
+            <a:noAutofit/>
+          </a:bodyPr>
+          <a:lstStyle>
+            <a:lvl1pPr marL="0" indent="0">
+              <a:spcBef>
+                <a:spcPts val="0"/>
+              </a:spcBef>
+              <a:buFontTx/>
+              <a:buNone/>
+              <a:defRPr sz="2000"/>
             </a:lvl1pPr>
           </a:lstStyle>
           <a:p>
@@ -4206,7 +4206,7 @@
           <p:cNvPr id="16" name="source">
             <a:extLst>
               <a:ext uri="{FF2B5EF4-FFF2-40B4-BE49-F238E27FC236}">
-                <a16:creationId xmlns:a16="http://schemas.microsoft.com/office/drawing/2014/main" id="{ADF5BFFE-E6DC-2C04-2DA1-8D162EE461D7}"/>
+                <a16:creationId xmlns:a16="http://schemas.microsoft.com/office/drawing/2014/main" id="{C812EE10-356E-A93A-EF58-DA97950BEF44}"/>
               </a:ext>
             </a:extLst>
           </p:cNvPr>
@@ -4261,7 +4261,7 @@
     </p:spTree>
     <p:extLst>
       <p:ext uri="{BB962C8B-B14F-4D97-AF65-F5344CB8AC3E}">
-        <p14:creationId xmlns:p14="http://schemas.microsoft.com/office/powerpoint/2010/main" val="2625213896"/>
+        <p14:creationId xmlns:p14="http://schemas.microsoft.com/office/powerpoint/2010/main" val="2083303161"/>
       </p:ext>
     </p:extLst>
   </p:cSld>
@@ -4293,7 +4293,7 @@
           <p:cNvPr id="6" name="glow">
             <a:extLst>
               <a:ext uri="{FF2B5EF4-FFF2-40B4-BE49-F238E27FC236}">
-                <a16:creationId xmlns:a16="http://schemas.microsoft.com/office/drawing/2014/main" id="{616C9183-74B7-9913-2EE6-59D1D0AEC5F2}"/>
+                <a16:creationId xmlns:a16="http://schemas.microsoft.com/office/drawing/2014/main" id="{FCF88333-800A-5544-295F-1E140B58D90C}"/>
               </a:ext>
             </a:extLst>
           </p:cNvPr>
@@ -4475,7 +4475,7 @@
             </a:lvl1pPr>
           </a:lstStyle>
           <a:p>
-            <a:fld id="{84563B43-CD3D-4346-947D-64165950A7CF}" type="datetimeFigureOut">
+            <a:fld id="{E74088FC-AB1D-4731-A24C-F46EBDB0C5A7}" type="datetimeFigureOut">
               <a:rPr lang="en-US" smtClean="0"/>
               <a:t>10/3/2026</a:t>
             </a:fld>
@@ -4512,7 +4512,7 @@
             </a:lvl1pPr>
           </a:lstStyle>
           <a:p>
-            <a:fld id="{691F7126-2246-49A0-8047-430012F919EB}" type="slidenum">
+            <a:fld id="{E4AD76C8-B1EB-4E10-9C29-0B8B3CD29BA6}" type="slidenum">
               <a:rPr lang="en-US" smtClean="0"/>
               <a:t>‹#›</a:t>
             </a:fld>
@@ -4525,7 +4525,7 @@
           <p:cNvPr id="7" name="body">
             <a:extLst>
               <a:ext uri="{FF2B5EF4-FFF2-40B4-BE49-F238E27FC236}">
-                <a16:creationId xmlns:a16="http://schemas.microsoft.com/office/drawing/2014/main" id="{8FB6FBD4-D91F-8007-9897-46D20B1DB988}"/>
+                <a16:creationId xmlns:a16="http://schemas.microsoft.com/office/drawing/2014/main" id="{7AC962DD-118D-9855-25E7-0E84A5A7A4CB}"/>
               </a:ext>
             </a:extLst>
           </p:cNvPr>
@@ -4567,7 +4567,7 @@
           <p:cNvPr id="8" name="kpi_value_1">
             <a:extLst>
               <a:ext uri="{FF2B5EF4-FFF2-40B4-BE49-F238E27FC236}">
-                <a16:creationId xmlns:a16="http://schemas.microsoft.com/office/drawing/2014/main" id="{A353090B-68C2-1E4A-8AE5-A29AE275F95D}"/>
+                <a16:creationId xmlns:a16="http://schemas.microsoft.com/office/drawing/2014/main" id="{0ED07E92-D5C4-2082-8BB0-D15076A517D6}"/>
               </a:ext>
             </a:extLst>
           </p:cNvPr>
@@ -4580,8 +4580,8 @@
         </p:nvSpPr>
         <p:spPr>
           <a:xfrm>
-            <a:off x="633365" y="2363142"/>
-            <a:ext cx="4461337" cy="1246499"/>
+            <a:off x="607870" y="2334448"/>
+            <a:ext cx="4512324" cy="1274416"/>
           </a:xfrm>
           <a:prstGeom prst="rect">
             <a:avLst/>
@@ -4620,7 +4620,7 @@
           <p:cNvPr id="9" name="kpi_label_1">
             <a:extLst>
               <a:ext uri="{FF2B5EF4-FFF2-40B4-BE49-F238E27FC236}">
-                <a16:creationId xmlns:a16="http://schemas.microsoft.com/office/drawing/2014/main" id="{B92F9B6A-3732-A88E-7603-3179337B729F}"/>
+                <a16:creationId xmlns:a16="http://schemas.microsoft.com/office/drawing/2014/main" id="{7281373E-B1A7-AD3F-50A1-70790E3BEE8A}"/>
               </a:ext>
             </a:extLst>
           </p:cNvPr>
@@ -4633,8 +4633,8 @@
         </p:nvSpPr>
         <p:spPr>
           <a:xfrm>
-            <a:off x="633365" y="3609640"/>
-            <a:ext cx="4461337" cy="692500"/>
+            <a:off x="607870" y="3608866"/>
+            <a:ext cx="4512324" cy="708009"/>
           </a:xfrm>
           <a:prstGeom prst="rect">
             <a:avLst/>
@@ -4651,7 +4651,7 @@
               </a:spcBef>
               <a:buFontTx/>
               <a:buNone/>
-              <a:defRPr sz="1800"/>
+              <a:defRPr sz="2000"/>
             </a:lvl1pPr>
           </a:lstStyle>
           <a:p>
@@ -4668,7 +4668,7 @@
           <p:cNvPr id="10" name="kpi_value_2">
             <a:extLst>
               <a:ext uri="{FF2B5EF4-FFF2-40B4-BE49-F238E27FC236}">
-                <a16:creationId xmlns:a16="http://schemas.microsoft.com/office/drawing/2014/main" id="{A2207E36-CDFD-EEA9-3F2D-DFE4C8180DCF}"/>
+                <a16:creationId xmlns:a16="http://schemas.microsoft.com/office/drawing/2014/main" id="{62C733CD-817C-5EA5-26D1-D65A452C9CFB}"/>
               </a:ext>
             </a:extLst>
           </p:cNvPr>
@@ -4681,8 +4681,8 @@
         </p:nvSpPr>
         <p:spPr>
           <a:xfrm>
-            <a:off x="5706543" y="2363142"/>
-            <a:ext cx="4461337" cy="1246499"/>
+            <a:off x="5681048" y="2334448"/>
+            <a:ext cx="4512324" cy="1274416"/>
           </a:xfrm>
           <a:prstGeom prst="rect">
             <a:avLst/>
@@ -4721,7 +4721,7 @@
           <p:cNvPr id="11" name="kpi_label_2">
             <a:extLst>
               <a:ext uri="{FF2B5EF4-FFF2-40B4-BE49-F238E27FC236}">
-                <a16:creationId xmlns:a16="http://schemas.microsoft.com/office/drawing/2014/main" id="{E4A632F2-E16D-AC0B-3CBB-762FBA128261}"/>
+                <a16:creationId xmlns:a16="http://schemas.microsoft.com/office/drawing/2014/main" id="{777EAA5E-8954-06D1-1762-EDCE6B410D2F}"/>
               </a:ext>
             </a:extLst>
           </p:cNvPr>
@@ -4734,8 +4734,8 @@
         </p:nvSpPr>
         <p:spPr>
           <a:xfrm>
-            <a:off x="5706543" y="3609640"/>
-            <a:ext cx="4461337" cy="692500"/>
+            <a:off x="5681048" y="3608866"/>
+            <a:ext cx="4512324" cy="708009"/>
           </a:xfrm>
           <a:prstGeom prst="rect">
             <a:avLst/>
@@ -4752,7 +4752,7 @@
               </a:spcBef>
               <a:buFontTx/>
               <a:buNone/>
-              <a:defRPr sz="1800"/>
+              <a:defRPr sz="2000"/>
             </a:lvl1pPr>
           </a:lstStyle>
           <a:p>
@@ -4769,7 +4769,7 @@
           <p:cNvPr id="12" name="source">
             <a:extLst>
               <a:ext uri="{FF2B5EF4-FFF2-40B4-BE49-F238E27FC236}">
-                <a16:creationId xmlns:a16="http://schemas.microsoft.com/office/drawing/2014/main" id="{24A28670-1E48-81EC-801B-B0E9648087BB}"/>
+                <a16:creationId xmlns:a16="http://schemas.microsoft.com/office/drawing/2014/main" id="{5E1FD258-F4E9-BFAE-79E8-335B9ADA387B}"/>
               </a:ext>
             </a:extLst>
           </p:cNvPr>
@@ -4824,7 +4824,7 @@
     </p:spTree>
     <p:extLst>
       <p:ext uri="{BB962C8B-B14F-4D97-AF65-F5344CB8AC3E}">
-        <p14:creationId xmlns:p14="http://schemas.microsoft.com/office/powerpoint/2010/main" val="2827296335"/>
+        <p14:creationId xmlns:p14="http://schemas.microsoft.com/office/powerpoint/2010/main" val="139380733"/>
       </p:ext>
     </p:extLst>
   </p:cSld>
@@ -4856,7 +4856,7 @@
           <p:cNvPr id="6" name="glow">
             <a:extLst>
               <a:ext uri="{FF2B5EF4-FFF2-40B4-BE49-F238E27FC236}">
-                <a16:creationId xmlns:a16="http://schemas.microsoft.com/office/drawing/2014/main" id="{80283EEC-4230-25BC-0633-D59F270D4784}"/>
+                <a16:creationId xmlns:a16="http://schemas.microsoft.com/office/drawing/2014/main" id="{1B2BC317-E72A-47AA-E3AD-14A77DEA0A93}"/>
               </a:ext>
             </a:extLst>
           </p:cNvPr>
@@ -5038,7 +5038,7 @@
             </a:lvl1pPr>
           </a:lstStyle>
           <a:p>
-            <a:fld id="{84563B43-CD3D-4346-947D-64165950A7CF}" type="datetimeFigureOut">
+            <a:fld id="{E74088FC-AB1D-4731-A24C-F46EBDB0C5A7}" type="datetimeFigureOut">
               <a:rPr lang="en-US" smtClean="0"/>
               <a:t>10/3/2026</a:t>
             </a:fld>
@@ -5075,7 +5075,7 @@
             </a:lvl1pPr>
           </a:lstStyle>
           <a:p>
-            <a:fld id="{691F7126-2246-49A0-8047-430012F919EB}" type="slidenum">
+            <a:fld id="{E4AD76C8-B1EB-4E10-9C29-0B8B3CD29BA6}" type="slidenum">
               <a:rPr lang="en-US" smtClean="0"/>
               <a:t>‹#›</a:t>
             </a:fld>
@@ -5088,7 +5088,7 @@
           <p:cNvPr id="7" name="body">
             <a:extLst>
               <a:ext uri="{FF2B5EF4-FFF2-40B4-BE49-F238E27FC236}">
-                <a16:creationId xmlns:a16="http://schemas.microsoft.com/office/drawing/2014/main" id="{A5D9F337-6BF6-E8A3-8774-2FF466FC4513}"/>
+                <a16:creationId xmlns:a16="http://schemas.microsoft.com/office/drawing/2014/main" id="{66B327E8-41B1-6FAA-7D80-D75221921373}"/>
               </a:ext>
             </a:extLst>
           </p:cNvPr>
@@ -5130,7 +5130,7 @@
           <p:cNvPr id="8" name="kpi_value_1">
             <a:extLst>
               <a:ext uri="{FF2B5EF4-FFF2-40B4-BE49-F238E27FC236}">
-                <a16:creationId xmlns:a16="http://schemas.microsoft.com/office/drawing/2014/main" id="{AFDC966F-3084-AA3B-AD05-2EE28B4FF3A3}"/>
+                <a16:creationId xmlns:a16="http://schemas.microsoft.com/office/drawing/2014/main" id="{59D929FC-B644-DE47-7867-4F8826F979A1}"/>
               </a:ext>
             </a:extLst>
           </p:cNvPr>
@@ -5161,7 +5161,7 @@
               </a:spcBef>
               <a:buFontTx/>
               <a:buNone/>
-              <a:defRPr sz="4000" b="1">
+              <a:defRPr sz="6000" b="1">
                 <a:solidFill>
                   <a:schemeClr val="accent1"/>
                 </a:solidFill>
@@ -5183,7 +5183,7 @@
           <p:cNvPr id="9" name="kpi_label_1">
             <a:extLst>
               <a:ext uri="{FF2B5EF4-FFF2-40B4-BE49-F238E27FC236}">
-                <a16:creationId xmlns:a16="http://schemas.microsoft.com/office/drawing/2014/main" id="{BAAA8B0B-6C69-B0F7-FFA6-51578AD51AE8}"/>
+                <a16:creationId xmlns:a16="http://schemas.microsoft.com/office/drawing/2014/main" id="{7D883D12-1B1B-191E-4E60-D8A525CCCC5F}"/>
               </a:ext>
             </a:extLst>
           </p:cNvPr>
@@ -5214,7 +5214,7 @@
               </a:spcBef>
               <a:buFontTx/>
               <a:buNone/>
-              <a:defRPr sz="1800"/>
+              <a:defRPr sz="2000"/>
             </a:lvl1pPr>
           </a:lstStyle>
           <a:p>
@@ -5231,7 +5231,7 @@
           <p:cNvPr id="10" name="kpi_value_2">
             <a:extLst>
               <a:ext uri="{FF2B5EF4-FFF2-40B4-BE49-F238E27FC236}">
-                <a16:creationId xmlns:a16="http://schemas.microsoft.com/office/drawing/2014/main" id="{F9EA0A34-AA06-6D6C-A134-3125E0B80560}"/>
+                <a16:creationId xmlns:a16="http://schemas.microsoft.com/office/drawing/2014/main" id="{E5C70104-8EF9-C145-3563-EC1592703241}"/>
               </a:ext>
             </a:extLst>
           </p:cNvPr>
@@ -5262,7 +5262,7 @@
               </a:spcBef>
               <a:buFontTx/>
               <a:buNone/>
-              <a:defRPr sz="4000" b="1">
+              <a:defRPr sz="6000" b="1">
                 <a:solidFill>
                   <a:schemeClr val="accent1"/>
                 </a:solidFill>
@@ -5284,7 +5284,7 @@
           <p:cNvPr id="11" name="kpi_label_2">
             <a:extLst>
               <a:ext uri="{FF2B5EF4-FFF2-40B4-BE49-F238E27FC236}">
-                <a16:creationId xmlns:a16="http://schemas.microsoft.com/office/drawing/2014/main" id="{D6345969-95E9-5443-6F9F-D41122265970}"/>
+                <a16:creationId xmlns:a16="http://schemas.microsoft.com/office/drawing/2014/main" id="{A87087AC-98BB-CEB6-2646-C37105A3C53A}"/>
               </a:ext>
             </a:extLst>
           </p:cNvPr>
@@ -5315,7 +5315,7 @@
               </a:spcBef>
               <a:buFontTx/>
               <a:buNone/>
-              <a:defRPr sz="1800"/>
+              <a:defRPr sz="2000"/>
             </a:lvl1pPr>
           </a:lstStyle>
           <a:p>
@@ -5332,7 +5332,7 @@
           <p:cNvPr id="12" name="kpi_value_3">
             <a:extLst>
               <a:ext uri="{FF2B5EF4-FFF2-40B4-BE49-F238E27FC236}">
-                <a16:creationId xmlns:a16="http://schemas.microsoft.com/office/drawing/2014/main" id="{D20BDDC6-B8C4-36A3-7AA9-77C72C0701FA}"/>
+                <a16:creationId xmlns:a16="http://schemas.microsoft.com/office/drawing/2014/main" id="{BF12EE03-3361-4413-5045-6777E56230AA}"/>
               </a:ext>
             </a:extLst>
           </p:cNvPr>
@@ -5363,7 +5363,7 @@
               </a:spcBef>
               <a:buFontTx/>
               <a:buNone/>
-              <a:defRPr sz="4000" b="1">
+              <a:defRPr sz="6000" b="1">
                 <a:solidFill>
                   <a:schemeClr val="accent1"/>
                 </a:solidFill>
@@ -5385,7 +5385,7 @@
           <p:cNvPr id="13" name="kpi_label_3">
             <a:extLst>
               <a:ext uri="{FF2B5EF4-FFF2-40B4-BE49-F238E27FC236}">
-                <a16:creationId xmlns:a16="http://schemas.microsoft.com/office/drawing/2014/main" id="{D48A5D57-2274-7154-C197-DD22CDCC51F9}"/>
+                <a16:creationId xmlns:a16="http://schemas.microsoft.com/office/drawing/2014/main" id="{9DEFCD34-E879-101E-1EA0-CE4E85F0DB7E}"/>
               </a:ext>
             </a:extLst>
           </p:cNvPr>
@@ -5416,7 +5416,7 @@
               </a:spcBef>
               <a:buFontTx/>
               <a:buNone/>
-              <a:defRPr sz="1800"/>
+              <a:defRPr sz="2000"/>
             </a:lvl1pPr>
           </a:lstStyle>
           <a:p>
@@ -5433,7 +5433,7 @@
           <p:cNvPr id="14" name="kpi_value_4">
             <a:extLst>
               <a:ext uri="{FF2B5EF4-FFF2-40B4-BE49-F238E27FC236}">
-                <a16:creationId xmlns:a16="http://schemas.microsoft.com/office/drawing/2014/main" id="{AED35CF0-B1DF-1F29-C056-AB84B35ECDBB}"/>
+                <a16:creationId xmlns:a16="http://schemas.microsoft.com/office/drawing/2014/main" id="{F91B23C3-9DA0-8C6B-DEC7-552796C00278}"/>
               </a:ext>
             </a:extLst>
           </p:cNvPr>
@@ -5464,7 +5464,7 @@
               </a:spcBef>
               <a:buFontTx/>
               <a:buNone/>
-              <a:defRPr sz="4000" b="1">
+              <a:defRPr sz="6000" b="1">
                 <a:solidFill>
                   <a:schemeClr val="accent1"/>
                 </a:solidFill>
@@ -5486,7 +5486,7 @@
           <p:cNvPr id="15" name="kpi_label_4">
             <a:extLst>
               <a:ext uri="{FF2B5EF4-FFF2-40B4-BE49-F238E27FC236}">
-                <a16:creationId xmlns:a16="http://schemas.microsoft.com/office/drawing/2014/main" id="{378189A8-387B-D8C1-B595-CA1C5F354E70}"/>
+                <a16:creationId xmlns:a16="http://schemas.microsoft.com/office/drawing/2014/main" id="{95EA60A3-63B1-C4E4-5384-81EA4C13705E}"/>
               </a:ext>
             </a:extLst>
           </p:cNvPr>
@@ -5517,7 +5517,7 @@
               </a:spcBef>
               <a:buFontTx/>
               <a:buNone/>
-              <a:defRPr sz="1800"/>
+              <a:defRPr sz="2000"/>
             </a:lvl1pPr>
           </a:lstStyle>
           <a:p>
@@ -5534,7 +5534,7 @@
           <p:cNvPr id="16" name="source">
             <a:extLst>
               <a:ext uri="{FF2B5EF4-FFF2-40B4-BE49-F238E27FC236}">
-                <a16:creationId xmlns:a16="http://schemas.microsoft.com/office/drawing/2014/main" id="{2ACB0C56-64E6-38B1-5C3A-B4986ADE3A6A}"/>
+                <a16:creationId xmlns:a16="http://schemas.microsoft.com/office/drawing/2014/main" id="{57012AD3-CEA5-0759-8185-7053322744C3}"/>
               </a:ext>
             </a:extLst>
           </p:cNvPr>
@@ -5589,7 +5589,7 @@
     </p:spTree>
     <p:extLst>
       <p:ext uri="{BB962C8B-B14F-4D97-AF65-F5344CB8AC3E}">
-        <p14:creationId xmlns:p14="http://schemas.microsoft.com/office/powerpoint/2010/main" val="2236583377"/>
+        <p14:creationId xmlns:p14="http://schemas.microsoft.com/office/powerpoint/2010/main" val="3362156089"/>
       </p:ext>
     </p:extLst>
   </p:cSld>
@@ -5621,7 +5621,7 @@
           <p:cNvPr id="6" name="glow">
             <a:extLst>
               <a:ext uri="{FF2B5EF4-FFF2-40B4-BE49-F238E27FC236}">
-                <a16:creationId xmlns:a16="http://schemas.microsoft.com/office/drawing/2014/main" id="{E9393BBA-C8CB-B612-4493-9155EC2949A3}"/>
+                <a16:creationId xmlns:a16="http://schemas.microsoft.com/office/drawing/2014/main" id="{AFBD2FD6-5D19-415D-B6D7-C936F6D30227}"/>
               </a:ext>
             </a:extLst>
           </p:cNvPr>
@@ -5803,7 +5803,7 @@
             </a:lvl1pPr>
           </a:lstStyle>
           <a:p>
-            <a:fld id="{84563B43-CD3D-4346-947D-64165950A7CF}" type="datetimeFigureOut">
+            <a:fld id="{E74088FC-AB1D-4731-A24C-F46EBDB0C5A7}" type="datetimeFigureOut">
               <a:rPr lang="en-US" smtClean="0"/>
               <a:t>10/3/2026</a:t>
             </a:fld>
@@ -5840,7 +5840,7 @@
             </a:lvl1pPr>
           </a:lstStyle>
           <a:p>
-            <a:fld id="{691F7126-2246-49A0-8047-430012F919EB}" type="slidenum">
+            <a:fld id="{E4AD76C8-B1EB-4E10-9C29-0B8B3CD29BA6}" type="slidenum">
               <a:rPr lang="en-US" smtClean="0"/>
               <a:t>‹#›</a:t>
             </a:fld>
@@ -5853,7 +5853,7 @@
           <p:cNvPr id="7" name="item_1_title">
             <a:extLst>
               <a:ext uri="{FF2B5EF4-FFF2-40B4-BE49-F238E27FC236}">
-                <a16:creationId xmlns:a16="http://schemas.microsoft.com/office/drawing/2014/main" id="{BAD319F0-93A1-93EB-AD20-D4ECAD2C4DCB}"/>
+                <a16:creationId xmlns:a16="http://schemas.microsoft.com/office/drawing/2014/main" id="{5F022019-B684-DE8C-4599-9AA3015C1961}"/>
               </a:ext>
             </a:extLst>
           </p:cNvPr>
@@ -5881,7 +5881,7 @@
               </a:spcBef>
               <a:buFontTx/>
               <a:buNone/>
-              <a:defRPr sz="2200" b="1">
+              <a:defRPr sz="2000" b="1">
                 <a:solidFill>
                   <a:schemeClr val="accent1"/>
                 </a:solidFill>
@@ -5903,7 +5903,7 @@
           <p:cNvPr id="8" name="item_1">
             <a:extLst>
               <a:ext uri="{FF2B5EF4-FFF2-40B4-BE49-F238E27FC236}">
-                <a16:creationId xmlns:a16="http://schemas.microsoft.com/office/drawing/2014/main" id="{D10BD7CA-EBD5-F91E-712A-B9916085B92C}"/>
+                <a16:creationId xmlns:a16="http://schemas.microsoft.com/office/drawing/2014/main" id="{8BDD0026-FCD9-B846-00E8-A8A38012F138}"/>
               </a:ext>
             </a:extLst>
           </p:cNvPr>
@@ -5951,7 +5951,7 @@
           <p:cNvPr id="9" name="item_2_title">
             <a:extLst>
               <a:ext uri="{FF2B5EF4-FFF2-40B4-BE49-F238E27FC236}">
-                <a16:creationId xmlns:a16="http://schemas.microsoft.com/office/drawing/2014/main" id="{99423AD3-59DD-5E44-1AC1-1DE37DBC7D3F}"/>
+                <a16:creationId xmlns:a16="http://schemas.microsoft.com/office/drawing/2014/main" id="{08FB1EC3-6E2C-FFE4-EEE4-26E74C497DBF}"/>
               </a:ext>
             </a:extLst>
           </p:cNvPr>
@@ -5982,7 +5982,7 @@
               </a:spcBef>
               <a:buFontTx/>
               <a:buNone/>
-              <a:defRPr sz="2200" b="1">
+              <a:defRPr sz="2000" b="1">
                 <a:solidFill>
                   <a:schemeClr val="accent1"/>
                 </a:solidFill>
@@ -6004,7 +6004,7 @@
           <p:cNvPr id="10" name="item_2">
             <a:extLst>
               <a:ext uri="{FF2B5EF4-FFF2-40B4-BE49-F238E27FC236}">
-                <a16:creationId xmlns:a16="http://schemas.microsoft.com/office/drawing/2014/main" id="{0AB08735-F3C3-1279-DDA2-D3DF60BBE2F0}"/>
+                <a16:creationId xmlns:a16="http://schemas.microsoft.com/office/drawing/2014/main" id="{8BDE2C03-05A7-8352-49A7-C11B8F2C6206}"/>
               </a:ext>
             </a:extLst>
           </p:cNvPr>
@@ -6052,7 +6052,7 @@
           <p:cNvPr id="11" name="item_3_title">
             <a:extLst>
               <a:ext uri="{FF2B5EF4-FFF2-40B4-BE49-F238E27FC236}">
-                <a16:creationId xmlns:a16="http://schemas.microsoft.com/office/drawing/2014/main" id="{24938649-1B0B-4AD8-98C4-5C2D0228E19C}"/>
+                <a16:creationId xmlns:a16="http://schemas.microsoft.com/office/drawing/2014/main" id="{4873793C-8C0C-F251-1665-9DA639B6FF61}"/>
               </a:ext>
             </a:extLst>
           </p:cNvPr>
@@ -6083,7 +6083,7 @@
               </a:spcBef>
               <a:buFontTx/>
               <a:buNone/>
-              <a:defRPr sz="2200" b="1">
+              <a:defRPr sz="2000" b="1">
                 <a:solidFill>
                   <a:schemeClr val="accent1"/>
                 </a:solidFill>
@@ -6105,7 +6105,7 @@
           <p:cNvPr id="12" name="item_3">
             <a:extLst>
               <a:ext uri="{FF2B5EF4-FFF2-40B4-BE49-F238E27FC236}">
-                <a16:creationId xmlns:a16="http://schemas.microsoft.com/office/drawing/2014/main" id="{93F44B72-7F3E-689E-8560-6F191DCB2EF1}"/>
+                <a16:creationId xmlns:a16="http://schemas.microsoft.com/office/drawing/2014/main" id="{4080C6BE-4F7F-D6C2-2618-830B8C1A92EE}"/>
               </a:ext>
             </a:extLst>
           </p:cNvPr>
@@ -6153,7 +6153,7 @@
           <p:cNvPr id="13" name="item_4_title">
             <a:extLst>
               <a:ext uri="{FF2B5EF4-FFF2-40B4-BE49-F238E27FC236}">
-                <a16:creationId xmlns:a16="http://schemas.microsoft.com/office/drawing/2014/main" id="{173C44E8-51AA-95C3-C65B-155256797E60}"/>
+                <a16:creationId xmlns:a16="http://schemas.microsoft.com/office/drawing/2014/main" id="{8C8F2677-D2A4-CB24-8BB7-ACC47BD4F83E}"/>
               </a:ext>
             </a:extLst>
           </p:cNvPr>
@@ -6184,7 +6184,7 @@
               </a:spcBef>
               <a:buFontTx/>
               <a:buNone/>
-              <a:defRPr sz="2200" b="1">
+              <a:defRPr sz="2000" b="1">
                 <a:solidFill>
                   <a:schemeClr val="accent1"/>
                 </a:solidFill>
@@ -6206,7 +6206,7 @@
           <p:cNvPr id="14" name="item_4">
             <a:extLst>
               <a:ext uri="{FF2B5EF4-FFF2-40B4-BE49-F238E27FC236}">
-                <a16:creationId xmlns:a16="http://schemas.microsoft.com/office/drawing/2014/main" id="{9A7D5AD0-889D-105D-4E60-B5FB3A6984C4}"/>
+                <a16:creationId xmlns:a16="http://schemas.microsoft.com/office/drawing/2014/main" id="{5ADEFA08-0EF2-15C3-A667-55090177E86D}"/>
               </a:ext>
             </a:extLst>
           </p:cNvPr>
@@ -6254,7 +6254,7 @@
           <p:cNvPr id="15" name="source">
             <a:extLst>
               <a:ext uri="{FF2B5EF4-FFF2-40B4-BE49-F238E27FC236}">
-                <a16:creationId xmlns:a16="http://schemas.microsoft.com/office/drawing/2014/main" id="{643EAF17-E585-71B8-B74B-809C92BEE6E0}"/>
+                <a16:creationId xmlns:a16="http://schemas.microsoft.com/office/drawing/2014/main" id="{4656CAD4-00A8-797C-1387-2FAF312946B3}"/>
               </a:ext>
             </a:extLst>
           </p:cNvPr>
@@ -6309,7 +6309,7 @@
     </p:spTree>
     <p:extLst>
       <p:ext uri="{BB962C8B-B14F-4D97-AF65-F5344CB8AC3E}">
-        <p14:creationId xmlns:p14="http://schemas.microsoft.com/office/powerpoint/2010/main" val="4133715098"/>
+        <p14:creationId xmlns:p14="http://schemas.microsoft.com/office/powerpoint/2010/main" val="3475473726"/>
       </p:ext>
     </p:extLst>
   </p:cSld>
@@ -6341,7 +6341,7 @@
           <p:cNvPr id="6" name="glow">
             <a:extLst>
               <a:ext uri="{FF2B5EF4-FFF2-40B4-BE49-F238E27FC236}">
-                <a16:creationId xmlns:a16="http://schemas.microsoft.com/office/drawing/2014/main" id="{960308E4-C8BC-4881-CF1E-9974661F1CFA}"/>
+                <a16:creationId xmlns:a16="http://schemas.microsoft.com/office/drawing/2014/main" id="{A24B9DDD-A4AF-2A7A-FC4C-377699402C18}"/>
               </a:ext>
             </a:extLst>
           </p:cNvPr>
@@ -6523,7 +6523,7 @@
             </a:lvl1pPr>
           </a:lstStyle>
           <a:p>
-            <a:fld id="{84563B43-CD3D-4346-947D-64165950A7CF}" type="datetimeFigureOut">
+            <a:fld id="{E74088FC-AB1D-4731-A24C-F46EBDB0C5A7}" type="datetimeFigureOut">
               <a:rPr lang="en-US" smtClean="0"/>
               <a:t>10/3/2026</a:t>
             </a:fld>
@@ -6560,7 +6560,7 @@
             </a:lvl1pPr>
           </a:lstStyle>
           <a:p>
-            <a:fld id="{691F7126-2246-49A0-8047-430012F919EB}" type="slidenum">
+            <a:fld id="{E4AD76C8-B1EB-4E10-9C29-0B8B3CD29BA6}" type="slidenum">
               <a:rPr lang="en-US" smtClean="0"/>
               <a:t>‹#›</a:t>
             </a:fld>
@@ -6573,7 +6573,7 @@
           <p:cNvPr id="7" name="marker_1">
             <a:extLst>
               <a:ext uri="{FF2B5EF4-FFF2-40B4-BE49-F238E27FC236}">
-                <a16:creationId xmlns:a16="http://schemas.microsoft.com/office/drawing/2014/main" id="{CFDE3F9E-81D1-52AB-330D-B2CF1F071024}"/>
+                <a16:creationId xmlns:a16="http://schemas.microsoft.com/office/drawing/2014/main" id="{93734648-4ADE-1701-E5BD-3A5CD4D903AE}"/>
               </a:ext>
             </a:extLst>
           </p:cNvPr>
@@ -6586,7 +6586,7 @@
         </p:nvSpPr>
         <p:spPr>
           <a:xfrm>
-            <a:off x="633364" y="2363142"/>
+            <a:off x="607870" y="2334449"/>
             <a:ext cx="560854" cy="631237"/>
           </a:xfrm>
           <a:prstGeom prst="ellipse">
@@ -6607,7 +6607,7 @@
               </a:spcBef>
               <a:buFontTx/>
               <a:buNone/>
-              <a:defRPr sz="2400" b="1">
+              <a:defRPr sz="2000" b="1">
                 <a:solidFill>
                   <a:schemeClr val="bg1"/>
                 </a:solidFill>
@@ -6629,7 +6629,7 @@
           <p:cNvPr id="8" name="item_1_title">
             <a:extLst>
               <a:ext uri="{FF2B5EF4-FFF2-40B4-BE49-F238E27FC236}">
-                <a16:creationId xmlns:a16="http://schemas.microsoft.com/office/drawing/2014/main" id="{06FF17E2-B2DE-5753-3182-DA20E9BBE02D}"/>
+                <a16:creationId xmlns:a16="http://schemas.microsoft.com/office/drawing/2014/main" id="{5C7C07EA-2E9E-C23E-9FBD-C850330996C9}"/>
               </a:ext>
             </a:extLst>
           </p:cNvPr>
@@ -6642,8 +6642,8 @@
         </p:nvSpPr>
         <p:spPr>
           <a:xfrm>
-            <a:off x="1296192" y="2363141"/>
-            <a:ext cx="8871687" cy="400852"/>
+            <a:off x="1270698" y="2334448"/>
+            <a:ext cx="8922674" cy="417730"/>
           </a:xfrm>
           <a:prstGeom prst="rect">
             <a:avLst/>
@@ -6660,7 +6660,7 @@
               </a:spcBef>
               <a:buFontTx/>
               <a:buNone/>
-              <a:defRPr sz="2200" b="1">
+              <a:defRPr sz="2000" b="1">
                 <a:solidFill>
                   <a:schemeClr val="accent1"/>
                 </a:solidFill>
@@ -6682,7 +6682,7 @@
           <p:cNvPr id="9" name="item_1">
             <a:extLst>
               <a:ext uri="{FF2B5EF4-FFF2-40B4-BE49-F238E27FC236}">
-                <a16:creationId xmlns:a16="http://schemas.microsoft.com/office/drawing/2014/main" id="{9EE1F1F6-77B8-A31D-8D33-26458429FE49}"/>
+                <a16:creationId xmlns:a16="http://schemas.microsoft.com/office/drawing/2014/main" id="{0BC99605-4249-8BA8-2516-1C2761B4A3DD}"/>
               </a:ext>
             </a:extLst>
           </p:cNvPr>
@@ -6695,8 +6695,8 @@
         </p:nvSpPr>
         <p:spPr>
           <a:xfrm>
-            <a:off x="1296192" y="2763993"/>
-            <a:ext cx="8871687" cy="962046"/>
+            <a:off x="1270698" y="2752180"/>
+            <a:ext cx="8922674" cy="1002553"/>
           </a:xfrm>
           <a:prstGeom prst="rect">
             <a:avLst/>
@@ -6730,7 +6730,7 @@
           <p:cNvPr id="10" name="marker_2">
             <a:extLst>
               <a:ext uri="{FF2B5EF4-FFF2-40B4-BE49-F238E27FC236}">
-                <a16:creationId xmlns:a16="http://schemas.microsoft.com/office/drawing/2014/main" id="{9614D702-3E36-F2F2-A1A4-4D4475C570BE}"/>
+                <a16:creationId xmlns:a16="http://schemas.microsoft.com/office/drawing/2014/main" id="{E9D09185-1D60-3614-A59C-41E707896452}"/>
               </a:ext>
             </a:extLst>
           </p:cNvPr>
@@ -6743,7 +6743,7 @@
         </p:nvSpPr>
         <p:spPr>
           <a:xfrm>
-            <a:off x="633364" y="4414662"/>
+            <a:off x="607870" y="4385969"/>
             <a:ext cx="560854" cy="631237"/>
           </a:xfrm>
           <a:prstGeom prst="ellipse">
@@ -6764,7 +6764,7 @@
               </a:spcBef>
               <a:buFontTx/>
               <a:buNone/>
-              <a:defRPr sz="2400" b="1">
+              <a:defRPr sz="2000" b="1">
                 <a:solidFill>
                   <a:schemeClr val="bg1"/>
                 </a:solidFill>
@@ -6786,7 +6786,7 @@
           <p:cNvPr id="11" name="item_2_title">
             <a:extLst>
               <a:ext uri="{FF2B5EF4-FFF2-40B4-BE49-F238E27FC236}">
-                <a16:creationId xmlns:a16="http://schemas.microsoft.com/office/drawing/2014/main" id="{18AEFA72-7210-5DD0-4E11-2D56CA97E749}"/>
+                <a16:creationId xmlns:a16="http://schemas.microsoft.com/office/drawing/2014/main" id="{5577A672-37D1-37AF-36A8-E077A2E00C74}"/>
               </a:ext>
             </a:extLst>
           </p:cNvPr>
@@ -6799,8 +6799,8 @@
         </p:nvSpPr>
         <p:spPr>
           <a:xfrm>
-            <a:off x="1296192" y="4414661"/>
-            <a:ext cx="8871687" cy="400852"/>
+            <a:off x="1270698" y="4385968"/>
+            <a:ext cx="8922674" cy="417730"/>
           </a:xfrm>
           <a:prstGeom prst="rect">
             <a:avLst/>
@@ -6817,7 +6817,7 @@
               </a:spcBef>
               <a:buFontTx/>
               <a:buNone/>
-              <a:defRPr sz="2200" b="1">
+              <a:defRPr sz="2000" b="1">
                 <a:solidFill>
                   <a:schemeClr val="accent1"/>
                 </a:solidFill>
@@ -6839,7 +6839,7 @@
           <p:cNvPr id="12" name="item_2">
             <a:extLst>
               <a:ext uri="{FF2B5EF4-FFF2-40B4-BE49-F238E27FC236}">
-                <a16:creationId xmlns:a16="http://schemas.microsoft.com/office/drawing/2014/main" id="{DAD37C78-1001-663F-CE20-CCADC24A6B4A}"/>
+                <a16:creationId xmlns:a16="http://schemas.microsoft.com/office/drawing/2014/main" id="{A2EE42D5-E3B9-5FA7-9A2E-40B973D9F812}"/>
               </a:ext>
             </a:extLst>
           </p:cNvPr>
@@ -6852,8 +6852,8 @@
         </p:nvSpPr>
         <p:spPr>
           <a:xfrm>
-            <a:off x="1296192" y="4815513"/>
-            <a:ext cx="8871687" cy="962046"/>
+            <a:off x="1270698" y="4803700"/>
+            <a:ext cx="8922674" cy="1002553"/>
           </a:xfrm>
           <a:prstGeom prst="rect">
             <a:avLst/>
@@ -6887,7 +6887,7 @@
           <p:cNvPr id="13" name="source">
             <a:extLst>
               <a:ext uri="{FF2B5EF4-FFF2-40B4-BE49-F238E27FC236}">
-                <a16:creationId xmlns:a16="http://schemas.microsoft.com/office/drawing/2014/main" id="{77D8D81A-1FAB-EBED-33C1-A6375463165D}"/>
+                <a16:creationId xmlns:a16="http://schemas.microsoft.com/office/drawing/2014/main" id="{970BF40F-1D24-2610-95CE-CFD8161ADCC2}"/>
               </a:ext>
             </a:extLst>
           </p:cNvPr>
@@ -6942,7 +6942,7 @@
     </p:spTree>
     <p:extLst>
       <p:ext uri="{BB962C8B-B14F-4D97-AF65-F5344CB8AC3E}">
-        <p14:creationId xmlns:p14="http://schemas.microsoft.com/office/powerpoint/2010/main" val="1534931685"/>
+        <p14:creationId xmlns:p14="http://schemas.microsoft.com/office/powerpoint/2010/main" val="154228058"/>
       </p:ext>
     </p:extLst>
   </p:cSld>
@@ -6974,7 +6974,7 @@
           <p:cNvPr id="6" name="glow">
             <a:extLst>
               <a:ext uri="{FF2B5EF4-FFF2-40B4-BE49-F238E27FC236}">
-                <a16:creationId xmlns:a16="http://schemas.microsoft.com/office/drawing/2014/main" id="{E1CF9DAB-EF72-A69A-E2A4-9787242B0C0B}"/>
+                <a16:creationId xmlns:a16="http://schemas.microsoft.com/office/drawing/2014/main" id="{EFF5C996-A397-30C0-CD2C-C76822C92901}"/>
               </a:ext>
             </a:extLst>
           </p:cNvPr>
@@ -7156,7 +7156,7 @@
             </a:lvl1pPr>
           </a:lstStyle>
           <a:p>
-            <a:fld id="{84563B43-CD3D-4346-947D-64165950A7CF}" type="datetimeFigureOut">
+            <a:fld id="{E74088FC-AB1D-4731-A24C-F46EBDB0C5A7}" type="datetimeFigureOut">
               <a:rPr lang="en-US" smtClean="0"/>
               <a:t>10/3/2026</a:t>
             </a:fld>
@@ -7193,7 +7193,7 @@
             </a:lvl1pPr>
           </a:lstStyle>
           <a:p>
-            <a:fld id="{691F7126-2246-49A0-8047-430012F919EB}" type="slidenum">
+            <a:fld id="{E4AD76C8-B1EB-4E10-9C29-0B8B3CD29BA6}" type="slidenum">
               <a:rPr lang="en-US" smtClean="0"/>
               <a:t>‹#›</a:t>
             </a:fld>
@@ -7206,7 +7206,7 @@
           <p:cNvPr id="7" name="item_1_title">
             <a:extLst>
               <a:ext uri="{FF2B5EF4-FFF2-40B4-BE49-F238E27FC236}">
-                <a16:creationId xmlns:a16="http://schemas.microsoft.com/office/drawing/2014/main" id="{B54486B9-2DB9-44F2-5735-2C5DF751EF15}"/>
+                <a16:creationId xmlns:a16="http://schemas.microsoft.com/office/drawing/2014/main" id="{F2B855E8-3169-42C6-FE1D-3CE6ABA731AE}"/>
               </a:ext>
             </a:extLst>
           </p:cNvPr>
@@ -7219,8 +7219,8 @@
         </p:nvSpPr>
         <p:spPr>
           <a:xfrm>
-            <a:off x="633364" y="2363141"/>
-            <a:ext cx="4461337" cy="400852"/>
+            <a:off x="607870" y="2334448"/>
+            <a:ext cx="4512324" cy="417730"/>
           </a:xfrm>
         </p:spPr>
         <p:txBody>
@@ -7234,7 +7234,7 @@
               </a:spcBef>
               <a:buFontTx/>
               <a:buNone/>
-              <a:defRPr sz="2200" b="1">
+              <a:defRPr sz="2000" b="1">
                 <a:solidFill>
                   <a:schemeClr val="accent1"/>
                 </a:solidFill>
@@ -7256,7 +7256,7 @@
           <p:cNvPr id="8" name="item_1">
             <a:extLst>
               <a:ext uri="{FF2B5EF4-FFF2-40B4-BE49-F238E27FC236}">
-                <a16:creationId xmlns:a16="http://schemas.microsoft.com/office/drawing/2014/main" id="{6F39F5F3-7467-9348-6D9F-C27423AA0048}"/>
+                <a16:creationId xmlns:a16="http://schemas.microsoft.com/office/drawing/2014/main" id="{D54C9672-DBC7-6657-B4C4-D870FF2B9015}"/>
               </a:ext>
             </a:extLst>
           </p:cNvPr>
@@ -7269,8 +7269,8 @@
         </p:nvSpPr>
         <p:spPr>
           <a:xfrm>
-            <a:off x="633365" y="2763993"/>
-            <a:ext cx="4461337" cy="962046"/>
+            <a:off x="607870" y="2752180"/>
+            <a:ext cx="4512324" cy="1002553"/>
           </a:xfrm>
           <a:prstGeom prst="rect">
             <a:avLst/>
@@ -7304,7 +7304,7 @@
           <p:cNvPr id="9" name="item_2_title">
             <a:extLst>
               <a:ext uri="{FF2B5EF4-FFF2-40B4-BE49-F238E27FC236}">
-                <a16:creationId xmlns:a16="http://schemas.microsoft.com/office/drawing/2014/main" id="{18C572A8-C157-7ACE-9CF6-48F417F36932}"/>
+                <a16:creationId xmlns:a16="http://schemas.microsoft.com/office/drawing/2014/main" id="{C274C8D7-D566-105B-3545-0C52F693A982}"/>
               </a:ext>
             </a:extLst>
           </p:cNvPr>
@@ -7317,8 +7317,8 @@
         </p:nvSpPr>
         <p:spPr>
           <a:xfrm>
-            <a:off x="5706543" y="2363141"/>
-            <a:ext cx="4461337" cy="400852"/>
+            <a:off x="5681048" y="2334448"/>
+            <a:ext cx="4512324" cy="417730"/>
           </a:xfrm>
           <a:prstGeom prst="rect">
             <a:avLst/>
@@ -7335,7 +7335,7 @@
               </a:spcBef>
               <a:buFontTx/>
               <a:buNone/>
-              <a:defRPr sz="2200" b="1">
+              <a:defRPr sz="2000" b="1">
                 <a:solidFill>
                   <a:schemeClr val="accent1"/>
                 </a:solidFill>
@@ -7357,7 +7357,7 @@
           <p:cNvPr id="10" name="item_2">
             <a:extLst>
               <a:ext uri="{FF2B5EF4-FFF2-40B4-BE49-F238E27FC236}">
-                <a16:creationId xmlns:a16="http://schemas.microsoft.com/office/drawing/2014/main" id="{C4B7D1C6-AFCB-A442-94FB-34D765653B22}"/>
+                <a16:creationId xmlns:a16="http://schemas.microsoft.com/office/drawing/2014/main" id="{42713E0C-83B1-9ADF-E8F5-0595DDB1536A}"/>
               </a:ext>
             </a:extLst>
           </p:cNvPr>
@@ -7370,8 +7370,8 @@
         </p:nvSpPr>
         <p:spPr>
           <a:xfrm>
-            <a:off x="5706543" y="2763993"/>
-            <a:ext cx="4461337" cy="962046"/>
+            <a:off x="5681048" y="2752180"/>
+            <a:ext cx="4512324" cy="1002553"/>
           </a:xfrm>
           <a:prstGeom prst="rect">
             <a:avLst/>
@@ -7405,7 +7405,7 @@
           <p:cNvPr id="11" name="item_3_title">
             <a:extLst>
               <a:ext uri="{FF2B5EF4-FFF2-40B4-BE49-F238E27FC236}">
-                <a16:creationId xmlns:a16="http://schemas.microsoft.com/office/drawing/2014/main" id="{8DDF38BE-F4F1-0D99-457F-8E5B79B924F1}"/>
+                <a16:creationId xmlns:a16="http://schemas.microsoft.com/office/drawing/2014/main" id="{07F5BA07-4F45-E34A-D07D-A8B07CEC80F5}"/>
               </a:ext>
             </a:extLst>
           </p:cNvPr>
@@ -7418,8 +7418,8 @@
         </p:nvSpPr>
         <p:spPr>
           <a:xfrm>
-            <a:off x="633365" y="4414661"/>
-            <a:ext cx="4461337" cy="400852"/>
+            <a:off x="607870" y="4385968"/>
+            <a:ext cx="4512324" cy="417730"/>
           </a:xfrm>
           <a:prstGeom prst="rect">
             <a:avLst/>
@@ -7436,7 +7436,7 @@
               </a:spcBef>
               <a:buFontTx/>
               <a:buNone/>
-              <a:defRPr sz="2200" b="1">
+              <a:defRPr sz="2000" b="1">
                 <a:solidFill>
                   <a:schemeClr val="accent1"/>
                 </a:solidFill>
@@ -7458,7 +7458,7 @@
           <p:cNvPr id="12" name="item_3">
             <a:extLst>
               <a:ext uri="{FF2B5EF4-FFF2-40B4-BE49-F238E27FC236}">
-                <a16:creationId xmlns:a16="http://schemas.microsoft.com/office/drawing/2014/main" id="{A86002A4-7A83-7796-A68B-FF440B612E91}"/>
+                <a16:creationId xmlns:a16="http://schemas.microsoft.com/office/drawing/2014/main" id="{FED12D61-5624-E9C2-1192-09DFA1098072}"/>
               </a:ext>
             </a:extLst>
           </p:cNvPr>
@@ -7471,8 +7471,8 @@
         </p:nvSpPr>
         <p:spPr>
           <a:xfrm>
-            <a:off x="633365" y="4815513"/>
-            <a:ext cx="4461337" cy="962046"/>
+            <a:off x="607870" y="4803700"/>
+            <a:ext cx="4512324" cy="1002553"/>
           </a:xfrm>
           <a:prstGeom prst="rect">
             <a:avLst/>
@@ -7506,7 +7506,7 @@
           <p:cNvPr id="13" name="item_4_title">
             <a:extLst>
               <a:ext uri="{FF2B5EF4-FFF2-40B4-BE49-F238E27FC236}">
-                <a16:creationId xmlns:a16="http://schemas.microsoft.com/office/drawing/2014/main" id="{4C90217C-5991-0390-B338-BD3410E2A7A6}"/>
+                <a16:creationId xmlns:a16="http://schemas.microsoft.com/office/drawing/2014/main" id="{0D70BF62-E99D-327F-5954-C5C34F43F9B2}"/>
               </a:ext>
             </a:extLst>
           </p:cNvPr>
@@ -7519,8 +7519,8 @@
         </p:nvSpPr>
         <p:spPr>
           <a:xfrm>
-            <a:off x="5706543" y="4414661"/>
-            <a:ext cx="4461337" cy="400852"/>
+            <a:off x="5681048" y="4385968"/>
+            <a:ext cx="4512324" cy="417730"/>
           </a:xfrm>
           <a:prstGeom prst="rect">
             <a:avLst/>
@@ -7537,7 +7537,7 @@
               </a:spcBef>
               <a:buFontTx/>
               <a:buNone/>
-              <a:defRPr sz="2200" b="1">
+              <a:defRPr sz="2000" b="1">
                 <a:solidFill>
                   <a:schemeClr val="accent1"/>
                 </a:solidFill>
@@ -7559,7 +7559,7 @@
           <p:cNvPr id="14" name="item_4">
             <a:extLst>
               <a:ext uri="{FF2B5EF4-FFF2-40B4-BE49-F238E27FC236}">
-                <a16:creationId xmlns:a16="http://schemas.microsoft.com/office/drawing/2014/main" id="{E679CDE9-AA6F-1702-F920-669B4F042C94}"/>
+                <a16:creationId xmlns:a16="http://schemas.microsoft.com/office/drawing/2014/main" id="{99519EE4-EAAB-E65A-FEC9-FD7CC273D750}"/>
               </a:ext>
             </a:extLst>
           </p:cNvPr>
@@ -7572,8 +7572,8 @@
         </p:nvSpPr>
         <p:spPr>
           <a:xfrm>
-            <a:off x="5706543" y="4815513"/>
-            <a:ext cx="4461337" cy="962046"/>
+            <a:off x="5681048" y="4803700"/>
+            <a:ext cx="4512324" cy="1002553"/>
           </a:xfrm>
           <a:prstGeom prst="rect">
             <a:avLst/>
@@ -7607,7 +7607,7 @@
           <p:cNvPr id="15" name="source">
             <a:extLst>
               <a:ext uri="{FF2B5EF4-FFF2-40B4-BE49-F238E27FC236}">
-                <a16:creationId xmlns:a16="http://schemas.microsoft.com/office/drawing/2014/main" id="{63EF7E26-2560-B8DE-23FC-D2FA139A8AE3}"/>
+                <a16:creationId xmlns:a16="http://schemas.microsoft.com/office/drawing/2014/main" id="{5A6EEB39-5186-B486-311F-0157F22AC068}"/>
               </a:ext>
             </a:extLst>
           </p:cNvPr>
@@ -7662,7 +7662,7 @@
     </p:spTree>
     <p:extLst>
       <p:ext uri="{BB962C8B-B14F-4D97-AF65-F5344CB8AC3E}">
-        <p14:creationId xmlns:p14="http://schemas.microsoft.com/office/powerpoint/2010/main" val="2206254279"/>
+        <p14:creationId xmlns:p14="http://schemas.microsoft.com/office/powerpoint/2010/main" val="618670841"/>
       </p:ext>
     </p:extLst>
   </p:cSld>
@@ -7694,7 +7694,7 @@
           <p:cNvPr id="6" name="glow">
             <a:extLst>
               <a:ext uri="{FF2B5EF4-FFF2-40B4-BE49-F238E27FC236}">
-                <a16:creationId xmlns:a16="http://schemas.microsoft.com/office/drawing/2014/main" id="{95ADB695-38C9-9CF8-8222-658E886C08C3}"/>
+                <a16:creationId xmlns:a16="http://schemas.microsoft.com/office/drawing/2014/main" id="{9E18E944-99BD-C58F-163E-9653FA012BBD}"/>
               </a:ext>
             </a:extLst>
           </p:cNvPr>
@@ -7876,7 +7876,7 @@
             </a:lvl1pPr>
           </a:lstStyle>
           <a:p>
-            <a:fld id="{84563B43-CD3D-4346-947D-64165950A7CF}" type="datetimeFigureOut">
+            <a:fld id="{E74088FC-AB1D-4731-A24C-F46EBDB0C5A7}" type="datetimeFigureOut">
               <a:rPr lang="en-US" smtClean="0"/>
               <a:t>10/3/2026</a:t>
             </a:fld>
@@ -7913,7 +7913,7 @@
             </a:lvl1pPr>
           </a:lstStyle>
           <a:p>
-            <a:fld id="{691F7126-2246-49A0-8047-430012F919EB}" type="slidenum">
+            <a:fld id="{E4AD76C8-B1EB-4E10-9C29-0B8B3CD29BA6}" type="slidenum">
               <a:rPr lang="en-US" smtClean="0"/>
               <a:t>‹#›</a:t>
             </a:fld>
@@ -7926,7 +7926,7 @@
           <p:cNvPr id="7" name="item_1_title">
             <a:extLst>
               <a:ext uri="{FF2B5EF4-FFF2-40B4-BE49-F238E27FC236}">
-                <a16:creationId xmlns:a16="http://schemas.microsoft.com/office/drawing/2014/main" id="{D6F763DD-E9E3-994E-78E2-258BBB0EAF55}"/>
+                <a16:creationId xmlns:a16="http://schemas.microsoft.com/office/drawing/2014/main" id="{5D482E04-80C7-5CE5-53A5-9F02E6EBFB01}"/>
               </a:ext>
             </a:extLst>
           </p:cNvPr>
@@ -7939,8 +7939,8 @@
         </p:nvSpPr>
         <p:spPr>
           <a:xfrm>
-            <a:off x="429417" y="2541337"/>
-            <a:ext cx="2332642" cy="1019342"/>
+            <a:off x="607870" y="2699902"/>
+            <a:ext cx="1975735" cy="913633"/>
           </a:xfrm>
         </p:spPr>
         <p:txBody>
@@ -7954,7 +7954,7 @@
               </a:spcBef>
               <a:buFontTx/>
               <a:buNone/>
-              <a:defRPr sz="2200" b="1">
+              <a:defRPr sz="2000" b="1">
                 <a:solidFill>
                   <a:schemeClr val="accent1"/>
                 </a:solidFill>
@@ -7976,7 +7976,7 @@
           <p:cNvPr id="8" name="item_1">
             <a:extLst>
               <a:ext uri="{FF2B5EF4-FFF2-40B4-BE49-F238E27FC236}">
-                <a16:creationId xmlns:a16="http://schemas.microsoft.com/office/drawing/2014/main" id="{07C53B0E-93C6-C069-DF5D-3563F9991541}"/>
+                <a16:creationId xmlns:a16="http://schemas.microsoft.com/office/drawing/2014/main" id="{FFEF48C3-1556-9F87-4E82-77586FB4479A}"/>
               </a:ext>
             </a:extLst>
           </p:cNvPr>
@@ -7989,8 +7989,8 @@
         </p:nvSpPr>
         <p:spPr>
           <a:xfrm>
-            <a:off x="429417" y="3560680"/>
-            <a:ext cx="2332642" cy="2446421"/>
+            <a:off x="607871" y="3613534"/>
+            <a:ext cx="1975735" cy="2192718"/>
           </a:xfrm>
           <a:prstGeom prst="rect">
             <a:avLst/>
@@ -8024,7 +8024,7 @@
           <p:cNvPr id="9" name="item_2_title">
             <a:extLst>
               <a:ext uri="{FF2B5EF4-FFF2-40B4-BE49-F238E27FC236}">
-                <a16:creationId xmlns:a16="http://schemas.microsoft.com/office/drawing/2014/main" id="{F3176238-42AF-57B6-D4D1-450590EBB64A}"/>
+                <a16:creationId xmlns:a16="http://schemas.microsoft.com/office/drawing/2014/main" id="{28A13841-8C72-57B4-5A5E-1B328ED8DD18}"/>
               </a:ext>
             </a:extLst>
           </p:cNvPr>
@@ -8037,8 +8037,8 @@
         </p:nvSpPr>
         <p:spPr>
           <a:xfrm>
-            <a:off x="2966006" y="2541337"/>
-            <a:ext cx="2332642" cy="1019342"/>
+            <a:off x="3144460" y="2699902"/>
+            <a:ext cx="1975735" cy="913633"/>
           </a:xfrm>
           <a:prstGeom prst="rect">
             <a:avLst/>
@@ -8055,7 +8055,7 @@
               </a:spcBef>
               <a:buFontTx/>
               <a:buNone/>
-              <a:defRPr sz="2200" b="1">
+              <a:defRPr sz="2000" b="1">
                 <a:solidFill>
                   <a:schemeClr val="accent1"/>
                 </a:solidFill>
@@ -8077,7 +8077,7 @@
           <p:cNvPr id="10" name="item_2">
             <a:extLst>
               <a:ext uri="{FF2B5EF4-FFF2-40B4-BE49-F238E27FC236}">
-                <a16:creationId xmlns:a16="http://schemas.microsoft.com/office/drawing/2014/main" id="{A73E63B3-E210-9CE8-842B-C1A00F19CC1F}"/>
+                <a16:creationId xmlns:a16="http://schemas.microsoft.com/office/drawing/2014/main" id="{3A461114-51F2-6356-D87B-49D65AC7FC7F}"/>
               </a:ext>
             </a:extLst>
           </p:cNvPr>
@@ -8090,8 +8090,8 @@
         </p:nvSpPr>
         <p:spPr>
           <a:xfrm>
-            <a:off x="2966006" y="3560680"/>
-            <a:ext cx="2332642" cy="2446421"/>
+            <a:off x="3144460" y="3613534"/>
+            <a:ext cx="1975735" cy="2192718"/>
           </a:xfrm>
           <a:prstGeom prst="rect">
             <a:avLst/>
@@ -8125,7 +8125,7 @@
           <p:cNvPr id="11" name="item_3_title">
             <a:extLst>
               <a:ext uri="{FF2B5EF4-FFF2-40B4-BE49-F238E27FC236}">
-                <a16:creationId xmlns:a16="http://schemas.microsoft.com/office/drawing/2014/main" id="{E96FFE86-2F85-6D61-F097-9F02CEEAB682}"/>
+                <a16:creationId xmlns:a16="http://schemas.microsoft.com/office/drawing/2014/main" id="{7173B150-5450-322A-94D1-E6274355DC96}"/>
               </a:ext>
             </a:extLst>
           </p:cNvPr>
@@ -8138,8 +8138,8 @@
         </p:nvSpPr>
         <p:spPr>
           <a:xfrm>
-            <a:off x="5502595" y="2541337"/>
-            <a:ext cx="2332642" cy="1019342"/>
+            <a:off x="5681049" y="2699902"/>
+            <a:ext cx="1975735" cy="913633"/>
           </a:xfrm>
           <a:prstGeom prst="rect">
             <a:avLst/>
@@ -8156,7 +8156,7 @@
               </a:spcBef>
               <a:buFontTx/>
               <a:buNone/>
-              <a:defRPr sz="2200" b="1">
+              <a:defRPr sz="2000" b="1">
                 <a:solidFill>
                   <a:schemeClr val="accent1"/>
                 </a:solidFill>
@@ -8178,7 +8178,7 @@
           <p:cNvPr id="12" name="item_3">
             <a:extLst>
               <a:ext uri="{FF2B5EF4-FFF2-40B4-BE49-F238E27FC236}">
-                <a16:creationId xmlns:a16="http://schemas.microsoft.com/office/drawing/2014/main" id="{E8A511B6-A8C5-EBA7-926B-369CCC25F731}"/>
+                <a16:creationId xmlns:a16="http://schemas.microsoft.com/office/drawing/2014/main" id="{2CA65A85-CD37-99CF-3DF1-0AFFF2C0FF04}"/>
               </a:ext>
             </a:extLst>
           </p:cNvPr>
@@ -8191,8 +8191,8 @@
         </p:nvSpPr>
         <p:spPr>
           <a:xfrm>
-            <a:off x="5502595" y="3560680"/>
-            <a:ext cx="2332642" cy="2446421"/>
+            <a:off x="5681049" y="3613534"/>
+            <a:ext cx="1975735" cy="2192718"/>
           </a:xfrm>
           <a:prstGeom prst="rect">
             <a:avLst/>
@@ -8226,7 +8226,7 @@
           <p:cNvPr id="13" name="item_4_title">
             <a:extLst>
               <a:ext uri="{FF2B5EF4-FFF2-40B4-BE49-F238E27FC236}">
-                <a16:creationId xmlns:a16="http://schemas.microsoft.com/office/drawing/2014/main" id="{3C3C3938-B135-B543-3D86-B4B578FA4C7D}"/>
+                <a16:creationId xmlns:a16="http://schemas.microsoft.com/office/drawing/2014/main" id="{0E609AAB-9CE0-FC82-D245-62EB7A17C368}"/>
               </a:ext>
             </a:extLst>
           </p:cNvPr>
@@ -8239,8 +8239,8 @@
         </p:nvSpPr>
         <p:spPr>
           <a:xfrm>
-            <a:off x="8039184" y="2541337"/>
-            <a:ext cx="2332642" cy="1019342"/>
+            <a:off x="8217638" y="2699902"/>
+            <a:ext cx="1975735" cy="913633"/>
           </a:xfrm>
           <a:prstGeom prst="rect">
             <a:avLst/>
@@ -8257,7 +8257,7 @@
               </a:spcBef>
               <a:buFontTx/>
               <a:buNone/>
-              <a:defRPr sz="2200" b="1">
+              <a:defRPr sz="2000" b="1">
                 <a:solidFill>
                   <a:schemeClr val="accent1"/>
                 </a:solidFill>
@@ -8279,7 +8279,7 @@
           <p:cNvPr id="14" name="item_4">
             <a:extLst>
               <a:ext uri="{FF2B5EF4-FFF2-40B4-BE49-F238E27FC236}">
-                <a16:creationId xmlns:a16="http://schemas.microsoft.com/office/drawing/2014/main" id="{497EEFED-DE91-29DD-4D58-24900C6BB6B3}"/>
+                <a16:creationId xmlns:a16="http://schemas.microsoft.com/office/drawing/2014/main" id="{B287EFF8-87D8-0104-3468-735871E3217A}"/>
               </a:ext>
             </a:extLst>
           </p:cNvPr>
@@ -8292,8 +8292,8 @@
         </p:nvSpPr>
         <p:spPr>
           <a:xfrm>
-            <a:off x="8039184" y="3560680"/>
-            <a:ext cx="2332642" cy="2446421"/>
+            <a:off x="8217638" y="3613534"/>
+            <a:ext cx="1975735" cy="2192718"/>
           </a:xfrm>
           <a:prstGeom prst="rect">
             <a:avLst/>
@@ -8327,7 +8327,7 @@
           <p:cNvPr id="15" name="source">
             <a:extLst>
               <a:ext uri="{FF2B5EF4-FFF2-40B4-BE49-F238E27FC236}">
-                <a16:creationId xmlns:a16="http://schemas.microsoft.com/office/drawing/2014/main" id="{FC4FA36F-A7DA-EA9F-F76A-F6AD8E1A2EFB}"/>
+                <a16:creationId xmlns:a16="http://schemas.microsoft.com/office/drawing/2014/main" id="{B93DF550-C51B-D573-234B-6DE3A7448073}"/>
               </a:ext>
             </a:extLst>
           </p:cNvPr>
@@ -8382,7 +8382,7 @@
     </p:spTree>
     <p:extLst>
       <p:ext uri="{BB962C8B-B14F-4D97-AF65-F5344CB8AC3E}">
-        <p14:creationId xmlns:p14="http://schemas.microsoft.com/office/powerpoint/2010/main" val="3496994913"/>
+        <p14:creationId xmlns:p14="http://schemas.microsoft.com/office/powerpoint/2010/main" val="3457988156"/>
       </p:ext>
     </p:extLst>
   </p:cSld>
@@ -8414,7 +8414,7 @@
           <p:cNvPr id="6" name="glow">
             <a:extLst>
               <a:ext uri="{FF2B5EF4-FFF2-40B4-BE49-F238E27FC236}">
-                <a16:creationId xmlns:a16="http://schemas.microsoft.com/office/drawing/2014/main" id="{201C199B-894C-2CAD-DF82-1C191956798F}"/>
+                <a16:creationId xmlns:a16="http://schemas.microsoft.com/office/drawing/2014/main" id="{A9271F71-AA87-8AAE-E65D-3640403306B6}"/>
               </a:ext>
             </a:extLst>
           </p:cNvPr>
@@ -8596,7 +8596,7 @@
             </a:lvl1pPr>
           </a:lstStyle>
           <a:p>
-            <a:fld id="{84563B43-CD3D-4346-947D-64165950A7CF}" type="datetimeFigureOut">
+            <a:fld id="{E74088FC-AB1D-4731-A24C-F46EBDB0C5A7}" type="datetimeFigureOut">
               <a:rPr lang="en-US" smtClean="0"/>
               <a:t>10/3/2026</a:t>
             </a:fld>
@@ -8633,7 +8633,7 @@
             </a:lvl1pPr>
           </a:lstStyle>
           <a:p>
-            <a:fld id="{691F7126-2246-49A0-8047-430012F919EB}" type="slidenum">
+            <a:fld id="{E4AD76C8-B1EB-4E10-9C29-0B8B3CD29BA6}" type="slidenum">
               <a:rPr lang="en-US" smtClean="0"/>
               <a:t>‹#›</a:t>
             </a:fld>
@@ -8646,7 +8646,7 @@
           <p:cNvPr id="7" name="kpi_value_1">
             <a:extLst>
               <a:ext uri="{FF2B5EF4-FFF2-40B4-BE49-F238E27FC236}">
-                <a16:creationId xmlns:a16="http://schemas.microsoft.com/office/drawing/2014/main" id="{F0EB263D-5DAE-FED8-822B-6304F46418A4}"/>
+                <a16:creationId xmlns:a16="http://schemas.microsoft.com/office/drawing/2014/main" id="{27D3A43C-701C-3807-6AB9-89D6A0952384}"/>
               </a:ext>
             </a:extLst>
           </p:cNvPr>
@@ -8659,8 +8659,8 @@
         </p:nvSpPr>
         <p:spPr>
           <a:xfrm>
-            <a:off x="633364" y="2363142"/>
-            <a:ext cx="4762159" cy="2116939"/>
+            <a:off x="607870" y="2334448"/>
+            <a:ext cx="4813145" cy="2152518"/>
           </a:xfrm>
         </p:spPr>
         <p:txBody>
@@ -8696,7 +8696,7 @@
           <p:cNvPr id="8" name="kpi_label_1">
             <a:extLst>
               <a:ext uri="{FF2B5EF4-FFF2-40B4-BE49-F238E27FC236}">
-                <a16:creationId xmlns:a16="http://schemas.microsoft.com/office/drawing/2014/main" id="{A90761BB-77DC-9C10-ED88-AAF06209A721}"/>
+                <a16:creationId xmlns:a16="http://schemas.microsoft.com/office/drawing/2014/main" id="{9187B472-B220-A8B6-89F9-C110C67CF17F}"/>
               </a:ext>
             </a:extLst>
           </p:cNvPr>
@@ -8709,207 +8709,8 @@
         </p:nvSpPr>
         <p:spPr>
           <a:xfrm>
-            <a:off x="633365" y="4548369"/>
-            <a:ext cx="4762159" cy="1229191"/>
-          </a:xfrm>
-          <a:prstGeom prst="rect">
-            <a:avLst/>
-          </a:prstGeom>
-        </p:spPr>
-        <p:txBody>
-          <a:bodyPr wrap="square" anchor="t">
-            <a:noAutofit/>
-          </a:bodyPr>
-          <a:lstStyle>
-            <a:lvl1pPr marL="0" indent="0">
-              <a:spcBef>
-                <a:spcPts val="0"/>
-              </a:spcBef>
-              <a:buFontTx/>
-              <a:buNone/>
-              <a:defRPr sz="1800"/>
-            </a:lvl1pPr>
-          </a:lstStyle>
-          <a:p>
-            <a:pPr lvl="0"/>
-            <a:r>
-              <a:rPr lang="en-US"/>
-              <a:t>kpi_label_1</a:t>
-            </a:r>
-          </a:p>
-        </p:txBody>
-      </p:sp>
-      <p:sp>
-        <p:nvSpPr>
-          <p:cNvPr id="9" name="quote">
-            <a:extLst>
-              <a:ext uri="{FF2B5EF4-FFF2-40B4-BE49-F238E27FC236}">
-                <a16:creationId xmlns:a16="http://schemas.microsoft.com/office/drawing/2014/main" id="{D854046E-5095-97F3-B573-396F180E728B}"/>
-              </a:ext>
-            </a:extLst>
-          </p:cNvPr>
-          <p:cNvSpPr>
-            <a:spLocks noGrp="1"/>
-          </p:cNvSpPr>
-          <p:nvPr>
-            <p:ph type="body" sz="quarter" idx="15" hasCustomPrompt="1"/>
-          </p:nvPr>
-        </p:nvSpPr>
-        <p:spPr>
-          <a:xfrm>
-            <a:off x="633365" y="2363141"/>
-            <a:ext cx="4762159" cy="2663246"/>
-          </a:xfrm>
-          <a:prstGeom prst="rect">
-            <a:avLst/>
-          </a:prstGeom>
-        </p:spPr>
-        <p:txBody>
-          <a:bodyPr wrap="square" anchor="t">
-            <a:noAutofit/>
-          </a:bodyPr>
-          <a:lstStyle>
-            <a:lvl1pPr marL="0" indent="0">
-              <a:spcBef>
-                <a:spcPts val="0"/>
-              </a:spcBef>
-              <a:buFontTx/>
-              <a:buNone/>
-              <a:defRPr sz="2400" i="1">
-                <a:latin typeface="+mj-lt"/>
-              </a:defRPr>
-            </a:lvl1pPr>
-          </a:lstStyle>
-          <a:p>
-            <a:pPr lvl="0"/>
-            <a:r>
-              <a:rPr lang="en-US"/>
-              <a:t>quote</a:t>
-            </a:r>
-          </a:p>
-        </p:txBody>
-      </p:sp>
-      <p:sp>
-        <p:nvSpPr>
-          <p:cNvPr id="10" name="attribution">
-            <a:extLst>
-              <a:ext uri="{FF2B5EF4-FFF2-40B4-BE49-F238E27FC236}">
-                <a16:creationId xmlns:a16="http://schemas.microsoft.com/office/drawing/2014/main" id="{8242ADE8-50A4-3D29-C162-F28CD7D0014F}"/>
-              </a:ext>
-            </a:extLst>
-          </p:cNvPr>
-          <p:cNvSpPr>
-            <a:spLocks noGrp="1"/>
-          </p:cNvSpPr>
-          <p:nvPr>
-            <p:ph type="body" sz="quarter" idx="16" hasCustomPrompt="1"/>
-          </p:nvPr>
-        </p:nvSpPr>
-        <p:spPr>
-          <a:xfrm>
-            <a:off x="633365" y="5094675"/>
-            <a:ext cx="4762159" cy="682884"/>
-          </a:xfrm>
-          <a:prstGeom prst="rect">
-            <a:avLst/>
-          </a:prstGeom>
-        </p:spPr>
-        <p:txBody>
-          <a:bodyPr wrap="square" anchor="t">
-            <a:noAutofit/>
-          </a:bodyPr>
-          <a:lstStyle>
-            <a:lvl1pPr marL="0" indent="0">
-              <a:spcBef>
-                <a:spcPts val="0"/>
-              </a:spcBef>
-              <a:buFontTx/>
-              <a:buNone/>
-              <a:defRPr sz="1400"/>
-            </a:lvl1pPr>
-          </a:lstStyle>
-          <a:p>
-            <a:pPr lvl="0"/>
-            <a:r>
-              <a:rPr lang="en-US"/>
-              <a:t>attribution</a:t>
-            </a:r>
-          </a:p>
-        </p:txBody>
-      </p:sp>
-      <p:sp>
-        <p:nvSpPr>
-          <p:cNvPr id="11" name="item_1_title">
-            <a:extLst>
-              <a:ext uri="{FF2B5EF4-FFF2-40B4-BE49-F238E27FC236}">
-                <a16:creationId xmlns:a16="http://schemas.microsoft.com/office/drawing/2014/main" id="{EDEFB3C6-8893-A486-B210-DFE126C1F628}"/>
-              </a:ext>
-            </a:extLst>
-          </p:cNvPr>
-          <p:cNvSpPr>
-            <a:spLocks noGrp="1"/>
-          </p:cNvSpPr>
-          <p:nvPr>
-            <p:ph type="body" sz="quarter" idx="17" hasCustomPrompt="1"/>
-          </p:nvPr>
-        </p:nvSpPr>
-        <p:spPr>
-          <a:xfrm>
-            <a:off x="5997166" y="2133601"/>
-            <a:ext cx="4374660" cy="1139265"/>
-          </a:xfrm>
-          <a:prstGeom prst="rect">
-            <a:avLst/>
-          </a:prstGeom>
-        </p:spPr>
-        <p:txBody>
-          <a:bodyPr wrap="square" anchor="t">
-            <a:noAutofit/>
-          </a:bodyPr>
-          <a:lstStyle>
-            <a:lvl1pPr marL="0" indent="0">
-              <a:spcBef>
-                <a:spcPts val="0"/>
-              </a:spcBef>
-              <a:buFontTx/>
-              <a:buNone/>
-              <a:defRPr sz="2200" b="1">
-                <a:solidFill>
-                  <a:schemeClr val="accent1"/>
-                </a:solidFill>
-                <a:latin typeface="+mj-lt"/>
-              </a:defRPr>
-            </a:lvl1pPr>
-          </a:lstStyle>
-          <a:p>
-            <a:pPr lvl="0"/>
-            <a:r>
-              <a:rPr lang="en-US"/>
-              <a:t>item_1_title</a:t>
-            </a:r>
-          </a:p>
-        </p:txBody>
-      </p:sp>
-      <p:sp>
-        <p:nvSpPr>
-          <p:cNvPr id="12" name="item_1">
-            <a:extLst>
-              <a:ext uri="{FF2B5EF4-FFF2-40B4-BE49-F238E27FC236}">
-                <a16:creationId xmlns:a16="http://schemas.microsoft.com/office/drawing/2014/main" id="{3EE32FC9-D57F-885F-BBD1-3EC31A14B32F}"/>
-              </a:ext>
-            </a:extLst>
-          </p:cNvPr>
-          <p:cNvSpPr>
-            <a:spLocks noGrp="1"/>
-          </p:cNvSpPr>
-          <p:nvPr>
-            <p:ph type="body" sz="quarter" idx="18" hasCustomPrompt="1"/>
-          </p:nvPr>
-        </p:nvSpPr>
-        <p:spPr>
-          <a:xfrm>
-            <a:off x="5997166" y="3272866"/>
-            <a:ext cx="4374660" cy="2734235"/>
+            <a:off x="607871" y="4556404"/>
+            <a:ext cx="4813145" cy="1249849"/>
           </a:xfrm>
           <a:prstGeom prst="rect">
             <a:avLst/>
@@ -8933,6 +8734,205 @@
             <a:pPr lvl="0"/>
             <a:r>
               <a:rPr lang="en-US"/>
+              <a:t>kpi_label_1</a:t>
+            </a:r>
+          </a:p>
+        </p:txBody>
+      </p:sp>
+      <p:sp>
+        <p:nvSpPr>
+          <p:cNvPr id="9" name="quote">
+            <a:extLst>
+              <a:ext uri="{FF2B5EF4-FFF2-40B4-BE49-F238E27FC236}">
+                <a16:creationId xmlns:a16="http://schemas.microsoft.com/office/drawing/2014/main" id="{0FBC4699-B774-C5D7-DCE9-7ED27EE2034B}"/>
+              </a:ext>
+            </a:extLst>
+          </p:cNvPr>
+          <p:cNvSpPr>
+            <a:spLocks noGrp="1"/>
+          </p:cNvSpPr>
+          <p:nvPr>
+            <p:ph type="body" sz="quarter" idx="15" hasCustomPrompt="1"/>
+          </p:nvPr>
+        </p:nvSpPr>
+        <p:spPr>
+          <a:xfrm>
+            <a:off x="607871" y="2334449"/>
+            <a:ext cx="4813145" cy="2708007"/>
+          </a:xfrm>
+          <a:prstGeom prst="rect">
+            <a:avLst/>
+          </a:prstGeom>
+        </p:spPr>
+        <p:txBody>
+          <a:bodyPr wrap="square" anchor="t">
+            <a:noAutofit/>
+          </a:bodyPr>
+          <a:lstStyle>
+            <a:lvl1pPr marL="0" indent="0">
+              <a:spcBef>
+                <a:spcPts val="0"/>
+              </a:spcBef>
+              <a:buFontTx/>
+              <a:buNone/>
+              <a:defRPr sz="2000" i="1">
+                <a:latin typeface="+mj-lt"/>
+              </a:defRPr>
+            </a:lvl1pPr>
+          </a:lstStyle>
+          <a:p>
+            <a:pPr lvl="0"/>
+            <a:r>
+              <a:rPr lang="en-US"/>
+              <a:t>quote</a:t>
+            </a:r>
+          </a:p>
+        </p:txBody>
+      </p:sp>
+      <p:sp>
+        <p:nvSpPr>
+          <p:cNvPr id="10" name="attribution">
+            <a:extLst>
+              <a:ext uri="{FF2B5EF4-FFF2-40B4-BE49-F238E27FC236}">
+                <a16:creationId xmlns:a16="http://schemas.microsoft.com/office/drawing/2014/main" id="{05347F82-5BD5-B936-90AD-937DC9179DE1}"/>
+              </a:ext>
+            </a:extLst>
+          </p:cNvPr>
+          <p:cNvSpPr>
+            <a:spLocks noGrp="1"/>
+          </p:cNvSpPr>
+          <p:nvPr>
+            <p:ph type="body" sz="quarter" idx="16" hasCustomPrompt="1"/>
+          </p:nvPr>
+        </p:nvSpPr>
+        <p:spPr>
+          <a:xfrm>
+            <a:off x="607871" y="5111892"/>
+            <a:ext cx="4813145" cy="694361"/>
+          </a:xfrm>
+          <a:prstGeom prst="rect">
+            <a:avLst/>
+          </a:prstGeom>
+        </p:spPr>
+        <p:txBody>
+          <a:bodyPr wrap="square" anchor="t">
+            <a:noAutofit/>
+          </a:bodyPr>
+          <a:lstStyle>
+            <a:lvl1pPr marL="0" indent="0">
+              <a:spcBef>
+                <a:spcPts val="0"/>
+              </a:spcBef>
+              <a:buFontTx/>
+              <a:buNone/>
+              <a:defRPr sz="2000"/>
+            </a:lvl1pPr>
+          </a:lstStyle>
+          <a:p>
+            <a:pPr lvl="0"/>
+            <a:r>
+              <a:rPr lang="en-US"/>
+              <a:t>attribution</a:t>
+            </a:r>
+          </a:p>
+        </p:txBody>
+      </p:sp>
+      <p:sp>
+        <p:nvSpPr>
+          <p:cNvPr id="11" name="item_1_title">
+            <a:extLst>
+              <a:ext uri="{FF2B5EF4-FFF2-40B4-BE49-F238E27FC236}">
+                <a16:creationId xmlns:a16="http://schemas.microsoft.com/office/drawing/2014/main" id="{1480FFF3-F6AE-D3C8-F30B-2340F518592D}"/>
+              </a:ext>
+            </a:extLst>
+          </p:cNvPr>
+          <p:cNvSpPr>
+            <a:spLocks noGrp="1"/>
+          </p:cNvSpPr>
+          <p:nvPr>
+            <p:ph type="body" sz="quarter" idx="17" hasCustomPrompt="1"/>
+          </p:nvPr>
+        </p:nvSpPr>
+        <p:spPr>
+          <a:xfrm>
+            <a:off x="5997166" y="2133601"/>
+            <a:ext cx="4374660" cy="1139265"/>
+          </a:xfrm>
+          <a:prstGeom prst="rect">
+            <a:avLst/>
+          </a:prstGeom>
+        </p:spPr>
+        <p:txBody>
+          <a:bodyPr wrap="square" anchor="t">
+            <a:noAutofit/>
+          </a:bodyPr>
+          <a:lstStyle>
+            <a:lvl1pPr marL="0" indent="0">
+              <a:spcBef>
+                <a:spcPts val="0"/>
+              </a:spcBef>
+              <a:buFontTx/>
+              <a:buNone/>
+              <a:defRPr sz="2000" b="1">
+                <a:solidFill>
+                  <a:schemeClr val="accent1"/>
+                </a:solidFill>
+                <a:latin typeface="+mj-lt"/>
+              </a:defRPr>
+            </a:lvl1pPr>
+          </a:lstStyle>
+          <a:p>
+            <a:pPr lvl="0"/>
+            <a:r>
+              <a:rPr lang="en-US"/>
+              <a:t>item_1_title</a:t>
+            </a:r>
+          </a:p>
+        </p:txBody>
+      </p:sp>
+      <p:sp>
+        <p:nvSpPr>
+          <p:cNvPr id="12" name="item_1">
+            <a:extLst>
+              <a:ext uri="{FF2B5EF4-FFF2-40B4-BE49-F238E27FC236}">
+                <a16:creationId xmlns:a16="http://schemas.microsoft.com/office/drawing/2014/main" id="{C0DE1CEE-1A28-C854-1B39-022D2EEC6237}"/>
+              </a:ext>
+            </a:extLst>
+          </p:cNvPr>
+          <p:cNvSpPr>
+            <a:spLocks noGrp="1"/>
+          </p:cNvSpPr>
+          <p:nvPr>
+            <p:ph type="body" sz="quarter" idx="18" hasCustomPrompt="1"/>
+          </p:nvPr>
+        </p:nvSpPr>
+        <p:spPr>
+          <a:xfrm>
+            <a:off x="5997166" y="3272866"/>
+            <a:ext cx="4374660" cy="2734235"/>
+          </a:xfrm>
+          <a:prstGeom prst="rect">
+            <a:avLst/>
+          </a:prstGeom>
+        </p:spPr>
+        <p:txBody>
+          <a:bodyPr wrap="square" anchor="t">
+            <a:noAutofit/>
+          </a:bodyPr>
+          <a:lstStyle>
+            <a:lvl1pPr marL="0" indent="0">
+              <a:spcBef>
+                <a:spcPts val="0"/>
+              </a:spcBef>
+              <a:buFontTx/>
+              <a:buNone/>
+              <a:defRPr sz="2000"/>
+            </a:lvl1pPr>
+          </a:lstStyle>
+          <a:p>
+            <a:pPr lvl="0"/>
+            <a:r>
+              <a:rPr lang="en-US"/>
               <a:t>item_1</a:t>
             </a:r>
           </a:p>
@@ -8943,7 +8943,7 @@
           <p:cNvPr id="13" name="source">
             <a:extLst>
               <a:ext uri="{FF2B5EF4-FFF2-40B4-BE49-F238E27FC236}">
-                <a16:creationId xmlns:a16="http://schemas.microsoft.com/office/drawing/2014/main" id="{39249AA3-8C64-0803-0962-BD38A87131E5}"/>
+                <a16:creationId xmlns:a16="http://schemas.microsoft.com/office/drawing/2014/main" id="{731EB6A3-B3B2-5F0D-B16A-49DDF96B5BD2}"/>
               </a:ext>
             </a:extLst>
           </p:cNvPr>
@@ -8998,7 +8998,7 @@
     </p:spTree>
     <p:extLst>
       <p:ext uri="{BB962C8B-B14F-4D97-AF65-F5344CB8AC3E}">
-        <p14:creationId xmlns:p14="http://schemas.microsoft.com/office/powerpoint/2010/main" val="486327911"/>
+        <p14:creationId xmlns:p14="http://schemas.microsoft.com/office/powerpoint/2010/main" val="3421191199"/>
       </p:ext>
     </p:extLst>
   </p:cSld>
@@ -9030,7 +9030,7 @@
           <p:cNvPr id="6" name="glow">
             <a:extLst>
               <a:ext uri="{FF2B5EF4-FFF2-40B4-BE49-F238E27FC236}">
-                <a16:creationId xmlns:a16="http://schemas.microsoft.com/office/drawing/2014/main" id="{B6722A5E-3CAE-595F-AF38-0A8C3A7DD688}"/>
+                <a16:creationId xmlns:a16="http://schemas.microsoft.com/office/drawing/2014/main" id="{1C71D8BF-43A9-8CF9-C01C-FC8B464CDEB7}"/>
               </a:ext>
             </a:extLst>
           </p:cNvPr>
@@ -9212,7 +9212,7 @@
             </a:lvl1pPr>
           </a:lstStyle>
           <a:p>
-            <a:fld id="{84563B43-CD3D-4346-947D-64165950A7CF}" type="datetimeFigureOut">
+            <a:fld id="{E74088FC-AB1D-4731-A24C-F46EBDB0C5A7}" type="datetimeFigureOut">
               <a:rPr lang="en-US" smtClean="0"/>
               <a:t>10/3/2026</a:t>
             </a:fld>
@@ -9249,7 +9249,7 @@
             </a:lvl1pPr>
           </a:lstStyle>
           <a:p>
-            <a:fld id="{691F7126-2246-49A0-8047-430012F919EB}" type="slidenum">
+            <a:fld id="{E4AD76C8-B1EB-4E10-9C29-0B8B3CD29BA6}" type="slidenum">
               <a:rPr lang="en-US" smtClean="0"/>
               <a:t>‹#›</a:t>
             </a:fld>
@@ -9262,7 +9262,7 @@
           <p:cNvPr id="7" name="item_1_title">
             <a:extLst>
               <a:ext uri="{FF2B5EF4-FFF2-40B4-BE49-F238E27FC236}">
-                <a16:creationId xmlns:a16="http://schemas.microsoft.com/office/drawing/2014/main" id="{98135D5A-5B74-32EF-3840-3815C1D62B3D}"/>
+                <a16:creationId xmlns:a16="http://schemas.microsoft.com/office/drawing/2014/main" id="{F7BC20F2-3765-CD83-75B0-4C3CF38A5FA1}"/>
               </a:ext>
             </a:extLst>
           </p:cNvPr>
@@ -9275,8 +9275,8 @@
         </p:nvSpPr>
         <p:spPr>
           <a:xfrm>
-            <a:off x="633364" y="2363142"/>
-            <a:ext cx="2770278" cy="1004241"/>
+            <a:off x="607870" y="2334449"/>
+            <a:ext cx="2821265" cy="1021119"/>
           </a:xfrm>
         </p:spPr>
         <p:txBody>
@@ -9290,7 +9290,7 @@
               </a:spcBef>
               <a:buFontTx/>
               <a:buNone/>
-              <a:defRPr sz="2200" b="1">
+              <a:defRPr sz="2000" b="1">
                 <a:solidFill>
                   <a:schemeClr val="accent1"/>
                 </a:solidFill>
@@ -9312,7 +9312,7 @@
           <p:cNvPr id="8" name="item_1">
             <a:extLst>
               <a:ext uri="{FF2B5EF4-FFF2-40B4-BE49-F238E27FC236}">
-                <a16:creationId xmlns:a16="http://schemas.microsoft.com/office/drawing/2014/main" id="{4AEABFAB-28E5-2DBC-C640-EE5A57835CD4}"/>
+                <a16:creationId xmlns:a16="http://schemas.microsoft.com/office/drawing/2014/main" id="{A21A0929-FFC1-470C-1BAB-0D23F571F964}"/>
               </a:ext>
             </a:extLst>
           </p:cNvPr>
@@ -9325,8 +9325,8 @@
         </p:nvSpPr>
         <p:spPr>
           <a:xfrm>
-            <a:off x="633364" y="3367382"/>
-            <a:ext cx="2770278" cy="2410178"/>
+            <a:off x="607871" y="3355568"/>
+            <a:ext cx="2821265" cy="2450685"/>
           </a:xfrm>
           <a:prstGeom prst="rect">
             <a:avLst/>
@@ -9360,7 +9360,7 @@
           <p:cNvPr id="9" name="item_2_title">
             <a:extLst>
               <a:ext uri="{FF2B5EF4-FFF2-40B4-BE49-F238E27FC236}">
-                <a16:creationId xmlns:a16="http://schemas.microsoft.com/office/drawing/2014/main" id="{64EF321C-F572-65C3-2FE0-00BE1D2223B0}"/>
+                <a16:creationId xmlns:a16="http://schemas.microsoft.com/office/drawing/2014/main" id="{8D2815DD-3E51-C59F-2576-75862FA2AB45}"/>
               </a:ext>
             </a:extLst>
           </p:cNvPr>
@@ -9373,8 +9373,8 @@
         </p:nvSpPr>
         <p:spPr>
           <a:xfrm>
-            <a:off x="4015482" y="2363142"/>
-            <a:ext cx="2770278" cy="1004241"/>
+            <a:off x="3989990" y="2334449"/>
+            <a:ext cx="2821265" cy="1021119"/>
           </a:xfrm>
           <a:prstGeom prst="rect">
             <a:avLst/>
@@ -9391,7 +9391,7 @@
               </a:spcBef>
               <a:buFontTx/>
               <a:buNone/>
-              <a:defRPr sz="2200" b="1">
+              <a:defRPr sz="2000" b="1">
                 <a:solidFill>
                   <a:schemeClr val="accent1"/>
                 </a:solidFill>
@@ -9413,7 +9413,7 @@
           <p:cNvPr id="10" name="item_2">
             <a:extLst>
               <a:ext uri="{FF2B5EF4-FFF2-40B4-BE49-F238E27FC236}">
-                <a16:creationId xmlns:a16="http://schemas.microsoft.com/office/drawing/2014/main" id="{78881549-2F06-FDAC-B6A9-2D8BA120437B}"/>
+                <a16:creationId xmlns:a16="http://schemas.microsoft.com/office/drawing/2014/main" id="{53942DFC-6842-4C21-7479-A205F578FE64}"/>
               </a:ext>
             </a:extLst>
           </p:cNvPr>
@@ -9426,8 +9426,8 @@
         </p:nvSpPr>
         <p:spPr>
           <a:xfrm>
-            <a:off x="4015482" y="3367382"/>
-            <a:ext cx="2770278" cy="2410178"/>
+            <a:off x="3989990" y="3355568"/>
+            <a:ext cx="2821265" cy="2450685"/>
           </a:xfrm>
           <a:prstGeom prst="rect">
             <a:avLst/>
@@ -9461,7 +9461,7 @@
           <p:cNvPr id="11" name="item_3_title">
             <a:extLst>
               <a:ext uri="{FF2B5EF4-FFF2-40B4-BE49-F238E27FC236}">
-                <a16:creationId xmlns:a16="http://schemas.microsoft.com/office/drawing/2014/main" id="{415BFFCC-7C57-B154-0C67-3C99CDFD8F19}"/>
+                <a16:creationId xmlns:a16="http://schemas.microsoft.com/office/drawing/2014/main" id="{A8DF379B-FCBF-5A4D-B2CD-67A1F3A85D4A}"/>
               </a:ext>
             </a:extLst>
           </p:cNvPr>
@@ -9474,8 +9474,8 @@
         </p:nvSpPr>
         <p:spPr>
           <a:xfrm>
-            <a:off x="7397600" y="2363142"/>
-            <a:ext cx="2770278" cy="1004241"/>
+            <a:off x="7372108" y="2334449"/>
+            <a:ext cx="2821265" cy="1021119"/>
           </a:xfrm>
           <a:prstGeom prst="rect">
             <a:avLst/>
@@ -9492,7 +9492,7 @@
               </a:spcBef>
               <a:buFontTx/>
               <a:buNone/>
-              <a:defRPr sz="2200" b="1">
+              <a:defRPr sz="2000" b="1">
                 <a:solidFill>
                   <a:schemeClr val="accent1"/>
                 </a:solidFill>
@@ -9514,7 +9514,7 @@
           <p:cNvPr id="12" name="item_3">
             <a:extLst>
               <a:ext uri="{FF2B5EF4-FFF2-40B4-BE49-F238E27FC236}">
-                <a16:creationId xmlns:a16="http://schemas.microsoft.com/office/drawing/2014/main" id="{05671233-FF18-055A-C6F8-23D48C40A6E0}"/>
+                <a16:creationId xmlns:a16="http://schemas.microsoft.com/office/drawing/2014/main" id="{E8570990-CD99-336D-179B-C2C381AA1CF2}"/>
               </a:ext>
             </a:extLst>
           </p:cNvPr>
@@ -9527,8 +9527,8 @@
         </p:nvSpPr>
         <p:spPr>
           <a:xfrm>
-            <a:off x="7397600" y="3367382"/>
-            <a:ext cx="2770278" cy="2410178"/>
+            <a:off x="7372108" y="3355568"/>
+            <a:ext cx="2821265" cy="2450685"/>
           </a:xfrm>
           <a:prstGeom prst="rect">
             <a:avLst/>
@@ -9562,7 +9562,7 @@
           <p:cNvPr id="13" name="source">
             <a:extLst>
               <a:ext uri="{FF2B5EF4-FFF2-40B4-BE49-F238E27FC236}">
-                <a16:creationId xmlns:a16="http://schemas.microsoft.com/office/drawing/2014/main" id="{531A5899-9C47-0661-7354-EFA3FAA2297F}"/>
+                <a16:creationId xmlns:a16="http://schemas.microsoft.com/office/drawing/2014/main" id="{C859F92F-FDA4-C12C-BD54-79CD90381AD2}"/>
               </a:ext>
             </a:extLst>
           </p:cNvPr>
@@ -9617,7 +9617,7 @@
     </p:spTree>
     <p:extLst>
       <p:ext uri="{BB962C8B-B14F-4D97-AF65-F5344CB8AC3E}">
-        <p14:creationId xmlns:p14="http://schemas.microsoft.com/office/powerpoint/2010/main" val="2761795780"/>
+        <p14:creationId xmlns:p14="http://schemas.microsoft.com/office/powerpoint/2010/main" val="3548884057"/>
       </p:ext>
     </p:extLst>
   </p:cSld>
@@ -9649,7 +9649,7 @@
           <p:cNvPr id="6" name="glow">
             <a:extLst>
               <a:ext uri="{FF2B5EF4-FFF2-40B4-BE49-F238E27FC236}">
-                <a16:creationId xmlns:a16="http://schemas.microsoft.com/office/drawing/2014/main" id="{F97F6525-9647-EDCF-46F2-975EB38B2432}"/>
+                <a16:creationId xmlns:a16="http://schemas.microsoft.com/office/drawing/2014/main" id="{C6054E55-60EA-0843-8B27-4B7F4F660C77}"/>
               </a:ext>
             </a:extLst>
           </p:cNvPr>
@@ -9831,7 +9831,7 @@
             </a:lvl1pPr>
           </a:lstStyle>
           <a:p>
-            <a:fld id="{84563B43-CD3D-4346-947D-64165950A7CF}" type="datetimeFigureOut">
+            <a:fld id="{E74088FC-AB1D-4731-A24C-F46EBDB0C5A7}" type="datetimeFigureOut">
               <a:rPr lang="en-US" smtClean="0"/>
               <a:t>10/3/2026</a:t>
             </a:fld>
@@ -9868,7 +9868,7 @@
             </a:lvl1pPr>
           </a:lstStyle>
           <a:p>
-            <a:fld id="{691F7126-2246-49A0-8047-430012F919EB}" type="slidenum">
+            <a:fld id="{E4AD76C8-B1EB-4E10-9C29-0B8B3CD29BA6}" type="slidenum">
               <a:rPr lang="en-US" smtClean="0"/>
               <a:t>‹#›</a:t>
             </a:fld>
@@ -9881,7 +9881,7 @@
           <p:cNvPr id="7" name="marker_1">
             <a:extLst>
               <a:ext uri="{FF2B5EF4-FFF2-40B4-BE49-F238E27FC236}">
-                <a16:creationId xmlns:a16="http://schemas.microsoft.com/office/drawing/2014/main" id="{91AA84AE-D95A-5013-A3B5-569135E90375}"/>
+                <a16:creationId xmlns:a16="http://schemas.microsoft.com/office/drawing/2014/main" id="{C81914FD-1845-15F8-F323-4801ECAC5F14}"/>
               </a:ext>
             </a:extLst>
           </p:cNvPr>
@@ -9894,7 +9894,7 @@
         </p:nvSpPr>
         <p:spPr>
           <a:xfrm>
-            <a:off x="633364" y="2363142"/>
+            <a:off x="607870" y="2334449"/>
             <a:ext cx="560854" cy="631237"/>
           </a:xfrm>
           <a:prstGeom prst="ellipse">
@@ -9915,7 +9915,7 @@
               </a:spcBef>
               <a:buFontTx/>
               <a:buNone/>
-              <a:defRPr sz="2400" b="1">
+              <a:defRPr sz="2000" b="1">
                 <a:solidFill>
                   <a:schemeClr val="bg1"/>
                 </a:solidFill>
@@ -9937,7 +9937,7 @@
           <p:cNvPr id="8" name="item_1_title">
             <a:extLst>
               <a:ext uri="{FF2B5EF4-FFF2-40B4-BE49-F238E27FC236}">
-                <a16:creationId xmlns:a16="http://schemas.microsoft.com/office/drawing/2014/main" id="{14A400B3-14D2-3F58-FEE4-6EDB17197B4B}"/>
+                <a16:creationId xmlns:a16="http://schemas.microsoft.com/office/drawing/2014/main" id="{9575E9AC-5110-1489-E549-0F96332FACCD}"/>
               </a:ext>
             </a:extLst>
           </p:cNvPr>
@@ -9950,8 +9950,8 @@
         </p:nvSpPr>
         <p:spPr>
           <a:xfrm>
-            <a:off x="1296192" y="2363141"/>
-            <a:ext cx="8871687" cy="400852"/>
+            <a:off x="1270698" y="2334448"/>
+            <a:ext cx="8922674" cy="417730"/>
           </a:xfrm>
           <a:prstGeom prst="rect">
             <a:avLst/>
@@ -9968,7 +9968,7 @@
               </a:spcBef>
               <a:buFontTx/>
               <a:buNone/>
-              <a:defRPr sz="2200" b="1">
+              <a:defRPr sz="2000" b="1">
                 <a:solidFill>
                   <a:schemeClr val="accent1"/>
                 </a:solidFill>
@@ -9990,7 +9990,7 @@
           <p:cNvPr id="9" name="item_1">
             <a:extLst>
               <a:ext uri="{FF2B5EF4-FFF2-40B4-BE49-F238E27FC236}">
-                <a16:creationId xmlns:a16="http://schemas.microsoft.com/office/drawing/2014/main" id="{6C4BC6B8-CF18-C705-929D-BB59C7441AB6}"/>
+                <a16:creationId xmlns:a16="http://schemas.microsoft.com/office/drawing/2014/main" id="{A2ADFD78-93F8-FA17-F1A1-B83B76A4D4AB}"/>
               </a:ext>
             </a:extLst>
           </p:cNvPr>
@@ -10003,8 +10003,8 @@
         </p:nvSpPr>
         <p:spPr>
           <a:xfrm>
-            <a:off x="1296192" y="2763993"/>
-            <a:ext cx="8871687" cy="962046"/>
+            <a:off x="1270698" y="2752180"/>
+            <a:ext cx="8922674" cy="1002553"/>
           </a:xfrm>
           <a:prstGeom prst="rect">
             <a:avLst/>
@@ -10038,7 +10038,7 @@
           <p:cNvPr id="10" name="marker_2">
             <a:extLst>
               <a:ext uri="{FF2B5EF4-FFF2-40B4-BE49-F238E27FC236}">
-                <a16:creationId xmlns:a16="http://schemas.microsoft.com/office/drawing/2014/main" id="{101CABED-42A4-472F-7EEE-A8A80D5B45BC}"/>
+                <a16:creationId xmlns:a16="http://schemas.microsoft.com/office/drawing/2014/main" id="{789437E5-A572-77C9-24AD-740B158568CA}"/>
               </a:ext>
             </a:extLst>
           </p:cNvPr>
@@ -10051,7 +10051,7 @@
         </p:nvSpPr>
         <p:spPr>
           <a:xfrm>
-            <a:off x="633364" y="4414662"/>
+            <a:off x="607870" y="4385969"/>
             <a:ext cx="560854" cy="631237"/>
           </a:xfrm>
           <a:prstGeom prst="ellipse">
@@ -10072,7 +10072,7 @@
               </a:spcBef>
               <a:buFontTx/>
               <a:buNone/>
-              <a:defRPr sz="2400" b="1">
+              <a:defRPr sz="2000" b="1">
                 <a:solidFill>
                   <a:schemeClr val="bg1"/>
                 </a:solidFill>
@@ -10094,7 +10094,7 @@
           <p:cNvPr id="11" name="item_2_title">
             <a:extLst>
               <a:ext uri="{FF2B5EF4-FFF2-40B4-BE49-F238E27FC236}">
-                <a16:creationId xmlns:a16="http://schemas.microsoft.com/office/drawing/2014/main" id="{9219EF08-5301-854C-F038-37AD8BDD7B75}"/>
+                <a16:creationId xmlns:a16="http://schemas.microsoft.com/office/drawing/2014/main" id="{3B778758-000F-916C-096F-5DEEBF12DDC9}"/>
               </a:ext>
             </a:extLst>
           </p:cNvPr>
@@ -10107,8 +10107,8 @@
         </p:nvSpPr>
         <p:spPr>
           <a:xfrm>
-            <a:off x="1296192" y="4414661"/>
-            <a:ext cx="8871687" cy="400852"/>
+            <a:off x="1270698" y="4385968"/>
+            <a:ext cx="8922674" cy="417730"/>
           </a:xfrm>
           <a:prstGeom prst="rect">
             <a:avLst/>
@@ -10125,7 +10125,7 @@
               </a:spcBef>
               <a:buFontTx/>
               <a:buNone/>
-              <a:defRPr sz="2200" b="1">
+              <a:defRPr sz="2000" b="1">
                 <a:solidFill>
                   <a:schemeClr val="accent1"/>
                 </a:solidFill>
@@ -10147,7 +10147,7 @@
           <p:cNvPr id="12" name="item_2">
             <a:extLst>
               <a:ext uri="{FF2B5EF4-FFF2-40B4-BE49-F238E27FC236}">
-                <a16:creationId xmlns:a16="http://schemas.microsoft.com/office/drawing/2014/main" id="{D38F28B1-446B-D624-FFB6-9F32FD1B4862}"/>
+                <a16:creationId xmlns:a16="http://schemas.microsoft.com/office/drawing/2014/main" id="{447D0069-0129-9025-6A24-13E4D89C6C9E}"/>
               </a:ext>
             </a:extLst>
           </p:cNvPr>
@@ -10160,8 +10160,8 @@
         </p:nvSpPr>
         <p:spPr>
           <a:xfrm>
-            <a:off x="1296192" y="4815513"/>
-            <a:ext cx="8871687" cy="962046"/>
+            <a:off x="1270698" y="4803700"/>
+            <a:ext cx="8922674" cy="1002553"/>
           </a:xfrm>
           <a:prstGeom prst="rect">
             <a:avLst/>
@@ -10195,7 +10195,7 @@
           <p:cNvPr id="13" name="source">
             <a:extLst>
               <a:ext uri="{FF2B5EF4-FFF2-40B4-BE49-F238E27FC236}">
-                <a16:creationId xmlns:a16="http://schemas.microsoft.com/office/drawing/2014/main" id="{036E67AB-2129-1031-686D-CDDCFA56991F}"/>
+                <a16:creationId xmlns:a16="http://schemas.microsoft.com/office/drawing/2014/main" id="{94F9E2D1-D212-D83E-C9C4-6651E01D47F9}"/>
               </a:ext>
             </a:extLst>
           </p:cNvPr>
@@ -10250,7 +10250,7 @@
     </p:spTree>
     <p:extLst>
       <p:ext uri="{BB962C8B-B14F-4D97-AF65-F5344CB8AC3E}">
-        <p14:creationId xmlns:p14="http://schemas.microsoft.com/office/powerpoint/2010/main" val="2908318207"/>
+        <p14:creationId xmlns:p14="http://schemas.microsoft.com/office/powerpoint/2010/main" val="3175090193"/>
       </p:ext>
     </p:extLst>
   </p:cSld>
@@ -10282,7 +10282,7 @@
           <p:cNvPr id="6" name="glow">
             <a:extLst>
               <a:ext uri="{FF2B5EF4-FFF2-40B4-BE49-F238E27FC236}">
-                <a16:creationId xmlns:a16="http://schemas.microsoft.com/office/drawing/2014/main" id="{160D6CA0-8A11-744B-6D65-0FA720FE4DCC}"/>
+                <a16:creationId xmlns:a16="http://schemas.microsoft.com/office/drawing/2014/main" id="{D37DB373-6548-BDA8-9AEE-D32229773A44}"/>
               </a:ext>
             </a:extLst>
           </p:cNvPr>
@@ -10464,7 +10464,7 @@
             </a:lvl1pPr>
           </a:lstStyle>
           <a:p>
-            <a:fld id="{84563B43-CD3D-4346-947D-64165950A7CF}" type="datetimeFigureOut">
+            <a:fld id="{E74088FC-AB1D-4731-A24C-F46EBDB0C5A7}" type="datetimeFigureOut">
               <a:rPr lang="en-US" smtClean="0"/>
               <a:t>10/3/2026</a:t>
             </a:fld>
@@ -10501,7 +10501,7 @@
             </a:lvl1pPr>
           </a:lstStyle>
           <a:p>
-            <a:fld id="{691F7126-2246-49A0-8047-430012F919EB}" type="slidenum">
+            <a:fld id="{E4AD76C8-B1EB-4E10-9C29-0B8B3CD29BA6}" type="slidenum">
               <a:rPr lang="en-US" smtClean="0"/>
               <a:t>‹#›</a:t>
             </a:fld>
@@ -10514,7 +10514,7 @@
           <p:cNvPr id="7" name="kpi_value_1">
             <a:extLst>
               <a:ext uri="{FF2B5EF4-FFF2-40B4-BE49-F238E27FC236}">
-                <a16:creationId xmlns:a16="http://schemas.microsoft.com/office/drawing/2014/main" id="{EE04D7E6-DC13-A914-3273-B30E5C09FDB0}"/>
+                <a16:creationId xmlns:a16="http://schemas.microsoft.com/office/drawing/2014/main" id="{9C3B2D20-6DF8-9113-2FCE-DC0F3764610E}"/>
               </a:ext>
             </a:extLst>
           </p:cNvPr>
@@ -10527,8 +10527,8 @@
         </p:nvSpPr>
         <p:spPr>
           <a:xfrm>
-            <a:off x="633364" y="2363142"/>
-            <a:ext cx="4762159" cy="2116939"/>
+            <a:off x="607870" y="2334448"/>
+            <a:ext cx="4813145" cy="2152518"/>
           </a:xfrm>
         </p:spPr>
         <p:txBody>
@@ -10564,7 +10564,7 @@
           <p:cNvPr id="8" name="kpi_label_1">
             <a:extLst>
               <a:ext uri="{FF2B5EF4-FFF2-40B4-BE49-F238E27FC236}">
-                <a16:creationId xmlns:a16="http://schemas.microsoft.com/office/drawing/2014/main" id="{77AA8F11-442B-0FA9-9145-E16547869123}"/>
+                <a16:creationId xmlns:a16="http://schemas.microsoft.com/office/drawing/2014/main" id="{1B9D7CB8-2D68-6972-980C-C9B3D6EF784F}"/>
               </a:ext>
             </a:extLst>
           </p:cNvPr>
@@ -10577,207 +10577,8 @@
         </p:nvSpPr>
         <p:spPr>
           <a:xfrm>
-            <a:off x="633365" y="4548369"/>
-            <a:ext cx="4762159" cy="1229191"/>
-          </a:xfrm>
-          <a:prstGeom prst="rect">
-            <a:avLst/>
-          </a:prstGeom>
-        </p:spPr>
-        <p:txBody>
-          <a:bodyPr wrap="square" anchor="t">
-            <a:noAutofit/>
-          </a:bodyPr>
-          <a:lstStyle>
-            <a:lvl1pPr marL="0" indent="0">
-              <a:spcBef>
-                <a:spcPts val="0"/>
-              </a:spcBef>
-              <a:buFontTx/>
-              <a:buNone/>
-              <a:defRPr sz="1800"/>
-            </a:lvl1pPr>
-          </a:lstStyle>
-          <a:p>
-            <a:pPr lvl="0"/>
-            <a:r>
-              <a:rPr lang="en-US"/>
-              <a:t>kpi_label_1</a:t>
-            </a:r>
-          </a:p>
-        </p:txBody>
-      </p:sp>
-      <p:sp>
-        <p:nvSpPr>
-          <p:cNvPr id="9" name="quote">
-            <a:extLst>
-              <a:ext uri="{FF2B5EF4-FFF2-40B4-BE49-F238E27FC236}">
-                <a16:creationId xmlns:a16="http://schemas.microsoft.com/office/drawing/2014/main" id="{25B44273-D5A7-D2B6-E0D1-46A0686DBBB7}"/>
-              </a:ext>
-            </a:extLst>
-          </p:cNvPr>
-          <p:cNvSpPr>
-            <a:spLocks noGrp="1"/>
-          </p:cNvSpPr>
-          <p:nvPr>
-            <p:ph type="body" sz="quarter" idx="15" hasCustomPrompt="1"/>
-          </p:nvPr>
-        </p:nvSpPr>
-        <p:spPr>
-          <a:xfrm>
-            <a:off x="633365" y="2363141"/>
-            <a:ext cx="4762159" cy="2663246"/>
-          </a:xfrm>
-          <a:prstGeom prst="rect">
-            <a:avLst/>
-          </a:prstGeom>
-        </p:spPr>
-        <p:txBody>
-          <a:bodyPr wrap="square" anchor="t">
-            <a:noAutofit/>
-          </a:bodyPr>
-          <a:lstStyle>
-            <a:lvl1pPr marL="0" indent="0">
-              <a:spcBef>
-                <a:spcPts val="0"/>
-              </a:spcBef>
-              <a:buFontTx/>
-              <a:buNone/>
-              <a:defRPr sz="2400" i="1">
-                <a:latin typeface="+mj-lt"/>
-              </a:defRPr>
-            </a:lvl1pPr>
-          </a:lstStyle>
-          <a:p>
-            <a:pPr lvl="0"/>
-            <a:r>
-              <a:rPr lang="en-US"/>
-              <a:t>quote</a:t>
-            </a:r>
-          </a:p>
-        </p:txBody>
-      </p:sp>
-      <p:sp>
-        <p:nvSpPr>
-          <p:cNvPr id="10" name="attribution">
-            <a:extLst>
-              <a:ext uri="{FF2B5EF4-FFF2-40B4-BE49-F238E27FC236}">
-                <a16:creationId xmlns:a16="http://schemas.microsoft.com/office/drawing/2014/main" id="{EF93B78A-6482-C11E-2A44-677D7FE55ADC}"/>
-              </a:ext>
-            </a:extLst>
-          </p:cNvPr>
-          <p:cNvSpPr>
-            <a:spLocks noGrp="1"/>
-          </p:cNvSpPr>
-          <p:nvPr>
-            <p:ph type="body" sz="quarter" idx="16" hasCustomPrompt="1"/>
-          </p:nvPr>
-        </p:nvSpPr>
-        <p:spPr>
-          <a:xfrm>
-            <a:off x="633365" y="5094675"/>
-            <a:ext cx="4762159" cy="682884"/>
-          </a:xfrm>
-          <a:prstGeom prst="rect">
-            <a:avLst/>
-          </a:prstGeom>
-        </p:spPr>
-        <p:txBody>
-          <a:bodyPr wrap="square" anchor="t">
-            <a:noAutofit/>
-          </a:bodyPr>
-          <a:lstStyle>
-            <a:lvl1pPr marL="0" indent="0">
-              <a:spcBef>
-                <a:spcPts val="0"/>
-              </a:spcBef>
-              <a:buFontTx/>
-              <a:buNone/>
-              <a:defRPr sz="1400"/>
-            </a:lvl1pPr>
-          </a:lstStyle>
-          <a:p>
-            <a:pPr lvl="0"/>
-            <a:r>
-              <a:rPr lang="en-US"/>
-              <a:t>attribution</a:t>
-            </a:r>
-          </a:p>
-        </p:txBody>
-      </p:sp>
-      <p:sp>
-        <p:nvSpPr>
-          <p:cNvPr id="11" name="item_1_title">
-            <a:extLst>
-              <a:ext uri="{FF2B5EF4-FFF2-40B4-BE49-F238E27FC236}">
-                <a16:creationId xmlns:a16="http://schemas.microsoft.com/office/drawing/2014/main" id="{394B5F2D-4732-E653-CBD9-55262D841BC7}"/>
-              </a:ext>
-            </a:extLst>
-          </p:cNvPr>
-          <p:cNvSpPr>
-            <a:spLocks noGrp="1"/>
-          </p:cNvSpPr>
-          <p:nvPr>
-            <p:ph type="body" sz="quarter" idx="17" hasCustomPrompt="1"/>
-          </p:nvPr>
-        </p:nvSpPr>
-        <p:spPr>
-          <a:xfrm>
-            <a:off x="5997166" y="2133601"/>
-            <a:ext cx="4374660" cy="1139265"/>
-          </a:xfrm>
-          <a:prstGeom prst="rect">
-            <a:avLst/>
-          </a:prstGeom>
-        </p:spPr>
-        <p:txBody>
-          <a:bodyPr wrap="square" anchor="t">
-            <a:noAutofit/>
-          </a:bodyPr>
-          <a:lstStyle>
-            <a:lvl1pPr marL="0" indent="0">
-              <a:spcBef>
-                <a:spcPts val="0"/>
-              </a:spcBef>
-              <a:buFontTx/>
-              <a:buNone/>
-              <a:defRPr sz="2200" b="1">
-                <a:solidFill>
-                  <a:schemeClr val="accent1"/>
-                </a:solidFill>
-                <a:latin typeface="+mj-lt"/>
-              </a:defRPr>
-            </a:lvl1pPr>
-          </a:lstStyle>
-          <a:p>
-            <a:pPr lvl="0"/>
-            <a:r>
-              <a:rPr lang="en-US"/>
-              <a:t>item_1_title</a:t>
-            </a:r>
-          </a:p>
-        </p:txBody>
-      </p:sp>
-      <p:sp>
-        <p:nvSpPr>
-          <p:cNvPr id="12" name="item_1">
-            <a:extLst>
-              <a:ext uri="{FF2B5EF4-FFF2-40B4-BE49-F238E27FC236}">
-                <a16:creationId xmlns:a16="http://schemas.microsoft.com/office/drawing/2014/main" id="{96729121-ECC3-6EA8-E3C4-E8FF5BC2D055}"/>
-              </a:ext>
-            </a:extLst>
-          </p:cNvPr>
-          <p:cNvSpPr>
-            <a:spLocks noGrp="1"/>
-          </p:cNvSpPr>
-          <p:nvPr>
-            <p:ph type="body" sz="quarter" idx="18" hasCustomPrompt="1"/>
-          </p:nvPr>
-        </p:nvSpPr>
-        <p:spPr>
-          <a:xfrm>
-            <a:off x="5997166" y="3272866"/>
-            <a:ext cx="4374660" cy="2734235"/>
+            <a:off x="607871" y="4556404"/>
+            <a:ext cx="4813145" cy="1249849"/>
           </a:xfrm>
           <a:prstGeom prst="rect">
             <a:avLst/>
@@ -10801,6 +10602,205 @@
             <a:pPr lvl="0"/>
             <a:r>
               <a:rPr lang="en-US"/>
+              <a:t>kpi_label_1</a:t>
+            </a:r>
+          </a:p>
+        </p:txBody>
+      </p:sp>
+      <p:sp>
+        <p:nvSpPr>
+          <p:cNvPr id="9" name="quote">
+            <a:extLst>
+              <a:ext uri="{FF2B5EF4-FFF2-40B4-BE49-F238E27FC236}">
+                <a16:creationId xmlns:a16="http://schemas.microsoft.com/office/drawing/2014/main" id="{CE238DB0-61B4-6C2B-2CDC-62D6590A8127}"/>
+              </a:ext>
+            </a:extLst>
+          </p:cNvPr>
+          <p:cNvSpPr>
+            <a:spLocks noGrp="1"/>
+          </p:cNvSpPr>
+          <p:nvPr>
+            <p:ph type="body" sz="quarter" idx="15" hasCustomPrompt="1"/>
+          </p:nvPr>
+        </p:nvSpPr>
+        <p:spPr>
+          <a:xfrm>
+            <a:off x="607871" y="2334449"/>
+            <a:ext cx="4813145" cy="2708007"/>
+          </a:xfrm>
+          <a:prstGeom prst="rect">
+            <a:avLst/>
+          </a:prstGeom>
+        </p:spPr>
+        <p:txBody>
+          <a:bodyPr wrap="square" anchor="t">
+            <a:noAutofit/>
+          </a:bodyPr>
+          <a:lstStyle>
+            <a:lvl1pPr marL="0" indent="0">
+              <a:spcBef>
+                <a:spcPts val="0"/>
+              </a:spcBef>
+              <a:buFontTx/>
+              <a:buNone/>
+              <a:defRPr sz="2000" i="1">
+                <a:latin typeface="+mj-lt"/>
+              </a:defRPr>
+            </a:lvl1pPr>
+          </a:lstStyle>
+          <a:p>
+            <a:pPr lvl="0"/>
+            <a:r>
+              <a:rPr lang="en-US"/>
+              <a:t>quote</a:t>
+            </a:r>
+          </a:p>
+        </p:txBody>
+      </p:sp>
+      <p:sp>
+        <p:nvSpPr>
+          <p:cNvPr id="10" name="attribution">
+            <a:extLst>
+              <a:ext uri="{FF2B5EF4-FFF2-40B4-BE49-F238E27FC236}">
+                <a16:creationId xmlns:a16="http://schemas.microsoft.com/office/drawing/2014/main" id="{A8244621-C7BC-72F2-A184-3B071C3ACB47}"/>
+              </a:ext>
+            </a:extLst>
+          </p:cNvPr>
+          <p:cNvSpPr>
+            <a:spLocks noGrp="1"/>
+          </p:cNvSpPr>
+          <p:nvPr>
+            <p:ph type="body" sz="quarter" idx="16" hasCustomPrompt="1"/>
+          </p:nvPr>
+        </p:nvSpPr>
+        <p:spPr>
+          <a:xfrm>
+            <a:off x="607871" y="5111892"/>
+            <a:ext cx="4813145" cy="694361"/>
+          </a:xfrm>
+          <a:prstGeom prst="rect">
+            <a:avLst/>
+          </a:prstGeom>
+        </p:spPr>
+        <p:txBody>
+          <a:bodyPr wrap="square" anchor="t">
+            <a:noAutofit/>
+          </a:bodyPr>
+          <a:lstStyle>
+            <a:lvl1pPr marL="0" indent="0">
+              <a:spcBef>
+                <a:spcPts val="0"/>
+              </a:spcBef>
+              <a:buFontTx/>
+              <a:buNone/>
+              <a:defRPr sz="2000"/>
+            </a:lvl1pPr>
+          </a:lstStyle>
+          <a:p>
+            <a:pPr lvl="0"/>
+            <a:r>
+              <a:rPr lang="en-US"/>
+              <a:t>attribution</a:t>
+            </a:r>
+          </a:p>
+        </p:txBody>
+      </p:sp>
+      <p:sp>
+        <p:nvSpPr>
+          <p:cNvPr id="11" name="item_1_title">
+            <a:extLst>
+              <a:ext uri="{FF2B5EF4-FFF2-40B4-BE49-F238E27FC236}">
+                <a16:creationId xmlns:a16="http://schemas.microsoft.com/office/drawing/2014/main" id="{AB5ABF98-7D0F-F254-711E-EE2339E48579}"/>
+              </a:ext>
+            </a:extLst>
+          </p:cNvPr>
+          <p:cNvSpPr>
+            <a:spLocks noGrp="1"/>
+          </p:cNvSpPr>
+          <p:nvPr>
+            <p:ph type="body" sz="quarter" idx="17" hasCustomPrompt="1"/>
+          </p:nvPr>
+        </p:nvSpPr>
+        <p:spPr>
+          <a:xfrm>
+            <a:off x="5997166" y="2133601"/>
+            <a:ext cx="4374660" cy="1139265"/>
+          </a:xfrm>
+          <a:prstGeom prst="rect">
+            <a:avLst/>
+          </a:prstGeom>
+        </p:spPr>
+        <p:txBody>
+          <a:bodyPr wrap="square" anchor="t">
+            <a:noAutofit/>
+          </a:bodyPr>
+          <a:lstStyle>
+            <a:lvl1pPr marL="0" indent="0">
+              <a:spcBef>
+                <a:spcPts val="0"/>
+              </a:spcBef>
+              <a:buFontTx/>
+              <a:buNone/>
+              <a:defRPr sz="2000" b="1">
+                <a:solidFill>
+                  <a:schemeClr val="accent1"/>
+                </a:solidFill>
+                <a:latin typeface="+mj-lt"/>
+              </a:defRPr>
+            </a:lvl1pPr>
+          </a:lstStyle>
+          <a:p>
+            <a:pPr lvl="0"/>
+            <a:r>
+              <a:rPr lang="en-US"/>
+              <a:t>item_1_title</a:t>
+            </a:r>
+          </a:p>
+        </p:txBody>
+      </p:sp>
+      <p:sp>
+        <p:nvSpPr>
+          <p:cNvPr id="12" name="item_1">
+            <a:extLst>
+              <a:ext uri="{FF2B5EF4-FFF2-40B4-BE49-F238E27FC236}">
+                <a16:creationId xmlns:a16="http://schemas.microsoft.com/office/drawing/2014/main" id="{3684247E-993E-C3F0-A72E-4118828D18C1}"/>
+              </a:ext>
+            </a:extLst>
+          </p:cNvPr>
+          <p:cNvSpPr>
+            <a:spLocks noGrp="1"/>
+          </p:cNvSpPr>
+          <p:nvPr>
+            <p:ph type="body" sz="quarter" idx="18" hasCustomPrompt="1"/>
+          </p:nvPr>
+        </p:nvSpPr>
+        <p:spPr>
+          <a:xfrm>
+            <a:off x="5997166" y="3272866"/>
+            <a:ext cx="4374660" cy="2734235"/>
+          </a:xfrm>
+          <a:prstGeom prst="rect">
+            <a:avLst/>
+          </a:prstGeom>
+        </p:spPr>
+        <p:txBody>
+          <a:bodyPr wrap="square" anchor="t">
+            <a:noAutofit/>
+          </a:bodyPr>
+          <a:lstStyle>
+            <a:lvl1pPr marL="0" indent="0">
+              <a:spcBef>
+                <a:spcPts val="0"/>
+              </a:spcBef>
+              <a:buFontTx/>
+              <a:buNone/>
+              <a:defRPr sz="2000"/>
+            </a:lvl1pPr>
+          </a:lstStyle>
+          <a:p>
+            <a:pPr lvl="0"/>
+            <a:r>
+              <a:rPr lang="en-US"/>
               <a:t>item_1</a:t>
             </a:r>
           </a:p>
@@ -10811,7 +10811,7 @@
           <p:cNvPr id="13" name="source">
             <a:extLst>
               <a:ext uri="{FF2B5EF4-FFF2-40B4-BE49-F238E27FC236}">
-                <a16:creationId xmlns:a16="http://schemas.microsoft.com/office/drawing/2014/main" id="{1DB8BE2F-36EF-CBC2-AA9C-6D1A33EFFEED}"/>
+                <a16:creationId xmlns:a16="http://schemas.microsoft.com/office/drawing/2014/main" id="{63AB064E-7BEF-4614-F6D4-7B8A1F113F57}"/>
               </a:ext>
             </a:extLst>
           </p:cNvPr>
@@ -10866,7 +10866,7 @@
     </p:spTree>
     <p:extLst>
       <p:ext uri="{BB962C8B-B14F-4D97-AF65-F5344CB8AC3E}">
-        <p14:creationId xmlns:p14="http://schemas.microsoft.com/office/powerpoint/2010/main" val="2572997606"/>
+        <p14:creationId xmlns:p14="http://schemas.microsoft.com/office/powerpoint/2010/main" val="3503813711"/>
       </p:ext>
     </p:extLst>
   </p:cSld>
@@ -10898,7 +10898,7 @@
           <p:cNvPr id="6" name="glow">
             <a:extLst>
               <a:ext uri="{FF2B5EF4-FFF2-40B4-BE49-F238E27FC236}">
-                <a16:creationId xmlns:a16="http://schemas.microsoft.com/office/drawing/2014/main" id="{7D84C9CE-BA43-E193-9B31-5F92FD2631C8}"/>
+                <a16:creationId xmlns:a16="http://schemas.microsoft.com/office/drawing/2014/main" id="{048574E4-1DA3-F0C6-7195-C4A2962FA746}"/>
               </a:ext>
             </a:extLst>
           </p:cNvPr>
@@ -11080,7 +11080,7 @@
             </a:lvl1pPr>
           </a:lstStyle>
           <a:p>
-            <a:fld id="{84563B43-CD3D-4346-947D-64165950A7CF}" type="datetimeFigureOut">
+            <a:fld id="{E74088FC-AB1D-4731-A24C-F46EBDB0C5A7}" type="datetimeFigureOut">
               <a:rPr lang="en-US" smtClean="0"/>
               <a:t>10/3/2026</a:t>
             </a:fld>
@@ -11117,7 +11117,7 @@
             </a:lvl1pPr>
           </a:lstStyle>
           <a:p>
-            <a:fld id="{691F7126-2246-49A0-8047-430012F919EB}" type="slidenum">
+            <a:fld id="{E4AD76C8-B1EB-4E10-9C29-0B8B3CD29BA6}" type="slidenum">
               <a:rPr lang="en-US" smtClean="0"/>
               <a:t>‹#›</a:t>
             </a:fld>
@@ -11130,7 +11130,7 @@
           <p:cNvPr id="7" name="marker_1">
             <a:extLst>
               <a:ext uri="{FF2B5EF4-FFF2-40B4-BE49-F238E27FC236}">
-                <a16:creationId xmlns:a16="http://schemas.microsoft.com/office/drawing/2014/main" id="{2E075DE6-DB4B-1801-C484-358EEF44858C}"/>
+                <a16:creationId xmlns:a16="http://schemas.microsoft.com/office/drawing/2014/main" id="{27CBA1EA-2623-3368-A5CC-94F930168046}"/>
               </a:ext>
             </a:extLst>
           </p:cNvPr>
@@ -11164,7 +11164,7 @@
               </a:spcBef>
               <a:buFontTx/>
               <a:buNone/>
-              <a:defRPr sz="2400" b="1">
+              <a:defRPr sz="2000" b="1">
                 <a:solidFill>
                   <a:schemeClr val="bg1"/>
                 </a:solidFill>
@@ -11186,7 +11186,7 @@
           <p:cNvPr id="8" name="item_1">
             <a:extLst>
               <a:ext uri="{FF2B5EF4-FFF2-40B4-BE49-F238E27FC236}">
-                <a16:creationId xmlns:a16="http://schemas.microsoft.com/office/drawing/2014/main" id="{FC15B0EF-D349-56FA-5FB2-9C9C8921F80E}"/>
+                <a16:creationId xmlns:a16="http://schemas.microsoft.com/office/drawing/2014/main" id="{4A730F7E-0252-7E39-8DD8-86E3857D1968}"/>
               </a:ext>
             </a:extLst>
           </p:cNvPr>
@@ -11234,7 +11234,7 @@
           <p:cNvPr id="9" name="marker_2">
             <a:extLst>
               <a:ext uri="{FF2B5EF4-FFF2-40B4-BE49-F238E27FC236}">
-                <a16:creationId xmlns:a16="http://schemas.microsoft.com/office/drawing/2014/main" id="{74F8013B-3E79-2E5C-6DA3-5F4066DE9940}"/>
+                <a16:creationId xmlns:a16="http://schemas.microsoft.com/office/drawing/2014/main" id="{988AC307-955C-2413-ACCF-1CB75DBC6D95}"/>
               </a:ext>
             </a:extLst>
           </p:cNvPr>
@@ -11268,7 +11268,7 @@
               </a:spcBef>
               <a:buFontTx/>
               <a:buNone/>
-              <a:defRPr sz="2400" b="1">
+              <a:defRPr sz="2000" b="1">
                 <a:solidFill>
                   <a:schemeClr val="bg1"/>
                 </a:solidFill>
@@ -11290,7 +11290,7 @@
           <p:cNvPr id="10" name="item_2">
             <a:extLst>
               <a:ext uri="{FF2B5EF4-FFF2-40B4-BE49-F238E27FC236}">
-                <a16:creationId xmlns:a16="http://schemas.microsoft.com/office/drawing/2014/main" id="{3ED788D3-0CD1-EFD2-1EC8-31A01F0BDC1D}"/>
+                <a16:creationId xmlns:a16="http://schemas.microsoft.com/office/drawing/2014/main" id="{8A9D5810-0336-486F-F63B-8D29B1D08CA3}"/>
               </a:ext>
             </a:extLst>
           </p:cNvPr>
@@ -11338,7 +11338,7 @@
           <p:cNvPr id="11" name="marker_3">
             <a:extLst>
               <a:ext uri="{FF2B5EF4-FFF2-40B4-BE49-F238E27FC236}">
-                <a16:creationId xmlns:a16="http://schemas.microsoft.com/office/drawing/2014/main" id="{7D4B0269-3D9C-8770-D784-3ED576DCCAD0}"/>
+                <a16:creationId xmlns:a16="http://schemas.microsoft.com/office/drawing/2014/main" id="{5FFE3543-206C-722B-E2CA-499613A4A395}"/>
               </a:ext>
             </a:extLst>
           </p:cNvPr>
@@ -11372,7 +11372,7 @@
               </a:spcBef>
               <a:buFontTx/>
               <a:buNone/>
-              <a:defRPr sz="2400" b="1">
+              <a:defRPr sz="2000" b="1">
                 <a:solidFill>
                   <a:schemeClr val="bg1"/>
                 </a:solidFill>
@@ -11394,7 +11394,7 @@
           <p:cNvPr id="12" name="item_3">
             <a:extLst>
               <a:ext uri="{FF2B5EF4-FFF2-40B4-BE49-F238E27FC236}">
-                <a16:creationId xmlns:a16="http://schemas.microsoft.com/office/drawing/2014/main" id="{D4C9FC3F-4621-8113-98F4-B50B0FE600E4}"/>
+                <a16:creationId xmlns:a16="http://schemas.microsoft.com/office/drawing/2014/main" id="{83CC1120-F063-5CC0-907F-08624CA4B754}"/>
               </a:ext>
             </a:extLst>
           </p:cNvPr>
@@ -11442,7 +11442,7 @@
           <p:cNvPr id="13" name="marker_4">
             <a:extLst>
               <a:ext uri="{FF2B5EF4-FFF2-40B4-BE49-F238E27FC236}">
-                <a16:creationId xmlns:a16="http://schemas.microsoft.com/office/drawing/2014/main" id="{559EC58F-2F2E-BCF3-EB54-2F0EEA9EB1BB}"/>
+                <a16:creationId xmlns:a16="http://schemas.microsoft.com/office/drawing/2014/main" id="{3A0C8171-8EDD-6BE9-B54D-D520E5FD4A86}"/>
               </a:ext>
             </a:extLst>
           </p:cNvPr>
@@ -11476,7 +11476,7 @@
               </a:spcBef>
               <a:buFontTx/>
               <a:buNone/>
-              <a:defRPr sz="2400" b="1">
+              <a:defRPr sz="2000" b="1">
                 <a:solidFill>
                   <a:schemeClr val="bg1"/>
                 </a:solidFill>
@@ -11498,7 +11498,7 @@
           <p:cNvPr id="14" name="item_4">
             <a:extLst>
               <a:ext uri="{FF2B5EF4-FFF2-40B4-BE49-F238E27FC236}">
-                <a16:creationId xmlns:a16="http://schemas.microsoft.com/office/drawing/2014/main" id="{E0D6B453-AB44-D93E-9F4C-1816B72ED51C}"/>
+                <a16:creationId xmlns:a16="http://schemas.microsoft.com/office/drawing/2014/main" id="{961A9FB0-701C-5DAB-81F8-B10D0B4C5E54}"/>
               </a:ext>
             </a:extLst>
           </p:cNvPr>
@@ -11546,7 +11546,7 @@
           <p:cNvPr id="15" name="source">
             <a:extLst>
               <a:ext uri="{FF2B5EF4-FFF2-40B4-BE49-F238E27FC236}">
-                <a16:creationId xmlns:a16="http://schemas.microsoft.com/office/drawing/2014/main" id="{B0328559-B639-99FF-1BE0-95CFA3E721AE}"/>
+                <a16:creationId xmlns:a16="http://schemas.microsoft.com/office/drawing/2014/main" id="{52BB1E58-2240-E012-192F-C8D21B5BD590}"/>
               </a:ext>
             </a:extLst>
           </p:cNvPr>
@@ -11601,7 +11601,7 @@
     </p:spTree>
     <p:extLst>
       <p:ext uri="{BB962C8B-B14F-4D97-AF65-F5344CB8AC3E}">
-        <p14:creationId xmlns:p14="http://schemas.microsoft.com/office/powerpoint/2010/main" val="4089404187"/>
+        <p14:creationId xmlns:p14="http://schemas.microsoft.com/office/powerpoint/2010/main" val="1223383320"/>
       </p:ext>
     </p:extLst>
   </p:cSld>
@@ -11633,7 +11633,7 @@
           <p:cNvPr id="6" name="glow">
             <a:extLst>
               <a:ext uri="{FF2B5EF4-FFF2-40B4-BE49-F238E27FC236}">
-                <a16:creationId xmlns:a16="http://schemas.microsoft.com/office/drawing/2014/main" id="{8FB6128A-0AB1-27E4-12D1-194FEF1D43F9}"/>
+                <a16:creationId xmlns:a16="http://schemas.microsoft.com/office/drawing/2014/main" id="{FE03E687-D25E-70CC-9429-DBA2C5529E96}"/>
               </a:ext>
             </a:extLst>
           </p:cNvPr>
@@ -11815,7 +11815,7 @@
             </a:lvl1pPr>
           </a:lstStyle>
           <a:p>
-            <a:fld id="{84563B43-CD3D-4346-947D-64165950A7CF}" type="datetimeFigureOut">
+            <a:fld id="{E74088FC-AB1D-4731-A24C-F46EBDB0C5A7}" type="datetimeFigureOut">
               <a:rPr lang="en-US" smtClean="0"/>
               <a:t>10/3/2026</a:t>
             </a:fld>
@@ -11852,7 +11852,7 @@
             </a:lvl1pPr>
           </a:lstStyle>
           <a:p>
-            <a:fld id="{691F7126-2246-49A0-8047-430012F919EB}" type="slidenum">
+            <a:fld id="{E4AD76C8-B1EB-4E10-9C29-0B8B3CD29BA6}" type="slidenum">
               <a:rPr lang="en-US" smtClean="0"/>
               <a:t>‹#›</a:t>
             </a:fld>
@@ -11865,7 +11865,7 @@
           <p:cNvPr id="7" name="decisions_title">
             <a:extLst>
               <a:ext uri="{FF2B5EF4-FFF2-40B4-BE49-F238E27FC236}">
-                <a16:creationId xmlns:a16="http://schemas.microsoft.com/office/drawing/2014/main" id="{591AF2AC-5995-D674-353F-E19C1FC1F125}"/>
+                <a16:creationId xmlns:a16="http://schemas.microsoft.com/office/drawing/2014/main" id="{B3482608-AE78-4F7D-4C7A-902B1760BACA}"/>
               </a:ext>
             </a:extLst>
           </p:cNvPr>
@@ -11878,8 +11878,8 @@
         </p:nvSpPr>
         <p:spPr>
           <a:xfrm>
-            <a:off x="633364" y="4919651"/>
-            <a:ext cx="2177132" cy="857908"/>
+            <a:off x="607870" y="4890958"/>
+            <a:ext cx="2406573" cy="915294"/>
           </a:xfrm>
         </p:spPr>
         <p:txBody>
@@ -11915,7 +11915,7 @@
           <p:cNvPr id="8" name="decisions">
             <a:extLst>
               <a:ext uri="{FF2B5EF4-FFF2-40B4-BE49-F238E27FC236}">
-                <a16:creationId xmlns:a16="http://schemas.microsoft.com/office/drawing/2014/main" id="{F56939D1-E680-B7FB-DD69-BE2B9BFFE90F}"/>
+                <a16:creationId xmlns:a16="http://schemas.microsoft.com/office/drawing/2014/main" id="{1CDA50A1-E469-7D4E-BE1A-9912C7D9BB7D}"/>
               </a:ext>
             </a:extLst>
           </p:cNvPr>
@@ -11928,8 +11928,8 @@
         </p:nvSpPr>
         <p:spPr>
           <a:xfrm>
-            <a:off x="3317814" y="4919651"/>
-            <a:ext cx="6850064" cy="857908"/>
+            <a:off x="3113867" y="4890958"/>
+            <a:ext cx="7079504" cy="915294"/>
           </a:xfrm>
           <a:prstGeom prst="rect">
             <a:avLst/>
@@ -11943,7 +11943,7 @@
             <a:lvl1pPr>
               <a:buFont typeface="+mj-lt"/>
               <a:buAutoNum type="arabicPeriod"/>
-              <a:defRPr sz="1800"/>
+              <a:defRPr sz="2000"/>
             </a:lvl1pPr>
           </a:lstStyle>
           <a:p>
@@ -11960,7 +11960,7 @@
           <p:cNvPr id="9" name="item_1_title">
             <a:extLst>
               <a:ext uri="{FF2B5EF4-FFF2-40B4-BE49-F238E27FC236}">
-                <a16:creationId xmlns:a16="http://schemas.microsoft.com/office/drawing/2014/main" id="{AA81259B-F16F-A974-F6EF-F6C70F9FE0B0}"/>
+                <a16:creationId xmlns:a16="http://schemas.microsoft.com/office/drawing/2014/main" id="{D0608A84-2FBC-C472-3D8F-93E032AFD65B}"/>
               </a:ext>
             </a:extLst>
           </p:cNvPr>
@@ -11973,8 +11973,8 @@
         </p:nvSpPr>
         <p:spPr>
           <a:xfrm>
-            <a:off x="633364" y="2363142"/>
-            <a:ext cx="2770278" cy="548535"/>
+            <a:off x="607871" y="2334449"/>
+            <a:ext cx="2821265" cy="565413"/>
           </a:xfrm>
           <a:prstGeom prst="rect">
             <a:avLst/>
@@ -11991,7 +11991,7 @@
               </a:spcBef>
               <a:buFontTx/>
               <a:buNone/>
-              <a:defRPr sz="2200" b="1">
+              <a:defRPr sz="2000" b="1">
                 <a:solidFill>
                   <a:schemeClr val="accent1"/>
                 </a:solidFill>
@@ -12013,7 +12013,7 @@
           <p:cNvPr id="10" name="item_1">
             <a:extLst>
               <a:ext uri="{FF2B5EF4-FFF2-40B4-BE49-F238E27FC236}">
-                <a16:creationId xmlns:a16="http://schemas.microsoft.com/office/drawing/2014/main" id="{A5CDD119-C2D8-83E2-AA9D-A426A04E35A4}"/>
+                <a16:creationId xmlns:a16="http://schemas.microsoft.com/office/drawing/2014/main" id="{AE4AFDC0-823C-E855-3A81-570D194A0A20}"/>
               </a:ext>
             </a:extLst>
           </p:cNvPr>
@@ -12026,8 +12026,8 @@
         </p:nvSpPr>
         <p:spPr>
           <a:xfrm>
-            <a:off x="633364" y="2911676"/>
-            <a:ext cx="2770278" cy="1316484"/>
+            <a:off x="607871" y="2899862"/>
+            <a:ext cx="2821265" cy="1356991"/>
           </a:xfrm>
           <a:prstGeom prst="rect">
             <a:avLst/>
@@ -12061,7 +12061,7 @@
           <p:cNvPr id="11" name="item_2_title">
             <a:extLst>
               <a:ext uri="{FF2B5EF4-FFF2-40B4-BE49-F238E27FC236}">
-                <a16:creationId xmlns:a16="http://schemas.microsoft.com/office/drawing/2014/main" id="{5F9A7690-A326-B0F2-071B-97375F8065B9}"/>
+                <a16:creationId xmlns:a16="http://schemas.microsoft.com/office/drawing/2014/main" id="{C14DCB8E-B6EF-E94E-3C80-D33052B4CCB8}"/>
               </a:ext>
             </a:extLst>
           </p:cNvPr>
@@ -12074,8 +12074,8 @@
         </p:nvSpPr>
         <p:spPr>
           <a:xfrm>
-            <a:off x="4015482" y="2363142"/>
-            <a:ext cx="2770278" cy="548535"/>
+            <a:off x="3989990" y="2334449"/>
+            <a:ext cx="2821265" cy="565413"/>
           </a:xfrm>
           <a:prstGeom prst="rect">
             <a:avLst/>
@@ -12092,7 +12092,7 @@
               </a:spcBef>
               <a:buFontTx/>
               <a:buNone/>
-              <a:defRPr sz="2200" b="1">
+              <a:defRPr sz="2000" b="1">
                 <a:solidFill>
                   <a:schemeClr val="accent1"/>
                 </a:solidFill>
@@ -12114,7 +12114,7 @@
           <p:cNvPr id="12" name="item_2">
             <a:extLst>
               <a:ext uri="{FF2B5EF4-FFF2-40B4-BE49-F238E27FC236}">
-                <a16:creationId xmlns:a16="http://schemas.microsoft.com/office/drawing/2014/main" id="{6DD0E7EA-F364-E63C-A15E-FAFA0C4A2D34}"/>
+                <a16:creationId xmlns:a16="http://schemas.microsoft.com/office/drawing/2014/main" id="{D7075C70-65DA-67CC-7D9F-3A6AAA28FC9A}"/>
               </a:ext>
             </a:extLst>
           </p:cNvPr>
@@ -12127,8 +12127,8 @@
         </p:nvSpPr>
         <p:spPr>
           <a:xfrm>
-            <a:off x="4015482" y="2911676"/>
-            <a:ext cx="2770278" cy="1316484"/>
+            <a:off x="3989990" y="2899862"/>
+            <a:ext cx="2821265" cy="1356991"/>
           </a:xfrm>
           <a:prstGeom prst="rect">
             <a:avLst/>
@@ -12162,7 +12162,7 @@
           <p:cNvPr id="13" name="item_3_title">
             <a:extLst>
               <a:ext uri="{FF2B5EF4-FFF2-40B4-BE49-F238E27FC236}">
-                <a16:creationId xmlns:a16="http://schemas.microsoft.com/office/drawing/2014/main" id="{9927E948-CE06-5EF0-7817-150272A417AC}"/>
+                <a16:creationId xmlns:a16="http://schemas.microsoft.com/office/drawing/2014/main" id="{8AE72B0E-490C-D3FD-BBAA-1FC9BD28A64D}"/>
               </a:ext>
             </a:extLst>
           </p:cNvPr>
@@ -12175,8 +12175,8 @@
         </p:nvSpPr>
         <p:spPr>
           <a:xfrm>
-            <a:off x="7397600" y="2363142"/>
-            <a:ext cx="2770278" cy="548535"/>
+            <a:off x="7372108" y="2334449"/>
+            <a:ext cx="2821265" cy="565413"/>
           </a:xfrm>
           <a:prstGeom prst="rect">
             <a:avLst/>
@@ -12193,7 +12193,7 @@
               </a:spcBef>
               <a:buFontTx/>
               <a:buNone/>
-              <a:defRPr sz="2200" b="1">
+              <a:defRPr sz="2000" b="1">
                 <a:solidFill>
                   <a:schemeClr val="accent1"/>
                 </a:solidFill>
@@ -12215,7 +12215,7 @@
           <p:cNvPr id="14" name="item_3">
             <a:extLst>
               <a:ext uri="{FF2B5EF4-FFF2-40B4-BE49-F238E27FC236}">
-                <a16:creationId xmlns:a16="http://schemas.microsoft.com/office/drawing/2014/main" id="{8B3D5701-C9E8-7389-CE58-9EC0F643503F}"/>
+                <a16:creationId xmlns:a16="http://schemas.microsoft.com/office/drawing/2014/main" id="{37E12395-3EE2-CBD2-7A0B-6C91D3F5B8B6}"/>
               </a:ext>
             </a:extLst>
           </p:cNvPr>
@@ -12228,8 +12228,8 @@
         </p:nvSpPr>
         <p:spPr>
           <a:xfrm>
-            <a:off x="7397600" y="2911676"/>
-            <a:ext cx="2770278" cy="1316484"/>
+            <a:off x="7372108" y="2899862"/>
+            <a:ext cx="2821265" cy="1356991"/>
           </a:xfrm>
           <a:prstGeom prst="rect">
             <a:avLst/>
@@ -12263,7 +12263,7 @@
           <p:cNvPr id="15" name="source">
             <a:extLst>
               <a:ext uri="{FF2B5EF4-FFF2-40B4-BE49-F238E27FC236}">
-                <a16:creationId xmlns:a16="http://schemas.microsoft.com/office/drawing/2014/main" id="{442EE688-5FA8-0E30-93FC-98FB659A4958}"/>
+                <a16:creationId xmlns:a16="http://schemas.microsoft.com/office/drawing/2014/main" id="{F753DC90-77D4-E9A2-EDF8-383F8294D1AF}"/>
               </a:ext>
             </a:extLst>
           </p:cNvPr>
@@ -12318,7 +12318,7 @@
     </p:spTree>
     <p:extLst>
       <p:ext uri="{BB962C8B-B14F-4D97-AF65-F5344CB8AC3E}">
-        <p14:creationId xmlns:p14="http://schemas.microsoft.com/office/powerpoint/2010/main" val="4194700615"/>
+        <p14:creationId xmlns:p14="http://schemas.microsoft.com/office/powerpoint/2010/main" val="1681404707"/>
       </p:ext>
     </p:extLst>
   </p:cSld>
@@ -12350,7 +12350,7 @@
           <p:cNvPr id="6" name="glow">
             <a:extLst>
               <a:ext uri="{FF2B5EF4-FFF2-40B4-BE49-F238E27FC236}">
-                <a16:creationId xmlns:a16="http://schemas.microsoft.com/office/drawing/2014/main" id="{879D2F8D-19CE-4BA7-78EA-015B8607D733}"/>
+                <a16:creationId xmlns:a16="http://schemas.microsoft.com/office/drawing/2014/main" id="{F09CD7E2-A7CF-09C9-0668-569A7E116BAD}"/>
               </a:ext>
             </a:extLst>
           </p:cNvPr>
@@ -12532,7 +12532,7 @@
             </a:lvl1pPr>
           </a:lstStyle>
           <a:p>
-            <a:fld id="{84563B43-CD3D-4346-947D-64165950A7CF}" type="datetimeFigureOut">
+            <a:fld id="{E74088FC-AB1D-4731-A24C-F46EBDB0C5A7}" type="datetimeFigureOut">
               <a:rPr lang="en-US" smtClean="0"/>
               <a:t>10/3/2026</a:t>
             </a:fld>
@@ -12569,7 +12569,7 @@
             </a:lvl1pPr>
           </a:lstStyle>
           <a:p>
-            <a:fld id="{691F7126-2246-49A0-8047-430012F919EB}" type="slidenum">
+            <a:fld id="{E4AD76C8-B1EB-4E10-9C29-0B8B3CD29BA6}" type="slidenum">
               <a:rPr lang="en-US" smtClean="0"/>
               <a:t>‹#›</a:t>
             </a:fld>
@@ -12582,7 +12582,7 @@
           <p:cNvPr id="7" name="body">
             <a:extLst>
               <a:ext uri="{FF2B5EF4-FFF2-40B4-BE49-F238E27FC236}">
-                <a16:creationId xmlns:a16="http://schemas.microsoft.com/office/drawing/2014/main" id="{3C23469E-C401-0D90-B409-814F83F8CE80}"/>
+                <a16:creationId xmlns:a16="http://schemas.microsoft.com/office/drawing/2014/main" id="{C090B1E8-88DA-0434-5C0A-E73B3A9735EB}"/>
               </a:ext>
             </a:extLst>
           </p:cNvPr>
@@ -12624,7 +12624,7 @@
           <p:cNvPr id="8" name="kpi_value_1">
             <a:extLst>
               <a:ext uri="{FF2B5EF4-FFF2-40B4-BE49-F238E27FC236}">
-                <a16:creationId xmlns:a16="http://schemas.microsoft.com/office/drawing/2014/main" id="{2DEF310F-FA46-64B0-5574-B3FCF30CB385}"/>
+                <a16:creationId xmlns:a16="http://schemas.microsoft.com/office/drawing/2014/main" id="{9A4B9942-9DCE-E6F1-030F-25B6C0BFE719}"/>
               </a:ext>
             </a:extLst>
           </p:cNvPr>
@@ -12637,8 +12637,8 @@
         </p:nvSpPr>
         <p:spPr>
           <a:xfrm>
-            <a:off x="633365" y="2363141"/>
-            <a:ext cx="4461337" cy="1597358"/>
+            <a:off x="607870" y="2334448"/>
+            <a:ext cx="4512324" cy="1634248"/>
           </a:xfrm>
           <a:prstGeom prst="rect">
             <a:avLst/>
@@ -12655,7 +12655,7 @@
               </a:spcBef>
               <a:buFontTx/>
               <a:buNone/>
-              <a:defRPr sz="8400" b="1">
+              <a:defRPr sz="6000" b="1">
                 <a:solidFill>
                   <a:schemeClr val="accent1"/>
                 </a:solidFill>
@@ -12677,7 +12677,7 @@
           <p:cNvPr id="9" name="kpi_label_1">
             <a:extLst>
               <a:ext uri="{FF2B5EF4-FFF2-40B4-BE49-F238E27FC236}">
-                <a16:creationId xmlns:a16="http://schemas.microsoft.com/office/drawing/2014/main" id="{8C6E0615-6BAB-E639-25CE-A5CCB0B858DF}"/>
+                <a16:creationId xmlns:a16="http://schemas.microsoft.com/office/drawing/2014/main" id="{EB822B31-C54A-B23D-4310-776D80618DF2}"/>
               </a:ext>
             </a:extLst>
           </p:cNvPr>
@@ -12690,8 +12690,8 @@
         </p:nvSpPr>
         <p:spPr>
           <a:xfrm>
-            <a:off x="633365" y="3960499"/>
-            <a:ext cx="4461337" cy="887421"/>
+            <a:off x="607870" y="3968696"/>
+            <a:ext cx="4512324" cy="907916"/>
           </a:xfrm>
           <a:prstGeom prst="rect">
             <a:avLst/>
@@ -12708,7 +12708,7 @@
               </a:spcBef>
               <a:buFontTx/>
               <a:buNone/>
-              <a:defRPr sz="1800"/>
+              <a:defRPr sz="2000"/>
             </a:lvl1pPr>
           </a:lstStyle>
           <a:p>
@@ -12725,7 +12725,7 @@
           <p:cNvPr id="10" name="kpi_value_2">
             <a:extLst>
               <a:ext uri="{FF2B5EF4-FFF2-40B4-BE49-F238E27FC236}">
-                <a16:creationId xmlns:a16="http://schemas.microsoft.com/office/drawing/2014/main" id="{92C26FD1-4EA5-A313-DF17-9EF5F98171D8}"/>
+                <a16:creationId xmlns:a16="http://schemas.microsoft.com/office/drawing/2014/main" id="{D7453D19-5472-437C-770B-170014189612}"/>
               </a:ext>
             </a:extLst>
           </p:cNvPr>
@@ -12738,8 +12738,8 @@
         </p:nvSpPr>
         <p:spPr>
           <a:xfrm>
-            <a:off x="5706543" y="2363141"/>
-            <a:ext cx="4461337" cy="1597358"/>
+            <a:off x="5681048" y="2334448"/>
+            <a:ext cx="4512324" cy="1634248"/>
           </a:xfrm>
           <a:prstGeom prst="rect">
             <a:avLst/>
@@ -12756,7 +12756,7 @@
               </a:spcBef>
               <a:buFontTx/>
               <a:buNone/>
-              <a:defRPr sz="8400" b="1">
+              <a:defRPr sz="6000" b="1">
                 <a:solidFill>
                   <a:schemeClr val="accent1"/>
                 </a:solidFill>
@@ -12778,7 +12778,7 @@
           <p:cNvPr id="11" name="kpi_label_2">
             <a:extLst>
               <a:ext uri="{FF2B5EF4-FFF2-40B4-BE49-F238E27FC236}">
-                <a16:creationId xmlns:a16="http://schemas.microsoft.com/office/drawing/2014/main" id="{7FC40FCF-61C0-32CC-40C6-26078922E268}"/>
+                <a16:creationId xmlns:a16="http://schemas.microsoft.com/office/drawing/2014/main" id="{60849D5C-FA61-4926-5150-8E6F7DF23922}"/>
               </a:ext>
             </a:extLst>
           </p:cNvPr>
@@ -12791,8 +12791,8 @@
         </p:nvSpPr>
         <p:spPr>
           <a:xfrm>
-            <a:off x="5706543" y="3960499"/>
-            <a:ext cx="4461337" cy="887421"/>
+            <a:off x="5681048" y="3968696"/>
+            <a:ext cx="4512324" cy="907916"/>
           </a:xfrm>
           <a:prstGeom prst="rect">
             <a:avLst/>
@@ -12809,7 +12809,7 @@
               </a:spcBef>
               <a:buFontTx/>
               <a:buNone/>
-              <a:defRPr sz="1800"/>
+              <a:defRPr sz="2000"/>
             </a:lvl1pPr>
           </a:lstStyle>
           <a:p>
@@ -12826,7 +12826,7 @@
           <p:cNvPr id="12" name="source">
             <a:extLst>
               <a:ext uri="{FF2B5EF4-FFF2-40B4-BE49-F238E27FC236}">
-                <a16:creationId xmlns:a16="http://schemas.microsoft.com/office/drawing/2014/main" id="{B239F17D-C1BB-F1E7-A398-C8F07A5AFAE3}"/>
+                <a16:creationId xmlns:a16="http://schemas.microsoft.com/office/drawing/2014/main" id="{8D800A50-D0A0-A367-9852-1D7DD0068FA7}"/>
               </a:ext>
             </a:extLst>
           </p:cNvPr>
@@ -12881,7 +12881,7 @@
     </p:spTree>
     <p:extLst>
       <p:ext uri="{BB962C8B-B14F-4D97-AF65-F5344CB8AC3E}">
-        <p14:creationId xmlns:p14="http://schemas.microsoft.com/office/powerpoint/2010/main" val="150906458"/>
+        <p14:creationId xmlns:p14="http://schemas.microsoft.com/office/powerpoint/2010/main" val="2950142666"/>
       </p:ext>
     </p:extLst>
   </p:cSld>
@@ -12913,7 +12913,7 @@
           <p:cNvPr id="6" name="glow">
             <a:extLst>
               <a:ext uri="{FF2B5EF4-FFF2-40B4-BE49-F238E27FC236}">
-                <a16:creationId xmlns:a16="http://schemas.microsoft.com/office/drawing/2014/main" id="{32A451BE-9476-5548-16D5-92D59052B368}"/>
+                <a16:creationId xmlns:a16="http://schemas.microsoft.com/office/drawing/2014/main" id="{2C6E5876-4ABD-67DB-BA70-5BF169FE6147}"/>
               </a:ext>
             </a:extLst>
           </p:cNvPr>
@@ -13095,7 +13095,7 @@
             </a:lvl1pPr>
           </a:lstStyle>
           <a:p>
-            <a:fld id="{84563B43-CD3D-4346-947D-64165950A7CF}" type="datetimeFigureOut">
+            <a:fld id="{E74088FC-AB1D-4731-A24C-F46EBDB0C5A7}" type="datetimeFigureOut">
               <a:rPr lang="en-US" smtClean="0"/>
               <a:t>10/3/2026</a:t>
             </a:fld>
@@ -13132,7 +13132,7 @@
             </a:lvl1pPr>
           </a:lstStyle>
           <a:p>
-            <a:fld id="{691F7126-2246-49A0-8047-430012F919EB}" type="slidenum">
+            <a:fld id="{E4AD76C8-B1EB-4E10-9C29-0B8B3CD29BA6}" type="slidenum">
               <a:rPr lang="en-US" smtClean="0"/>
               <a:t>‹#›</a:t>
             </a:fld>
@@ -13145,7 +13145,7 @@
           <p:cNvPr id="7" name="body">
             <a:extLst>
               <a:ext uri="{FF2B5EF4-FFF2-40B4-BE49-F238E27FC236}">
-                <a16:creationId xmlns:a16="http://schemas.microsoft.com/office/drawing/2014/main" id="{8907FD74-17BB-7F9A-1AF4-176E124A5288}"/>
+                <a16:creationId xmlns:a16="http://schemas.microsoft.com/office/drawing/2014/main" id="{2AB3420B-4EE0-D02D-4BCF-8005018F69AA}"/>
               </a:ext>
             </a:extLst>
           </p:cNvPr>
@@ -13187,7 +13187,7 @@
           <p:cNvPr id="8" name="kpi_value_1">
             <a:extLst>
               <a:ext uri="{FF2B5EF4-FFF2-40B4-BE49-F238E27FC236}">
-                <a16:creationId xmlns:a16="http://schemas.microsoft.com/office/drawing/2014/main" id="{34F7E284-6CCD-CD73-E9CA-5B5B27871B42}"/>
+                <a16:creationId xmlns:a16="http://schemas.microsoft.com/office/drawing/2014/main" id="{2F14A230-2ABA-B355-9217-F93537D26B99}"/>
               </a:ext>
             </a:extLst>
           </p:cNvPr>
@@ -13200,8 +13200,8 @@
         </p:nvSpPr>
         <p:spPr>
           <a:xfrm>
-            <a:off x="633364" y="2363141"/>
-            <a:ext cx="1924748" cy="1597358"/>
+            <a:off x="607871" y="2334448"/>
+            <a:ext cx="1975735" cy="1634248"/>
           </a:xfrm>
           <a:prstGeom prst="rect">
             <a:avLst/>
@@ -13240,7 +13240,7 @@
           <p:cNvPr id="9" name="kpi_label_1">
             <a:extLst>
               <a:ext uri="{FF2B5EF4-FFF2-40B4-BE49-F238E27FC236}">
-                <a16:creationId xmlns:a16="http://schemas.microsoft.com/office/drawing/2014/main" id="{F2D6C050-7F50-2B07-1F4F-A3170E9DDD51}"/>
+                <a16:creationId xmlns:a16="http://schemas.microsoft.com/office/drawing/2014/main" id="{BE546E87-263B-DE2D-33D5-A300E2B8F906}"/>
               </a:ext>
             </a:extLst>
           </p:cNvPr>
@@ -13253,8 +13253,8 @@
         </p:nvSpPr>
         <p:spPr>
           <a:xfrm>
-            <a:off x="633364" y="3960499"/>
-            <a:ext cx="1924748" cy="887421"/>
+            <a:off x="607871" y="3968696"/>
+            <a:ext cx="1975735" cy="907916"/>
           </a:xfrm>
           <a:prstGeom prst="rect">
             <a:avLst/>
@@ -13271,7 +13271,7 @@
               </a:spcBef>
               <a:buFontTx/>
               <a:buNone/>
-              <a:defRPr sz="1800"/>
+              <a:defRPr sz="2000"/>
             </a:lvl1pPr>
           </a:lstStyle>
           <a:p>
@@ -13288,7 +13288,7 @@
           <p:cNvPr id="10" name="kpi_value_2">
             <a:extLst>
               <a:ext uri="{FF2B5EF4-FFF2-40B4-BE49-F238E27FC236}">
-                <a16:creationId xmlns:a16="http://schemas.microsoft.com/office/drawing/2014/main" id="{FEFBB2EA-E5CA-3D5C-9F84-ABD211F3CA69}"/>
+                <a16:creationId xmlns:a16="http://schemas.microsoft.com/office/drawing/2014/main" id="{EDC5A694-3766-5477-AA3D-E1A8ED985AE0}"/>
               </a:ext>
             </a:extLst>
           </p:cNvPr>
@@ -13301,8 +13301,8 @@
         </p:nvSpPr>
         <p:spPr>
           <a:xfrm>
-            <a:off x="3169953" y="2363141"/>
-            <a:ext cx="1924748" cy="1597358"/>
+            <a:off x="3144460" y="2334448"/>
+            <a:ext cx="1975735" cy="1634248"/>
           </a:xfrm>
           <a:prstGeom prst="rect">
             <a:avLst/>
@@ -13341,7 +13341,7 @@
           <p:cNvPr id="11" name="kpi_label_2">
             <a:extLst>
               <a:ext uri="{FF2B5EF4-FFF2-40B4-BE49-F238E27FC236}">
-                <a16:creationId xmlns:a16="http://schemas.microsoft.com/office/drawing/2014/main" id="{5BF355F7-D6AC-6299-1ED7-3228AA035FB6}"/>
+                <a16:creationId xmlns:a16="http://schemas.microsoft.com/office/drawing/2014/main" id="{E70BE909-934A-051E-4F02-51AF99B75DF7}"/>
               </a:ext>
             </a:extLst>
           </p:cNvPr>
@@ -13354,8 +13354,8 @@
         </p:nvSpPr>
         <p:spPr>
           <a:xfrm>
-            <a:off x="3169953" y="3960499"/>
-            <a:ext cx="1924748" cy="887421"/>
+            <a:off x="3144460" y="3968696"/>
+            <a:ext cx="1975735" cy="907916"/>
           </a:xfrm>
           <a:prstGeom prst="rect">
             <a:avLst/>
@@ -13372,7 +13372,7 @@
               </a:spcBef>
               <a:buFontTx/>
               <a:buNone/>
-              <a:defRPr sz="1800"/>
+              <a:defRPr sz="2000"/>
             </a:lvl1pPr>
           </a:lstStyle>
           <a:p>
@@ -13389,7 +13389,7 @@
           <p:cNvPr id="12" name="kpi_value_3">
             <a:extLst>
               <a:ext uri="{FF2B5EF4-FFF2-40B4-BE49-F238E27FC236}">
-                <a16:creationId xmlns:a16="http://schemas.microsoft.com/office/drawing/2014/main" id="{C1A73E2E-5176-6DB4-3B6B-7F7F1779F865}"/>
+                <a16:creationId xmlns:a16="http://schemas.microsoft.com/office/drawing/2014/main" id="{B93BCCB2-DAB1-5965-F92B-AA6072A973F4}"/>
               </a:ext>
             </a:extLst>
           </p:cNvPr>
@@ -13402,8 +13402,8 @@
         </p:nvSpPr>
         <p:spPr>
           <a:xfrm>
-            <a:off x="5706542" y="2363141"/>
-            <a:ext cx="1924748" cy="1597358"/>
+            <a:off x="5681049" y="2334448"/>
+            <a:ext cx="1975735" cy="1634248"/>
           </a:xfrm>
           <a:prstGeom prst="rect">
             <a:avLst/>
@@ -13442,7 +13442,7 @@
           <p:cNvPr id="13" name="kpi_label_3">
             <a:extLst>
               <a:ext uri="{FF2B5EF4-FFF2-40B4-BE49-F238E27FC236}">
-                <a16:creationId xmlns:a16="http://schemas.microsoft.com/office/drawing/2014/main" id="{749D5CF6-A591-BE21-776B-FA62AC9FE8FB}"/>
+                <a16:creationId xmlns:a16="http://schemas.microsoft.com/office/drawing/2014/main" id="{C1FFA03D-C783-728D-5D84-BE7CCDF5B52A}"/>
               </a:ext>
             </a:extLst>
           </p:cNvPr>
@@ -13455,8 +13455,8 @@
         </p:nvSpPr>
         <p:spPr>
           <a:xfrm>
-            <a:off x="5706542" y="3960499"/>
-            <a:ext cx="1924748" cy="887421"/>
+            <a:off x="5681049" y="3968696"/>
+            <a:ext cx="1975735" cy="907916"/>
           </a:xfrm>
           <a:prstGeom prst="rect">
             <a:avLst/>
@@ -13473,7 +13473,7 @@
               </a:spcBef>
               <a:buFontTx/>
               <a:buNone/>
-              <a:defRPr sz="1800"/>
+              <a:defRPr sz="2000"/>
             </a:lvl1pPr>
           </a:lstStyle>
           <a:p>
@@ -13490,7 +13490,7 @@
           <p:cNvPr id="14" name="kpi_value_4">
             <a:extLst>
               <a:ext uri="{FF2B5EF4-FFF2-40B4-BE49-F238E27FC236}">
-                <a16:creationId xmlns:a16="http://schemas.microsoft.com/office/drawing/2014/main" id="{57895B02-9EE5-9A4B-CEB4-4386CE41DBA7}"/>
+                <a16:creationId xmlns:a16="http://schemas.microsoft.com/office/drawing/2014/main" id="{E13EFA3E-4F50-1304-3AC7-4FF14DD25D80}"/>
               </a:ext>
             </a:extLst>
           </p:cNvPr>
@@ -13503,8 +13503,8 @@
         </p:nvSpPr>
         <p:spPr>
           <a:xfrm>
-            <a:off x="8243130" y="2363141"/>
-            <a:ext cx="1924748" cy="1597358"/>
+            <a:off x="8217638" y="2334448"/>
+            <a:ext cx="1975735" cy="1634248"/>
           </a:xfrm>
           <a:prstGeom prst="rect">
             <a:avLst/>
@@ -13543,7 +13543,7 @@
           <p:cNvPr id="15" name="kpi_label_4">
             <a:extLst>
               <a:ext uri="{FF2B5EF4-FFF2-40B4-BE49-F238E27FC236}">
-                <a16:creationId xmlns:a16="http://schemas.microsoft.com/office/drawing/2014/main" id="{E1A880E1-7209-2788-AD3E-1FAB761C5996}"/>
+                <a16:creationId xmlns:a16="http://schemas.microsoft.com/office/drawing/2014/main" id="{682A7ADE-5D05-08A5-A79C-A4EE0273F289}"/>
               </a:ext>
             </a:extLst>
           </p:cNvPr>
@@ -13556,8 +13556,8 @@
         </p:nvSpPr>
         <p:spPr>
           <a:xfrm>
-            <a:off x="8243130" y="3960499"/>
-            <a:ext cx="1924748" cy="887421"/>
+            <a:off x="8217638" y="3968696"/>
+            <a:ext cx="1975735" cy="907916"/>
           </a:xfrm>
           <a:prstGeom prst="rect">
             <a:avLst/>
@@ -13574,7 +13574,7 @@
               </a:spcBef>
               <a:buFontTx/>
               <a:buNone/>
-              <a:defRPr sz="1800"/>
+              <a:defRPr sz="2000"/>
             </a:lvl1pPr>
           </a:lstStyle>
           <a:p>
@@ -13591,7 +13591,7 @@
           <p:cNvPr id="16" name="source">
             <a:extLst>
               <a:ext uri="{FF2B5EF4-FFF2-40B4-BE49-F238E27FC236}">
-                <a16:creationId xmlns:a16="http://schemas.microsoft.com/office/drawing/2014/main" id="{7817719B-CD6F-29FD-FE5A-2F5C744D23E2}"/>
+                <a16:creationId xmlns:a16="http://schemas.microsoft.com/office/drawing/2014/main" id="{7D4FB8B1-E31A-BC1C-1638-F49998B6B70F}"/>
               </a:ext>
             </a:extLst>
           </p:cNvPr>
@@ -13646,7 +13646,7 @@
     </p:spTree>
     <p:extLst>
       <p:ext uri="{BB962C8B-B14F-4D97-AF65-F5344CB8AC3E}">
-        <p14:creationId xmlns:p14="http://schemas.microsoft.com/office/powerpoint/2010/main" val="2191318158"/>
+        <p14:creationId xmlns:p14="http://schemas.microsoft.com/office/powerpoint/2010/main" val="2813909209"/>
       </p:ext>
     </p:extLst>
   </p:cSld>
@@ -13678,7 +13678,7 @@
           <p:cNvPr id="6" name="glow">
             <a:extLst>
               <a:ext uri="{FF2B5EF4-FFF2-40B4-BE49-F238E27FC236}">
-                <a16:creationId xmlns:a16="http://schemas.microsoft.com/office/drawing/2014/main" id="{DE8763A3-7F05-50D6-63A6-797F75FD8DDE}"/>
+                <a16:creationId xmlns:a16="http://schemas.microsoft.com/office/drawing/2014/main" id="{5EA648AE-8B3B-8850-C9F4-C14934638D9E}"/>
               </a:ext>
             </a:extLst>
           </p:cNvPr>
@@ -13860,7 +13860,7 @@
             </a:lvl1pPr>
           </a:lstStyle>
           <a:p>
-            <a:fld id="{84563B43-CD3D-4346-947D-64165950A7CF}" type="datetimeFigureOut">
+            <a:fld id="{E74088FC-AB1D-4731-A24C-F46EBDB0C5A7}" type="datetimeFigureOut">
               <a:rPr lang="en-US" smtClean="0"/>
               <a:t>10/3/2026</a:t>
             </a:fld>
@@ -13897,7 +13897,7 @@
             </a:lvl1pPr>
           </a:lstStyle>
           <a:p>
-            <a:fld id="{691F7126-2246-49A0-8047-430012F919EB}" type="slidenum">
+            <a:fld id="{E4AD76C8-B1EB-4E10-9C29-0B8B3CD29BA6}" type="slidenum">
               <a:rPr lang="en-US" smtClean="0"/>
               <a:t>‹#›</a:t>
             </a:fld>
@@ -13910,7 +13910,7 @@
           <p:cNvPr id="7" name="body">
             <a:extLst>
               <a:ext uri="{FF2B5EF4-FFF2-40B4-BE49-F238E27FC236}">
-                <a16:creationId xmlns:a16="http://schemas.microsoft.com/office/drawing/2014/main" id="{F261BB65-CC99-0838-6B78-722287AE52DB}"/>
+                <a16:creationId xmlns:a16="http://schemas.microsoft.com/office/drawing/2014/main" id="{9FC2C685-1F8C-D1F2-214A-C10CBD3771BF}"/>
               </a:ext>
             </a:extLst>
           </p:cNvPr>
@@ -13952,7 +13952,7 @@
           <p:cNvPr id="8" name="quote">
             <a:extLst>
               <a:ext uri="{FF2B5EF4-FFF2-40B4-BE49-F238E27FC236}">
-                <a16:creationId xmlns:a16="http://schemas.microsoft.com/office/drawing/2014/main" id="{8432ED57-04D5-7911-BCC1-A27AAE869F5D}"/>
+                <a16:creationId xmlns:a16="http://schemas.microsoft.com/office/drawing/2014/main" id="{2E261A82-AC60-E4C2-2CE0-19D97C75556A}"/>
               </a:ext>
             </a:extLst>
           </p:cNvPr>
@@ -13965,8 +13965,8 @@
         </p:nvSpPr>
         <p:spPr>
           <a:xfrm>
-            <a:off x="6598809" y="2363142"/>
-            <a:ext cx="3569070" cy="2639719"/>
+            <a:off x="6573317" y="2334448"/>
+            <a:ext cx="3620057" cy="2897952"/>
           </a:xfrm>
           <a:prstGeom prst="rect">
             <a:avLst/>
@@ -13983,7 +13983,7 @@
               </a:spcBef>
               <a:buFontTx/>
               <a:buNone/>
-              <a:defRPr sz="2400" i="1">
+              <a:defRPr sz="2000" i="1">
                 <a:latin typeface="+mj-lt"/>
               </a:defRPr>
             </a:lvl1pPr>
@@ -14002,7 +14002,7 @@
           <p:cNvPr id="9" name="attribution">
             <a:extLst>
               <a:ext uri="{FF2B5EF4-FFF2-40B4-BE49-F238E27FC236}">
-                <a16:creationId xmlns:a16="http://schemas.microsoft.com/office/drawing/2014/main" id="{5FC69A7E-A9AE-5B89-D1C5-B5EB8A51614A}"/>
+                <a16:creationId xmlns:a16="http://schemas.microsoft.com/office/drawing/2014/main" id="{508F1375-E3A6-7DBD-EDB5-087DD683DFEC}"/>
               </a:ext>
             </a:extLst>
           </p:cNvPr>
@@ -14015,8 +14015,8 @@
         </p:nvSpPr>
         <p:spPr>
           <a:xfrm>
-            <a:off x="6598809" y="5461942"/>
-            <a:ext cx="3569070" cy="315619"/>
+            <a:off x="6573317" y="5232400"/>
+            <a:ext cx="3620057" cy="573852"/>
           </a:xfrm>
           <a:prstGeom prst="rect">
             <a:avLst/>
@@ -14033,7 +14033,7 @@
               </a:spcBef>
               <a:buFontTx/>
               <a:buNone/>
-              <a:defRPr sz="1400"/>
+              <a:defRPr sz="2000"/>
             </a:lvl1pPr>
           </a:lstStyle>
           <a:p>
@@ -14050,7 +14050,7 @@
           <p:cNvPr id="10" name="source">
             <a:extLst>
               <a:ext uri="{FF2B5EF4-FFF2-40B4-BE49-F238E27FC236}">
-                <a16:creationId xmlns:a16="http://schemas.microsoft.com/office/drawing/2014/main" id="{A89191D8-A81E-99BF-1D56-10105E61DE40}"/>
+                <a16:creationId xmlns:a16="http://schemas.microsoft.com/office/drawing/2014/main" id="{B239C3C3-4A5E-B62F-6C2B-9D4FBD17A2E6}"/>
               </a:ext>
             </a:extLst>
           </p:cNvPr>
@@ -14105,7 +14105,7 @@
     </p:spTree>
     <p:extLst>
       <p:ext uri="{BB962C8B-B14F-4D97-AF65-F5344CB8AC3E}">
-        <p14:creationId xmlns:p14="http://schemas.microsoft.com/office/powerpoint/2010/main" val="696119091"/>
+        <p14:creationId xmlns:p14="http://schemas.microsoft.com/office/powerpoint/2010/main" val="3011324465"/>
       </p:ext>
     </p:extLst>
   </p:cSld>
@@ -14137,7 +14137,7 @@
           <p:cNvPr id="6" name="glow">
             <a:extLst>
               <a:ext uri="{FF2B5EF4-FFF2-40B4-BE49-F238E27FC236}">
-                <a16:creationId xmlns:a16="http://schemas.microsoft.com/office/drawing/2014/main" id="{027D3A6F-5BF3-477C-54C2-DE6C38DE1294}"/>
+                <a16:creationId xmlns:a16="http://schemas.microsoft.com/office/drawing/2014/main" id="{6254242D-09A8-17A3-C2EF-5C8F4FFD46B2}"/>
               </a:ext>
             </a:extLst>
           </p:cNvPr>
@@ -14319,7 +14319,7 @@
             </a:lvl1pPr>
           </a:lstStyle>
           <a:p>
-            <a:fld id="{84563B43-CD3D-4346-947D-64165950A7CF}" type="datetimeFigureOut">
+            <a:fld id="{E74088FC-AB1D-4731-A24C-F46EBDB0C5A7}" type="datetimeFigureOut">
               <a:rPr lang="en-US" smtClean="0"/>
               <a:t>10/3/2026</a:t>
             </a:fld>
@@ -14356,7 +14356,7 @@
             </a:lvl1pPr>
           </a:lstStyle>
           <a:p>
-            <a:fld id="{691F7126-2246-49A0-8047-430012F919EB}" type="slidenum">
+            <a:fld id="{E4AD76C8-B1EB-4E10-9C29-0B8B3CD29BA6}" type="slidenum">
               <a:rPr lang="en-US" smtClean="0"/>
               <a:t>‹#›</a:t>
             </a:fld>
@@ -14369,7 +14369,7 @@
           <p:cNvPr id="7" name="item_1_title">
             <a:extLst>
               <a:ext uri="{FF2B5EF4-FFF2-40B4-BE49-F238E27FC236}">
-                <a16:creationId xmlns:a16="http://schemas.microsoft.com/office/drawing/2014/main" id="{88340FF2-CE79-C7AC-FA1F-72AE826E274B}"/>
+                <a16:creationId xmlns:a16="http://schemas.microsoft.com/office/drawing/2014/main" id="{F726CEFF-6178-B5A7-2A77-1E729850D963}"/>
               </a:ext>
             </a:extLst>
           </p:cNvPr>
@@ -14382,8 +14382,8 @@
         </p:nvSpPr>
         <p:spPr>
           <a:xfrm>
-            <a:off x="633364" y="2363142"/>
-            <a:ext cx="2770278" cy="1004241"/>
+            <a:off x="607870" y="2334449"/>
+            <a:ext cx="2821265" cy="1021119"/>
           </a:xfrm>
         </p:spPr>
         <p:txBody>
@@ -14397,7 +14397,7 @@
               </a:spcBef>
               <a:buFontTx/>
               <a:buNone/>
-              <a:defRPr sz="2200" b="1">
+              <a:defRPr sz="2000" b="1">
                 <a:solidFill>
                   <a:schemeClr val="accent1"/>
                 </a:solidFill>
@@ -14419,7 +14419,7 @@
           <p:cNvPr id="8" name="item_1">
             <a:extLst>
               <a:ext uri="{FF2B5EF4-FFF2-40B4-BE49-F238E27FC236}">
-                <a16:creationId xmlns:a16="http://schemas.microsoft.com/office/drawing/2014/main" id="{95A456CB-D5D1-3D15-FBF0-66F24D6469C5}"/>
+                <a16:creationId xmlns:a16="http://schemas.microsoft.com/office/drawing/2014/main" id="{4879625A-CD36-1461-980D-B24B572D4B1B}"/>
               </a:ext>
             </a:extLst>
           </p:cNvPr>
@@ -14432,8 +14432,8 @@
         </p:nvSpPr>
         <p:spPr>
           <a:xfrm>
-            <a:off x="633364" y="3367382"/>
-            <a:ext cx="2770278" cy="2410178"/>
+            <a:off x="607871" y="3355568"/>
+            <a:ext cx="2821265" cy="2450685"/>
           </a:xfrm>
           <a:prstGeom prst="rect">
             <a:avLst/>
@@ -14467,7 +14467,7 @@
           <p:cNvPr id="9" name="item_2_title">
             <a:extLst>
               <a:ext uri="{FF2B5EF4-FFF2-40B4-BE49-F238E27FC236}">
-                <a16:creationId xmlns:a16="http://schemas.microsoft.com/office/drawing/2014/main" id="{81518C17-11E2-4B1B-1B16-8E908A01ECAD}"/>
+                <a16:creationId xmlns:a16="http://schemas.microsoft.com/office/drawing/2014/main" id="{F6AAF314-CF39-5BA1-70A4-B7923AB559F0}"/>
               </a:ext>
             </a:extLst>
           </p:cNvPr>
@@ -14480,8 +14480,8 @@
         </p:nvSpPr>
         <p:spPr>
           <a:xfrm>
-            <a:off x="4015482" y="2363142"/>
-            <a:ext cx="2770278" cy="1004241"/>
+            <a:off x="3989990" y="2334449"/>
+            <a:ext cx="2821265" cy="1021119"/>
           </a:xfrm>
           <a:prstGeom prst="rect">
             <a:avLst/>
@@ -14498,7 +14498,7 @@
               </a:spcBef>
               <a:buFontTx/>
               <a:buNone/>
-              <a:defRPr sz="2200" b="1">
+              <a:defRPr sz="2000" b="1">
                 <a:solidFill>
                   <a:schemeClr val="accent1"/>
                 </a:solidFill>
@@ -14520,7 +14520,7 @@
           <p:cNvPr id="10" name="item_2">
             <a:extLst>
               <a:ext uri="{FF2B5EF4-FFF2-40B4-BE49-F238E27FC236}">
-                <a16:creationId xmlns:a16="http://schemas.microsoft.com/office/drawing/2014/main" id="{2D1977B3-E140-0061-C212-66A45C1F58E0}"/>
+                <a16:creationId xmlns:a16="http://schemas.microsoft.com/office/drawing/2014/main" id="{7AB50CC2-C613-761B-D3F8-E4E0B5AD419A}"/>
               </a:ext>
             </a:extLst>
           </p:cNvPr>
@@ -14533,8 +14533,8 @@
         </p:nvSpPr>
         <p:spPr>
           <a:xfrm>
-            <a:off x="4015482" y="3367382"/>
-            <a:ext cx="2770278" cy="2410178"/>
+            <a:off x="3989990" y="3355568"/>
+            <a:ext cx="2821265" cy="2450685"/>
           </a:xfrm>
           <a:prstGeom prst="rect">
             <a:avLst/>
@@ -14568,7 +14568,7 @@
           <p:cNvPr id="11" name="item_3_title">
             <a:extLst>
               <a:ext uri="{FF2B5EF4-FFF2-40B4-BE49-F238E27FC236}">
-                <a16:creationId xmlns:a16="http://schemas.microsoft.com/office/drawing/2014/main" id="{3BA11B13-4140-1405-C409-FBC20BB45BED}"/>
+                <a16:creationId xmlns:a16="http://schemas.microsoft.com/office/drawing/2014/main" id="{5572AE55-5D7B-99A6-3BFF-396519371FB6}"/>
               </a:ext>
             </a:extLst>
           </p:cNvPr>
@@ -14581,8 +14581,8 @@
         </p:nvSpPr>
         <p:spPr>
           <a:xfrm>
-            <a:off x="7397600" y="2363142"/>
-            <a:ext cx="2770278" cy="1004241"/>
+            <a:off x="7372108" y="2334449"/>
+            <a:ext cx="2821265" cy="1021119"/>
           </a:xfrm>
           <a:prstGeom prst="rect">
             <a:avLst/>
@@ -14599,7 +14599,7 @@
               </a:spcBef>
               <a:buFontTx/>
               <a:buNone/>
-              <a:defRPr sz="2200" b="1">
+              <a:defRPr sz="2000" b="1">
                 <a:solidFill>
                   <a:schemeClr val="accent1"/>
                 </a:solidFill>
@@ -14621,7 +14621,7 @@
           <p:cNvPr id="12" name="item_3">
             <a:extLst>
               <a:ext uri="{FF2B5EF4-FFF2-40B4-BE49-F238E27FC236}">
-                <a16:creationId xmlns:a16="http://schemas.microsoft.com/office/drawing/2014/main" id="{ADFD15DB-93A3-617A-277C-4DBBEEB5CF3D}"/>
+                <a16:creationId xmlns:a16="http://schemas.microsoft.com/office/drawing/2014/main" id="{90D4D100-063A-DE47-9367-CA9650D8532E}"/>
               </a:ext>
             </a:extLst>
           </p:cNvPr>
@@ -14634,8 +14634,8 @@
         </p:nvSpPr>
         <p:spPr>
           <a:xfrm>
-            <a:off x="7397600" y="3367382"/>
-            <a:ext cx="2770278" cy="2410178"/>
+            <a:off x="7372108" y="3355568"/>
+            <a:ext cx="2821265" cy="2450685"/>
           </a:xfrm>
           <a:prstGeom prst="rect">
             <a:avLst/>
@@ -14669,7 +14669,7 @@
           <p:cNvPr id="13" name="source">
             <a:extLst>
               <a:ext uri="{FF2B5EF4-FFF2-40B4-BE49-F238E27FC236}">
-                <a16:creationId xmlns:a16="http://schemas.microsoft.com/office/drawing/2014/main" id="{37A5D30A-CDB1-8F66-AE01-E10B5D639725}"/>
+                <a16:creationId xmlns:a16="http://schemas.microsoft.com/office/drawing/2014/main" id="{EE99377C-59D5-C908-F99E-2BD0A082AF7C}"/>
               </a:ext>
             </a:extLst>
           </p:cNvPr>
@@ -14724,7 +14724,7 @@
     </p:spTree>
     <p:extLst>
       <p:ext uri="{BB962C8B-B14F-4D97-AF65-F5344CB8AC3E}">
-        <p14:creationId xmlns:p14="http://schemas.microsoft.com/office/powerpoint/2010/main" val="3682452197"/>
+        <p14:creationId xmlns:p14="http://schemas.microsoft.com/office/powerpoint/2010/main" val="411975745"/>
       </p:ext>
     </p:extLst>
   </p:cSld>
@@ -14756,7 +14756,7 @@
           <p:cNvPr id="6" name="glow">
             <a:extLst>
               <a:ext uri="{FF2B5EF4-FFF2-40B4-BE49-F238E27FC236}">
-                <a16:creationId xmlns:a16="http://schemas.microsoft.com/office/drawing/2014/main" id="{FCEA8D8C-7A7C-3097-6AAB-D849DF11CB9E}"/>
+                <a16:creationId xmlns:a16="http://schemas.microsoft.com/office/drawing/2014/main" id="{ADE49234-F5E5-858F-ABDB-A2B43ACD5A99}"/>
               </a:ext>
             </a:extLst>
           </p:cNvPr>
@@ -14938,7 +14938,7 @@
             </a:lvl1pPr>
           </a:lstStyle>
           <a:p>
-            <a:fld id="{84563B43-CD3D-4346-947D-64165950A7CF}" type="datetimeFigureOut">
+            <a:fld id="{E74088FC-AB1D-4731-A24C-F46EBDB0C5A7}" type="datetimeFigureOut">
               <a:rPr lang="en-US" smtClean="0"/>
               <a:t>10/3/2026</a:t>
             </a:fld>
@@ -14975,7 +14975,7 @@
             </a:lvl1pPr>
           </a:lstStyle>
           <a:p>
-            <a:fld id="{691F7126-2246-49A0-8047-430012F919EB}" type="slidenum">
+            <a:fld id="{E4AD76C8-B1EB-4E10-9C29-0B8B3CD29BA6}" type="slidenum">
               <a:rPr lang="en-US" smtClean="0"/>
               <a:t>‹#›</a:t>
             </a:fld>
@@ -14988,7 +14988,7 @@
           <p:cNvPr id="7" name="item_1_title">
             <a:extLst>
               <a:ext uri="{FF2B5EF4-FFF2-40B4-BE49-F238E27FC236}">
-                <a16:creationId xmlns:a16="http://schemas.microsoft.com/office/drawing/2014/main" id="{1D909ECE-0558-3C3B-C110-5B8D4C4B9CB2}"/>
+                <a16:creationId xmlns:a16="http://schemas.microsoft.com/office/drawing/2014/main" id="{4AE22BE7-C3A5-D90B-A891-7BB9EEFC5548}"/>
               </a:ext>
             </a:extLst>
           </p:cNvPr>
@@ -15001,8 +15001,8 @@
         </p:nvSpPr>
         <p:spPr>
           <a:xfrm>
-            <a:off x="633364" y="2363142"/>
-            <a:ext cx="4461337" cy="1004241"/>
+            <a:off x="607870" y="2334449"/>
+            <a:ext cx="4512324" cy="1021119"/>
           </a:xfrm>
         </p:spPr>
         <p:txBody>
@@ -15016,7 +15016,7 @@
               </a:spcBef>
               <a:buFontTx/>
               <a:buNone/>
-              <a:defRPr sz="2200" b="1">
+              <a:defRPr sz="2000" b="1">
                 <a:solidFill>
                   <a:schemeClr val="accent1"/>
                 </a:solidFill>
@@ -15038,7 +15038,7 @@
           <p:cNvPr id="8" name="item_1">
             <a:extLst>
               <a:ext uri="{FF2B5EF4-FFF2-40B4-BE49-F238E27FC236}">
-                <a16:creationId xmlns:a16="http://schemas.microsoft.com/office/drawing/2014/main" id="{730E3492-2B17-59FF-7E60-2A2E9A5D208F}"/>
+                <a16:creationId xmlns:a16="http://schemas.microsoft.com/office/drawing/2014/main" id="{7E089502-BDB8-9E9B-257D-CDC5A3ED97EB}"/>
               </a:ext>
             </a:extLst>
           </p:cNvPr>
@@ -15051,8 +15051,8 @@
         </p:nvSpPr>
         <p:spPr>
           <a:xfrm>
-            <a:off x="633365" y="3367382"/>
-            <a:ext cx="4461337" cy="2410178"/>
+            <a:off x="607870" y="3355568"/>
+            <a:ext cx="4512324" cy="2450685"/>
           </a:xfrm>
           <a:prstGeom prst="rect">
             <a:avLst/>
@@ -15086,7 +15086,7 @@
           <p:cNvPr id="9" name="item_2_title">
             <a:extLst>
               <a:ext uri="{FF2B5EF4-FFF2-40B4-BE49-F238E27FC236}">
-                <a16:creationId xmlns:a16="http://schemas.microsoft.com/office/drawing/2014/main" id="{5A9AE8ED-DADF-A9D2-E319-6EB3F7B5667E}"/>
+                <a16:creationId xmlns:a16="http://schemas.microsoft.com/office/drawing/2014/main" id="{D140DF33-D055-B6BB-874D-F86044B15C6E}"/>
               </a:ext>
             </a:extLst>
           </p:cNvPr>
@@ -15099,8 +15099,8 @@
         </p:nvSpPr>
         <p:spPr>
           <a:xfrm>
-            <a:off x="5706543" y="2363142"/>
-            <a:ext cx="4461337" cy="1004241"/>
+            <a:off x="5681048" y="2334449"/>
+            <a:ext cx="4512324" cy="1021119"/>
           </a:xfrm>
           <a:prstGeom prst="rect">
             <a:avLst/>
@@ -15117,7 +15117,7 @@
               </a:spcBef>
               <a:buFontTx/>
               <a:buNone/>
-              <a:defRPr sz="2200" b="1">
+              <a:defRPr sz="2000" b="1">
                 <a:solidFill>
                   <a:schemeClr val="accent1"/>
                 </a:solidFill>
@@ -15139,7 +15139,7 @@
           <p:cNvPr id="10" name="item_2">
             <a:extLst>
               <a:ext uri="{FF2B5EF4-FFF2-40B4-BE49-F238E27FC236}">
-                <a16:creationId xmlns:a16="http://schemas.microsoft.com/office/drawing/2014/main" id="{AB3E8BD2-BC2E-BF83-2298-6E55252A7E94}"/>
+                <a16:creationId xmlns:a16="http://schemas.microsoft.com/office/drawing/2014/main" id="{45F7F21A-B5F2-5925-CEDC-C92A731A3032}"/>
               </a:ext>
             </a:extLst>
           </p:cNvPr>
@@ -15152,8 +15152,8 @@
         </p:nvSpPr>
         <p:spPr>
           <a:xfrm>
-            <a:off x="5706543" y="3367382"/>
-            <a:ext cx="4461337" cy="2410178"/>
+            <a:off x="5681048" y="3355568"/>
+            <a:ext cx="4512324" cy="2450685"/>
           </a:xfrm>
           <a:prstGeom prst="rect">
             <a:avLst/>
@@ -15187,7 +15187,7 @@
           <p:cNvPr id="11" name="source">
             <a:extLst>
               <a:ext uri="{FF2B5EF4-FFF2-40B4-BE49-F238E27FC236}">
-                <a16:creationId xmlns:a16="http://schemas.microsoft.com/office/drawing/2014/main" id="{2243EFC7-C56A-3C41-9421-A610F3AC9FD0}"/>
+                <a16:creationId xmlns:a16="http://schemas.microsoft.com/office/drawing/2014/main" id="{009D0AB2-3AED-8542-F034-D774674B12E3}"/>
               </a:ext>
             </a:extLst>
           </p:cNvPr>
@@ -15242,7 +15242,7 @@
     </p:spTree>
     <p:extLst>
       <p:ext uri="{BB962C8B-B14F-4D97-AF65-F5344CB8AC3E}">
-        <p14:creationId xmlns:p14="http://schemas.microsoft.com/office/powerpoint/2010/main" val="1258243056"/>
+        <p14:creationId xmlns:p14="http://schemas.microsoft.com/office/powerpoint/2010/main" val="3865704321"/>
       </p:ext>
     </p:extLst>
   </p:cSld>
@@ -15274,7 +15274,7 @@
           <p:cNvPr id="6" name="glow">
             <a:extLst>
               <a:ext uri="{FF2B5EF4-FFF2-40B4-BE49-F238E27FC236}">
-                <a16:creationId xmlns:a16="http://schemas.microsoft.com/office/drawing/2014/main" id="{3B2B0D17-E968-6222-4C1E-0E999402AD4A}"/>
+                <a16:creationId xmlns:a16="http://schemas.microsoft.com/office/drawing/2014/main" id="{351D9A3B-0675-E211-AFB6-0A6A0073F36B}"/>
               </a:ext>
             </a:extLst>
           </p:cNvPr>
@@ -15456,7 +15456,7 @@
             </a:lvl1pPr>
           </a:lstStyle>
           <a:p>
-            <a:fld id="{84563B43-CD3D-4346-947D-64165950A7CF}" type="datetimeFigureOut">
+            <a:fld id="{E74088FC-AB1D-4731-A24C-F46EBDB0C5A7}" type="datetimeFigureOut">
               <a:rPr lang="en-US" smtClean="0"/>
               <a:t>10/3/2026</a:t>
             </a:fld>
@@ -15493,7 +15493,7 @@
             </a:lvl1pPr>
           </a:lstStyle>
           <a:p>
-            <a:fld id="{691F7126-2246-49A0-8047-430012F919EB}" type="slidenum">
+            <a:fld id="{E4AD76C8-B1EB-4E10-9C29-0B8B3CD29BA6}" type="slidenum">
               <a:rPr lang="en-US" smtClean="0"/>
               <a:t>‹#›</a:t>
             </a:fld>
@@ -15506,7 +15506,7 @@
           <p:cNvPr id="7" name="chart">
             <a:extLst>
               <a:ext uri="{FF2B5EF4-FFF2-40B4-BE49-F238E27FC236}">
-                <a16:creationId xmlns:a16="http://schemas.microsoft.com/office/drawing/2014/main" id="{F75D5476-A14F-86C6-3BD0-BD1CF2D1287A}"/>
+                <a16:creationId xmlns:a16="http://schemas.microsoft.com/office/drawing/2014/main" id="{83B61B7C-B0C7-5D90-DB5D-D4C4D1C0DB32}"/>
               </a:ext>
             </a:extLst>
           </p:cNvPr>
@@ -15536,7 +15536,7 @@
           <p:cNvPr id="8" name="body">
             <a:extLst>
               <a:ext uri="{FF2B5EF4-FFF2-40B4-BE49-F238E27FC236}">
-                <a16:creationId xmlns:a16="http://schemas.microsoft.com/office/drawing/2014/main" id="{47B9741F-996A-6680-7F07-3908B0997152}"/>
+                <a16:creationId xmlns:a16="http://schemas.microsoft.com/office/drawing/2014/main" id="{92C108B4-C461-9E2F-238E-078114CC34DC}"/>
               </a:ext>
             </a:extLst>
           </p:cNvPr>
@@ -15581,7 +15581,7 @@
           <p:cNvPr id="9" name="source">
             <a:extLst>
               <a:ext uri="{FF2B5EF4-FFF2-40B4-BE49-F238E27FC236}">
-                <a16:creationId xmlns:a16="http://schemas.microsoft.com/office/drawing/2014/main" id="{74389FDA-85E2-0AC8-23C3-C90D6CA931BE}"/>
+                <a16:creationId xmlns:a16="http://schemas.microsoft.com/office/drawing/2014/main" id="{70C0317D-456A-4381-8821-2BA030A23A6D}"/>
               </a:ext>
             </a:extLst>
           </p:cNvPr>
@@ -15636,7 +15636,7 @@
     </p:spTree>
     <p:extLst>
       <p:ext uri="{BB962C8B-B14F-4D97-AF65-F5344CB8AC3E}">
-        <p14:creationId xmlns:p14="http://schemas.microsoft.com/office/powerpoint/2010/main" val="869082110"/>
+        <p14:creationId xmlns:p14="http://schemas.microsoft.com/office/powerpoint/2010/main" val="2343747231"/>
       </p:ext>
     </p:extLst>
   </p:cSld>
@@ -15668,7 +15668,7 @@
           <p:cNvPr id="6" name="glow">
             <a:extLst>
               <a:ext uri="{FF2B5EF4-FFF2-40B4-BE49-F238E27FC236}">
-                <a16:creationId xmlns:a16="http://schemas.microsoft.com/office/drawing/2014/main" id="{0D5BE530-DE71-FDAF-9BC6-F2E16809577F}"/>
+                <a16:creationId xmlns:a16="http://schemas.microsoft.com/office/drawing/2014/main" id="{CBF85F44-6F30-83D5-17A0-1DC868E8EF91}"/>
               </a:ext>
             </a:extLst>
           </p:cNvPr>
@@ -15850,7 +15850,7 @@
             </a:lvl1pPr>
           </a:lstStyle>
           <a:p>
-            <a:fld id="{84563B43-CD3D-4346-947D-64165950A7CF}" type="datetimeFigureOut">
+            <a:fld id="{E74088FC-AB1D-4731-A24C-F46EBDB0C5A7}" type="datetimeFigureOut">
               <a:rPr lang="en-US" smtClean="0"/>
               <a:t>10/3/2026</a:t>
             </a:fld>
@@ -15887,7 +15887,7 @@
             </a:lvl1pPr>
           </a:lstStyle>
           <a:p>
-            <a:fld id="{691F7126-2246-49A0-8047-430012F919EB}" type="slidenum">
+            <a:fld id="{E4AD76C8-B1EB-4E10-9C29-0B8B3CD29BA6}" type="slidenum">
               <a:rPr lang="en-US" smtClean="0"/>
               <a:t>‹#›</a:t>
             </a:fld>
@@ -15900,7 +15900,7 @@
           <p:cNvPr id="7" name="item_1_title">
             <a:extLst>
               <a:ext uri="{FF2B5EF4-FFF2-40B4-BE49-F238E27FC236}">
-                <a16:creationId xmlns:a16="http://schemas.microsoft.com/office/drawing/2014/main" id="{8E1821D8-EBB1-CCED-96B7-223C49E280C2}"/>
+                <a16:creationId xmlns:a16="http://schemas.microsoft.com/office/drawing/2014/main" id="{66BDFDEB-BDFB-78DE-E7BB-CDB8A1809E6F}"/>
               </a:ext>
             </a:extLst>
           </p:cNvPr>
@@ -15913,8 +15913,8 @@
         </p:nvSpPr>
         <p:spPr>
           <a:xfrm>
-            <a:off x="633364" y="2363141"/>
-            <a:ext cx="4461337" cy="400852"/>
+            <a:off x="607870" y="2334448"/>
+            <a:ext cx="4512324" cy="417730"/>
           </a:xfrm>
         </p:spPr>
         <p:txBody>
@@ -15928,7 +15928,7 @@
               </a:spcBef>
               <a:buFontTx/>
               <a:buNone/>
-              <a:defRPr sz="2200" b="1">
+              <a:defRPr sz="2000" b="1">
                 <a:solidFill>
                   <a:schemeClr val="accent1"/>
                 </a:solidFill>
@@ -15950,7 +15950,7 @@
           <p:cNvPr id="8" name="item_1">
             <a:extLst>
               <a:ext uri="{FF2B5EF4-FFF2-40B4-BE49-F238E27FC236}">
-                <a16:creationId xmlns:a16="http://schemas.microsoft.com/office/drawing/2014/main" id="{1F90282E-ADF4-DDEE-3FFD-8A5FA70499ED}"/>
+                <a16:creationId xmlns:a16="http://schemas.microsoft.com/office/drawing/2014/main" id="{54A8D5D6-EF87-39B8-49E9-827F0C74BFB5}"/>
               </a:ext>
             </a:extLst>
           </p:cNvPr>
@@ -15963,8 +15963,8 @@
         </p:nvSpPr>
         <p:spPr>
           <a:xfrm>
-            <a:off x="633365" y="2763993"/>
-            <a:ext cx="4461337" cy="962046"/>
+            <a:off x="607870" y="2752180"/>
+            <a:ext cx="4512324" cy="1002553"/>
           </a:xfrm>
           <a:prstGeom prst="rect">
             <a:avLst/>
@@ -15998,7 +15998,7 @@
           <p:cNvPr id="9" name="item_2_title">
             <a:extLst>
               <a:ext uri="{FF2B5EF4-FFF2-40B4-BE49-F238E27FC236}">
-                <a16:creationId xmlns:a16="http://schemas.microsoft.com/office/drawing/2014/main" id="{871606B1-9C51-CF34-687E-E761C93C71BD}"/>
+                <a16:creationId xmlns:a16="http://schemas.microsoft.com/office/drawing/2014/main" id="{318BB76A-50DE-E8C7-1DD4-787608D52B7D}"/>
               </a:ext>
             </a:extLst>
           </p:cNvPr>
@@ -16011,8 +16011,8 @@
         </p:nvSpPr>
         <p:spPr>
           <a:xfrm>
-            <a:off x="5706543" y="2363141"/>
-            <a:ext cx="4461337" cy="400852"/>
+            <a:off x="5681048" y="2334448"/>
+            <a:ext cx="4512324" cy="417730"/>
           </a:xfrm>
           <a:prstGeom prst="rect">
             <a:avLst/>
@@ -16029,7 +16029,7 @@
               </a:spcBef>
               <a:buFontTx/>
               <a:buNone/>
-              <a:defRPr sz="2200" b="1">
+              <a:defRPr sz="2000" b="1">
                 <a:solidFill>
                   <a:schemeClr val="accent1"/>
                 </a:solidFill>
@@ -16051,7 +16051,7 @@
           <p:cNvPr id="10" name="item_2">
             <a:extLst>
               <a:ext uri="{FF2B5EF4-FFF2-40B4-BE49-F238E27FC236}">
-                <a16:creationId xmlns:a16="http://schemas.microsoft.com/office/drawing/2014/main" id="{38523284-D8FB-29D0-E9A8-36BB4D3CF023}"/>
+                <a16:creationId xmlns:a16="http://schemas.microsoft.com/office/drawing/2014/main" id="{23B155FB-CA3B-C630-9825-3FADB984A438}"/>
               </a:ext>
             </a:extLst>
           </p:cNvPr>
@@ -16064,8 +16064,8 @@
         </p:nvSpPr>
         <p:spPr>
           <a:xfrm>
-            <a:off x="5706543" y="2763993"/>
-            <a:ext cx="4461337" cy="962046"/>
+            <a:off x="5681048" y="2752180"/>
+            <a:ext cx="4512324" cy="1002553"/>
           </a:xfrm>
           <a:prstGeom prst="rect">
             <a:avLst/>
@@ -16099,7 +16099,7 @@
           <p:cNvPr id="11" name="item_3_title">
             <a:extLst>
               <a:ext uri="{FF2B5EF4-FFF2-40B4-BE49-F238E27FC236}">
-                <a16:creationId xmlns:a16="http://schemas.microsoft.com/office/drawing/2014/main" id="{F86A633A-A55E-C7DE-EF27-DE02A4DBC6D6}"/>
+                <a16:creationId xmlns:a16="http://schemas.microsoft.com/office/drawing/2014/main" id="{F220A033-7D0D-9BA4-3642-4DFEB6AA271A}"/>
               </a:ext>
             </a:extLst>
           </p:cNvPr>
@@ -16112,8 +16112,8 @@
         </p:nvSpPr>
         <p:spPr>
           <a:xfrm>
-            <a:off x="633365" y="4414661"/>
-            <a:ext cx="4461337" cy="400852"/>
+            <a:off x="607870" y="4385968"/>
+            <a:ext cx="4512324" cy="417730"/>
           </a:xfrm>
           <a:prstGeom prst="rect">
             <a:avLst/>
@@ -16130,7 +16130,7 @@
               </a:spcBef>
               <a:buFontTx/>
               <a:buNone/>
-              <a:defRPr sz="2200" b="1">
+              <a:defRPr sz="2000" b="1">
                 <a:solidFill>
                   <a:schemeClr val="accent1"/>
                 </a:solidFill>
@@ -16152,7 +16152,7 @@
           <p:cNvPr id="12" name="item_3">
             <a:extLst>
               <a:ext uri="{FF2B5EF4-FFF2-40B4-BE49-F238E27FC236}">
-                <a16:creationId xmlns:a16="http://schemas.microsoft.com/office/drawing/2014/main" id="{4E9CE42C-E0EA-2D00-1061-20064552B4DF}"/>
+                <a16:creationId xmlns:a16="http://schemas.microsoft.com/office/drawing/2014/main" id="{76DEF984-2B20-B396-8CC8-03D3B354479D}"/>
               </a:ext>
             </a:extLst>
           </p:cNvPr>
@@ -16165,8 +16165,8 @@
         </p:nvSpPr>
         <p:spPr>
           <a:xfrm>
-            <a:off x="633365" y="4815513"/>
-            <a:ext cx="4461337" cy="962046"/>
+            <a:off x="607870" y="4803700"/>
+            <a:ext cx="4512324" cy="1002553"/>
           </a:xfrm>
           <a:prstGeom prst="rect">
             <a:avLst/>
@@ -16200,7 +16200,7 @@
           <p:cNvPr id="13" name="item_4_title">
             <a:extLst>
               <a:ext uri="{FF2B5EF4-FFF2-40B4-BE49-F238E27FC236}">
-                <a16:creationId xmlns:a16="http://schemas.microsoft.com/office/drawing/2014/main" id="{EF78E14D-5B8C-51E7-7DF9-4F2F433F2296}"/>
+                <a16:creationId xmlns:a16="http://schemas.microsoft.com/office/drawing/2014/main" id="{80CB101F-181A-96A8-4189-229FD5D0A3C9}"/>
               </a:ext>
             </a:extLst>
           </p:cNvPr>
@@ -16213,8 +16213,8 @@
         </p:nvSpPr>
         <p:spPr>
           <a:xfrm>
-            <a:off x="5706543" y="4414661"/>
-            <a:ext cx="4461337" cy="400852"/>
+            <a:off x="5681048" y="4385968"/>
+            <a:ext cx="4512324" cy="417730"/>
           </a:xfrm>
           <a:prstGeom prst="rect">
             <a:avLst/>
@@ -16231,7 +16231,7 @@
               </a:spcBef>
               <a:buFontTx/>
               <a:buNone/>
-              <a:defRPr sz="2200" b="1">
+              <a:defRPr sz="2000" b="1">
                 <a:solidFill>
                   <a:schemeClr val="accent1"/>
                 </a:solidFill>
@@ -16253,7 +16253,7 @@
           <p:cNvPr id="14" name="item_4">
             <a:extLst>
               <a:ext uri="{FF2B5EF4-FFF2-40B4-BE49-F238E27FC236}">
-                <a16:creationId xmlns:a16="http://schemas.microsoft.com/office/drawing/2014/main" id="{C089FAB9-AF95-28FD-7F94-3DFDEA9D03B6}"/>
+                <a16:creationId xmlns:a16="http://schemas.microsoft.com/office/drawing/2014/main" id="{21271166-E1EC-76D0-D68C-D3511D2437A1}"/>
               </a:ext>
             </a:extLst>
           </p:cNvPr>
@@ -16266,8 +16266,8 @@
         </p:nvSpPr>
         <p:spPr>
           <a:xfrm>
-            <a:off x="5706543" y="4815513"/>
-            <a:ext cx="4461337" cy="962046"/>
+            <a:off x="5681048" y="4803700"/>
+            <a:ext cx="4512324" cy="1002553"/>
           </a:xfrm>
           <a:prstGeom prst="rect">
             <a:avLst/>
@@ -16301,7 +16301,7 @@
           <p:cNvPr id="15" name="source">
             <a:extLst>
               <a:ext uri="{FF2B5EF4-FFF2-40B4-BE49-F238E27FC236}">
-                <a16:creationId xmlns:a16="http://schemas.microsoft.com/office/drawing/2014/main" id="{9B3965F6-B9C6-AF9E-4DD6-60DB92BEF367}"/>
+                <a16:creationId xmlns:a16="http://schemas.microsoft.com/office/drawing/2014/main" id="{FF646FA1-78C6-9EAC-30D2-3FA4ABACF078}"/>
               </a:ext>
             </a:extLst>
           </p:cNvPr>
@@ -16356,7 +16356,7 @@
     </p:spTree>
     <p:extLst>
       <p:ext uri="{BB962C8B-B14F-4D97-AF65-F5344CB8AC3E}">
-        <p14:creationId xmlns:p14="http://schemas.microsoft.com/office/powerpoint/2010/main" val="615525210"/>
+        <p14:creationId xmlns:p14="http://schemas.microsoft.com/office/powerpoint/2010/main" val="1660263370"/>
       </p:ext>
     </p:extLst>
   </p:cSld>
@@ -16573,7 +16573,7 @@
             </a:lvl1pPr>
           </a:lstStyle>
           <a:p>
-            <a:fld id="{84563B43-CD3D-4346-947D-64165950A7CF}" type="datetimeFigureOut">
+            <a:fld id="{E74088FC-AB1D-4731-A24C-F46EBDB0C5A7}" type="datetimeFigureOut">
               <a:rPr lang="en-US" smtClean="0"/>
               <a:t>10/3/2026</a:t>
             </a:fld>
@@ -16618,7 +16618,7 @@
             </a:lvl1pPr>
           </a:lstStyle>
           <a:p>
-            <a:fld id="{691F7126-2246-49A0-8047-430012F919EB}" type="slidenum">
+            <a:fld id="{E4AD76C8-B1EB-4E10-9C29-0B8B3CD29BA6}" type="slidenum">
               <a:rPr lang="en-US" smtClean="0"/>
               <a:t>‹#›</a:t>
             </a:fld>
@@ -16629,7 +16629,7 @@
     </p:spTree>
     <p:extLst>
       <p:ext uri="{BB962C8B-B14F-4D97-AF65-F5344CB8AC3E}">
-        <p14:creationId xmlns:p14="http://schemas.microsoft.com/office/powerpoint/2010/main" val="3239553406"/>
+        <p14:creationId xmlns:p14="http://schemas.microsoft.com/office/powerpoint/2010/main" val="3960044905"/>
       </p:ext>
     </p:extLst>
   </p:cSld>

--- a/design/templates/film-burn-dark/template.pptx
+++ b/design/templates/film-burn-dark/template.pptx
@@ -320,9 +320,9 @@
             </a:lvl1pPr>
           </a:lstStyle>
           <a:p>
-            <a:fld id="{E74088FC-AB1D-4731-A24C-F46EBDB0C5A7}" type="datetimeFigureOut">
+            <a:fld id="{F3B25E4A-609E-4439-9216-58A1FB513E4F}" type="datetimeFigureOut">
               <a:rPr lang="en-US" smtClean="0"/>
-              <a:t>10/3/2026</a:t>
+              <a:t>10/4/2026</a:t>
             </a:fld>
             <a:endParaRPr lang="en-US"/>
           </a:p>
@@ -357,7 +357,7 @@
             </a:lvl1pPr>
           </a:lstStyle>
           <a:p>
-            <a:fld id="{E4AD76C8-B1EB-4E10-9C29-0B8B3CD29BA6}" type="slidenum">
+            <a:fld id="{466CBC16-03F9-4EFF-A443-63D10023E700}" type="slidenum">
               <a:rPr lang="en-US" smtClean="0"/>
               <a:t>‹#›</a:t>
             </a:fld>
@@ -368,7 +368,7 @@
     </p:spTree>
     <p:extLst>
       <p:ext uri="{BB962C8B-B14F-4D97-AF65-F5344CB8AC3E}">
-        <p14:creationId xmlns:p14="http://schemas.microsoft.com/office/powerpoint/2010/main" val="1172761785"/>
+        <p14:creationId xmlns:p14="http://schemas.microsoft.com/office/powerpoint/2010/main" val="3134353787"/>
       </p:ext>
     </p:extLst>
   </p:cSld>
@@ -400,7 +400,7 @@
           <p:cNvPr id="6" name="glow">
             <a:extLst>
               <a:ext uri="{FF2B5EF4-FFF2-40B4-BE49-F238E27FC236}">
-                <a16:creationId xmlns:a16="http://schemas.microsoft.com/office/drawing/2014/main" id="{3A094AD4-2156-8EBB-D115-0468A92E5126}"/>
+                <a16:creationId xmlns:a16="http://schemas.microsoft.com/office/drawing/2014/main" id="{0FD2B7BE-1EAC-042F-4659-82D6CCF138FF}"/>
               </a:ext>
             </a:extLst>
           </p:cNvPr>
@@ -419,11 +419,15 @@
             <a:gsLst>
               <a:gs pos="0">
                 <a:schemeClr val="accent1">
+                  <a:lumMod val="70000"/>
+                  <a:lumOff val="30000"/>
                   <a:alpha val="28000"/>
                 </a:schemeClr>
               </a:gs>
               <a:gs pos="100000">
                 <a:schemeClr val="accent1">
+                  <a:lumMod val="70000"/>
+                  <a:lumOff val="30000"/>
                   <a:alpha val="0"/>
                 </a:schemeClr>
               </a:gs>
@@ -582,9 +586,9 @@
             </a:lvl1pPr>
           </a:lstStyle>
           <a:p>
-            <a:fld id="{E74088FC-AB1D-4731-A24C-F46EBDB0C5A7}" type="datetimeFigureOut">
+            <a:fld id="{F3B25E4A-609E-4439-9216-58A1FB513E4F}" type="datetimeFigureOut">
               <a:rPr lang="en-US" smtClean="0"/>
-              <a:t>10/3/2026</a:t>
+              <a:t>10/4/2026</a:t>
             </a:fld>
             <a:endParaRPr lang="en-US"/>
           </a:p>
@@ -619,7 +623,7 @@
             </a:lvl1pPr>
           </a:lstStyle>
           <a:p>
-            <a:fld id="{E4AD76C8-B1EB-4E10-9C29-0B8B3CD29BA6}" type="slidenum">
+            <a:fld id="{466CBC16-03F9-4EFF-A443-63D10023E700}" type="slidenum">
               <a:rPr lang="en-US" smtClean="0"/>
               <a:t>‹#›</a:t>
             </a:fld>
@@ -632,7 +636,7 @@
           <p:cNvPr id="7" name="body">
             <a:extLst>
               <a:ext uri="{FF2B5EF4-FFF2-40B4-BE49-F238E27FC236}">
-                <a16:creationId xmlns:a16="http://schemas.microsoft.com/office/drawing/2014/main" id="{CE07A34C-B3B2-A96A-C827-89D5F26EC2A7}"/>
+                <a16:creationId xmlns:a16="http://schemas.microsoft.com/office/drawing/2014/main" id="{13ACE43B-9E3C-AA9D-48EA-A924BC86787A}"/>
               </a:ext>
             </a:extLst>
           </p:cNvPr>
@@ -674,7 +678,7 @@
           <p:cNvPr id="8" name="source">
             <a:extLst>
               <a:ext uri="{FF2B5EF4-FFF2-40B4-BE49-F238E27FC236}">
-                <a16:creationId xmlns:a16="http://schemas.microsoft.com/office/drawing/2014/main" id="{47C30BDC-CE8F-8904-BF58-886193DB1B28}"/>
+                <a16:creationId xmlns:a16="http://schemas.microsoft.com/office/drawing/2014/main" id="{9C820867-125F-9476-760C-3D636692AAAE}"/>
               </a:ext>
             </a:extLst>
           </p:cNvPr>
@@ -696,7 +700,10 @@
             </a:avLst>
           </a:prstGeom>
           <a:solidFill>
-            <a:schemeClr val="accent1"/>
+            <a:schemeClr val="accent1">
+              <a:lumMod val="70000"/>
+              <a:lumOff val="30000"/>
+            </a:schemeClr>
           </a:solidFill>
         </p:spPr>
         <p:txBody>
@@ -729,7 +736,7 @@
     </p:spTree>
     <p:extLst>
       <p:ext uri="{BB962C8B-B14F-4D97-AF65-F5344CB8AC3E}">
-        <p14:creationId xmlns:p14="http://schemas.microsoft.com/office/powerpoint/2010/main" val="4085234562"/>
+        <p14:creationId xmlns:p14="http://schemas.microsoft.com/office/powerpoint/2010/main" val="1638250489"/>
       </p:ext>
     </p:extLst>
   </p:cSld>
@@ -761,7 +768,7 @@
           <p:cNvPr id="6" name="glow">
             <a:extLst>
               <a:ext uri="{FF2B5EF4-FFF2-40B4-BE49-F238E27FC236}">
-                <a16:creationId xmlns:a16="http://schemas.microsoft.com/office/drawing/2014/main" id="{B0F1C81A-C8AD-57D4-3CD4-7A0D4D1821E0}"/>
+                <a16:creationId xmlns:a16="http://schemas.microsoft.com/office/drawing/2014/main" id="{90F4E567-9686-541E-3F62-78463093853D}"/>
               </a:ext>
             </a:extLst>
           </p:cNvPr>
@@ -780,11 +787,15 @@
             <a:gsLst>
               <a:gs pos="0">
                 <a:schemeClr val="accent1">
+                  <a:lumMod val="70000"/>
+                  <a:lumOff val="30000"/>
                   <a:alpha val="28000"/>
                 </a:schemeClr>
               </a:gs>
               <a:gs pos="100000">
                 <a:schemeClr val="accent1">
+                  <a:lumMod val="70000"/>
+                  <a:lumOff val="30000"/>
                   <a:alpha val="0"/>
                 </a:schemeClr>
               </a:gs>
@@ -943,9 +954,9 @@
             </a:lvl1pPr>
           </a:lstStyle>
           <a:p>
-            <a:fld id="{E74088FC-AB1D-4731-A24C-F46EBDB0C5A7}" type="datetimeFigureOut">
+            <a:fld id="{F3B25E4A-609E-4439-9216-58A1FB513E4F}" type="datetimeFigureOut">
               <a:rPr lang="en-US" smtClean="0"/>
-              <a:t>10/3/2026</a:t>
+              <a:t>10/4/2026</a:t>
             </a:fld>
             <a:endParaRPr lang="en-US"/>
           </a:p>
@@ -980,7 +991,7 @@
             </a:lvl1pPr>
           </a:lstStyle>
           <a:p>
-            <a:fld id="{E4AD76C8-B1EB-4E10-9C29-0B8B3CD29BA6}" type="slidenum">
+            <a:fld id="{466CBC16-03F9-4EFF-A443-63D10023E700}" type="slidenum">
               <a:rPr lang="en-US" smtClean="0"/>
               <a:t>‹#›</a:t>
             </a:fld>
@@ -993,7 +1004,7 @@
           <p:cNvPr id="7" name="body">
             <a:extLst>
               <a:ext uri="{FF2B5EF4-FFF2-40B4-BE49-F238E27FC236}">
-                <a16:creationId xmlns:a16="http://schemas.microsoft.com/office/drawing/2014/main" id="{B8987E70-E38E-EF88-5868-7448A7FB8A4C}"/>
+                <a16:creationId xmlns:a16="http://schemas.microsoft.com/office/drawing/2014/main" id="{A7CD6D7C-2E3B-31C5-514F-D6E62CAC872F}"/>
               </a:ext>
             </a:extLst>
           </p:cNvPr>
@@ -1036,7 +1047,7 @@
     </p:spTree>
     <p:extLst>
       <p:ext uri="{BB962C8B-B14F-4D97-AF65-F5344CB8AC3E}">
-        <p14:creationId xmlns:p14="http://schemas.microsoft.com/office/powerpoint/2010/main" val="3855178355"/>
+        <p14:creationId xmlns:p14="http://schemas.microsoft.com/office/powerpoint/2010/main" val="2639903382"/>
       </p:ext>
     </p:extLst>
   </p:cSld>
@@ -1127,7 +1138,7 @@
           <p:cNvPr id="6" name="section_number">
             <a:extLst>
               <a:ext uri="{FF2B5EF4-FFF2-40B4-BE49-F238E27FC236}">
-                <a16:creationId xmlns:a16="http://schemas.microsoft.com/office/drawing/2014/main" id="{BEEACFC8-02F3-2E98-A387-4292DEFE7E81}"/>
+                <a16:creationId xmlns:a16="http://schemas.microsoft.com/office/drawing/2014/main" id="{ED3A5F04-07C4-A58B-BA1C-815D6D749A99}"/>
               </a:ext>
             </a:extLst>
           </p:cNvPr>
@@ -1180,7 +1191,7 @@
           <p:cNvPr id="7" name="subtitle">
             <a:extLst>
               <a:ext uri="{FF2B5EF4-FFF2-40B4-BE49-F238E27FC236}">
-                <a16:creationId xmlns:a16="http://schemas.microsoft.com/office/drawing/2014/main" id="{17AF2EA3-25E0-5FDD-0B44-8CD70B6173D1}"/>
+                <a16:creationId xmlns:a16="http://schemas.microsoft.com/office/drawing/2014/main" id="{C271105C-5D57-FD19-2EF7-0FB7FDC711BD}"/>
               </a:ext>
             </a:extLst>
           </p:cNvPr>
@@ -1230,7 +1241,7 @@
     </p:spTree>
     <p:extLst>
       <p:ext uri="{BB962C8B-B14F-4D97-AF65-F5344CB8AC3E}">
-        <p14:creationId xmlns:p14="http://schemas.microsoft.com/office/powerpoint/2010/main" val="157498087"/>
+        <p14:creationId xmlns:p14="http://schemas.microsoft.com/office/powerpoint/2010/main" val="3985501611"/>
       </p:ext>
     </p:extLst>
   </p:cSld>
@@ -1262,7 +1273,7 @@
           <p:cNvPr id="6" name="glow">
             <a:extLst>
               <a:ext uri="{FF2B5EF4-FFF2-40B4-BE49-F238E27FC236}">
-                <a16:creationId xmlns:a16="http://schemas.microsoft.com/office/drawing/2014/main" id="{C79BFA5D-F319-FEA4-9D0C-CB6167D7384F}"/>
+                <a16:creationId xmlns:a16="http://schemas.microsoft.com/office/drawing/2014/main" id="{3E85B59E-04CF-AC6C-975A-FECF633B1B44}"/>
               </a:ext>
             </a:extLst>
           </p:cNvPr>
@@ -1281,11 +1292,15 @@
             <a:gsLst>
               <a:gs pos="0">
                 <a:schemeClr val="accent1">
+                  <a:lumMod val="70000"/>
+                  <a:lumOff val="30000"/>
                   <a:alpha val="28000"/>
                 </a:schemeClr>
               </a:gs>
               <a:gs pos="100000">
                 <a:schemeClr val="accent1">
+                  <a:lumMod val="70000"/>
+                  <a:lumOff val="30000"/>
                   <a:alpha val="0"/>
                 </a:schemeClr>
               </a:gs>
@@ -1444,9 +1459,9 @@
             </a:lvl1pPr>
           </a:lstStyle>
           <a:p>
-            <a:fld id="{E74088FC-AB1D-4731-A24C-F46EBDB0C5A7}" type="datetimeFigureOut">
+            <a:fld id="{F3B25E4A-609E-4439-9216-58A1FB513E4F}" type="datetimeFigureOut">
               <a:rPr lang="en-US" smtClean="0"/>
-              <a:t>10/3/2026</a:t>
+              <a:t>10/4/2026</a:t>
             </a:fld>
             <a:endParaRPr lang="en-US"/>
           </a:p>
@@ -1481,7 +1496,7 @@
             </a:lvl1pPr>
           </a:lstStyle>
           <a:p>
-            <a:fld id="{E4AD76C8-B1EB-4E10-9C29-0B8B3CD29BA6}" type="slidenum">
+            <a:fld id="{466CBC16-03F9-4EFF-A443-63D10023E700}" type="slidenum">
               <a:rPr lang="en-US" smtClean="0"/>
               <a:t>‹#›</a:t>
             </a:fld>
@@ -1494,7 +1509,7 @@
           <p:cNvPr id="7" name="item_1_title">
             <a:extLst>
               <a:ext uri="{FF2B5EF4-FFF2-40B4-BE49-F238E27FC236}">
-                <a16:creationId xmlns:a16="http://schemas.microsoft.com/office/drawing/2014/main" id="{E7572208-BCFC-3400-D5B7-5F635541DE38}"/>
+                <a16:creationId xmlns:a16="http://schemas.microsoft.com/office/drawing/2014/main" id="{5F39D555-A816-4C60-2E27-8C58C8F7B6A0}"/>
               </a:ext>
             </a:extLst>
           </p:cNvPr>
@@ -1508,7 +1523,7 @@
         <p:spPr>
           <a:xfrm>
             <a:off x="556884" y="2277063"/>
-            <a:ext cx="2906242" cy="573852"/>
+            <a:ext cx="2906243" cy="573852"/>
           </a:xfrm>
         </p:spPr>
         <p:txBody>
@@ -1524,7 +1539,10 @@
               <a:buNone/>
               <a:defRPr sz="2000" b="1">
                 <a:solidFill>
-                  <a:schemeClr val="accent1"/>
+                  <a:schemeClr val="accent1">
+                    <a:lumMod val="70000"/>
+                    <a:lumOff val="30000"/>
+                  </a:schemeClr>
                 </a:solidFill>
                 <a:latin typeface="+mj-lt"/>
               </a:defRPr>
@@ -1544,7 +1562,7 @@
           <p:cNvPr id="8" name="item_1">
             <a:extLst>
               <a:ext uri="{FF2B5EF4-FFF2-40B4-BE49-F238E27FC236}">
-                <a16:creationId xmlns:a16="http://schemas.microsoft.com/office/drawing/2014/main" id="{FF45D06C-D742-F260-EB72-85548D84AA97}"/>
+                <a16:creationId xmlns:a16="http://schemas.microsoft.com/office/drawing/2014/main" id="{17CC1186-50C0-2E9C-86E9-D6E2034B3DBE}"/>
               </a:ext>
             </a:extLst>
           </p:cNvPr>
@@ -1557,7 +1575,7 @@
         </p:nvSpPr>
         <p:spPr>
           <a:xfrm>
-            <a:off x="3565100" y="2277063"/>
+            <a:off x="3565101" y="2277063"/>
             <a:ext cx="6679259" cy="573852"/>
           </a:xfrm>
           <a:prstGeom prst="rect">
@@ -1592,7 +1610,7 @@
           <p:cNvPr id="9" name="item_2_title">
             <a:extLst>
               <a:ext uri="{FF2B5EF4-FFF2-40B4-BE49-F238E27FC236}">
-                <a16:creationId xmlns:a16="http://schemas.microsoft.com/office/drawing/2014/main" id="{80DF1E81-DF29-6845-347E-5CA935305B82}"/>
+                <a16:creationId xmlns:a16="http://schemas.microsoft.com/office/drawing/2014/main" id="{6A9566D8-D111-83B2-F824-DE225E82771D}"/>
               </a:ext>
             </a:extLst>
           </p:cNvPr>
@@ -1605,8 +1623,8 @@
         </p:nvSpPr>
         <p:spPr>
           <a:xfrm>
-            <a:off x="556884" y="3281304"/>
-            <a:ext cx="2906242" cy="573852"/>
+            <a:off x="556885" y="3281304"/>
+            <a:ext cx="2906243" cy="573852"/>
           </a:xfrm>
           <a:prstGeom prst="rect">
             <a:avLst/>
@@ -1625,7 +1643,10 @@
               <a:buNone/>
               <a:defRPr sz="2000" b="1">
                 <a:solidFill>
-                  <a:schemeClr val="accent1"/>
+                  <a:schemeClr val="accent1">
+                    <a:lumMod val="70000"/>
+                    <a:lumOff val="30000"/>
+                  </a:schemeClr>
                 </a:solidFill>
                 <a:latin typeface="+mj-lt"/>
               </a:defRPr>
@@ -1645,7 +1666,7 @@
           <p:cNvPr id="10" name="item_2">
             <a:extLst>
               <a:ext uri="{FF2B5EF4-FFF2-40B4-BE49-F238E27FC236}">
-                <a16:creationId xmlns:a16="http://schemas.microsoft.com/office/drawing/2014/main" id="{74F60BA7-6802-A38E-5FFC-BD682C9527C7}"/>
+                <a16:creationId xmlns:a16="http://schemas.microsoft.com/office/drawing/2014/main" id="{9B9B1962-9B58-B018-093A-1E7D93975F70}"/>
               </a:ext>
             </a:extLst>
           </p:cNvPr>
@@ -1658,7 +1679,7 @@
         </p:nvSpPr>
         <p:spPr>
           <a:xfrm>
-            <a:off x="3565100" y="3281304"/>
+            <a:off x="3565101" y="3281304"/>
             <a:ext cx="6679259" cy="573852"/>
           </a:xfrm>
           <a:prstGeom prst="rect">
@@ -1693,7 +1714,7 @@
           <p:cNvPr id="11" name="item_3_title">
             <a:extLst>
               <a:ext uri="{FF2B5EF4-FFF2-40B4-BE49-F238E27FC236}">
-                <a16:creationId xmlns:a16="http://schemas.microsoft.com/office/drawing/2014/main" id="{9CEBB602-D199-BCA8-BEED-B61C25B0CE4F}"/>
+                <a16:creationId xmlns:a16="http://schemas.microsoft.com/office/drawing/2014/main" id="{818C2E51-1DE3-6F44-0A78-980EAB140DEB}"/>
               </a:ext>
             </a:extLst>
           </p:cNvPr>
@@ -1706,8 +1727,8 @@
         </p:nvSpPr>
         <p:spPr>
           <a:xfrm>
-            <a:off x="556884" y="4285545"/>
-            <a:ext cx="2906242" cy="573852"/>
+            <a:off x="556885" y="4285545"/>
+            <a:ext cx="2906243" cy="573852"/>
           </a:xfrm>
           <a:prstGeom prst="rect">
             <a:avLst/>
@@ -1726,7 +1747,10 @@
               <a:buNone/>
               <a:defRPr sz="2000" b="1">
                 <a:solidFill>
-                  <a:schemeClr val="accent1"/>
+                  <a:schemeClr val="accent1">
+                    <a:lumMod val="70000"/>
+                    <a:lumOff val="30000"/>
+                  </a:schemeClr>
                 </a:solidFill>
                 <a:latin typeface="+mj-lt"/>
               </a:defRPr>
@@ -1746,7 +1770,7 @@
           <p:cNvPr id="12" name="item_3">
             <a:extLst>
               <a:ext uri="{FF2B5EF4-FFF2-40B4-BE49-F238E27FC236}">
-                <a16:creationId xmlns:a16="http://schemas.microsoft.com/office/drawing/2014/main" id="{6DE693A1-043E-5C80-6B04-171D6858EFCA}"/>
+                <a16:creationId xmlns:a16="http://schemas.microsoft.com/office/drawing/2014/main" id="{EDB70BC4-EA72-36A7-E684-646410FB54A8}"/>
               </a:ext>
             </a:extLst>
           </p:cNvPr>
@@ -1759,7 +1783,7 @@
         </p:nvSpPr>
         <p:spPr>
           <a:xfrm>
-            <a:off x="3565100" y="4285545"/>
+            <a:off x="3565101" y="4285545"/>
             <a:ext cx="6679259" cy="573852"/>
           </a:xfrm>
           <a:prstGeom prst="rect">
@@ -1794,7 +1818,7 @@
           <p:cNvPr id="13" name="item_4_title">
             <a:extLst>
               <a:ext uri="{FF2B5EF4-FFF2-40B4-BE49-F238E27FC236}">
-                <a16:creationId xmlns:a16="http://schemas.microsoft.com/office/drawing/2014/main" id="{E64A0E53-5FC1-5BCA-EB2F-4AACFF04C5D7}"/>
+                <a16:creationId xmlns:a16="http://schemas.microsoft.com/office/drawing/2014/main" id="{FEB979DE-9B80-3CBE-209D-69775E7A2343}"/>
               </a:ext>
             </a:extLst>
           </p:cNvPr>
@@ -1807,8 +1831,8 @@
         </p:nvSpPr>
         <p:spPr>
           <a:xfrm>
-            <a:off x="556884" y="5289785"/>
-            <a:ext cx="2906242" cy="573852"/>
+            <a:off x="556885" y="5289785"/>
+            <a:ext cx="2906243" cy="573852"/>
           </a:xfrm>
           <a:prstGeom prst="rect">
             <a:avLst/>
@@ -1827,7 +1851,10 @@
               <a:buNone/>
               <a:defRPr sz="2000" b="1">
                 <a:solidFill>
-                  <a:schemeClr val="accent1"/>
+                  <a:schemeClr val="accent1">
+                    <a:lumMod val="70000"/>
+                    <a:lumOff val="30000"/>
+                  </a:schemeClr>
                 </a:solidFill>
                 <a:latin typeface="+mj-lt"/>
               </a:defRPr>
@@ -1847,7 +1874,7 @@
           <p:cNvPr id="14" name="item_4">
             <a:extLst>
               <a:ext uri="{FF2B5EF4-FFF2-40B4-BE49-F238E27FC236}">
-                <a16:creationId xmlns:a16="http://schemas.microsoft.com/office/drawing/2014/main" id="{1957ECA6-1D89-02FC-AEE5-ED1C0DBC3A3C}"/>
+                <a16:creationId xmlns:a16="http://schemas.microsoft.com/office/drawing/2014/main" id="{099011FA-DC37-530A-66E1-1DE97620AD19}"/>
               </a:ext>
             </a:extLst>
           </p:cNvPr>
@@ -1860,7 +1887,7 @@
         </p:nvSpPr>
         <p:spPr>
           <a:xfrm>
-            <a:off x="3565100" y="5289785"/>
+            <a:off x="3565101" y="5289785"/>
             <a:ext cx="6679259" cy="573852"/>
           </a:xfrm>
           <a:prstGeom prst="rect">
@@ -1895,7 +1922,7 @@
           <p:cNvPr id="15" name="source">
             <a:extLst>
               <a:ext uri="{FF2B5EF4-FFF2-40B4-BE49-F238E27FC236}">
-                <a16:creationId xmlns:a16="http://schemas.microsoft.com/office/drawing/2014/main" id="{B3D27D6D-3027-F239-8F00-DFCCD05DE082}"/>
+                <a16:creationId xmlns:a16="http://schemas.microsoft.com/office/drawing/2014/main" id="{03DE5E29-010A-EBF7-352B-ADF3DB0E90FE}"/>
               </a:ext>
             </a:extLst>
           </p:cNvPr>
@@ -1917,7 +1944,10 @@
             </a:avLst>
           </a:prstGeom>
           <a:solidFill>
-            <a:schemeClr val="accent1"/>
+            <a:schemeClr val="accent1">
+              <a:lumMod val="70000"/>
+              <a:lumOff val="30000"/>
+            </a:schemeClr>
           </a:solidFill>
         </p:spPr>
         <p:txBody>
@@ -1950,7 +1980,7 @@
     </p:spTree>
     <p:extLst>
       <p:ext uri="{BB962C8B-B14F-4D97-AF65-F5344CB8AC3E}">
-        <p14:creationId xmlns:p14="http://schemas.microsoft.com/office/powerpoint/2010/main" val="3364329190"/>
+        <p14:creationId xmlns:p14="http://schemas.microsoft.com/office/powerpoint/2010/main" val="4166489466"/>
       </p:ext>
     </p:extLst>
   </p:cSld>
@@ -1982,7 +2012,7 @@
           <p:cNvPr id="6" name="glow">
             <a:extLst>
               <a:ext uri="{FF2B5EF4-FFF2-40B4-BE49-F238E27FC236}">
-                <a16:creationId xmlns:a16="http://schemas.microsoft.com/office/drawing/2014/main" id="{FF9921BB-09BF-7C40-7C21-93DF9A7C2B05}"/>
+                <a16:creationId xmlns:a16="http://schemas.microsoft.com/office/drawing/2014/main" id="{49169C54-2EA2-903D-3FC1-D48517605BE9}"/>
               </a:ext>
             </a:extLst>
           </p:cNvPr>
@@ -2001,11 +2031,15 @@
             <a:gsLst>
               <a:gs pos="0">
                 <a:schemeClr val="accent1">
+                  <a:lumMod val="70000"/>
+                  <a:lumOff val="30000"/>
                   <a:alpha val="28000"/>
                 </a:schemeClr>
               </a:gs>
               <a:gs pos="100000">
                 <a:schemeClr val="accent1">
+                  <a:lumMod val="70000"/>
+                  <a:lumOff val="30000"/>
                   <a:alpha val="0"/>
                 </a:schemeClr>
               </a:gs>
@@ -2164,9 +2198,9 @@
             </a:lvl1pPr>
           </a:lstStyle>
           <a:p>
-            <a:fld id="{E74088FC-AB1D-4731-A24C-F46EBDB0C5A7}" type="datetimeFigureOut">
+            <a:fld id="{F3B25E4A-609E-4439-9216-58A1FB513E4F}" type="datetimeFigureOut">
               <a:rPr lang="en-US" smtClean="0"/>
-              <a:t>10/3/2026</a:t>
+              <a:t>10/4/2026</a:t>
             </a:fld>
             <a:endParaRPr lang="en-US"/>
           </a:p>
@@ -2201,7 +2235,7 @@
             </a:lvl1pPr>
           </a:lstStyle>
           <a:p>
-            <a:fld id="{E4AD76C8-B1EB-4E10-9C29-0B8B3CD29BA6}" type="slidenum">
+            <a:fld id="{466CBC16-03F9-4EFF-A443-63D10023E700}" type="slidenum">
               <a:rPr lang="en-US" smtClean="0"/>
               <a:t>‹#›</a:t>
             </a:fld>
@@ -2214,7 +2248,7 @@
           <p:cNvPr id="7" name="body">
             <a:extLst>
               <a:ext uri="{FF2B5EF4-FFF2-40B4-BE49-F238E27FC236}">
-                <a16:creationId xmlns:a16="http://schemas.microsoft.com/office/drawing/2014/main" id="{2F455E0A-E737-A1B2-C885-C5EF8976AE8B}"/>
+                <a16:creationId xmlns:a16="http://schemas.microsoft.com/office/drawing/2014/main" id="{1384E1F5-2406-8B43-C666-FDDA817D61C8}"/>
               </a:ext>
             </a:extLst>
           </p:cNvPr>
@@ -2259,7 +2293,7 @@
           <p:cNvPr id="8" name="source">
             <a:extLst>
               <a:ext uri="{FF2B5EF4-FFF2-40B4-BE49-F238E27FC236}">
-                <a16:creationId xmlns:a16="http://schemas.microsoft.com/office/drawing/2014/main" id="{23C9631B-12FD-3B58-123A-A13F20F7301F}"/>
+                <a16:creationId xmlns:a16="http://schemas.microsoft.com/office/drawing/2014/main" id="{61ABA265-F311-F925-7BC9-CC64A818C049}"/>
               </a:ext>
             </a:extLst>
           </p:cNvPr>
@@ -2281,7 +2315,10 @@
             </a:avLst>
           </a:prstGeom>
           <a:solidFill>
-            <a:schemeClr val="accent1"/>
+            <a:schemeClr val="accent1">
+              <a:lumMod val="70000"/>
+              <a:lumOff val="30000"/>
+            </a:schemeClr>
           </a:solidFill>
         </p:spPr>
         <p:txBody>
@@ -2314,7 +2351,7 @@
     </p:spTree>
     <p:extLst>
       <p:ext uri="{BB962C8B-B14F-4D97-AF65-F5344CB8AC3E}">
-        <p14:creationId xmlns:p14="http://schemas.microsoft.com/office/powerpoint/2010/main" val="1601994239"/>
+        <p14:creationId xmlns:p14="http://schemas.microsoft.com/office/powerpoint/2010/main" val="42243259"/>
       </p:ext>
     </p:extLst>
   </p:cSld>
@@ -2346,7 +2383,7 @@
           <p:cNvPr id="6" name="glow">
             <a:extLst>
               <a:ext uri="{FF2B5EF4-FFF2-40B4-BE49-F238E27FC236}">
-                <a16:creationId xmlns:a16="http://schemas.microsoft.com/office/drawing/2014/main" id="{B873165F-BB2D-7324-2131-845748C1FAB8}"/>
+                <a16:creationId xmlns:a16="http://schemas.microsoft.com/office/drawing/2014/main" id="{933F2E5D-19BD-EA5E-9E24-264815314DBA}"/>
               </a:ext>
             </a:extLst>
           </p:cNvPr>
@@ -2365,11 +2402,15 @@
             <a:gsLst>
               <a:gs pos="0">
                 <a:schemeClr val="accent1">
+                  <a:lumMod val="70000"/>
+                  <a:lumOff val="30000"/>
                   <a:alpha val="28000"/>
                 </a:schemeClr>
               </a:gs>
               <a:gs pos="100000">
                 <a:schemeClr val="accent1">
+                  <a:lumMod val="70000"/>
+                  <a:lumOff val="30000"/>
                   <a:alpha val="0"/>
                 </a:schemeClr>
               </a:gs>
@@ -2528,9 +2569,9 @@
             </a:lvl1pPr>
           </a:lstStyle>
           <a:p>
-            <a:fld id="{E74088FC-AB1D-4731-A24C-F46EBDB0C5A7}" type="datetimeFigureOut">
+            <a:fld id="{F3B25E4A-609E-4439-9216-58A1FB513E4F}" type="datetimeFigureOut">
               <a:rPr lang="en-US" smtClean="0"/>
-              <a:t>10/3/2026</a:t>
+              <a:t>10/4/2026</a:t>
             </a:fld>
             <a:endParaRPr lang="en-US"/>
           </a:p>
@@ -2565,7 +2606,7 @@
             </a:lvl1pPr>
           </a:lstStyle>
           <a:p>
-            <a:fld id="{E4AD76C8-B1EB-4E10-9C29-0B8B3CD29BA6}" type="slidenum">
+            <a:fld id="{466CBC16-03F9-4EFF-A443-63D10023E700}" type="slidenum">
               <a:rPr lang="en-US" smtClean="0"/>
               <a:t>‹#›</a:t>
             </a:fld>
@@ -2578,7 +2619,7 @@
           <p:cNvPr id="7" name="item_1_title">
             <a:extLst>
               <a:ext uri="{FF2B5EF4-FFF2-40B4-BE49-F238E27FC236}">
-                <a16:creationId xmlns:a16="http://schemas.microsoft.com/office/drawing/2014/main" id="{1DB1692F-082F-1E51-FC4D-3E8EC7B07519}"/>
+                <a16:creationId xmlns:a16="http://schemas.microsoft.com/office/drawing/2014/main" id="{D5B1EA74-35B6-545E-7012-A68C0D49C2D1}"/>
               </a:ext>
             </a:extLst>
           </p:cNvPr>
@@ -2608,7 +2649,10 @@
               <a:buNone/>
               <a:defRPr sz="2000" b="1">
                 <a:solidFill>
-                  <a:schemeClr val="accent1"/>
+                  <a:schemeClr val="accent1">
+                    <a:lumMod val="70000"/>
+                    <a:lumOff val="30000"/>
+                  </a:schemeClr>
                 </a:solidFill>
                 <a:latin typeface="+mj-lt"/>
               </a:defRPr>
@@ -2628,7 +2672,7 @@
           <p:cNvPr id="8" name="item_1">
             <a:extLst>
               <a:ext uri="{FF2B5EF4-FFF2-40B4-BE49-F238E27FC236}">
-                <a16:creationId xmlns:a16="http://schemas.microsoft.com/office/drawing/2014/main" id="{A93A79FC-A465-CFA7-98F1-5FC7DBCC9D43}"/>
+                <a16:creationId xmlns:a16="http://schemas.microsoft.com/office/drawing/2014/main" id="{B6F5CFD2-1E61-B7CD-9C0A-9B8E525AA020}"/>
               </a:ext>
             </a:extLst>
           </p:cNvPr>
@@ -2676,7 +2720,7 @@
           <p:cNvPr id="9" name="item_2_title">
             <a:extLst>
               <a:ext uri="{FF2B5EF4-FFF2-40B4-BE49-F238E27FC236}">
-                <a16:creationId xmlns:a16="http://schemas.microsoft.com/office/drawing/2014/main" id="{01577E30-F995-04E1-69FD-B5530A99D715}"/>
+                <a16:creationId xmlns:a16="http://schemas.microsoft.com/office/drawing/2014/main" id="{C7D20FF6-7B16-B457-A4CF-3AB766471A68}"/>
               </a:ext>
             </a:extLst>
           </p:cNvPr>
@@ -2709,7 +2753,10 @@
               <a:buNone/>
               <a:defRPr sz="2000" b="1">
                 <a:solidFill>
-                  <a:schemeClr val="accent1"/>
+                  <a:schemeClr val="accent1">
+                    <a:lumMod val="70000"/>
+                    <a:lumOff val="30000"/>
+                  </a:schemeClr>
                 </a:solidFill>
                 <a:latin typeface="+mj-lt"/>
               </a:defRPr>
@@ -2729,7 +2776,7 @@
           <p:cNvPr id="10" name="item_2">
             <a:extLst>
               <a:ext uri="{FF2B5EF4-FFF2-40B4-BE49-F238E27FC236}">
-                <a16:creationId xmlns:a16="http://schemas.microsoft.com/office/drawing/2014/main" id="{B066A2C9-C882-105E-4BB9-9D7614E2A911}"/>
+                <a16:creationId xmlns:a16="http://schemas.microsoft.com/office/drawing/2014/main" id="{F24B23EE-BAD9-35A2-2107-2B8D5E4F7376}"/>
               </a:ext>
             </a:extLst>
           </p:cNvPr>
@@ -2777,7 +2824,7 @@
           <p:cNvPr id="11" name="item_3_title">
             <a:extLst>
               <a:ext uri="{FF2B5EF4-FFF2-40B4-BE49-F238E27FC236}">
-                <a16:creationId xmlns:a16="http://schemas.microsoft.com/office/drawing/2014/main" id="{E2404D4D-F4A4-F908-6013-4D6524FDB8B9}"/>
+                <a16:creationId xmlns:a16="http://schemas.microsoft.com/office/drawing/2014/main" id="{3F3482A9-50BD-3195-AB47-03A66A029099}"/>
               </a:ext>
             </a:extLst>
           </p:cNvPr>
@@ -2810,7 +2857,10 @@
               <a:buNone/>
               <a:defRPr sz="2000" b="1">
                 <a:solidFill>
-                  <a:schemeClr val="accent1"/>
+                  <a:schemeClr val="accent1">
+                    <a:lumMod val="70000"/>
+                    <a:lumOff val="30000"/>
+                  </a:schemeClr>
                 </a:solidFill>
                 <a:latin typeface="+mj-lt"/>
               </a:defRPr>
@@ -2830,7 +2880,7 @@
           <p:cNvPr id="12" name="item_3">
             <a:extLst>
               <a:ext uri="{FF2B5EF4-FFF2-40B4-BE49-F238E27FC236}">
-                <a16:creationId xmlns:a16="http://schemas.microsoft.com/office/drawing/2014/main" id="{E0E3A896-93C2-C36D-4156-62D778A11368}"/>
+                <a16:creationId xmlns:a16="http://schemas.microsoft.com/office/drawing/2014/main" id="{E5B8F4A7-0A5A-17E1-8A7B-24CF47CE8430}"/>
               </a:ext>
             </a:extLst>
           </p:cNvPr>
@@ -2878,7 +2928,7 @@
           <p:cNvPr id="13" name="item_4_title">
             <a:extLst>
               <a:ext uri="{FF2B5EF4-FFF2-40B4-BE49-F238E27FC236}">
-                <a16:creationId xmlns:a16="http://schemas.microsoft.com/office/drawing/2014/main" id="{6B58F933-B0D1-E6E8-BB48-26CE6463E5BB}"/>
+                <a16:creationId xmlns:a16="http://schemas.microsoft.com/office/drawing/2014/main" id="{EA29D051-761E-B1CD-973C-196F253D4BE3}"/>
               </a:ext>
             </a:extLst>
           </p:cNvPr>
@@ -2911,7 +2961,10 @@
               <a:buNone/>
               <a:defRPr sz="2000" b="1">
                 <a:solidFill>
-                  <a:schemeClr val="accent1"/>
+                  <a:schemeClr val="accent1">
+                    <a:lumMod val="70000"/>
+                    <a:lumOff val="30000"/>
+                  </a:schemeClr>
                 </a:solidFill>
                 <a:latin typeface="+mj-lt"/>
               </a:defRPr>
@@ -2931,7 +2984,7 @@
           <p:cNvPr id="14" name="item_4">
             <a:extLst>
               <a:ext uri="{FF2B5EF4-FFF2-40B4-BE49-F238E27FC236}">
-                <a16:creationId xmlns:a16="http://schemas.microsoft.com/office/drawing/2014/main" id="{CBF2A7E3-72D5-5AD3-86A1-B13FEF10602A}"/>
+                <a16:creationId xmlns:a16="http://schemas.microsoft.com/office/drawing/2014/main" id="{C63C99FB-E75A-511D-035E-656CE0E33323}"/>
               </a:ext>
             </a:extLst>
           </p:cNvPr>
@@ -2979,7 +3032,7 @@
           <p:cNvPr id="15" name="source">
             <a:extLst>
               <a:ext uri="{FF2B5EF4-FFF2-40B4-BE49-F238E27FC236}">
-                <a16:creationId xmlns:a16="http://schemas.microsoft.com/office/drawing/2014/main" id="{CF4E50A9-7796-9DF0-CC3C-C88A66DAB148}"/>
+                <a16:creationId xmlns:a16="http://schemas.microsoft.com/office/drawing/2014/main" id="{899B0E5B-A3A0-5139-D898-580AE495129D}"/>
               </a:ext>
             </a:extLst>
           </p:cNvPr>
@@ -3001,7 +3054,10 @@
             </a:avLst>
           </a:prstGeom>
           <a:solidFill>
-            <a:schemeClr val="accent1"/>
+            <a:schemeClr val="accent1">
+              <a:lumMod val="70000"/>
+              <a:lumOff val="30000"/>
+            </a:schemeClr>
           </a:solidFill>
         </p:spPr>
         <p:txBody>
@@ -3034,7 +3090,7 @@
     </p:spTree>
     <p:extLst>
       <p:ext uri="{BB962C8B-B14F-4D97-AF65-F5344CB8AC3E}">
-        <p14:creationId xmlns:p14="http://schemas.microsoft.com/office/powerpoint/2010/main" val="2140031972"/>
+        <p14:creationId xmlns:p14="http://schemas.microsoft.com/office/powerpoint/2010/main" val="831003675"/>
       </p:ext>
     </p:extLst>
   </p:cSld>
@@ -3066,7 +3122,7 @@
           <p:cNvPr id="6" name="glow">
             <a:extLst>
               <a:ext uri="{FF2B5EF4-FFF2-40B4-BE49-F238E27FC236}">
-                <a16:creationId xmlns:a16="http://schemas.microsoft.com/office/drawing/2014/main" id="{3ABE3CBA-ECEE-8AE5-036F-83969EBE9991}"/>
+                <a16:creationId xmlns:a16="http://schemas.microsoft.com/office/drawing/2014/main" id="{C333D717-B20A-DAAA-1F91-A4E8CF9505BE}"/>
               </a:ext>
             </a:extLst>
           </p:cNvPr>
@@ -3085,11 +3141,15 @@
             <a:gsLst>
               <a:gs pos="0">
                 <a:schemeClr val="accent1">
+                  <a:lumMod val="70000"/>
+                  <a:lumOff val="30000"/>
                   <a:alpha val="28000"/>
                 </a:schemeClr>
               </a:gs>
               <a:gs pos="100000">
                 <a:schemeClr val="accent1">
+                  <a:lumMod val="70000"/>
+                  <a:lumOff val="30000"/>
                   <a:alpha val="0"/>
                 </a:schemeClr>
               </a:gs>
@@ -3248,9 +3308,9 @@
             </a:lvl1pPr>
           </a:lstStyle>
           <a:p>
-            <a:fld id="{E74088FC-AB1D-4731-A24C-F46EBDB0C5A7}" type="datetimeFigureOut">
+            <a:fld id="{F3B25E4A-609E-4439-9216-58A1FB513E4F}" type="datetimeFigureOut">
               <a:rPr lang="en-US" smtClean="0"/>
-              <a:t>10/3/2026</a:t>
+              <a:t>10/4/2026</a:t>
             </a:fld>
             <a:endParaRPr lang="en-US"/>
           </a:p>
@@ -3285,7 +3345,7 @@
             </a:lvl1pPr>
           </a:lstStyle>
           <a:p>
-            <a:fld id="{E4AD76C8-B1EB-4E10-9C29-0B8B3CD29BA6}" type="slidenum">
+            <a:fld id="{466CBC16-03F9-4EFF-A443-63D10023E700}" type="slidenum">
               <a:rPr lang="en-US" smtClean="0"/>
               <a:t>‹#›</a:t>
             </a:fld>
@@ -3298,7 +3358,7 @@
           <p:cNvPr id="7" name="body">
             <a:extLst>
               <a:ext uri="{FF2B5EF4-FFF2-40B4-BE49-F238E27FC236}">
-                <a16:creationId xmlns:a16="http://schemas.microsoft.com/office/drawing/2014/main" id="{0B9F8482-3F65-EE01-4A89-36A92C8C40A6}"/>
+                <a16:creationId xmlns:a16="http://schemas.microsoft.com/office/drawing/2014/main" id="{34A274C5-6C75-E0D6-4040-B6C154A4C3FF}"/>
               </a:ext>
             </a:extLst>
           </p:cNvPr>
@@ -3340,7 +3400,7 @@
           <p:cNvPr id="8" name="kpi_value_1">
             <a:extLst>
               <a:ext uri="{FF2B5EF4-FFF2-40B4-BE49-F238E27FC236}">
-                <a16:creationId xmlns:a16="http://schemas.microsoft.com/office/drawing/2014/main" id="{A1D61CF5-550B-1A52-0E56-FA656C61FAF2}"/>
+                <a16:creationId xmlns:a16="http://schemas.microsoft.com/office/drawing/2014/main" id="{4CC3C096-6859-5C98-9BC3-3E428FF9B9AA}"/>
               </a:ext>
             </a:extLst>
           </p:cNvPr>
@@ -3373,7 +3433,10 @@
               <a:buNone/>
               <a:defRPr sz="10800" b="1">
                 <a:solidFill>
-                  <a:schemeClr val="accent1"/>
+                  <a:schemeClr val="accent1">
+                    <a:lumMod val="70000"/>
+                    <a:lumOff val="30000"/>
+                  </a:schemeClr>
                 </a:solidFill>
                 <a:latin typeface="+mj-lt"/>
               </a:defRPr>
@@ -3393,7 +3456,7 @@
           <p:cNvPr id="9" name="kpi_label_1">
             <a:extLst>
               <a:ext uri="{FF2B5EF4-FFF2-40B4-BE49-F238E27FC236}">
-                <a16:creationId xmlns:a16="http://schemas.microsoft.com/office/drawing/2014/main" id="{BA5296B1-55E9-3ABB-F4B7-4E4768A4943A}"/>
+                <a16:creationId xmlns:a16="http://schemas.microsoft.com/office/drawing/2014/main" id="{959361EC-6BEC-EFA3-071C-CEE4108ACDA4}"/>
               </a:ext>
             </a:extLst>
           </p:cNvPr>
@@ -3441,7 +3504,7 @@
           <p:cNvPr id="10" name="source">
             <a:extLst>
               <a:ext uri="{FF2B5EF4-FFF2-40B4-BE49-F238E27FC236}">
-                <a16:creationId xmlns:a16="http://schemas.microsoft.com/office/drawing/2014/main" id="{FB0153F9-57AE-EEB4-6A4D-4F9970C39F7F}"/>
+                <a16:creationId xmlns:a16="http://schemas.microsoft.com/office/drawing/2014/main" id="{E353BA3D-3307-3231-02AB-209CD9473D4F}"/>
               </a:ext>
             </a:extLst>
           </p:cNvPr>
@@ -3463,7 +3526,10 @@
             </a:avLst>
           </a:prstGeom>
           <a:solidFill>
-            <a:schemeClr val="accent1"/>
+            <a:schemeClr val="accent1">
+              <a:lumMod val="70000"/>
+              <a:lumOff val="30000"/>
+            </a:schemeClr>
           </a:solidFill>
         </p:spPr>
         <p:txBody>
@@ -3496,7 +3562,7 @@
     </p:spTree>
     <p:extLst>
       <p:ext uri="{BB962C8B-B14F-4D97-AF65-F5344CB8AC3E}">
-        <p14:creationId xmlns:p14="http://schemas.microsoft.com/office/powerpoint/2010/main" val="2179177626"/>
+        <p14:creationId xmlns:p14="http://schemas.microsoft.com/office/powerpoint/2010/main" val="2783566021"/>
       </p:ext>
     </p:extLst>
   </p:cSld>
@@ -3528,7 +3594,7 @@
           <p:cNvPr id="6" name="glow">
             <a:extLst>
               <a:ext uri="{FF2B5EF4-FFF2-40B4-BE49-F238E27FC236}">
-                <a16:creationId xmlns:a16="http://schemas.microsoft.com/office/drawing/2014/main" id="{6771B206-371F-3558-641B-A86180B0A663}"/>
+                <a16:creationId xmlns:a16="http://schemas.microsoft.com/office/drawing/2014/main" id="{707DFE9B-8840-481E-D9A4-E6BCFA33F85D}"/>
               </a:ext>
             </a:extLst>
           </p:cNvPr>
@@ -3547,11 +3613,15 @@
             <a:gsLst>
               <a:gs pos="0">
                 <a:schemeClr val="accent1">
+                  <a:lumMod val="70000"/>
+                  <a:lumOff val="30000"/>
                   <a:alpha val="28000"/>
                 </a:schemeClr>
               </a:gs>
               <a:gs pos="100000">
                 <a:schemeClr val="accent1">
+                  <a:lumMod val="70000"/>
+                  <a:lumOff val="30000"/>
                   <a:alpha val="0"/>
                 </a:schemeClr>
               </a:gs>
@@ -3710,9 +3780,9 @@
             </a:lvl1pPr>
           </a:lstStyle>
           <a:p>
-            <a:fld id="{E74088FC-AB1D-4731-A24C-F46EBDB0C5A7}" type="datetimeFigureOut">
+            <a:fld id="{F3B25E4A-609E-4439-9216-58A1FB513E4F}" type="datetimeFigureOut">
               <a:rPr lang="en-US" smtClean="0"/>
-              <a:t>10/3/2026</a:t>
+              <a:t>10/4/2026</a:t>
             </a:fld>
             <a:endParaRPr lang="en-US"/>
           </a:p>
@@ -3747,7 +3817,7 @@
             </a:lvl1pPr>
           </a:lstStyle>
           <a:p>
-            <a:fld id="{E4AD76C8-B1EB-4E10-9C29-0B8B3CD29BA6}" type="slidenum">
+            <a:fld id="{466CBC16-03F9-4EFF-A443-63D10023E700}" type="slidenum">
               <a:rPr lang="en-US" smtClean="0"/>
               <a:t>‹#›</a:t>
             </a:fld>
@@ -3760,7 +3830,7 @@
           <p:cNvPr id="7" name="body">
             <a:extLst>
               <a:ext uri="{FF2B5EF4-FFF2-40B4-BE49-F238E27FC236}">
-                <a16:creationId xmlns:a16="http://schemas.microsoft.com/office/drawing/2014/main" id="{37424DB2-F1C5-4A83-2931-B8E2660224BA}"/>
+                <a16:creationId xmlns:a16="http://schemas.microsoft.com/office/drawing/2014/main" id="{EC273846-454F-248C-6C9A-1D700C64F486}"/>
               </a:ext>
             </a:extLst>
           </p:cNvPr>
@@ -3802,7 +3872,7 @@
           <p:cNvPr id="8" name="kpi_value_1">
             <a:extLst>
               <a:ext uri="{FF2B5EF4-FFF2-40B4-BE49-F238E27FC236}">
-                <a16:creationId xmlns:a16="http://schemas.microsoft.com/office/drawing/2014/main" id="{000E1729-B7FA-32CA-BE95-2EA037EDF6CB}"/>
+                <a16:creationId xmlns:a16="http://schemas.microsoft.com/office/drawing/2014/main" id="{4769EC42-6472-F0B4-239A-18563C47430A}"/>
               </a:ext>
             </a:extLst>
           </p:cNvPr>
@@ -3835,7 +3905,10 @@
               <a:buNone/>
               <a:defRPr sz="6000" b="1">
                 <a:solidFill>
-                  <a:schemeClr val="accent1"/>
+                  <a:schemeClr val="accent1">
+                    <a:lumMod val="70000"/>
+                    <a:lumOff val="30000"/>
+                  </a:schemeClr>
                 </a:solidFill>
                 <a:latin typeface="+mj-lt"/>
               </a:defRPr>
@@ -3855,7 +3928,7 @@
           <p:cNvPr id="9" name="kpi_label_1">
             <a:extLst>
               <a:ext uri="{FF2B5EF4-FFF2-40B4-BE49-F238E27FC236}">
-                <a16:creationId xmlns:a16="http://schemas.microsoft.com/office/drawing/2014/main" id="{402C51A3-D95C-4FB9-FFED-C90F05ADC8E1}"/>
+                <a16:creationId xmlns:a16="http://schemas.microsoft.com/office/drawing/2014/main" id="{962C4775-3640-05E5-8776-902212627D0B}"/>
               </a:ext>
             </a:extLst>
           </p:cNvPr>
@@ -3903,7 +3976,7 @@
           <p:cNvPr id="10" name="kpi_value_2">
             <a:extLst>
               <a:ext uri="{FF2B5EF4-FFF2-40B4-BE49-F238E27FC236}">
-                <a16:creationId xmlns:a16="http://schemas.microsoft.com/office/drawing/2014/main" id="{202042B6-370A-B7DE-AE78-BDFC85EDDC63}"/>
+                <a16:creationId xmlns:a16="http://schemas.microsoft.com/office/drawing/2014/main" id="{5014ECB8-39DE-4CBE-5B9F-D2871FA93349}"/>
               </a:ext>
             </a:extLst>
           </p:cNvPr>
@@ -3936,7 +4009,10 @@
               <a:buNone/>
               <a:defRPr sz="6000" b="1">
                 <a:solidFill>
-                  <a:schemeClr val="accent1"/>
+                  <a:schemeClr val="accent1">
+                    <a:lumMod val="70000"/>
+                    <a:lumOff val="30000"/>
+                  </a:schemeClr>
                 </a:solidFill>
                 <a:latin typeface="+mj-lt"/>
               </a:defRPr>
@@ -3956,7 +4032,7 @@
           <p:cNvPr id="11" name="kpi_label_2">
             <a:extLst>
               <a:ext uri="{FF2B5EF4-FFF2-40B4-BE49-F238E27FC236}">
-                <a16:creationId xmlns:a16="http://schemas.microsoft.com/office/drawing/2014/main" id="{21B8757E-A524-66BE-94FF-E1DC7C6EDFD4}"/>
+                <a16:creationId xmlns:a16="http://schemas.microsoft.com/office/drawing/2014/main" id="{6E7F51BB-A87A-FD83-85FC-EE0B0CD24C69}"/>
               </a:ext>
             </a:extLst>
           </p:cNvPr>
@@ -4004,7 +4080,7 @@
           <p:cNvPr id="12" name="kpi_value_3">
             <a:extLst>
               <a:ext uri="{FF2B5EF4-FFF2-40B4-BE49-F238E27FC236}">
-                <a16:creationId xmlns:a16="http://schemas.microsoft.com/office/drawing/2014/main" id="{BBD0A224-3947-5E49-9100-DE1ABB060886}"/>
+                <a16:creationId xmlns:a16="http://schemas.microsoft.com/office/drawing/2014/main" id="{A94A119E-6676-4BE9-E153-1B1EFD4273AE}"/>
               </a:ext>
             </a:extLst>
           </p:cNvPr>
@@ -4037,7 +4113,10 @@
               <a:buNone/>
               <a:defRPr sz="6000" b="1">
                 <a:solidFill>
-                  <a:schemeClr val="accent1"/>
+                  <a:schemeClr val="accent1">
+                    <a:lumMod val="70000"/>
+                    <a:lumOff val="30000"/>
+                  </a:schemeClr>
                 </a:solidFill>
                 <a:latin typeface="+mj-lt"/>
               </a:defRPr>
@@ -4057,7 +4136,7 @@
           <p:cNvPr id="13" name="kpi_label_3">
             <a:extLst>
               <a:ext uri="{FF2B5EF4-FFF2-40B4-BE49-F238E27FC236}">
-                <a16:creationId xmlns:a16="http://schemas.microsoft.com/office/drawing/2014/main" id="{453B1D1C-C237-772A-7154-7DA2243A1B6B}"/>
+                <a16:creationId xmlns:a16="http://schemas.microsoft.com/office/drawing/2014/main" id="{CC9E854A-D07D-E94C-D271-FCC354C480F5}"/>
               </a:ext>
             </a:extLst>
           </p:cNvPr>
@@ -4105,7 +4184,7 @@
           <p:cNvPr id="14" name="kpi_value_4">
             <a:extLst>
               <a:ext uri="{FF2B5EF4-FFF2-40B4-BE49-F238E27FC236}">
-                <a16:creationId xmlns:a16="http://schemas.microsoft.com/office/drawing/2014/main" id="{A4E5999C-31C6-AF65-1EB8-771EA0E973A8}"/>
+                <a16:creationId xmlns:a16="http://schemas.microsoft.com/office/drawing/2014/main" id="{E6489373-713A-E7B1-C691-E101F59A3E35}"/>
               </a:ext>
             </a:extLst>
           </p:cNvPr>
@@ -4118,7 +4197,7 @@
         </p:nvSpPr>
         <p:spPr>
           <a:xfrm>
-            <a:off x="8268623" y="3959883"/>
+            <a:off x="8268624" y="3959883"/>
             <a:ext cx="1924748" cy="639128"/>
           </a:xfrm>
           <a:prstGeom prst="rect">
@@ -4138,7 +4217,10 @@
               <a:buNone/>
               <a:defRPr sz="6000" b="1">
                 <a:solidFill>
-                  <a:schemeClr val="accent1"/>
+                  <a:schemeClr val="accent1">
+                    <a:lumMod val="70000"/>
+                    <a:lumOff val="30000"/>
+                  </a:schemeClr>
                 </a:solidFill>
                 <a:latin typeface="+mj-lt"/>
               </a:defRPr>
@@ -4158,7 +4240,7 @@
           <p:cNvPr id="15" name="kpi_label_4">
             <a:extLst>
               <a:ext uri="{FF2B5EF4-FFF2-40B4-BE49-F238E27FC236}">
-                <a16:creationId xmlns:a16="http://schemas.microsoft.com/office/drawing/2014/main" id="{E7CE7EB8-5D28-E90B-AD2C-CD082B24CE20}"/>
+                <a16:creationId xmlns:a16="http://schemas.microsoft.com/office/drawing/2014/main" id="{601C9F7B-AFDA-FAFE-9106-849103728D7D}"/>
               </a:ext>
             </a:extLst>
           </p:cNvPr>
@@ -4171,7 +4253,7 @@
         </p:nvSpPr>
         <p:spPr>
           <a:xfrm>
-            <a:off x="8268623" y="4599012"/>
+            <a:off x="8268624" y="4599012"/>
             <a:ext cx="1924748" cy="355071"/>
           </a:xfrm>
           <a:prstGeom prst="rect">
@@ -4206,7 +4288,7 @@
           <p:cNvPr id="16" name="source">
             <a:extLst>
               <a:ext uri="{FF2B5EF4-FFF2-40B4-BE49-F238E27FC236}">
-                <a16:creationId xmlns:a16="http://schemas.microsoft.com/office/drawing/2014/main" id="{C812EE10-356E-A93A-EF58-DA97950BEF44}"/>
+                <a16:creationId xmlns:a16="http://schemas.microsoft.com/office/drawing/2014/main" id="{82F42264-C626-38D1-02F9-62D27AFA3FBF}"/>
               </a:ext>
             </a:extLst>
           </p:cNvPr>
@@ -4228,7 +4310,10 @@
             </a:avLst>
           </a:prstGeom>
           <a:solidFill>
-            <a:schemeClr val="accent1"/>
+            <a:schemeClr val="accent1">
+              <a:lumMod val="70000"/>
+              <a:lumOff val="30000"/>
+            </a:schemeClr>
           </a:solidFill>
         </p:spPr>
         <p:txBody>
@@ -4261,7 +4346,7 @@
     </p:spTree>
     <p:extLst>
       <p:ext uri="{BB962C8B-B14F-4D97-AF65-F5344CB8AC3E}">
-        <p14:creationId xmlns:p14="http://schemas.microsoft.com/office/powerpoint/2010/main" val="2083303161"/>
+        <p14:creationId xmlns:p14="http://schemas.microsoft.com/office/powerpoint/2010/main" val="153993691"/>
       </p:ext>
     </p:extLst>
   </p:cSld>
@@ -4293,7 +4378,7 @@
           <p:cNvPr id="6" name="glow">
             <a:extLst>
               <a:ext uri="{FF2B5EF4-FFF2-40B4-BE49-F238E27FC236}">
-                <a16:creationId xmlns:a16="http://schemas.microsoft.com/office/drawing/2014/main" id="{FCF88333-800A-5544-295F-1E140B58D90C}"/>
+                <a16:creationId xmlns:a16="http://schemas.microsoft.com/office/drawing/2014/main" id="{39D6561D-9378-A533-FFE7-8B985245E7E9}"/>
               </a:ext>
             </a:extLst>
           </p:cNvPr>
@@ -4312,11 +4397,15 @@
             <a:gsLst>
               <a:gs pos="0">
                 <a:schemeClr val="accent1">
+                  <a:lumMod val="70000"/>
+                  <a:lumOff val="30000"/>
                   <a:alpha val="28000"/>
                 </a:schemeClr>
               </a:gs>
               <a:gs pos="100000">
                 <a:schemeClr val="accent1">
+                  <a:lumMod val="70000"/>
+                  <a:lumOff val="30000"/>
                   <a:alpha val="0"/>
                 </a:schemeClr>
               </a:gs>
@@ -4475,9 +4564,9 @@
             </a:lvl1pPr>
           </a:lstStyle>
           <a:p>
-            <a:fld id="{E74088FC-AB1D-4731-A24C-F46EBDB0C5A7}" type="datetimeFigureOut">
+            <a:fld id="{F3B25E4A-609E-4439-9216-58A1FB513E4F}" type="datetimeFigureOut">
               <a:rPr lang="en-US" smtClean="0"/>
-              <a:t>10/3/2026</a:t>
+              <a:t>10/4/2026</a:t>
             </a:fld>
             <a:endParaRPr lang="en-US"/>
           </a:p>
@@ -4512,7 +4601,7 @@
             </a:lvl1pPr>
           </a:lstStyle>
           <a:p>
-            <a:fld id="{E4AD76C8-B1EB-4E10-9C29-0B8B3CD29BA6}" type="slidenum">
+            <a:fld id="{466CBC16-03F9-4EFF-A443-63D10023E700}" type="slidenum">
               <a:rPr lang="en-US" smtClean="0"/>
               <a:t>‹#›</a:t>
             </a:fld>
@@ -4525,7 +4614,7 @@
           <p:cNvPr id="7" name="body">
             <a:extLst>
               <a:ext uri="{FF2B5EF4-FFF2-40B4-BE49-F238E27FC236}">
-                <a16:creationId xmlns:a16="http://schemas.microsoft.com/office/drawing/2014/main" id="{7AC962DD-118D-9855-25E7-0E84A5A7A4CB}"/>
+                <a16:creationId xmlns:a16="http://schemas.microsoft.com/office/drawing/2014/main" id="{CE2BA959-4667-1494-5832-1AD0C74D028D}"/>
               </a:ext>
             </a:extLst>
           </p:cNvPr>
@@ -4567,7 +4656,7 @@
           <p:cNvPr id="8" name="kpi_value_1">
             <a:extLst>
               <a:ext uri="{FF2B5EF4-FFF2-40B4-BE49-F238E27FC236}">
-                <a16:creationId xmlns:a16="http://schemas.microsoft.com/office/drawing/2014/main" id="{0ED07E92-D5C4-2082-8BB0-D15076A517D6}"/>
+                <a16:creationId xmlns:a16="http://schemas.microsoft.com/office/drawing/2014/main" id="{82DDB411-7B18-AA75-B7A6-5598304F69BA}"/>
               </a:ext>
             </a:extLst>
           </p:cNvPr>
@@ -4600,7 +4689,10 @@
               <a:buNone/>
               <a:defRPr sz="6000" b="1">
                 <a:solidFill>
-                  <a:schemeClr val="accent1"/>
+                  <a:schemeClr val="accent1">
+                    <a:lumMod val="70000"/>
+                    <a:lumOff val="30000"/>
+                  </a:schemeClr>
                 </a:solidFill>
                 <a:latin typeface="+mj-lt"/>
               </a:defRPr>
@@ -4620,7 +4712,7 @@
           <p:cNvPr id="9" name="kpi_label_1">
             <a:extLst>
               <a:ext uri="{FF2B5EF4-FFF2-40B4-BE49-F238E27FC236}">
-                <a16:creationId xmlns:a16="http://schemas.microsoft.com/office/drawing/2014/main" id="{7281373E-B1A7-AD3F-50A1-70790E3BEE8A}"/>
+                <a16:creationId xmlns:a16="http://schemas.microsoft.com/office/drawing/2014/main" id="{82323666-7310-0F4A-DAD9-1FF50293797E}"/>
               </a:ext>
             </a:extLst>
           </p:cNvPr>
@@ -4668,7 +4760,7 @@
           <p:cNvPr id="10" name="kpi_value_2">
             <a:extLst>
               <a:ext uri="{FF2B5EF4-FFF2-40B4-BE49-F238E27FC236}">
-                <a16:creationId xmlns:a16="http://schemas.microsoft.com/office/drawing/2014/main" id="{62C733CD-817C-5EA5-26D1-D65A452C9CFB}"/>
+                <a16:creationId xmlns:a16="http://schemas.microsoft.com/office/drawing/2014/main" id="{E46A9C5C-48DE-69F2-2F40-56BCD7892AA4}"/>
               </a:ext>
             </a:extLst>
           </p:cNvPr>
@@ -4701,7 +4793,10 @@
               <a:buNone/>
               <a:defRPr sz="6000" b="1">
                 <a:solidFill>
-                  <a:schemeClr val="accent1"/>
+                  <a:schemeClr val="accent1">
+                    <a:lumMod val="70000"/>
+                    <a:lumOff val="30000"/>
+                  </a:schemeClr>
                 </a:solidFill>
                 <a:latin typeface="+mj-lt"/>
               </a:defRPr>
@@ -4721,7 +4816,7 @@
           <p:cNvPr id="11" name="kpi_label_2">
             <a:extLst>
               <a:ext uri="{FF2B5EF4-FFF2-40B4-BE49-F238E27FC236}">
-                <a16:creationId xmlns:a16="http://schemas.microsoft.com/office/drawing/2014/main" id="{777EAA5E-8954-06D1-1762-EDCE6B410D2F}"/>
+                <a16:creationId xmlns:a16="http://schemas.microsoft.com/office/drawing/2014/main" id="{02AB22A8-91B6-6EA1-664D-3EE16D09A4C3}"/>
               </a:ext>
             </a:extLst>
           </p:cNvPr>
@@ -4769,7 +4864,7 @@
           <p:cNvPr id="12" name="source">
             <a:extLst>
               <a:ext uri="{FF2B5EF4-FFF2-40B4-BE49-F238E27FC236}">
-                <a16:creationId xmlns:a16="http://schemas.microsoft.com/office/drawing/2014/main" id="{5E1FD258-F4E9-BFAE-79E8-335B9ADA387B}"/>
+                <a16:creationId xmlns:a16="http://schemas.microsoft.com/office/drawing/2014/main" id="{12609FDA-673F-BC44-2DD5-2C9462771006}"/>
               </a:ext>
             </a:extLst>
           </p:cNvPr>
@@ -4791,7 +4886,10 @@
             </a:avLst>
           </a:prstGeom>
           <a:solidFill>
-            <a:schemeClr val="accent1"/>
+            <a:schemeClr val="accent1">
+              <a:lumMod val="70000"/>
+              <a:lumOff val="30000"/>
+            </a:schemeClr>
           </a:solidFill>
         </p:spPr>
         <p:txBody>
@@ -4824,7 +4922,7 @@
     </p:spTree>
     <p:extLst>
       <p:ext uri="{BB962C8B-B14F-4D97-AF65-F5344CB8AC3E}">
-        <p14:creationId xmlns:p14="http://schemas.microsoft.com/office/powerpoint/2010/main" val="139380733"/>
+        <p14:creationId xmlns:p14="http://schemas.microsoft.com/office/powerpoint/2010/main" val="466556344"/>
       </p:ext>
     </p:extLst>
   </p:cSld>
@@ -4856,7 +4954,7 @@
           <p:cNvPr id="6" name="glow">
             <a:extLst>
               <a:ext uri="{FF2B5EF4-FFF2-40B4-BE49-F238E27FC236}">
-                <a16:creationId xmlns:a16="http://schemas.microsoft.com/office/drawing/2014/main" id="{1B2BC317-E72A-47AA-E3AD-14A77DEA0A93}"/>
+                <a16:creationId xmlns:a16="http://schemas.microsoft.com/office/drawing/2014/main" id="{19067D02-F9C4-9B0A-5DC9-A8F9C40AFDA6}"/>
               </a:ext>
             </a:extLst>
           </p:cNvPr>
@@ -4875,11 +4973,15 @@
             <a:gsLst>
               <a:gs pos="0">
                 <a:schemeClr val="accent1">
+                  <a:lumMod val="70000"/>
+                  <a:lumOff val="30000"/>
                   <a:alpha val="28000"/>
                 </a:schemeClr>
               </a:gs>
               <a:gs pos="100000">
                 <a:schemeClr val="accent1">
+                  <a:lumMod val="70000"/>
+                  <a:lumOff val="30000"/>
                   <a:alpha val="0"/>
                 </a:schemeClr>
               </a:gs>
@@ -5038,9 +5140,9 @@
             </a:lvl1pPr>
           </a:lstStyle>
           <a:p>
-            <a:fld id="{E74088FC-AB1D-4731-A24C-F46EBDB0C5A7}" type="datetimeFigureOut">
+            <a:fld id="{F3B25E4A-609E-4439-9216-58A1FB513E4F}" type="datetimeFigureOut">
               <a:rPr lang="en-US" smtClean="0"/>
-              <a:t>10/3/2026</a:t>
+              <a:t>10/4/2026</a:t>
             </a:fld>
             <a:endParaRPr lang="en-US"/>
           </a:p>
@@ -5075,7 +5177,7 @@
             </a:lvl1pPr>
           </a:lstStyle>
           <a:p>
-            <a:fld id="{E4AD76C8-B1EB-4E10-9C29-0B8B3CD29BA6}" type="slidenum">
+            <a:fld id="{466CBC16-03F9-4EFF-A443-63D10023E700}" type="slidenum">
               <a:rPr lang="en-US" smtClean="0"/>
               <a:t>‹#›</a:t>
             </a:fld>
@@ -5088,7 +5190,7 @@
           <p:cNvPr id="7" name="body">
             <a:extLst>
               <a:ext uri="{FF2B5EF4-FFF2-40B4-BE49-F238E27FC236}">
-                <a16:creationId xmlns:a16="http://schemas.microsoft.com/office/drawing/2014/main" id="{66B327E8-41B1-6FAA-7D80-D75221921373}"/>
+                <a16:creationId xmlns:a16="http://schemas.microsoft.com/office/drawing/2014/main" id="{3FA2B2BD-D9E2-4D8A-8042-E0C4747C154E}"/>
               </a:ext>
             </a:extLst>
           </p:cNvPr>
@@ -5130,7 +5232,7 @@
           <p:cNvPr id="8" name="kpi_value_1">
             <a:extLst>
               <a:ext uri="{FF2B5EF4-FFF2-40B4-BE49-F238E27FC236}">
-                <a16:creationId xmlns:a16="http://schemas.microsoft.com/office/drawing/2014/main" id="{59D929FC-B644-DE47-7867-4F8826F979A1}"/>
+                <a16:creationId xmlns:a16="http://schemas.microsoft.com/office/drawing/2014/main" id="{801DFDB2-95C5-3AD6-C009-FAF3D34368B7}"/>
               </a:ext>
             </a:extLst>
           </p:cNvPr>
@@ -5163,7 +5265,10 @@
               <a:buNone/>
               <a:defRPr sz="6000" b="1">
                 <a:solidFill>
-                  <a:schemeClr val="accent1"/>
+                  <a:schemeClr val="accent1">
+                    <a:lumMod val="70000"/>
+                    <a:lumOff val="30000"/>
+                  </a:schemeClr>
                 </a:solidFill>
                 <a:latin typeface="+mj-lt"/>
               </a:defRPr>
@@ -5183,7 +5288,7 @@
           <p:cNvPr id="9" name="kpi_label_1">
             <a:extLst>
               <a:ext uri="{FF2B5EF4-FFF2-40B4-BE49-F238E27FC236}">
-                <a16:creationId xmlns:a16="http://schemas.microsoft.com/office/drawing/2014/main" id="{7D883D12-1B1B-191E-4E60-D8A525CCCC5F}"/>
+                <a16:creationId xmlns:a16="http://schemas.microsoft.com/office/drawing/2014/main" id="{8DA79C3B-25F9-23C6-63F3-010EC23A9868}"/>
               </a:ext>
             </a:extLst>
           </p:cNvPr>
@@ -5231,7 +5336,7 @@
           <p:cNvPr id="10" name="kpi_value_2">
             <a:extLst>
               <a:ext uri="{FF2B5EF4-FFF2-40B4-BE49-F238E27FC236}">
-                <a16:creationId xmlns:a16="http://schemas.microsoft.com/office/drawing/2014/main" id="{E5C70104-8EF9-C145-3563-EC1592703241}"/>
+                <a16:creationId xmlns:a16="http://schemas.microsoft.com/office/drawing/2014/main" id="{90E95494-A8E1-C1E8-25A7-5EBFE52ABCC4}"/>
               </a:ext>
             </a:extLst>
           </p:cNvPr>
@@ -5264,7 +5369,10 @@
               <a:buNone/>
               <a:defRPr sz="6000" b="1">
                 <a:solidFill>
-                  <a:schemeClr val="accent1"/>
+                  <a:schemeClr val="accent1">
+                    <a:lumMod val="70000"/>
+                    <a:lumOff val="30000"/>
+                  </a:schemeClr>
                 </a:solidFill>
                 <a:latin typeface="+mj-lt"/>
               </a:defRPr>
@@ -5284,7 +5392,7 @@
           <p:cNvPr id="11" name="kpi_label_2">
             <a:extLst>
               <a:ext uri="{FF2B5EF4-FFF2-40B4-BE49-F238E27FC236}">
-                <a16:creationId xmlns:a16="http://schemas.microsoft.com/office/drawing/2014/main" id="{A87087AC-98BB-CEB6-2646-C37105A3C53A}"/>
+                <a16:creationId xmlns:a16="http://schemas.microsoft.com/office/drawing/2014/main" id="{A50A59D2-B247-05EC-39CF-AC8B86127827}"/>
               </a:ext>
             </a:extLst>
           </p:cNvPr>
@@ -5332,7 +5440,7 @@
           <p:cNvPr id="12" name="kpi_value_3">
             <a:extLst>
               <a:ext uri="{FF2B5EF4-FFF2-40B4-BE49-F238E27FC236}">
-                <a16:creationId xmlns:a16="http://schemas.microsoft.com/office/drawing/2014/main" id="{BF12EE03-3361-4413-5045-6777E56230AA}"/>
+                <a16:creationId xmlns:a16="http://schemas.microsoft.com/office/drawing/2014/main" id="{B2DA76DB-4CBF-87FA-6BDD-D886D3767E64}"/>
               </a:ext>
             </a:extLst>
           </p:cNvPr>
@@ -5365,7 +5473,10 @@
               <a:buNone/>
               <a:defRPr sz="6000" b="1">
                 <a:solidFill>
-                  <a:schemeClr val="accent1"/>
+                  <a:schemeClr val="accent1">
+                    <a:lumMod val="70000"/>
+                    <a:lumOff val="30000"/>
+                  </a:schemeClr>
                 </a:solidFill>
                 <a:latin typeface="+mj-lt"/>
               </a:defRPr>
@@ -5385,7 +5496,7 @@
           <p:cNvPr id="13" name="kpi_label_3">
             <a:extLst>
               <a:ext uri="{FF2B5EF4-FFF2-40B4-BE49-F238E27FC236}">
-                <a16:creationId xmlns:a16="http://schemas.microsoft.com/office/drawing/2014/main" id="{9DEFCD34-E879-101E-1EA0-CE4E85F0DB7E}"/>
+                <a16:creationId xmlns:a16="http://schemas.microsoft.com/office/drawing/2014/main" id="{549C7C77-F3DD-B9DF-CE85-103448E5EA84}"/>
               </a:ext>
             </a:extLst>
           </p:cNvPr>
@@ -5433,7 +5544,7 @@
           <p:cNvPr id="14" name="kpi_value_4">
             <a:extLst>
               <a:ext uri="{FF2B5EF4-FFF2-40B4-BE49-F238E27FC236}">
-                <a16:creationId xmlns:a16="http://schemas.microsoft.com/office/drawing/2014/main" id="{F91B23C3-9DA0-8C6B-DEC7-552796C00278}"/>
+                <a16:creationId xmlns:a16="http://schemas.microsoft.com/office/drawing/2014/main" id="{19B3504E-4733-4789-0BC9-C63541FEF97C}"/>
               </a:ext>
             </a:extLst>
           </p:cNvPr>
@@ -5466,7 +5577,10 @@
               <a:buNone/>
               <a:defRPr sz="6000" b="1">
                 <a:solidFill>
-                  <a:schemeClr val="accent1"/>
+                  <a:schemeClr val="accent1">
+                    <a:lumMod val="70000"/>
+                    <a:lumOff val="30000"/>
+                  </a:schemeClr>
                 </a:solidFill>
                 <a:latin typeface="+mj-lt"/>
               </a:defRPr>
@@ -5486,7 +5600,7 @@
           <p:cNvPr id="15" name="kpi_label_4">
             <a:extLst>
               <a:ext uri="{FF2B5EF4-FFF2-40B4-BE49-F238E27FC236}">
-                <a16:creationId xmlns:a16="http://schemas.microsoft.com/office/drawing/2014/main" id="{95EA60A3-63B1-C4E4-5384-81EA4C13705E}"/>
+                <a16:creationId xmlns:a16="http://schemas.microsoft.com/office/drawing/2014/main" id="{BFD6E2A6-EF22-0455-6375-D220A93475AE}"/>
               </a:ext>
             </a:extLst>
           </p:cNvPr>
@@ -5534,7 +5648,7 @@
           <p:cNvPr id="16" name="source">
             <a:extLst>
               <a:ext uri="{FF2B5EF4-FFF2-40B4-BE49-F238E27FC236}">
-                <a16:creationId xmlns:a16="http://schemas.microsoft.com/office/drawing/2014/main" id="{57012AD3-CEA5-0759-8185-7053322744C3}"/>
+                <a16:creationId xmlns:a16="http://schemas.microsoft.com/office/drawing/2014/main" id="{031F0D56-EF02-D04F-298F-30ED92C92044}"/>
               </a:ext>
             </a:extLst>
           </p:cNvPr>
@@ -5556,7 +5670,10 @@
             </a:avLst>
           </a:prstGeom>
           <a:solidFill>
-            <a:schemeClr val="accent1"/>
+            <a:schemeClr val="accent1">
+              <a:lumMod val="70000"/>
+              <a:lumOff val="30000"/>
+            </a:schemeClr>
           </a:solidFill>
         </p:spPr>
         <p:txBody>
@@ -5589,7 +5706,7 @@
     </p:spTree>
     <p:extLst>
       <p:ext uri="{BB962C8B-B14F-4D97-AF65-F5344CB8AC3E}">
-        <p14:creationId xmlns:p14="http://schemas.microsoft.com/office/powerpoint/2010/main" val="3362156089"/>
+        <p14:creationId xmlns:p14="http://schemas.microsoft.com/office/powerpoint/2010/main" val="1587688094"/>
       </p:ext>
     </p:extLst>
   </p:cSld>
@@ -5621,7 +5738,7 @@
           <p:cNvPr id="6" name="glow">
             <a:extLst>
               <a:ext uri="{FF2B5EF4-FFF2-40B4-BE49-F238E27FC236}">
-                <a16:creationId xmlns:a16="http://schemas.microsoft.com/office/drawing/2014/main" id="{AFBD2FD6-5D19-415D-B6D7-C936F6D30227}"/>
+                <a16:creationId xmlns:a16="http://schemas.microsoft.com/office/drawing/2014/main" id="{66FB22AF-7EA0-5FAF-B91D-6C0B9945EBEE}"/>
               </a:ext>
             </a:extLst>
           </p:cNvPr>
@@ -5640,11 +5757,15 @@
             <a:gsLst>
               <a:gs pos="0">
                 <a:schemeClr val="accent1">
+                  <a:lumMod val="70000"/>
+                  <a:lumOff val="30000"/>
                   <a:alpha val="28000"/>
                 </a:schemeClr>
               </a:gs>
               <a:gs pos="100000">
                 <a:schemeClr val="accent1">
+                  <a:lumMod val="70000"/>
+                  <a:lumOff val="30000"/>
                   <a:alpha val="0"/>
                 </a:schemeClr>
               </a:gs>
@@ -5803,9 +5924,9 @@
             </a:lvl1pPr>
           </a:lstStyle>
           <a:p>
-            <a:fld id="{E74088FC-AB1D-4731-A24C-F46EBDB0C5A7}" type="datetimeFigureOut">
+            <a:fld id="{F3B25E4A-609E-4439-9216-58A1FB513E4F}" type="datetimeFigureOut">
               <a:rPr lang="en-US" smtClean="0"/>
-              <a:t>10/3/2026</a:t>
+              <a:t>10/4/2026</a:t>
             </a:fld>
             <a:endParaRPr lang="en-US"/>
           </a:p>
@@ -5840,7 +5961,7 @@
             </a:lvl1pPr>
           </a:lstStyle>
           <a:p>
-            <a:fld id="{E4AD76C8-B1EB-4E10-9C29-0B8B3CD29BA6}" type="slidenum">
+            <a:fld id="{466CBC16-03F9-4EFF-A443-63D10023E700}" type="slidenum">
               <a:rPr lang="en-US" smtClean="0"/>
               <a:t>‹#›</a:t>
             </a:fld>
@@ -5853,7 +5974,7 @@
           <p:cNvPr id="7" name="item_1_title">
             <a:extLst>
               <a:ext uri="{FF2B5EF4-FFF2-40B4-BE49-F238E27FC236}">
-                <a16:creationId xmlns:a16="http://schemas.microsoft.com/office/drawing/2014/main" id="{5F022019-B684-DE8C-4599-9AA3015C1961}"/>
+                <a16:creationId xmlns:a16="http://schemas.microsoft.com/office/drawing/2014/main" id="{DA9F633C-EB8C-80A9-723B-2E8258CDF333}"/>
               </a:ext>
             </a:extLst>
           </p:cNvPr>
@@ -5867,7 +5988,7 @@
         <p:spPr>
           <a:xfrm>
             <a:off x="556884" y="2277063"/>
-            <a:ext cx="2906242" cy="573852"/>
+            <a:ext cx="2906243" cy="573852"/>
           </a:xfrm>
         </p:spPr>
         <p:txBody>
@@ -5883,7 +6004,10 @@
               <a:buNone/>
               <a:defRPr sz="2000" b="1">
                 <a:solidFill>
-                  <a:schemeClr val="accent1"/>
+                  <a:schemeClr val="accent1">
+                    <a:lumMod val="70000"/>
+                    <a:lumOff val="30000"/>
+                  </a:schemeClr>
                 </a:solidFill>
                 <a:latin typeface="+mj-lt"/>
               </a:defRPr>
@@ -5903,7 +6027,7 @@
           <p:cNvPr id="8" name="item_1">
             <a:extLst>
               <a:ext uri="{FF2B5EF4-FFF2-40B4-BE49-F238E27FC236}">
-                <a16:creationId xmlns:a16="http://schemas.microsoft.com/office/drawing/2014/main" id="{8BDD0026-FCD9-B846-00E8-A8A38012F138}"/>
+                <a16:creationId xmlns:a16="http://schemas.microsoft.com/office/drawing/2014/main" id="{27C36405-F826-40CA-C535-987FD270B9D9}"/>
               </a:ext>
             </a:extLst>
           </p:cNvPr>
@@ -5916,7 +6040,7 @@
         </p:nvSpPr>
         <p:spPr>
           <a:xfrm>
-            <a:off x="3565100" y="2277063"/>
+            <a:off x="3565101" y="2277063"/>
             <a:ext cx="6679259" cy="573852"/>
           </a:xfrm>
           <a:prstGeom prst="rect">
@@ -5951,7 +6075,7 @@
           <p:cNvPr id="9" name="item_2_title">
             <a:extLst>
               <a:ext uri="{FF2B5EF4-FFF2-40B4-BE49-F238E27FC236}">
-                <a16:creationId xmlns:a16="http://schemas.microsoft.com/office/drawing/2014/main" id="{08FB1EC3-6E2C-FFE4-EEE4-26E74C497DBF}"/>
+                <a16:creationId xmlns:a16="http://schemas.microsoft.com/office/drawing/2014/main" id="{8451BDB1-095A-BCFC-9A05-4842B14BEF64}"/>
               </a:ext>
             </a:extLst>
           </p:cNvPr>
@@ -5964,8 +6088,8 @@
         </p:nvSpPr>
         <p:spPr>
           <a:xfrm>
-            <a:off x="556884" y="3281304"/>
-            <a:ext cx="2906242" cy="573852"/>
+            <a:off x="556885" y="3281304"/>
+            <a:ext cx="2906243" cy="573852"/>
           </a:xfrm>
           <a:prstGeom prst="rect">
             <a:avLst/>
@@ -5984,7 +6108,10 @@
               <a:buNone/>
               <a:defRPr sz="2000" b="1">
                 <a:solidFill>
-                  <a:schemeClr val="accent1"/>
+                  <a:schemeClr val="accent1">
+                    <a:lumMod val="70000"/>
+                    <a:lumOff val="30000"/>
+                  </a:schemeClr>
                 </a:solidFill>
                 <a:latin typeface="+mj-lt"/>
               </a:defRPr>
@@ -6004,7 +6131,7 @@
           <p:cNvPr id="10" name="item_2">
             <a:extLst>
               <a:ext uri="{FF2B5EF4-FFF2-40B4-BE49-F238E27FC236}">
-                <a16:creationId xmlns:a16="http://schemas.microsoft.com/office/drawing/2014/main" id="{8BDE2C03-05A7-8352-49A7-C11B8F2C6206}"/>
+                <a16:creationId xmlns:a16="http://schemas.microsoft.com/office/drawing/2014/main" id="{7C7A9A2A-1C0D-B836-6040-A5A13433A213}"/>
               </a:ext>
             </a:extLst>
           </p:cNvPr>
@@ -6017,7 +6144,7 @@
         </p:nvSpPr>
         <p:spPr>
           <a:xfrm>
-            <a:off x="3565100" y="3281304"/>
+            <a:off x="3565101" y="3281304"/>
             <a:ext cx="6679259" cy="573852"/>
           </a:xfrm>
           <a:prstGeom prst="rect">
@@ -6052,7 +6179,7 @@
           <p:cNvPr id="11" name="item_3_title">
             <a:extLst>
               <a:ext uri="{FF2B5EF4-FFF2-40B4-BE49-F238E27FC236}">
-                <a16:creationId xmlns:a16="http://schemas.microsoft.com/office/drawing/2014/main" id="{4873793C-8C0C-F251-1665-9DA639B6FF61}"/>
+                <a16:creationId xmlns:a16="http://schemas.microsoft.com/office/drawing/2014/main" id="{C9C00D77-09BC-E663-684F-8F19C995746B}"/>
               </a:ext>
             </a:extLst>
           </p:cNvPr>
@@ -6065,8 +6192,8 @@
         </p:nvSpPr>
         <p:spPr>
           <a:xfrm>
-            <a:off x="556884" y="4285545"/>
-            <a:ext cx="2906242" cy="573852"/>
+            <a:off x="556885" y="4285545"/>
+            <a:ext cx="2906243" cy="573852"/>
           </a:xfrm>
           <a:prstGeom prst="rect">
             <a:avLst/>
@@ -6085,7 +6212,10 @@
               <a:buNone/>
               <a:defRPr sz="2000" b="1">
                 <a:solidFill>
-                  <a:schemeClr val="accent1"/>
+                  <a:schemeClr val="accent1">
+                    <a:lumMod val="70000"/>
+                    <a:lumOff val="30000"/>
+                  </a:schemeClr>
                 </a:solidFill>
                 <a:latin typeface="+mj-lt"/>
               </a:defRPr>
@@ -6105,7 +6235,7 @@
           <p:cNvPr id="12" name="item_3">
             <a:extLst>
               <a:ext uri="{FF2B5EF4-FFF2-40B4-BE49-F238E27FC236}">
-                <a16:creationId xmlns:a16="http://schemas.microsoft.com/office/drawing/2014/main" id="{4080C6BE-4F7F-D6C2-2618-830B8C1A92EE}"/>
+                <a16:creationId xmlns:a16="http://schemas.microsoft.com/office/drawing/2014/main" id="{5117787A-7A99-FE83-D83E-4ADFE5F0A597}"/>
               </a:ext>
             </a:extLst>
           </p:cNvPr>
@@ -6118,7 +6248,7 @@
         </p:nvSpPr>
         <p:spPr>
           <a:xfrm>
-            <a:off x="3565100" y="4285545"/>
+            <a:off x="3565101" y="4285545"/>
             <a:ext cx="6679259" cy="573852"/>
           </a:xfrm>
           <a:prstGeom prst="rect">
@@ -6153,7 +6283,7 @@
           <p:cNvPr id="13" name="item_4_title">
             <a:extLst>
               <a:ext uri="{FF2B5EF4-FFF2-40B4-BE49-F238E27FC236}">
-                <a16:creationId xmlns:a16="http://schemas.microsoft.com/office/drawing/2014/main" id="{8C8F2677-D2A4-CB24-8BB7-ACC47BD4F83E}"/>
+                <a16:creationId xmlns:a16="http://schemas.microsoft.com/office/drawing/2014/main" id="{8F248CB4-F87B-4543-FDFA-3EF5A272C720}"/>
               </a:ext>
             </a:extLst>
           </p:cNvPr>
@@ -6166,8 +6296,8 @@
         </p:nvSpPr>
         <p:spPr>
           <a:xfrm>
-            <a:off x="556884" y="5289785"/>
-            <a:ext cx="2906242" cy="573852"/>
+            <a:off x="556885" y="5289785"/>
+            <a:ext cx="2906243" cy="573852"/>
           </a:xfrm>
           <a:prstGeom prst="rect">
             <a:avLst/>
@@ -6186,7 +6316,10 @@
               <a:buNone/>
               <a:defRPr sz="2000" b="1">
                 <a:solidFill>
-                  <a:schemeClr val="accent1"/>
+                  <a:schemeClr val="accent1">
+                    <a:lumMod val="70000"/>
+                    <a:lumOff val="30000"/>
+                  </a:schemeClr>
                 </a:solidFill>
                 <a:latin typeface="+mj-lt"/>
               </a:defRPr>
@@ -6206,7 +6339,7 @@
           <p:cNvPr id="14" name="item_4">
             <a:extLst>
               <a:ext uri="{FF2B5EF4-FFF2-40B4-BE49-F238E27FC236}">
-                <a16:creationId xmlns:a16="http://schemas.microsoft.com/office/drawing/2014/main" id="{5ADEFA08-0EF2-15C3-A667-55090177E86D}"/>
+                <a16:creationId xmlns:a16="http://schemas.microsoft.com/office/drawing/2014/main" id="{0C7E5A25-9360-7797-C8DE-876B415ED512}"/>
               </a:ext>
             </a:extLst>
           </p:cNvPr>
@@ -6219,7 +6352,7 @@
         </p:nvSpPr>
         <p:spPr>
           <a:xfrm>
-            <a:off x="3565100" y="5289785"/>
+            <a:off x="3565101" y="5289785"/>
             <a:ext cx="6679259" cy="573852"/>
           </a:xfrm>
           <a:prstGeom prst="rect">
@@ -6254,7 +6387,7 @@
           <p:cNvPr id="15" name="source">
             <a:extLst>
               <a:ext uri="{FF2B5EF4-FFF2-40B4-BE49-F238E27FC236}">
-                <a16:creationId xmlns:a16="http://schemas.microsoft.com/office/drawing/2014/main" id="{4656CAD4-00A8-797C-1387-2FAF312946B3}"/>
+                <a16:creationId xmlns:a16="http://schemas.microsoft.com/office/drawing/2014/main" id="{B001E29A-0813-22E5-81CB-692413ADC2D5}"/>
               </a:ext>
             </a:extLst>
           </p:cNvPr>
@@ -6276,7 +6409,10 @@
             </a:avLst>
           </a:prstGeom>
           <a:solidFill>
-            <a:schemeClr val="accent1"/>
+            <a:schemeClr val="accent1">
+              <a:lumMod val="70000"/>
+              <a:lumOff val="30000"/>
+            </a:schemeClr>
           </a:solidFill>
         </p:spPr>
         <p:txBody>
@@ -6309,7 +6445,7 @@
     </p:spTree>
     <p:extLst>
       <p:ext uri="{BB962C8B-B14F-4D97-AF65-F5344CB8AC3E}">
-        <p14:creationId xmlns:p14="http://schemas.microsoft.com/office/powerpoint/2010/main" val="3475473726"/>
+        <p14:creationId xmlns:p14="http://schemas.microsoft.com/office/powerpoint/2010/main" val="187204395"/>
       </p:ext>
     </p:extLst>
   </p:cSld>
@@ -6341,7 +6477,7 @@
           <p:cNvPr id="6" name="glow">
             <a:extLst>
               <a:ext uri="{FF2B5EF4-FFF2-40B4-BE49-F238E27FC236}">
-                <a16:creationId xmlns:a16="http://schemas.microsoft.com/office/drawing/2014/main" id="{A24B9DDD-A4AF-2A7A-FC4C-377699402C18}"/>
+                <a16:creationId xmlns:a16="http://schemas.microsoft.com/office/drawing/2014/main" id="{44905FBE-8469-A430-3DFC-E67F968FA51C}"/>
               </a:ext>
             </a:extLst>
           </p:cNvPr>
@@ -6360,11 +6496,15 @@
             <a:gsLst>
               <a:gs pos="0">
                 <a:schemeClr val="accent1">
+                  <a:lumMod val="70000"/>
+                  <a:lumOff val="30000"/>
                   <a:alpha val="28000"/>
                 </a:schemeClr>
               </a:gs>
               <a:gs pos="100000">
                 <a:schemeClr val="accent1">
+                  <a:lumMod val="70000"/>
+                  <a:lumOff val="30000"/>
                   <a:alpha val="0"/>
                 </a:schemeClr>
               </a:gs>
@@ -6523,9 +6663,9 @@
             </a:lvl1pPr>
           </a:lstStyle>
           <a:p>
-            <a:fld id="{E74088FC-AB1D-4731-A24C-F46EBDB0C5A7}" type="datetimeFigureOut">
+            <a:fld id="{F3B25E4A-609E-4439-9216-58A1FB513E4F}" type="datetimeFigureOut">
               <a:rPr lang="en-US" smtClean="0"/>
-              <a:t>10/3/2026</a:t>
+              <a:t>10/4/2026</a:t>
             </a:fld>
             <a:endParaRPr lang="en-US"/>
           </a:p>
@@ -6560,7 +6700,7 @@
             </a:lvl1pPr>
           </a:lstStyle>
           <a:p>
-            <a:fld id="{E4AD76C8-B1EB-4E10-9C29-0B8B3CD29BA6}" type="slidenum">
+            <a:fld id="{466CBC16-03F9-4EFF-A443-63D10023E700}" type="slidenum">
               <a:rPr lang="en-US" smtClean="0"/>
               <a:t>‹#›</a:t>
             </a:fld>
@@ -6573,7 +6713,7 @@
           <p:cNvPr id="7" name="marker_1">
             <a:extLst>
               <a:ext uri="{FF2B5EF4-FFF2-40B4-BE49-F238E27FC236}">
-                <a16:creationId xmlns:a16="http://schemas.microsoft.com/office/drawing/2014/main" id="{93734648-4ADE-1701-E5BD-3A5CD4D903AE}"/>
+                <a16:creationId xmlns:a16="http://schemas.microsoft.com/office/drawing/2014/main" id="{6E3D74EE-DFFA-84E4-9FBF-162D4CCEAC7F}"/>
               </a:ext>
             </a:extLst>
           </p:cNvPr>
@@ -6593,7 +6733,10 @@
             <a:avLst/>
           </a:prstGeom>
           <a:solidFill>
-            <a:schemeClr val="accent1"/>
+            <a:schemeClr val="accent1">
+              <a:lumMod val="70000"/>
+              <a:lumOff val="30000"/>
+            </a:schemeClr>
           </a:solidFill>
         </p:spPr>
         <p:txBody>
@@ -6629,7 +6772,7 @@
           <p:cNvPr id="8" name="item_1_title">
             <a:extLst>
               <a:ext uri="{FF2B5EF4-FFF2-40B4-BE49-F238E27FC236}">
-                <a16:creationId xmlns:a16="http://schemas.microsoft.com/office/drawing/2014/main" id="{5C7C07EA-2E9E-C23E-9FBD-C850330996C9}"/>
+                <a16:creationId xmlns:a16="http://schemas.microsoft.com/office/drawing/2014/main" id="{3000B5B3-C14F-D62E-82E3-B99AC52851A6}"/>
               </a:ext>
             </a:extLst>
           </p:cNvPr>
@@ -6642,8 +6785,8 @@
         </p:nvSpPr>
         <p:spPr>
           <a:xfrm>
-            <a:off x="1270698" y="2334448"/>
-            <a:ext cx="8922674" cy="417730"/>
+            <a:off x="1270699" y="2334448"/>
+            <a:ext cx="8922675" cy="417730"/>
           </a:xfrm>
           <a:prstGeom prst="rect">
             <a:avLst/>
@@ -6662,7 +6805,10 @@
               <a:buNone/>
               <a:defRPr sz="2000" b="1">
                 <a:solidFill>
-                  <a:schemeClr val="accent1"/>
+                  <a:schemeClr val="accent1">
+                    <a:lumMod val="70000"/>
+                    <a:lumOff val="30000"/>
+                  </a:schemeClr>
                 </a:solidFill>
                 <a:latin typeface="+mj-lt"/>
               </a:defRPr>
@@ -6682,7 +6828,7 @@
           <p:cNvPr id="9" name="item_1">
             <a:extLst>
               <a:ext uri="{FF2B5EF4-FFF2-40B4-BE49-F238E27FC236}">
-                <a16:creationId xmlns:a16="http://schemas.microsoft.com/office/drawing/2014/main" id="{0BC99605-4249-8BA8-2516-1C2761B4A3DD}"/>
+                <a16:creationId xmlns:a16="http://schemas.microsoft.com/office/drawing/2014/main" id="{B9863212-3389-A72C-A0B0-1D406EB86B36}"/>
               </a:ext>
             </a:extLst>
           </p:cNvPr>
@@ -6695,8 +6841,8 @@
         </p:nvSpPr>
         <p:spPr>
           <a:xfrm>
-            <a:off x="1270698" y="2752180"/>
-            <a:ext cx="8922674" cy="1002553"/>
+            <a:off x="1270699" y="2752180"/>
+            <a:ext cx="8922675" cy="1002553"/>
           </a:xfrm>
           <a:prstGeom prst="rect">
             <a:avLst/>
@@ -6730,7 +6876,7 @@
           <p:cNvPr id="10" name="marker_2">
             <a:extLst>
               <a:ext uri="{FF2B5EF4-FFF2-40B4-BE49-F238E27FC236}">
-                <a16:creationId xmlns:a16="http://schemas.microsoft.com/office/drawing/2014/main" id="{E9D09185-1D60-3614-A59C-41E707896452}"/>
+                <a16:creationId xmlns:a16="http://schemas.microsoft.com/office/drawing/2014/main" id="{5A707C80-39EA-5B00-5B58-C10847E17CB1}"/>
               </a:ext>
             </a:extLst>
           </p:cNvPr>
@@ -6750,7 +6896,10 @@
             <a:avLst/>
           </a:prstGeom>
           <a:solidFill>
-            <a:schemeClr val="accent1"/>
+            <a:schemeClr val="accent1">
+              <a:lumMod val="70000"/>
+              <a:lumOff val="30000"/>
+            </a:schemeClr>
           </a:solidFill>
         </p:spPr>
         <p:txBody>
@@ -6786,7 +6935,7 @@
           <p:cNvPr id="11" name="item_2_title">
             <a:extLst>
               <a:ext uri="{FF2B5EF4-FFF2-40B4-BE49-F238E27FC236}">
-                <a16:creationId xmlns:a16="http://schemas.microsoft.com/office/drawing/2014/main" id="{5577A672-37D1-37AF-36A8-E077A2E00C74}"/>
+                <a16:creationId xmlns:a16="http://schemas.microsoft.com/office/drawing/2014/main" id="{38C23545-E275-4CAE-B399-86565036B043}"/>
               </a:ext>
             </a:extLst>
           </p:cNvPr>
@@ -6799,8 +6948,8 @@
         </p:nvSpPr>
         <p:spPr>
           <a:xfrm>
-            <a:off x="1270698" y="4385968"/>
-            <a:ext cx="8922674" cy="417730"/>
+            <a:off x="1270699" y="4385968"/>
+            <a:ext cx="8922675" cy="417730"/>
           </a:xfrm>
           <a:prstGeom prst="rect">
             <a:avLst/>
@@ -6819,7 +6968,10 @@
               <a:buNone/>
               <a:defRPr sz="2000" b="1">
                 <a:solidFill>
-                  <a:schemeClr val="accent1"/>
+                  <a:schemeClr val="accent1">
+                    <a:lumMod val="70000"/>
+                    <a:lumOff val="30000"/>
+                  </a:schemeClr>
                 </a:solidFill>
                 <a:latin typeface="+mj-lt"/>
               </a:defRPr>
@@ -6839,7 +6991,7 @@
           <p:cNvPr id="12" name="item_2">
             <a:extLst>
               <a:ext uri="{FF2B5EF4-FFF2-40B4-BE49-F238E27FC236}">
-                <a16:creationId xmlns:a16="http://schemas.microsoft.com/office/drawing/2014/main" id="{A2EE42D5-E3B9-5FA7-9A2E-40B973D9F812}"/>
+                <a16:creationId xmlns:a16="http://schemas.microsoft.com/office/drawing/2014/main" id="{FC19BD29-8ED2-402C-ED07-D31B8082582C}"/>
               </a:ext>
             </a:extLst>
           </p:cNvPr>
@@ -6852,8 +7004,8 @@
         </p:nvSpPr>
         <p:spPr>
           <a:xfrm>
-            <a:off x="1270698" y="4803700"/>
-            <a:ext cx="8922674" cy="1002553"/>
+            <a:off x="1270699" y="4803700"/>
+            <a:ext cx="8922675" cy="1002553"/>
           </a:xfrm>
           <a:prstGeom prst="rect">
             <a:avLst/>
@@ -6887,7 +7039,7 @@
           <p:cNvPr id="13" name="source">
             <a:extLst>
               <a:ext uri="{FF2B5EF4-FFF2-40B4-BE49-F238E27FC236}">
-                <a16:creationId xmlns:a16="http://schemas.microsoft.com/office/drawing/2014/main" id="{970BF40F-1D24-2610-95CE-CFD8161ADCC2}"/>
+                <a16:creationId xmlns:a16="http://schemas.microsoft.com/office/drawing/2014/main" id="{77CB78C0-A5CD-0287-C254-7C1311C477DB}"/>
               </a:ext>
             </a:extLst>
           </p:cNvPr>
@@ -6909,7 +7061,10 @@
             </a:avLst>
           </a:prstGeom>
           <a:solidFill>
-            <a:schemeClr val="accent1"/>
+            <a:schemeClr val="accent1">
+              <a:lumMod val="70000"/>
+              <a:lumOff val="30000"/>
+            </a:schemeClr>
           </a:solidFill>
         </p:spPr>
         <p:txBody>
@@ -6942,7 +7097,7 @@
     </p:spTree>
     <p:extLst>
       <p:ext uri="{BB962C8B-B14F-4D97-AF65-F5344CB8AC3E}">
-        <p14:creationId xmlns:p14="http://schemas.microsoft.com/office/powerpoint/2010/main" val="154228058"/>
+        <p14:creationId xmlns:p14="http://schemas.microsoft.com/office/powerpoint/2010/main" val="3739293825"/>
       </p:ext>
     </p:extLst>
   </p:cSld>
@@ -6974,7 +7129,7 @@
           <p:cNvPr id="6" name="glow">
             <a:extLst>
               <a:ext uri="{FF2B5EF4-FFF2-40B4-BE49-F238E27FC236}">
-                <a16:creationId xmlns:a16="http://schemas.microsoft.com/office/drawing/2014/main" id="{EFF5C996-A397-30C0-CD2C-C76822C92901}"/>
+                <a16:creationId xmlns:a16="http://schemas.microsoft.com/office/drawing/2014/main" id="{5A438CCB-DB69-43E7-3AF9-96C0F6B8B9E9}"/>
               </a:ext>
             </a:extLst>
           </p:cNvPr>
@@ -6993,11 +7148,15 @@
             <a:gsLst>
               <a:gs pos="0">
                 <a:schemeClr val="accent1">
+                  <a:lumMod val="70000"/>
+                  <a:lumOff val="30000"/>
                   <a:alpha val="28000"/>
                 </a:schemeClr>
               </a:gs>
               <a:gs pos="100000">
                 <a:schemeClr val="accent1">
+                  <a:lumMod val="70000"/>
+                  <a:lumOff val="30000"/>
                   <a:alpha val="0"/>
                 </a:schemeClr>
               </a:gs>
@@ -7156,9 +7315,9 @@
             </a:lvl1pPr>
           </a:lstStyle>
           <a:p>
-            <a:fld id="{E74088FC-AB1D-4731-A24C-F46EBDB0C5A7}" type="datetimeFigureOut">
+            <a:fld id="{F3B25E4A-609E-4439-9216-58A1FB513E4F}" type="datetimeFigureOut">
               <a:rPr lang="en-US" smtClean="0"/>
-              <a:t>10/3/2026</a:t>
+              <a:t>10/4/2026</a:t>
             </a:fld>
             <a:endParaRPr lang="en-US"/>
           </a:p>
@@ -7193,7 +7352,7 @@
             </a:lvl1pPr>
           </a:lstStyle>
           <a:p>
-            <a:fld id="{E4AD76C8-B1EB-4E10-9C29-0B8B3CD29BA6}" type="slidenum">
+            <a:fld id="{466CBC16-03F9-4EFF-A443-63D10023E700}" type="slidenum">
               <a:rPr lang="en-US" smtClean="0"/>
               <a:t>‹#›</a:t>
             </a:fld>
@@ -7206,7 +7365,7 @@
           <p:cNvPr id="7" name="item_1_title">
             <a:extLst>
               <a:ext uri="{FF2B5EF4-FFF2-40B4-BE49-F238E27FC236}">
-                <a16:creationId xmlns:a16="http://schemas.microsoft.com/office/drawing/2014/main" id="{F2B855E8-3169-42C6-FE1D-3CE6ABA731AE}"/>
+                <a16:creationId xmlns:a16="http://schemas.microsoft.com/office/drawing/2014/main" id="{4D02E286-55D3-027E-E04E-68ABE19FDEF0}"/>
               </a:ext>
             </a:extLst>
           </p:cNvPr>
@@ -7236,7 +7395,10 @@
               <a:buNone/>
               <a:defRPr sz="2000" b="1">
                 <a:solidFill>
-                  <a:schemeClr val="accent1"/>
+                  <a:schemeClr val="accent1">
+                    <a:lumMod val="70000"/>
+                    <a:lumOff val="30000"/>
+                  </a:schemeClr>
                 </a:solidFill>
                 <a:latin typeface="+mj-lt"/>
               </a:defRPr>
@@ -7256,7 +7418,7 @@
           <p:cNvPr id="8" name="item_1">
             <a:extLst>
               <a:ext uri="{FF2B5EF4-FFF2-40B4-BE49-F238E27FC236}">
-                <a16:creationId xmlns:a16="http://schemas.microsoft.com/office/drawing/2014/main" id="{D54C9672-DBC7-6657-B4C4-D870FF2B9015}"/>
+                <a16:creationId xmlns:a16="http://schemas.microsoft.com/office/drawing/2014/main" id="{9EF274E7-C0CB-ABC8-FEB2-EEA6A65BEFA1}"/>
               </a:ext>
             </a:extLst>
           </p:cNvPr>
@@ -7304,7 +7466,7 @@
           <p:cNvPr id="9" name="item_2_title">
             <a:extLst>
               <a:ext uri="{FF2B5EF4-FFF2-40B4-BE49-F238E27FC236}">
-                <a16:creationId xmlns:a16="http://schemas.microsoft.com/office/drawing/2014/main" id="{C274C8D7-D566-105B-3545-0C52F693A982}"/>
+                <a16:creationId xmlns:a16="http://schemas.microsoft.com/office/drawing/2014/main" id="{58AF3228-F7BB-D0ED-0602-A4E96B378890}"/>
               </a:ext>
             </a:extLst>
           </p:cNvPr>
@@ -7337,7 +7499,10 @@
               <a:buNone/>
               <a:defRPr sz="2000" b="1">
                 <a:solidFill>
-                  <a:schemeClr val="accent1"/>
+                  <a:schemeClr val="accent1">
+                    <a:lumMod val="70000"/>
+                    <a:lumOff val="30000"/>
+                  </a:schemeClr>
                 </a:solidFill>
                 <a:latin typeface="+mj-lt"/>
               </a:defRPr>
@@ -7357,7 +7522,7 @@
           <p:cNvPr id="10" name="item_2">
             <a:extLst>
               <a:ext uri="{FF2B5EF4-FFF2-40B4-BE49-F238E27FC236}">
-                <a16:creationId xmlns:a16="http://schemas.microsoft.com/office/drawing/2014/main" id="{42713E0C-83B1-9ADF-E8F5-0595DDB1536A}"/>
+                <a16:creationId xmlns:a16="http://schemas.microsoft.com/office/drawing/2014/main" id="{725FC843-D248-1C7B-B280-FC5A6DFF84BC}"/>
               </a:ext>
             </a:extLst>
           </p:cNvPr>
@@ -7405,7 +7570,7 @@
           <p:cNvPr id="11" name="item_3_title">
             <a:extLst>
               <a:ext uri="{FF2B5EF4-FFF2-40B4-BE49-F238E27FC236}">
-                <a16:creationId xmlns:a16="http://schemas.microsoft.com/office/drawing/2014/main" id="{07F5BA07-4F45-E34A-D07D-A8B07CEC80F5}"/>
+                <a16:creationId xmlns:a16="http://schemas.microsoft.com/office/drawing/2014/main" id="{463D84B4-1C4A-D5EF-534A-A9C761811CEB}"/>
               </a:ext>
             </a:extLst>
           </p:cNvPr>
@@ -7438,7 +7603,10 @@
               <a:buNone/>
               <a:defRPr sz="2000" b="1">
                 <a:solidFill>
-                  <a:schemeClr val="accent1"/>
+                  <a:schemeClr val="accent1">
+                    <a:lumMod val="70000"/>
+                    <a:lumOff val="30000"/>
+                  </a:schemeClr>
                 </a:solidFill>
                 <a:latin typeface="+mj-lt"/>
               </a:defRPr>
@@ -7458,7 +7626,7 @@
           <p:cNvPr id="12" name="item_3">
             <a:extLst>
               <a:ext uri="{FF2B5EF4-FFF2-40B4-BE49-F238E27FC236}">
-                <a16:creationId xmlns:a16="http://schemas.microsoft.com/office/drawing/2014/main" id="{FED12D61-5624-E9C2-1192-09DFA1098072}"/>
+                <a16:creationId xmlns:a16="http://schemas.microsoft.com/office/drawing/2014/main" id="{0AC7B5D0-7BFA-7E04-66A4-E9FB43C6CAF3}"/>
               </a:ext>
             </a:extLst>
           </p:cNvPr>
@@ -7506,7 +7674,7 @@
           <p:cNvPr id="13" name="item_4_title">
             <a:extLst>
               <a:ext uri="{FF2B5EF4-FFF2-40B4-BE49-F238E27FC236}">
-                <a16:creationId xmlns:a16="http://schemas.microsoft.com/office/drawing/2014/main" id="{0D70BF62-E99D-327F-5954-C5C34F43F9B2}"/>
+                <a16:creationId xmlns:a16="http://schemas.microsoft.com/office/drawing/2014/main" id="{75E3CB84-E4F3-9849-24B3-AEB47D8A30F2}"/>
               </a:ext>
             </a:extLst>
           </p:cNvPr>
@@ -7539,7 +7707,10 @@
               <a:buNone/>
               <a:defRPr sz="2000" b="1">
                 <a:solidFill>
-                  <a:schemeClr val="accent1"/>
+                  <a:schemeClr val="accent1">
+                    <a:lumMod val="70000"/>
+                    <a:lumOff val="30000"/>
+                  </a:schemeClr>
                 </a:solidFill>
                 <a:latin typeface="+mj-lt"/>
               </a:defRPr>
@@ -7559,7 +7730,7 @@
           <p:cNvPr id="14" name="item_4">
             <a:extLst>
               <a:ext uri="{FF2B5EF4-FFF2-40B4-BE49-F238E27FC236}">
-                <a16:creationId xmlns:a16="http://schemas.microsoft.com/office/drawing/2014/main" id="{99519EE4-EAAB-E65A-FEC9-FD7CC273D750}"/>
+                <a16:creationId xmlns:a16="http://schemas.microsoft.com/office/drawing/2014/main" id="{BC122944-020E-DBBB-1CBA-0105BA88F8D4}"/>
               </a:ext>
             </a:extLst>
           </p:cNvPr>
@@ -7607,7 +7778,7 @@
           <p:cNvPr id="15" name="source">
             <a:extLst>
               <a:ext uri="{FF2B5EF4-FFF2-40B4-BE49-F238E27FC236}">
-                <a16:creationId xmlns:a16="http://schemas.microsoft.com/office/drawing/2014/main" id="{5A6EEB39-5186-B486-311F-0157F22AC068}"/>
+                <a16:creationId xmlns:a16="http://schemas.microsoft.com/office/drawing/2014/main" id="{A4A92DD6-DBEF-C091-F756-D7586B7ABE65}"/>
               </a:ext>
             </a:extLst>
           </p:cNvPr>
@@ -7629,7 +7800,10 @@
             </a:avLst>
           </a:prstGeom>
           <a:solidFill>
-            <a:schemeClr val="accent1"/>
+            <a:schemeClr val="accent1">
+              <a:lumMod val="70000"/>
+              <a:lumOff val="30000"/>
+            </a:schemeClr>
           </a:solidFill>
         </p:spPr>
         <p:txBody>
@@ -7662,7 +7836,7 @@
     </p:spTree>
     <p:extLst>
       <p:ext uri="{BB962C8B-B14F-4D97-AF65-F5344CB8AC3E}">
-        <p14:creationId xmlns:p14="http://schemas.microsoft.com/office/powerpoint/2010/main" val="618670841"/>
+        <p14:creationId xmlns:p14="http://schemas.microsoft.com/office/powerpoint/2010/main" val="2619749069"/>
       </p:ext>
     </p:extLst>
   </p:cSld>
@@ -7694,7 +7868,7 @@
           <p:cNvPr id="6" name="glow">
             <a:extLst>
               <a:ext uri="{FF2B5EF4-FFF2-40B4-BE49-F238E27FC236}">
-                <a16:creationId xmlns:a16="http://schemas.microsoft.com/office/drawing/2014/main" id="{9E18E944-99BD-C58F-163E-9653FA012BBD}"/>
+                <a16:creationId xmlns:a16="http://schemas.microsoft.com/office/drawing/2014/main" id="{B5CF8AD7-0761-FF58-D31A-9CFDAE58188B}"/>
               </a:ext>
             </a:extLst>
           </p:cNvPr>
@@ -7713,11 +7887,15 @@
             <a:gsLst>
               <a:gs pos="0">
                 <a:schemeClr val="accent1">
+                  <a:lumMod val="70000"/>
+                  <a:lumOff val="30000"/>
                   <a:alpha val="28000"/>
                 </a:schemeClr>
               </a:gs>
               <a:gs pos="100000">
                 <a:schemeClr val="accent1">
+                  <a:lumMod val="70000"/>
+                  <a:lumOff val="30000"/>
                   <a:alpha val="0"/>
                 </a:schemeClr>
               </a:gs>
@@ -7876,9 +8054,9 @@
             </a:lvl1pPr>
           </a:lstStyle>
           <a:p>
-            <a:fld id="{E74088FC-AB1D-4731-A24C-F46EBDB0C5A7}" type="datetimeFigureOut">
+            <a:fld id="{F3B25E4A-609E-4439-9216-58A1FB513E4F}" type="datetimeFigureOut">
               <a:rPr lang="en-US" smtClean="0"/>
-              <a:t>10/3/2026</a:t>
+              <a:t>10/4/2026</a:t>
             </a:fld>
             <a:endParaRPr lang="en-US"/>
           </a:p>
@@ -7913,7 +8091,7 @@
             </a:lvl1pPr>
           </a:lstStyle>
           <a:p>
-            <a:fld id="{E4AD76C8-B1EB-4E10-9C29-0B8B3CD29BA6}" type="slidenum">
+            <a:fld id="{466CBC16-03F9-4EFF-A443-63D10023E700}" type="slidenum">
               <a:rPr lang="en-US" smtClean="0"/>
               <a:t>‹#›</a:t>
             </a:fld>
@@ -7926,7 +8104,7 @@
           <p:cNvPr id="7" name="item_1_title">
             <a:extLst>
               <a:ext uri="{FF2B5EF4-FFF2-40B4-BE49-F238E27FC236}">
-                <a16:creationId xmlns:a16="http://schemas.microsoft.com/office/drawing/2014/main" id="{5D482E04-80C7-5CE5-53A5-9F02E6EBFB01}"/>
+                <a16:creationId xmlns:a16="http://schemas.microsoft.com/office/drawing/2014/main" id="{CF2DA9EB-9400-FEE3-9640-A52B7D89A503}"/>
               </a:ext>
             </a:extLst>
           </p:cNvPr>
@@ -7956,7 +8134,10 @@
               <a:buNone/>
               <a:defRPr sz="2000" b="1">
                 <a:solidFill>
-                  <a:schemeClr val="accent1"/>
+                  <a:schemeClr val="accent1">
+                    <a:lumMod val="70000"/>
+                    <a:lumOff val="30000"/>
+                  </a:schemeClr>
                 </a:solidFill>
                 <a:latin typeface="+mj-lt"/>
               </a:defRPr>
@@ -7976,7 +8157,7 @@
           <p:cNvPr id="8" name="item_1">
             <a:extLst>
               <a:ext uri="{FF2B5EF4-FFF2-40B4-BE49-F238E27FC236}">
-                <a16:creationId xmlns:a16="http://schemas.microsoft.com/office/drawing/2014/main" id="{FFEF48C3-1556-9F87-4E82-77586FB4479A}"/>
+                <a16:creationId xmlns:a16="http://schemas.microsoft.com/office/drawing/2014/main" id="{0D6F75F6-66A7-42ED-2BB5-4BBC0436265F}"/>
               </a:ext>
             </a:extLst>
           </p:cNvPr>
@@ -8024,7 +8205,7 @@
           <p:cNvPr id="9" name="item_2_title">
             <a:extLst>
               <a:ext uri="{FF2B5EF4-FFF2-40B4-BE49-F238E27FC236}">
-                <a16:creationId xmlns:a16="http://schemas.microsoft.com/office/drawing/2014/main" id="{28A13841-8C72-57B4-5A5E-1B328ED8DD18}"/>
+                <a16:creationId xmlns:a16="http://schemas.microsoft.com/office/drawing/2014/main" id="{3AB3C396-DD27-DCD3-D7B1-EBF7B27D5E68}"/>
               </a:ext>
             </a:extLst>
           </p:cNvPr>
@@ -8057,7 +8238,10 @@
               <a:buNone/>
               <a:defRPr sz="2000" b="1">
                 <a:solidFill>
-                  <a:schemeClr val="accent1"/>
+                  <a:schemeClr val="accent1">
+                    <a:lumMod val="70000"/>
+                    <a:lumOff val="30000"/>
+                  </a:schemeClr>
                 </a:solidFill>
                 <a:latin typeface="+mj-lt"/>
               </a:defRPr>
@@ -8077,7 +8261,7 @@
           <p:cNvPr id="10" name="item_2">
             <a:extLst>
               <a:ext uri="{FF2B5EF4-FFF2-40B4-BE49-F238E27FC236}">
-                <a16:creationId xmlns:a16="http://schemas.microsoft.com/office/drawing/2014/main" id="{3A461114-51F2-6356-D87B-49D65AC7FC7F}"/>
+                <a16:creationId xmlns:a16="http://schemas.microsoft.com/office/drawing/2014/main" id="{80CCC0D5-B0F3-E2BE-D942-1F33B3B24EF8}"/>
               </a:ext>
             </a:extLst>
           </p:cNvPr>
@@ -8125,7 +8309,7 @@
           <p:cNvPr id="11" name="item_3_title">
             <a:extLst>
               <a:ext uri="{FF2B5EF4-FFF2-40B4-BE49-F238E27FC236}">
-                <a16:creationId xmlns:a16="http://schemas.microsoft.com/office/drawing/2014/main" id="{7173B150-5450-322A-94D1-E6274355DC96}"/>
+                <a16:creationId xmlns:a16="http://schemas.microsoft.com/office/drawing/2014/main" id="{4320B510-4009-561B-909C-0ADDF523012A}"/>
               </a:ext>
             </a:extLst>
           </p:cNvPr>
@@ -8158,7 +8342,10 @@
               <a:buNone/>
               <a:defRPr sz="2000" b="1">
                 <a:solidFill>
-                  <a:schemeClr val="accent1"/>
+                  <a:schemeClr val="accent1">
+                    <a:lumMod val="70000"/>
+                    <a:lumOff val="30000"/>
+                  </a:schemeClr>
                 </a:solidFill>
                 <a:latin typeface="+mj-lt"/>
               </a:defRPr>
@@ -8178,7 +8365,7 @@
           <p:cNvPr id="12" name="item_3">
             <a:extLst>
               <a:ext uri="{FF2B5EF4-FFF2-40B4-BE49-F238E27FC236}">
-                <a16:creationId xmlns:a16="http://schemas.microsoft.com/office/drawing/2014/main" id="{2CA65A85-CD37-99CF-3DF1-0AFFF2C0FF04}"/>
+                <a16:creationId xmlns:a16="http://schemas.microsoft.com/office/drawing/2014/main" id="{42BC905C-C9F3-9079-90B5-73E42EFBCEFE}"/>
               </a:ext>
             </a:extLst>
           </p:cNvPr>
@@ -8226,7 +8413,7 @@
           <p:cNvPr id="13" name="item_4_title">
             <a:extLst>
               <a:ext uri="{FF2B5EF4-FFF2-40B4-BE49-F238E27FC236}">
-                <a16:creationId xmlns:a16="http://schemas.microsoft.com/office/drawing/2014/main" id="{0E609AAB-9CE0-FC82-D245-62EB7A17C368}"/>
+                <a16:creationId xmlns:a16="http://schemas.microsoft.com/office/drawing/2014/main" id="{568ED1A4-ABEC-862A-F596-9B44DF6EE66D}"/>
               </a:ext>
             </a:extLst>
           </p:cNvPr>
@@ -8259,7 +8446,10 @@
               <a:buNone/>
               <a:defRPr sz="2000" b="1">
                 <a:solidFill>
-                  <a:schemeClr val="accent1"/>
+                  <a:schemeClr val="accent1">
+                    <a:lumMod val="70000"/>
+                    <a:lumOff val="30000"/>
+                  </a:schemeClr>
                 </a:solidFill>
                 <a:latin typeface="+mj-lt"/>
               </a:defRPr>
@@ -8279,7 +8469,7 @@
           <p:cNvPr id="14" name="item_4">
             <a:extLst>
               <a:ext uri="{FF2B5EF4-FFF2-40B4-BE49-F238E27FC236}">
-                <a16:creationId xmlns:a16="http://schemas.microsoft.com/office/drawing/2014/main" id="{B287EFF8-87D8-0104-3468-735871E3217A}"/>
+                <a16:creationId xmlns:a16="http://schemas.microsoft.com/office/drawing/2014/main" id="{580D37EF-B8EC-6068-384F-0A950B6E2CB6}"/>
               </a:ext>
             </a:extLst>
           </p:cNvPr>
@@ -8327,7 +8517,7 @@
           <p:cNvPr id="15" name="source">
             <a:extLst>
               <a:ext uri="{FF2B5EF4-FFF2-40B4-BE49-F238E27FC236}">
-                <a16:creationId xmlns:a16="http://schemas.microsoft.com/office/drawing/2014/main" id="{B93DF550-C51B-D573-234B-6DE3A7448073}"/>
+                <a16:creationId xmlns:a16="http://schemas.microsoft.com/office/drawing/2014/main" id="{2A5CE9B6-C46A-820B-F148-D940E24B831E}"/>
               </a:ext>
             </a:extLst>
           </p:cNvPr>
@@ -8349,7 +8539,10 @@
             </a:avLst>
           </a:prstGeom>
           <a:solidFill>
-            <a:schemeClr val="accent1"/>
+            <a:schemeClr val="accent1">
+              <a:lumMod val="70000"/>
+              <a:lumOff val="30000"/>
+            </a:schemeClr>
           </a:solidFill>
         </p:spPr>
         <p:txBody>
@@ -8382,7 +8575,7 @@
     </p:spTree>
     <p:extLst>
       <p:ext uri="{BB962C8B-B14F-4D97-AF65-F5344CB8AC3E}">
-        <p14:creationId xmlns:p14="http://schemas.microsoft.com/office/powerpoint/2010/main" val="3457988156"/>
+        <p14:creationId xmlns:p14="http://schemas.microsoft.com/office/powerpoint/2010/main" val="3085528547"/>
       </p:ext>
     </p:extLst>
   </p:cSld>
@@ -8414,7 +8607,7 @@
           <p:cNvPr id="6" name="glow">
             <a:extLst>
               <a:ext uri="{FF2B5EF4-FFF2-40B4-BE49-F238E27FC236}">
-                <a16:creationId xmlns:a16="http://schemas.microsoft.com/office/drawing/2014/main" id="{A9271F71-AA87-8AAE-E65D-3640403306B6}"/>
+                <a16:creationId xmlns:a16="http://schemas.microsoft.com/office/drawing/2014/main" id="{9AE23310-D736-02B6-9B3B-989137889E3E}"/>
               </a:ext>
             </a:extLst>
           </p:cNvPr>
@@ -8433,11 +8626,15 @@
             <a:gsLst>
               <a:gs pos="0">
                 <a:schemeClr val="accent1">
+                  <a:lumMod val="70000"/>
+                  <a:lumOff val="30000"/>
                   <a:alpha val="28000"/>
                 </a:schemeClr>
               </a:gs>
               <a:gs pos="100000">
                 <a:schemeClr val="accent1">
+                  <a:lumMod val="70000"/>
+                  <a:lumOff val="30000"/>
                   <a:alpha val="0"/>
                 </a:schemeClr>
               </a:gs>
@@ -8596,9 +8793,9 @@
             </a:lvl1pPr>
           </a:lstStyle>
           <a:p>
-            <a:fld id="{E74088FC-AB1D-4731-A24C-F46EBDB0C5A7}" type="datetimeFigureOut">
+            <a:fld id="{F3B25E4A-609E-4439-9216-58A1FB513E4F}" type="datetimeFigureOut">
               <a:rPr lang="en-US" smtClean="0"/>
-              <a:t>10/3/2026</a:t>
+              <a:t>10/4/2026</a:t>
             </a:fld>
             <a:endParaRPr lang="en-US"/>
           </a:p>
@@ -8633,7 +8830,7 @@
             </a:lvl1pPr>
           </a:lstStyle>
           <a:p>
-            <a:fld id="{E4AD76C8-B1EB-4E10-9C29-0B8B3CD29BA6}" type="slidenum">
+            <a:fld id="{466CBC16-03F9-4EFF-A443-63D10023E700}" type="slidenum">
               <a:rPr lang="en-US" smtClean="0"/>
               <a:t>‹#›</a:t>
             </a:fld>
@@ -8646,7 +8843,7 @@
           <p:cNvPr id="7" name="kpi_value_1">
             <a:extLst>
               <a:ext uri="{FF2B5EF4-FFF2-40B4-BE49-F238E27FC236}">
-                <a16:creationId xmlns:a16="http://schemas.microsoft.com/office/drawing/2014/main" id="{27D3A43C-701C-3807-6AB9-89D6A0952384}"/>
+                <a16:creationId xmlns:a16="http://schemas.microsoft.com/office/drawing/2014/main" id="{B91D33EF-D6AD-2D39-DB0B-8517C64E0900}"/>
               </a:ext>
             </a:extLst>
           </p:cNvPr>
@@ -8676,7 +8873,10 @@
               <a:buNone/>
               <a:defRPr sz="10800" b="1">
                 <a:solidFill>
-                  <a:schemeClr val="accent1"/>
+                  <a:schemeClr val="accent1">
+                    <a:lumMod val="70000"/>
+                    <a:lumOff val="30000"/>
+                  </a:schemeClr>
                 </a:solidFill>
                 <a:latin typeface="+mj-lt"/>
               </a:defRPr>
@@ -8696,7 +8896,7 @@
           <p:cNvPr id="8" name="kpi_label_1">
             <a:extLst>
               <a:ext uri="{FF2B5EF4-FFF2-40B4-BE49-F238E27FC236}">
-                <a16:creationId xmlns:a16="http://schemas.microsoft.com/office/drawing/2014/main" id="{9187B472-B220-A8B6-89F9-C110C67CF17F}"/>
+                <a16:creationId xmlns:a16="http://schemas.microsoft.com/office/drawing/2014/main" id="{D0D5305A-279F-C838-66A0-68F2742D5A84}"/>
               </a:ext>
             </a:extLst>
           </p:cNvPr>
@@ -8744,7 +8944,7 @@
           <p:cNvPr id="9" name="quote">
             <a:extLst>
               <a:ext uri="{FF2B5EF4-FFF2-40B4-BE49-F238E27FC236}">
-                <a16:creationId xmlns:a16="http://schemas.microsoft.com/office/drawing/2014/main" id="{0FBC4699-B774-C5D7-DCE9-7ED27EE2034B}"/>
+                <a16:creationId xmlns:a16="http://schemas.microsoft.com/office/drawing/2014/main" id="{FB655878-5886-72C2-1F7B-40FCB531FE1D}"/>
               </a:ext>
             </a:extLst>
           </p:cNvPr>
@@ -8794,7 +8994,7 @@
           <p:cNvPr id="10" name="attribution">
             <a:extLst>
               <a:ext uri="{FF2B5EF4-FFF2-40B4-BE49-F238E27FC236}">
-                <a16:creationId xmlns:a16="http://schemas.microsoft.com/office/drawing/2014/main" id="{05347F82-5BD5-B936-90AD-937DC9179DE1}"/>
+                <a16:creationId xmlns:a16="http://schemas.microsoft.com/office/drawing/2014/main" id="{2B91D7E5-073F-029D-0E16-1831B9F73FFC}"/>
               </a:ext>
             </a:extLst>
           </p:cNvPr>
@@ -8842,7 +9042,7 @@
           <p:cNvPr id="11" name="item_1_title">
             <a:extLst>
               <a:ext uri="{FF2B5EF4-FFF2-40B4-BE49-F238E27FC236}">
-                <a16:creationId xmlns:a16="http://schemas.microsoft.com/office/drawing/2014/main" id="{1480FFF3-F6AE-D3C8-F30B-2340F518592D}"/>
+                <a16:creationId xmlns:a16="http://schemas.microsoft.com/office/drawing/2014/main" id="{4C523D36-1890-0A0C-818B-2125B93C44FE}"/>
               </a:ext>
             </a:extLst>
           </p:cNvPr>
@@ -8875,7 +9075,10 @@
               <a:buNone/>
               <a:defRPr sz="2000" b="1">
                 <a:solidFill>
-                  <a:schemeClr val="accent1"/>
+                  <a:schemeClr val="accent1">
+                    <a:lumMod val="70000"/>
+                    <a:lumOff val="30000"/>
+                  </a:schemeClr>
                 </a:solidFill>
                 <a:latin typeface="+mj-lt"/>
               </a:defRPr>
@@ -8895,7 +9098,7 @@
           <p:cNvPr id="12" name="item_1">
             <a:extLst>
               <a:ext uri="{FF2B5EF4-FFF2-40B4-BE49-F238E27FC236}">
-                <a16:creationId xmlns:a16="http://schemas.microsoft.com/office/drawing/2014/main" id="{C0DE1CEE-1A28-C854-1B39-022D2EEC6237}"/>
+                <a16:creationId xmlns:a16="http://schemas.microsoft.com/office/drawing/2014/main" id="{B43EB864-DBF8-0EEC-E833-E0C69779A354}"/>
               </a:ext>
             </a:extLst>
           </p:cNvPr>
@@ -8943,7 +9146,7 @@
           <p:cNvPr id="13" name="source">
             <a:extLst>
               <a:ext uri="{FF2B5EF4-FFF2-40B4-BE49-F238E27FC236}">
-                <a16:creationId xmlns:a16="http://schemas.microsoft.com/office/drawing/2014/main" id="{731EB6A3-B3B2-5F0D-B16A-49DDF96B5BD2}"/>
+                <a16:creationId xmlns:a16="http://schemas.microsoft.com/office/drawing/2014/main" id="{E30C0A20-EF9B-323A-D482-D30EEFF50E6F}"/>
               </a:ext>
             </a:extLst>
           </p:cNvPr>
@@ -8965,7 +9168,10 @@
             </a:avLst>
           </a:prstGeom>
           <a:solidFill>
-            <a:schemeClr val="accent1"/>
+            <a:schemeClr val="accent1">
+              <a:lumMod val="70000"/>
+              <a:lumOff val="30000"/>
+            </a:schemeClr>
           </a:solidFill>
         </p:spPr>
         <p:txBody>
@@ -8998,7 +9204,7 @@
     </p:spTree>
     <p:extLst>
       <p:ext uri="{BB962C8B-B14F-4D97-AF65-F5344CB8AC3E}">
-        <p14:creationId xmlns:p14="http://schemas.microsoft.com/office/powerpoint/2010/main" val="3421191199"/>
+        <p14:creationId xmlns:p14="http://schemas.microsoft.com/office/powerpoint/2010/main" val="3906583072"/>
       </p:ext>
     </p:extLst>
   </p:cSld>
@@ -9030,7 +9236,7 @@
           <p:cNvPr id="6" name="glow">
             <a:extLst>
               <a:ext uri="{FF2B5EF4-FFF2-40B4-BE49-F238E27FC236}">
-                <a16:creationId xmlns:a16="http://schemas.microsoft.com/office/drawing/2014/main" id="{1C71D8BF-43A9-8CF9-C01C-FC8B464CDEB7}"/>
+                <a16:creationId xmlns:a16="http://schemas.microsoft.com/office/drawing/2014/main" id="{34D35A0C-A9ED-1601-18A6-6918D986A6F4}"/>
               </a:ext>
             </a:extLst>
           </p:cNvPr>
@@ -9049,11 +9255,15 @@
             <a:gsLst>
               <a:gs pos="0">
                 <a:schemeClr val="accent1">
+                  <a:lumMod val="70000"/>
+                  <a:lumOff val="30000"/>
                   <a:alpha val="28000"/>
                 </a:schemeClr>
               </a:gs>
               <a:gs pos="100000">
                 <a:schemeClr val="accent1">
+                  <a:lumMod val="70000"/>
+                  <a:lumOff val="30000"/>
                   <a:alpha val="0"/>
                 </a:schemeClr>
               </a:gs>
@@ -9212,9 +9422,9 @@
             </a:lvl1pPr>
           </a:lstStyle>
           <a:p>
-            <a:fld id="{E74088FC-AB1D-4731-A24C-F46EBDB0C5A7}" type="datetimeFigureOut">
+            <a:fld id="{F3B25E4A-609E-4439-9216-58A1FB513E4F}" type="datetimeFigureOut">
               <a:rPr lang="en-US" smtClean="0"/>
-              <a:t>10/3/2026</a:t>
+              <a:t>10/4/2026</a:t>
             </a:fld>
             <a:endParaRPr lang="en-US"/>
           </a:p>
@@ -9249,7 +9459,7 @@
             </a:lvl1pPr>
           </a:lstStyle>
           <a:p>
-            <a:fld id="{E4AD76C8-B1EB-4E10-9C29-0B8B3CD29BA6}" type="slidenum">
+            <a:fld id="{466CBC16-03F9-4EFF-A443-63D10023E700}" type="slidenum">
               <a:rPr lang="en-US" smtClean="0"/>
               <a:t>‹#›</a:t>
             </a:fld>
@@ -9262,7 +9472,7 @@
           <p:cNvPr id="7" name="item_1_title">
             <a:extLst>
               <a:ext uri="{FF2B5EF4-FFF2-40B4-BE49-F238E27FC236}">
-                <a16:creationId xmlns:a16="http://schemas.microsoft.com/office/drawing/2014/main" id="{F7BC20F2-3765-CD83-75B0-4C3CF38A5FA1}"/>
+                <a16:creationId xmlns:a16="http://schemas.microsoft.com/office/drawing/2014/main" id="{78443C78-4E66-D9AB-6E02-DD44972A4D8B}"/>
               </a:ext>
             </a:extLst>
           </p:cNvPr>
@@ -9292,7 +9502,10 @@
               <a:buNone/>
               <a:defRPr sz="2000" b="1">
                 <a:solidFill>
-                  <a:schemeClr val="accent1"/>
+                  <a:schemeClr val="accent1">
+                    <a:lumMod val="70000"/>
+                    <a:lumOff val="30000"/>
+                  </a:schemeClr>
                 </a:solidFill>
                 <a:latin typeface="+mj-lt"/>
               </a:defRPr>
@@ -9312,7 +9525,7 @@
           <p:cNvPr id="8" name="item_1">
             <a:extLst>
               <a:ext uri="{FF2B5EF4-FFF2-40B4-BE49-F238E27FC236}">
-                <a16:creationId xmlns:a16="http://schemas.microsoft.com/office/drawing/2014/main" id="{A21A0929-FFC1-470C-1BAB-0D23F571F964}"/>
+                <a16:creationId xmlns:a16="http://schemas.microsoft.com/office/drawing/2014/main" id="{04B19555-A883-ACC9-5B38-F362FEA88D5A}"/>
               </a:ext>
             </a:extLst>
           </p:cNvPr>
@@ -9360,7 +9573,7 @@
           <p:cNvPr id="9" name="item_2_title">
             <a:extLst>
               <a:ext uri="{FF2B5EF4-FFF2-40B4-BE49-F238E27FC236}">
-                <a16:creationId xmlns:a16="http://schemas.microsoft.com/office/drawing/2014/main" id="{8D2815DD-3E51-C59F-2576-75862FA2AB45}"/>
+                <a16:creationId xmlns:a16="http://schemas.microsoft.com/office/drawing/2014/main" id="{C791FA15-4B01-55AF-6BAB-3381337CAF1F}"/>
               </a:ext>
             </a:extLst>
           </p:cNvPr>
@@ -9393,7 +9606,10 @@
               <a:buNone/>
               <a:defRPr sz="2000" b="1">
                 <a:solidFill>
-                  <a:schemeClr val="accent1"/>
+                  <a:schemeClr val="accent1">
+                    <a:lumMod val="70000"/>
+                    <a:lumOff val="30000"/>
+                  </a:schemeClr>
                 </a:solidFill>
                 <a:latin typeface="+mj-lt"/>
               </a:defRPr>
@@ -9413,7 +9629,7 @@
           <p:cNvPr id="10" name="item_2">
             <a:extLst>
               <a:ext uri="{FF2B5EF4-FFF2-40B4-BE49-F238E27FC236}">
-                <a16:creationId xmlns:a16="http://schemas.microsoft.com/office/drawing/2014/main" id="{53942DFC-6842-4C21-7479-A205F578FE64}"/>
+                <a16:creationId xmlns:a16="http://schemas.microsoft.com/office/drawing/2014/main" id="{5E1C0EC3-F7B1-8EB5-F650-854E5A397F64}"/>
               </a:ext>
             </a:extLst>
           </p:cNvPr>
@@ -9461,7 +9677,7 @@
           <p:cNvPr id="11" name="item_3_title">
             <a:extLst>
               <a:ext uri="{FF2B5EF4-FFF2-40B4-BE49-F238E27FC236}">
-                <a16:creationId xmlns:a16="http://schemas.microsoft.com/office/drawing/2014/main" id="{A8DF379B-FCBF-5A4D-B2CD-67A1F3A85D4A}"/>
+                <a16:creationId xmlns:a16="http://schemas.microsoft.com/office/drawing/2014/main" id="{A9285C3A-C1D9-1562-AA27-53F53C318B17}"/>
               </a:ext>
             </a:extLst>
           </p:cNvPr>
@@ -9494,7 +9710,10 @@
               <a:buNone/>
               <a:defRPr sz="2000" b="1">
                 <a:solidFill>
-                  <a:schemeClr val="accent1"/>
+                  <a:schemeClr val="accent1">
+                    <a:lumMod val="70000"/>
+                    <a:lumOff val="30000"/>
+                  </a:schemeClr>
                 </a:solidFill>
                 <a:latin typeface="+mj-lt"/>
               </a:defRPr>
@@ -9514,7 +9733,7 @@
           <p:cNvPr id="12" name="item_3">
             <a:extLst>
               <a:ext uri="{FF2B5EF4-FFF2-40B4-BE49-F238E27FC236}">
-                <a16:creationId xmlns:a16="http://schemas.microsoft.com/office/drawing/2014/main" id="{E8570990-CD99-336D-179B-C2C381AA1CF2}"/>
+                <a16:creationId xmlns:a16="http://schemas.microsoft.com/office/drawing/2014/main" id="{B29909B6-A63D-74C8-998E-E31371D9CB5E}"/>
               </a:ext>
             </a:extLst>
           </p:cNvPr>
@@ -9562,7 +9781,7 @@
           <p:cNvPr id="13" name="source">
             <a:extLst>
               <a:ext uri="{FF2B5EF4-FFF2-40B4-BE49-F238E27FC236}">
-                <a16:creationId xmlns:a16="http://schemas.microsoft.com/office/drawing/2014/main" id="{C859F92F-FDA4-C12C-BD54-79CD90381AD2}"/>
+                <a16:creationId xmlns:a16="http://schemas.microsoft.com/office/drawing/2014/main" id="{2ADADE69-7B2E-F8D6-33A4-D9E387735D1B}"/>
               </a:ext>
             </a:extLst>
           </p:cNvPr>
@@ -9584,7 +9803,10 @@
             </a:avLst>
           </a:prstGeom>
           <a:solidFill>
-            <a:schemeClr val="accent1"/>
+            <a:schemeClr val="accent1">
+              <a:lumMod val="70000"/>
+              <a:lumOff val="30000"/>
+            </a:schemeClr>
           </a:solidFill>
         </p:spPr>
         <p:txBody>
@@ -9617,7 +9839,7 @@
     </p:spTree>
     <p:extLst>
       <p:ext uri="{BB962C8B-B14F-4D97-AF65-F5344CB8AC3E}">
-        <p14:creationId xmlns:p14="http://schemas.microsoft.com/office/powerpoint/2010/main" val="3548884057"/>
+        <p14:creationId xmlns:p14="http://schemas.microsoft.com/office/powerpoint/2010/main" val="4230353982"/>
       </p:ext>
     </p:extLst>
   </p:cSld>
@@ -9649,7 +9871,7 @@
           <p:cNvPr id="6" name="glow">
             <a:extLst>
               <a:ext uri="{FF2B5EF4-FFF2-40B4-BE49-F238E27FC236}">
-                <a16:creationId xmlns:a16="http://schemas.microsoft.com/office/drawing/2014/main" id="{C6054E55-60EA-0843-8B27-4B7F4F660C77}"/>
+                <a16:creationId xmlns:a16="http://schemas.microsoft.com/office/drawing/2014/main" id="{1E6AFE33-021F-D946-661D-100080B2593F}"/>
               </a:ext>
             </a:extLst>
           </p:cNvPr>
@@ -9668,11 +9890,15 @@
             <a:gsLst>
               <a:gs pos="0">
                 <a:schemeClr val="accent1">
+                  <a:lumMod val="70000"/>
+                  <a:lumOff val="30000"/>
                   <a:alpha val="28000"/>
                 </a:schemeClr>
               </a:gs>
               <a:gs pos="100000">
                 <a:schemeClr val="accent1">
+                  <a:lumMod val="70000"/>
+                  <a:lumOff val="30000"/>
                   <a:alpha val="0"/>
                 </a:schemeClr>
               </a:gs>
@@ -9831,9 +10057,9 @@
             </a:lvl1pPr>
           </a:lstStyle>
           <a:p>
-            <a:fld id="{E74088FC-AB1D-4731-A24C-F46EBDB0C5A7}" type="datetimeFigureOut">
+            <a:fld id="{F3B25E4A-609E-4439-9216-58A1FB513E4F}" type="datetimeFigureOut">
               <a:rPr lang="en-US" smtClean="0"/>
-              <a:t>10/3/2026</a:t>
+              <a:t>10/4/2026</a:t>
             </a:fld>
             <a:endParaRPr lang="en-US"/>
           </a:p>
@@ -9868,7 +10094,7 @@
             </a:lvl1pPr>
           </a:lstStyle>
           <a:p>
-            <a:fld id="{E4AD76C8-B1EB-4E10-9C29-0B8B3CD29BA6}" type="slidenum">
+            <a:fld id="{466CBC16-03F9-4EFF-A443-63D10023E700}" type="slidenum">
               <a:rPr lang="en-US" smtClean="0"/>
               <a:t>‹#›</a:t>
             </a:fld>
@@ -9881,7 +10107,7 @@
           <p:cNvPr id="7" name="marker_1">
             <a:extLst>
               <a:ext uri="{FF2B5EF4-FFF2-40B4-BE49-F238E27FC236}">
-                <a16:creationId xmlns:a16="http://schemas.microsoft.com/office/drawing/2014/main" id="{C81914FD-1845-15F8-F323-4801ECAC5F14}"/>
+                <a16:creationId xmlns:a16="http://schemas.microsoft.com/office/drawing/2014/main" id="{FC39ACA6-876F-1DF9-E358-A367C141CCC0}"/>
               </a:ext>
             </a:extLst>
           </p:cNvPr>
@@ -9901,7 +10127,10 @@
             <a:avLst/>
           </a:prstGeom>
           <a:solidFill>
-            <a:schemeClr val="accent1"/>
+            <a:schemeClr val="accent1">
+              <a:lumMod val="70000"/>
+              <a:lumOff val="30000"/>
+            </a:schemeClr>
           </a:solidFill>
         </p:spPr>
         <p:txBody>
@@ -9937,7 +10166,7 @@
           <p:cNvPr id="8" name="item_1_title">
             <a:extLst>
               <a:ext uri="{FF2B5EF4-FFF2-40B4-BE49-F238E27FC236}">
-                <a16:creationId xmlns:a16="http://schemas.microsoft.com/office/drawing/2014/main" id="{9575E9AC-5110-1489-E549-0F96332FACCD}"/>
+                <a16:creationId xmlns:a16="http://schemas.microsoft.com/office/drawing/2014/main" id="{50EB1A0C-0DA9-0208-7421-157D976D4227}"/>
               </a:ext>
             </a:extLst>
           </p:cNvPr>
@@ -9950,8 +10179,8 @@
         </p:nvSpPr>
         <p:spPr>
           <a:xfrm>
-            <a:off x="1270698" y="2334448"/>
-            <a:ext cx="8922674" cy="417730"/>
+            <a:off x="1270699" y="2334448"/>
+            <a:ext cx="8922675" cy="417730"/>
           </a:xfrm>
           <a:prstGeom prst="rect">
             <a:avLst/>
@@ -9970,7 +10199,10 @@
               <a:buNone/>
               <a:defRPr sz="2000" b="1">
                 <a:solidFill>
-                  <a:schemeClr val="accent1"/>
+                  <a:schemeClr val="accent1">
+                    <a:lumMod val="70000"/>
+                    <a:lumOff val="30000"/>
+                  </a:schemeClr>
                 </a:solidFill>
                 <a:latin typeface="+mj-lt"/>
               </a:defRPr>
@@ -9990,7 +10222,7 @@
           <p:cNvPr id="9" name="item_1">
             <a:extLst>
               <a:ext uri="{FF2B5EF4-FFF2-40B4-BE49-F238E27FC236}">
-                <a16:creationId xmlns:a16="http://schemas.microsoft.com/office/drawing/2014/main" id="{A2ADFD78-93F8-FA17-F1A1-B83B76A4D4AB}"/>
+                <a16:creationId xmlns:a16="http://schemas.microsoft.com/office/drawing/2014/main" id="{88D63932-2CBC-D9F5-B47B-0BE528ABB860}"/>
               </a:ext>
             </a:extLst>
           </p:cNvPr>
@@ -10003,8 +10235,8 @@
         </p:nvSpPr>
         <p:spPr>
           <a:xfrm>
-            <a:off x="1270698" y="2752180"/>
-            <a:ext cx="8922674" cy="1002553"/>
+            <a:off x="1270699" y="2752180"/>
+            <a:ext cx="8922675" cy="1002553"/>
           </a:xfrm>
           <a:prstGeom prst="rect">
             <a:avLst/>
@@ -10038,7 +10270,7 @@
           <p:cNvPr id="10" name="marker_2">
             <a:extLst>
               <a:ext uri="{FF2B5EF4-FFF2-40B4-BE49-F238E27FC236}">
-                <a16:creationId xmlns:a16="http://schemas.microsoft.com/office/drawing/2014/main" id="{789437E5-A572-77C9-24AD-740B158568CA}"/>
+                <a16:creationId xmlns:a16="http://schemas.microsoft.com/office/drawing/2014/main" id="{D0AAA542-40F5-186B-921F-07E4454D37AF}"/>
               </a:ext>
             </a:extLst>
           </p:cNvPr>
@@ -10058,7 +10290,10 @@
             <a:avLst/>
           </a:prstGeom>
           <a:solidFill>
-            <a:schemeClr val="accent1"/>
+            <a:schemeClr val="accent1">
+              <a:lumMod val="70000"/>
+              <a:lumOff val="30000"/>
+            </a:schemeClr>
           </a:solidFill>
         </p:spPr>
         <p:txBody>
@@ -10094,7 +10329,7 @@
           <p:cNvPr id="11" name="item_2_title">
             <a:extLst>
               <a:ext uri="{FF2B5EF4-FFF2-40B4-BE49-F238E27FC236}">
-                <a16:creationId xmlns:a16="http://schemas.microsoft.com/office/drawing/2014/main" id="{3B778758-000F-916C-096F-5DEEBF12DDC9}"/>
+                <a16:creationId xmlns:a16="http://schemas.microsoft.com/office/drawing/2014/main" id="{93F46F16-6D1D-4D4A-5EFD-98E358DA1899}"/>
               </a:ext>
             </a:extLst>
           </p:cNvPr>
@@ -10107,8 +10342,8 @@
         </p:nvSpPr>
         <p:spPr>
           <a:xfrm>
-            <a:off x="1270698" y="4385968"/>
-            <a:ext cx="8922674" cy="417730"/>
+            <a:off x="1270699" y="4385968"/>
+            <a:ext cx="8922675" cy="417730"/>
           </a:xfrm>
           <a:prstGeom prst="rect">
             <a:avLst/>
@@ -10127,7 +10362,10 @@
               <a:buNone/>
               <a:defRPr sz="2000" b="1">
                 <a:solidFill>
-                  <a:schemeClr val="accent1"/>
+                  <a:schemeClr val="accent1">
+                    <a:lumMod val="70000"/>
+                    <a:lumOff val="30000"/>
+                  </a:schemeClr>
                 </a:solidFill>
                 <a:latin typeface="+mj-lt"/>
               </a:defRPr>
@@ -10147,7 +10385,7 @@
           <p:cNvPr id="12" name="item_2">
             <a:extLst>
               <a:ext uri="{FF2B5EF4-FFF2-40B4-BE49-F238E27FC236}">
-                <a16:creationId xmlns:a16="http://schemas.microsoft.com/office/drawing/2014/main" id="{447D0069-0129-9025-6A24-13E4D89C6C9E}"/>
+                <a16:creationId xmlns:a16="http://schemas.microsoft.com/office/drawing/2014/main" id="{004E3D85-6FCF-8FF2-352A-9AA6307E3407}"/>
               </a:ext>
             </a:extLst>
           </p:cNvPr>
@@ -10160,8 +10398,8 @@
         </p:nvSpPr>
         <p:spPr>
           <a:xfrm>
-            <a:off x="1270698" y="4803700"/>
-            <a:ext cx="8922674" cy="1002553"/>
+            <a:off x="1270699" y="4803700"/>
+            <a:ext cx="8922675" cy="1002553"/>
           </a:xfrm>
           <a:prstGeom prst="rect">
             <a:avLst/>
@@ -10195,7 +10433,7 @@
           <p:cNvPr id="13" name="source">
             <a:extLst>
               <a:ext uri="{FF2B5EF4-FFF2-40B4-BE49-F238E27FC236}">
-                <a16:creationId xmlns:a16="http://schemas.microsoft.com/office/drawing/2014/main" id="{94F9E2D1-D212-D83E-C9C4-6651E01D47F9}"/>
+                <a16:creationId xmlns:a16="http://schemas.microsoft.com/office/drawing/2014/main" id="{3021D0BD-F984-E2D8-02B8-480752051116}"/>
               </a:ext>
             </a:extLst>
           </p:cNvPr>
@@ -10217,7 +10455,10 @@
             </a:avLst>
           </a:prstGeom>
           <a:solidFill>
-            <a:schemeClr val="accent1"/>
+            <a:schemeClr val="accent1">
+              <a:lumMod val="70000"/>
+              <a:lumOff val="30000"/>
+            </a:schemeClr>
           </a:solidFill>
         </p:spPr>
         <p:txBody>
@@ -10250,7 +10491,7 @@
     </p:spTree>
     <p:extLst>
       <p:ext uri="{BB962C8B-B14F-4D97-AF65-F5344CB8AC3E}">
-        <p14:creationId xmlns:p14="http://schemas.microsoft.com/office/powerpoint/2010/main" val="3175090193"/>
+        <p14:creationId xmlns:p14="http://schemas.microsoft.com/office/powerpoint/2010/main" val="2140109397"/>
       </p:ext>
     </p:extLst>
   </p:cSld>
@@ -10282,7 +10523,7 @@
           <p:cNvPr id="6" name="glow">
             <a:extLst>
               <a:ext uri="{FF2B5EF4-FFF2-40B4-BE49-F238E27FC236}">
-                <a16:creationId xmlns:a16="http://schemas.microsoft.com/office/drawing/2014/main" id="{D37DB373-6548-BDA8-9AEE-D32229773A44}"/>
+                <a16:creationId xmlns:a16="http://schemas.microsoft.com/office/drawing/2014/main" id="{E60C8FE8-FD0C-F9F1-6BF8-3BA04D56EED8}"/>
               </a:ext>
             </a:extLst>
           </p:cNvPr>
@@ -10301,11 +10542,15 @@
             <a:gsLst>
               <a:gs pos="0">
                 <a:schemeClr val="accent1">
+                  <a:lumMod val="70000"/>
+                  <a:lumOff val="30000"/>
                   <a:alpha val="28000"/>
                 </a:schemeClr>
               </a:gs>
               <a:gs pos="100000">
                 <a:schemeClr val="accent1">
+                  <a:lumMod val="70000"/>
+                  <a:lumOff val="30000"/>
                   <a:alpha val="0"/>
                 </a:schemeClr>
               </a:gs>
@@ -10464,9 +10709,9 @@
             </a:lvl1pPr>
           </a:lstStyle>
           <a:p>
-            <a:fld id="{E74088FC-AB1D-4731-A24C-F46EBDB0C5A7}" type="datetimeFigureOut">
+            <a:fld id="{F3B25E4A-609E-4439-9216-58A1FB513E4F}" type="datetimeFigureOut">
               <a:rPr lang="en-US" smtClean="0"/>
-              <a:t>10/3/2026</a:t>
+              <a:t>10/4/2026</a:t>
             </a:fld>
             <a:endParaRPr lang="en-US"/>
           </a:p>
@@ -10501,7 +10746,7 @@
             </a:lvl1pPr>
           </a:lstStyle>
           <a:p>
-            <a:fld id="{E4AD76C8-B1EB-4E10-9C29-0B8B3CD29BA6}" type="slidenum">
+            <a:fld id="{466CBC16-03F9-4EFF-A443-63D10023E700}" type="slidenum">
               <a:rPr lang="en-US" smtClean="0"/>
               <a:t>‹#›</a:t>
             </a:fld>
@@ -10514,7 +10759,7 @@
           <p:cNvPr id="7" name="kpi_value_1">
             <a:extLst>
               <a:ext uri="{FF2B5EF4-FFF2-40B4-BE49-F238E27FC236}">
-                <a16:creationId xmlns:a16="http://schemas.microsoft.com/office/drawing/2014/main" id="{9C3B2D20-6DF8-9113-2FCE-DC0F3764610E}"/>
+                <a16:creationId xmlns:a16="http://schemas.microsoft.com/office/drawing/2014/main" id="{2511F302-7FBD-4203-767B-B050D368EB6D}"/>
               </a:ext>
             </a:extLst>
           </p:cNvPr>
@@ -10544,7 +10789,10 @@
               <a:buNone/>
               <a:defRPr sz="10800" b="1">
                 <a:solidFill>
-                  <a:schemeClr val="accent1"/>
+                  <a:schemeClr val="accent1">
+                    <a:lumMod val="70000"/>
+                    <a:lumOff val="30000"/>
+                  </a:schemeClr>
                 </a:solidFill>
                 <a:latin typeface="+mj-lt"/>
               </a:defRPr>
@@ -10564,7 +10812,7 @@
           <p:cNvPr id="8" name="kpi_label_1">
             <a:extLst>
               <a:ext uri="{FF2B5EF4-FFF2-40B4-BE49-F238E27FC236}">
-                <a16:creationId xmlns:a16="http://schemas.microsoft.com/office/drawing/2014/main" id="{1B9D7CB8-2D68-6972-980C-C9B3D6EF784F}"/>
+                <a16:creationId xmlns:a16="http://schemas.microsoft.com/office/drawing/2014/main" id="{288D77B7-6AE7-F34D-0C49-F811148A729C}"/>
               </a:ext>
             </a:extLst>
           </p:cNvPr>
@@ -10612,7 +10860,7 @@
           <p:cNvPr id="9" name="quote">
             <a:extLst>
               <a:ext uri="{FF2B5EF4-FFF2-40B4-BE49-F238E27FC236}">
-                <a16:creationId xmlns:a16="http://schemas.microsoft.com/office/drawing/2014/main" id="{CE238DB0-61B4-6C2B-2CDC-62D6590A8127}"/>
+                <a16:creationId xmlns:a16="http://schemas.microsoft.com/office/drawing/2014/main" id="{16E71EE9-B16F-A43D-F93B-0E87118C4C4B}"/>
               </a:ext>
             </a:extLst>
           </p:cNvPr>
@@ -10662,7 +10910,7 @@
           <p:cNvPr id="10" name="attribution">
             <a:extLst>
               <a:ext uri="{FF2B5EF4-FFF2-40B4-BE49-F238E27FC236}">
-                <a16:creationId xmlns:a16="http://schemas.microsoft.com/office/drawing/2014/main" id="{A8244621-C7BC-72F2-A184-3B071C3ACB47}"/>
+                <a16:creationId xmlns:a16="http://schemas.microsoft.com/office/drawing/2014/main" id="{50EB9058-BBE5-2F60-1BDE-BD52344DC185}"/>
               </a:ext>
             </a:extLst>
           </p:cNvPr>
@@ -10710,7 +10958,7 @@
           <p:cNvPr id="11" name="item_1_title">
             <a:extLst>
               <a:ext uri="{FF2B5EF4-FFF2-40B4-BE49-F238E27FC236}">
-                <a16:creationId xmlns:a16="http://schemas.microsoft.com/office/drawing/2014/main" id="{AB5ABF98-7D0F-F254-711E-EE2339E48579}"/>
+                <a16:creationId xmlns:a16="http://schemas.microsoft.com/office/drawing/2014/main" id="{DC57E679-E44F-EA96-8C94-F6AA2A617E85}"/>
               </a:ext>
             </a:extLst>
           </p:cNvPr>
@@ -10743,7 +10991,10 @@
               <a:buNone/>
               <a:defRPr sz="2000" b="1">
                 <a:solidFill>
-                  <a:schemeClr val="accent1"/>
+                  <a:schemeClr val="accent1">
+                    <a:lumMod val="70000"/>
+                    <a:lumOff val="30000"/>
+                  </a:schemeClr>
                 </a:solidFill>
                 <a:latin typeface="+mj-lt"/>
               </a:defRPr>
@@ -10763,7 +11014,7 @@
           <p:cNvPr id="12" name="item_1">
             <a:extLst>
               <a:ext uri="{FF2B5EF4-FFF2-40B4-BE49-F238E27FC236}">
-                <a16:creationId xmlns:a16="http://schemas.microsoft.com/office/drawing/2014/main" id="{3684247E-993E-C3F0-A72E-4118828D18C1}"/>
+                <a16:creationId xmlns:a16="http://schemas.microsoft.com/office/drawing/2014/main" id="{D8816FBA-F99E-D701-2D15-35A8B693C6D4}"/>
               </a:ext>
             </a:extLst>
           </p:cNvPr>
@@ -10811,7 +11062,7 @@
           <p:cNvPr id="13" name="source">
             <a:extLst>
               <a:ext uri="{FF2B5EF4-FFF2-40B4-BE49-F238E27FC236}">
-                <a16:creationId xmlns:a16="http://schemas.microsoft.com/office/drawing/2014/main" id="{63AB064E-7BEF-4614-F6D4-7B8A1F113F57}"/>
+                <a16:creationId xmlns:a16="http://schemas.microsoft.com/office/drawing/2014/main" id="{EB11924A-A858-D759-6CA9-72296835DF2D}"/>
               </a:ext>
             </a:extLst>
           </p:cNvPr>
@@ -10833,7 +11084,10 @@
             </a:avLst>
           </a:prstGeom>
           <a:solidFill>
-            <a:schemeClr val="accent1"/>
+            <a:schemeClr val="accent1">
+              <a:lumMod val="70000"/>
+              <a:lumOff val="30000"/>
+            </a:schemeClr>
           </a:solidFill>
         </p:spPr>
         <p:txBody>
@@ -10866,7 +11120,7 @@
     </p:spTree>
     <p:extLst>
       <p:ext uri="{BB962C8B-B14F-4D97-AF65-F5344CB8AC3E}">
-        <p14:creationId xmlns:p14="http://schemas.microsoft.com/office/powerpoint/2010/main" val="3503813711"/>
+        <p14:creationId xmlns:p14="http://schemas.microsoft.com/office/powerpoint/2010/main" val="459040721"/>
       </p:ext>
     </p:extLst>
   </p:cSld>
@@ -10898,7 +11152,7 @@
           <p:cNvPr id="6" name="glow">
             <a:extLst>
               <a:ext uri="{FF2B5EF4-FFF2-40B4-BE49-F238E27FC236}">
-                <a16:creationId xmlns:a16="http://schemas.microsoft.com/office/drawing/2014/main" id="{048574E4-1DA3-F0C6-7195-C4A2962FA746}"/>
+                <a16:creationId xmlns:a16="http://schemas.microsoft.com/office/drawing/2014/main" id="{0A523530-6C56-0E03-7310-1D86E819763D}"/>
               </a:ext>
             </a:extLst>
           </p:cNvPr>
@@ -10917,11 +11171,15 @@
             <a:gsLst>
               <a:gs pos="0">
                 <a:schemeClr val="accent1">
+                  <a:lumMod val="70000"/>
+                  <a:lumOff val="30000"/>
                   <a:alpha val="28000"/>
                 </a:schemeClr>
               </a:gs>
               <a:gs pos="100000">
                 <a:schemeClr val="accent1">
+                  <a:lumMod val="70000"/>
+                  <a:lumOff val="30000"/>
                   <a:alpha val="0"/>
                 </a:schemeClr>
               </a:gs>
@@ -11080,9 +11338,9 @@
             </a:lvl1pPr>
           </a:lstStyle>
           <a:p>
-            <a:fld id="{E74088FC-AB1D-4731-A24C-F46EBDB0C5A7}" type="datetimeFigureOut">
+            <a:fld id="{F3B25E4A-609E-4439-9216-58A1FB513E4F}" type="datetimeFigureOut">
               <a:rPr lang="en-US" smtClean="0"/>
-              <a:t>10/3/2026</a:t>
+              <a:t>10/4/2026</a:t>
             </a:fld>
             <a:endParaRPr lang="en-US"/>
           </a:p>
@@ -11117,7 +11375,7 @@
             </a:lvl1pPr>
           </a:lstStyle>
           <a:p>
-            <a:fld id="{E4AD76C8-B1EB-4E10-9C29-0B8B3CD29BA6}" type="slidenum">
+            <a:fld id="{466CBC16-03F9-4EFF-A443-63D10023E700}" type="slidenum">
               <a:rPr lang="en-US" smtClean="0"/>
               <a:t>‹#›</a:t>
             </a:fld>
@@ -11130,7 +11388,7 @@
           <p:cNvPr id="7" name="marker_1">
             <a:extLst>
               <a:ext uri="{FF2B5EF4-FFF2-40B4-BE49-F238E27FC236}">
-                <a16:creationId xmlns:a16="http://schemas.microsoft.com/office/drawing/2014/main" id="{27CBA1EA-2623-3368-A5CC-94F930168046}"/>
+                <a16:creationId xmlns:a16="http://schemas.microsoft.com/office/drawing/2014/main" id="{E1C9A480-9A21-B831-13AB-A5103B6D5808}"/>
               </a:ext>
             </a:extLst>
           </p:cNvPr>
@@ -11150,7 +11408,10 @@
             <a:avLst/>
           </a:prstGeom>
           <a:solidFill>
-            <a:schemeClr val="accent1"/>
+            <a:schemeClr val="accent1">
+              <a:lumMod val="70000"/>
+              <a:lumOff val="30000"/>
+            </a:schemeClr>
           </a:solidFill>
         </p:spPr>
         <p:txBody>
@@ -11186,7 +11447,7 @@
           <p:cNvPr id="8" name="item_1">
             <a:extLst>
               <a:ext uri="{FF2B5EF4-FFF2-40B4-BE49-F238E27FC236}">
-                <a16:creationId xmlns:a16="http://schemas.microsoft.com/office/drawing/2014/main" id="{4A730F7E-0252-7E39-8DD8-86E3857D1968}"/>
+                <a16:creationId xmlns:a16="http://schemas.microsoft.com/office/drawing/2014/main" id="{EE5B1CE5-8191-F48E-7A30-65DF9ED38AD3}"/>
               </a:ext>
             </a:extLst>
           </p:cNvPr>
@@ -11234,7 +11495,7 @@
           <p:cNvPr id="9" name="marker_2">
             <a:extLst>
               <a:ext uri="{FF2B5EF4-FFF2-40B4-BE49-F238E27FC236}">
-                <a16:creationId xmlns:a16="http://schemas.microsoft.com/office/drawing/2014/main" id="{988AC307-955C-2413-ACCF-1CB75DBC6D95}"/>
+                <a16:creationId xmlns:a16="http://schemas.microsoft.com/office/drawing/2014/main" id="{7CCAA80F-6E90-7DBA-161A-F0A904D6B674}"/>
               </a:ext>
             </a:extLst>
           </p:cNvPr>
@@ -11254,7 +11515,10 @@
             <a:avLst/>
           </a:prstGeom>
           <a:solidFill>
-            <a:schemeClr val="accent1"/>
+            <a:schemeClr val="accent1">
+              <a:lumMod val="70000"/>
+              <a:lumOff val="30000"/>
+            </a:schemeClr>
           </a:solidFill>
         </p:spPr>
         <p:txBody>
@@ -11290,7 +11554,7 @@
           <p:cNvPr id="10" name="item_2">
             <a:extLst>
               <a:ext uri="{FF2B5EF4-FFF2-40B4-BE49-F238E27FC236}">
-                <a16:creationId xmlns:a16="http://schemas.microsoft.com/office/drawing/2014/main" id="{8A9D5810-0336-486F-F63B-8D29B1D08CA3}"/>
+                <a16:creationId xmlns:a16="http://schemas.microsoft.com/office/drawing/2014/main" id="{BD07E8ED-33A1-0632-A978-10EF9AE15BF2}"/>
               </a:ext>
             </a:extLst>
           </p:cNvPr>
@@ -11338,7 +11602,7 @@
           <p:cNvPr id="11" name="marker_3">
             <a:extLst>
               <a:ext uri="{FF2B5EF4-FFF2-40B4-BE49-F238E27FC236}">
-                <a16:creationId xmlns:a16="http://schemas.microsoft.com/office/drawing/2014/main" id="{5FFE3543-206C-722B-E2CA-499613A4A395}"/>
+                <a16:creationId xmlns:a16="http://schemas.microsoft.com/office/drawing/2014/main" id="{C42D954F-9EE7-8C0B-2348-5205D8BB685A}"/>
               </a:ext>
             </a:extLst>
           </p:cNvPr>
@@ -11358,7 +11622,10 @@
             <a:avLst/>
           </a:prstGeom>
           <a:solidFill>
-            <a:schemeClr val="accent1"/>
+            <a:schemeClr val="accent1">
+              <a:lumMod val="70000"/>
+              <a:lumOff val="30000"/>
+            </a:schemeClr>
           </a:solidFill>
         </p:spPr>
         <p:txBody>
@@ -11394,7 +11661,7 @@
           <p:cNvPr id="12" name="item_3">
             <a:extLst>
               <a:ext uri="{FF2B5EF4-FFF2-40B4-BE49-F238E27FC236}">
-                <a16:creationId xmlns:a16="http://schemas.microsoft.com/office/drawing/2014/main" id="{83CC1120-F063-5CC0-907F-08624CA4B754}"/>
+                <a16:creationId xmlns:a16="http://schemas.microsoft.com/office/drawing/2014/main" id="{26BEA96B-F395-B521-D7F3-C98EBFDA4122}"/>
               </a:ext>
             </a:extLst>
           </p:cNvPr>
@@ -11442,7 +11709,7 @@
           <p:cNvPr id="13" name="marker_4">
             <a:extLst>
               <a:ext uri="{FF2B5EF4-FFF2-40B4-BE49-F238E27FC236}">
-                <a16:creationId xmlns:a16="http://schemas.microsoft.com/office/drawing/2014/main" id="{3A0C8171-8EDD-6BE9-B54D-D520E5FD4A86}"/>
+                <a16:creationId xmlns:a16="http://schemas.microsoft.com/office/drawing/2014/main" id="{B978CEE0-B7D8-860E-E18A-DE227DF3BB7A}"/>
               </a:ext>
             </a:extLst>
           </p:cNvPr>
@@ -11462,7 +11729,10 @@
             <a:avLst/>
           </a:prstGeom>
           <a:solidFill>
-            <a:schemeClr val="accent1"/>
+            <a:schemeClr val="accent1">
+              <a:lumMod val="70000"/>
+              <a:lumOff val="30000"/>
+            </a:schemeClr>
           </a:solidFill>
         </p:spPr>
         <p:txBody>
@@ -11498,7 +11768,7 @@
           <p:cNvPr id="14" name="item_4">
             <a:extLst>
               <a:ext uri="{FF2B5EF4-FFF2-40B4-BE49-F238E27FC236}">
-                <a16:creationId xmlns:a16="http://schemas.microsoft.com/office/drawing/2014/main" id="{961A9FB0-701C-5DAB-81F8-B10D0B4C5E54}"/>
+                <a16:creationId xmlns:a16="http://schemas.microsoft.com/office/drawing/2014/main" id="{3214BACB-A245-2D1B-485E-C64DAB3C4355}"/>
               </a:ext>
             </a:extLst>
           </p:cNvPr>
@@ -11546,7 +11816,7 @@
           <p:cNvPr id="15" name="source">
             <a:extLst>
               <a:ext uri="{FF2B5EF4-FFF2-40B4-BE49-F238E27FC236}">
-                <a16:creationId xmlns:a16="http://schemas.microsoft.com/office/drawing/2014/main" id="{52BB1E58-2240-E012-192F-C8D21B5BD590}"/>
+                <a16:creationId xmlns:a16="http://schemas.microsoft.com/office/drawing/2014/main" id="{6639E963-1BA3-79AE-C4E8-AA487A40D270}"/>
               </a:ext>
             </a:extLst>
           </p:cNvPr>
@@ -11568,7 +11838,10 @@
             </a:avLst>
           </a:prstGeom>
           <a:solidFill>
-            <a:schemeClr val="accent1"/>
+            <a:schemeClr val="accent1">
+              <a:lumMod val="70000"/>
+              <a:lumOff val="30000"/>
+            </a:schemeClr>
           </a:solidFill>
         </p:spPr>
         <p:txBody>
@@ -11601,7 +11874,7 @@
     </p:spTree>
     <p:extLst>
       <p:ext uri="{BB962C8B-B14F-4D97-AF65-F5344CB8AC3E}">
-        <p14:creationId xmlns:p14="http://schemas.microsoft.com/office/powerpoint/2010/main" val="1223383320"/>
+        <p14:creationId xmlns:p14="http://schemas.microsoft.com/office/powerpoint/2010/main" val="1427386687"/>
       </p:ext>
     </p:extLst>
   </p:cSld>
@@ -11633,7 +11906,7 @@
           <p:cNvPr id="6" name="glow">
             <a:extLst>
               <a:ext uri="{FF2B5EF4-FFF2-40B4-BE49-F238E27FC236}">
-                <a16:creationId xmlns:a16="http://schemas.microsoft.com/office/drawing/2014/main" id="{FE03E687-D25E-70CC-9429-DBA2C5529E96}"/>
+                <a16:creationId xmlns:a16="http://schemas.microsoft.com/office/drawing/2014/main" id="{F9BB77A2-1BED-B0A2-3C86-ADAB17A23E80}"/>
               </a:ext>
             </a:extLst>
           </p:cNvPr>
@@ -11652,11 +11925,15 @@
             <a:gsLst>
               <a:gs pos="0">
                 <a:schemeClr val="accent1">
+                  <a:lumMod val="70000"/>
+                  <a:lumOff val="30000"/>
                   <a:alpha val="28000"/>
                 </a:schemeClr>
               </a:gs>
               <a:gs pos="100000">
                 <a:schemeClr val="accent1">
+                  <a:lumMod val="70000"/>
+                  <a:lumOff val="30000"/>
                   <a:alpha val="0"/>
                 </a:schemeClr>
               </a:gs>
@@ -11815,9 +12092,9 @@
             </a:lvl1pPr>
           </a:lstStyle>
           <a:p>
-            <a:fld id="{E74088FC-AB1D-4731-A24C-F46EBDB0C5A7}" type="datetimeFigureOut">
+            <a:fld id="{F3B25E4A-609E-4439-9216-58A1FB513E4F}" type="datetimeFigureOut">
               <a:rPr lang="en-US" smtClean="0"/>
-              <a:t>10/3/2026</a:t>
+              <a:t>10/4/2026</a:t>
             </a:fld>
             <a:endParaRPr lang="en-US"/>
           </a:p>
@@ -11852,7 +12129,7 @@
             </a:lvl1pPr>
           </a:lstStyle>
           <a:p>
-            <a:fld id="{E4AD76C8-B1EB-4E10-9C29-0B8B3CD29BA6}" type="slidenum">
+            <a:fld id="{466CBC16-03F9-4EFF-A443-63D10023E700}" type="slidenum">
               <a:rPr lang="en-US" smtClean="0"/>
               <a:t>‹#›</a:t>
             </a:fld>
@@ -11865,7 +12142,7 @@
           <p:cNvPr id="7" name="decisions_title">
             <a:extLst>
               <a:ext uri="{FF2B5EF4-FFF2-40B4-BE49-F238E27FC236}">
-                <a16:creationId xmlns:a16="http://schemas.microsoft.com/office/drawing/2014/main" id="{B3482608-AE78-4F7D-4C7A-902B1760BACA}"/>
+                <a16:creationId xmlns:a16="http://schemas.microsoft.com/office/drawing/2014/main" id="{8B436507-53FF-D7DA-E6C2-A0A854A14DC7}"/>
               </a:ext>
             </a:extLst>
           </p:cNvPr>
@@ -11895,7 +12172,10 @@
               <a:buNone/>
               <a:defRPr sz="2000" b="1">
                 <a:solidFill>
-                  <a:schemeClr val="accent1"/>
+                  <a:schemeClr val="accent1">
+                    <a:lumMod val="70000"/>
+                    <a:lumOff val="30000"/>
+                  </a:schemeClr>
                 </a:solidFill>
                 <a:latin typeface="+mj-lt"/>
               </a:defRPr>
@@ -11915,7 +12195,7 @@
           <p:cNvPr id="8" name="decisions">
             <a:extLst>
               <a:ext uri="{FF2B5EF4-FFF2-40B4-BE49-F238E27FC236}">
-                <a16:creationId xmlns:a16="http://schemas.microsoft.com/office/drawing/2014/main" id="{1CDA50A1-E469-7D4E-BE1A-9912C7D9BB7D}"/>
+                <a16:creationId xmlns:a16="http://schemas.microsoft.com/office/drawing/2014/main" id="{6CFF1E45-4C2F-4C3E-C59D-25D4420E4FBB}"/>
               </a:ext>
             </a:extLst>
           </p:cNvPr>
@@ -11928,8 +12208,8 @@
         </p:nvSpPr>
         <p:spPr>
           <a:xfrm>
-            <a:off x="3113867" y="4890958"/>
-            <a:ext cx="7079504" cy="915294"/>
+            <a:off x="3113868" y="4890958"/>
+            <a:ext cx="7079505" cy="915294"/>
           </a:xfrm>
           <a:prstGeom prst="rect">
             <a:avLst/>
@@ -11960,7 +12240,7 @@
           <p:cNvPr id="9" name="item_1_title">
             <a:extLst>
               <a:ext uri="{FF2B5EF4-FFF2-40B4-BE49-F238E27FC236}">
-                <a16:creationId xmlns:a16="http://schemas.microsoft.com/office/drawing/2014/main" id="{D0608A84-2FBC-C472-3D8F-93E032AFD65B}"/>
+                <a16:creationId xmlns:a16="http://schemas.microsoft.com/office/drawing/2014/main" id="{FEB21B84-C580-135D-2E06-740A331A0ADF}"/>
               </a:ext>
             </a:extLst>
           </p:cNvPr>
@@ -11993,7 +12273,10 @@
               <a:buNone/>
               <a:defRPr sz="2000" b="1">
                 <a:solidFill>
-                  <a:schemeClr val="accent1"/>
+                  <a:schemeClr val="accent1">
+                    <a:lumMod val="70000"/>
+                    <a:lumOff val="30000"/>
+                  </a:schemeClr>
                 </a:solidFill>
                 <a:latin typeface="+mj-lt"/>
               </a:defRPr>
@@ -12013,7 +12296,7 @@
           <p:cNvPr id="10" name="item_1">
             <a:extLst>
               <a:ext uri="{FF2B5EF4-FFF2-40B4-BE49-F238E27FC236}">
-                <a16:creationId xmlns:a16="http://schemas.microsoft.com/office/drawing/2014/main" id="{AE4AFDC0-823C-E855-3A81-570D194A0A20}"/>
+                <a16:creationId xmlns:a16="http://schemas.microsoft.com/office/drawing/2014/main" id="{1F6CF521-6463-9F93-A448-00F3CB51C853}"/>
               </a:ext>
             </a:extLst>
           </p:cNvPr>
@@ -12061,7 +12344,7 @@
           <p:cNvPr id="11" name="item_2_title">
             <a:extLst>
               <a:ext uri="{FF2B5EF4-FFF2-40B4-BE49-F238E27FC236}">
-                <a16:creationId xmlns:a16="http://schemas.microsoft.com/office/drawing/2014/main" id="{C14DCB8E-B6EF-E94E-3C80-D33052B4CCB8}"/>
+                <a16:creationId xmlns:a16="http://schemas.microsoft.com/office/drawing/2014/main" id="{53087166-A0BE-77D4-3DDA-A1C5803C5280}"/>
               </a:ext>
             </a:extLst>
           </p:cNvPr>
@@ -12094,7 +12377,10 @@
               <a:buNone/>
               <a:defRPr sz="2000" b="1">
                 <a:solidFill>
-                  <a:schemeClr val="accent1"/>
+                  <a:schemeClr val="accent1">
+                    <a:lumMod val="70000"/>
+                    <a:lumOff val="30000"/>
+                  </a:schemeClr>
                 </a:solidFill>
                 <a:latin typeface="+mj-lt"/>
               </a:defRPr>
@@ -12114,7 +12400,7 @@
           <p:cNvPr id="12" name="item_2">
             <a:extLst>
               <a:ext uri="{FF2B5EF4-FFF2-40B4-BE49-F238E27FC236}">
-                <a16:creationId xmlns:a16="http://schemas.microsoft.com/office/drawing/2014/main" id="{D7075C70-65DA-67CC-7D9F-3A6AAA28FC9A}"/>
+                <a16:creationId xmlns:a16="http://schemas.microsoft.com/office/drawing/2014/main" id="{D04265FA-46EA-7326-BFA3-4D849EC10E2E}"/>
               </a:ext>
             </a:extLst>
           </p:cNvPr>
@@ -12162,7 +12448,7 @@
           <p:cNvPr id="13" name="item_3_title">
             <a:extLst>
               <a:ext uri="{FF2B5EF4-FFF2-40B4-BE49-F238E27FC236}">
-                <a16:creationId xmlns:a16="http://schemas.microsoft.com/office/drawing/2014/main" id="{8AE72B0E-490C-D3FD-BBAA-1FC9BD28A64D}"/>
+                <a16:creationId xmlns:a16="http://schemas.microsoft.com/office/drawing/2014/main" id="{37ABE9ED-E36A-4316-3074-4740D6C2529F}"/>
               </a:ext>
             </a:extLst>
           </p:cNvPr>
@@ -12195,7 +12481,10 @@
               <a:buNone/>
               <a:defRPr sz="2000" b="1">
                 <a:solidFill>
-                  <a:schemeClr val="accent1"/>
+                  <a:schemeClr val="accent1">
+                    <a:lumMod val="70000"/>
+                    <a:lumOff val="30000"/>
+                  </a:schemeClr>
                 </a:solidFill>
                 <a:latin typeface="+mj-lt"/>
               </a:defRPr>
@@ -12215,7 +12504,7 @@
           <p:cNvPr id="14" name="item_3">
             <a:extLst>
               <a:ext uri="{FF2B5EF4-FFF2-40B4-BE49-F238E27FC236}">
-                <a16:creationId xmlns:a16="http://schemas.microsoft.com/office/drawing/2014/main" id="{37E12395-3EE2-CBD2-7A0B-6C91D3F5B8B6}"/>
+                <a16:creationId xmlns:a16="http://schemas.microsoft.com/office/drawing/2014/main" id="{7905D2EA-5C42-7056-1E97-3F7CC20299D8}"/>
               </a:ext>
             </a:extLst>
           </p:cNvPr>
@@ -12263,7 +12552,7 @@
           <p:cNvPr id="15" name="source">
             <a:extLst>
               <a:ext uri="{FF2B5EF4-FFF2-40B4-BE49-F238E27FC236}">
-                <a16:creationId xmlns:a16="http://schemas.microsoft.com/office/drawing/2014/main" id="{F753DC90-77D4-E9A2-EDF8-383F8294D1AF}"/>
+                <a16:creationId xmlns:a16="http://schemas.microsoft.com/office/drawing/2014/main" id="{B7FD029D-CFB0-A63F-50E9-ADBEEBAA7480}"/>
               </a:ext>
             </a:extLst>
           </p:cNvPr>
@@ -12285,7 +12574,10 @@
             </a:avLst>
           </a:prstGeom>
           <a:solidFill>
-            <a:schemeClr val="accent1"/>
+            <a:schemeClr val="accent1">
+              <a:lumMod val="70000"/>
+              <a:lumOff val="30000"/>
+            </a:schemeClr>
           </a:solidFill>
         </p:spPr>
         <p:txBody>
@@ -12318,7 +12610,7 @@
     </p:spTree>
     <p:extLst>
       <p:ext uri="{BB962C8B-B14F-4D97-AF65-F5344CB8AC3E}">
-        <p14:creationId xmlns:p14="http://schemas.microsoft.com/office/powerpoint/2010/main" val="1681404707"/>
+        <p14:creationId xmlns:p14="http://schemas.microsoft.com/office/powerpoint/2010/main" val="3827952489"/>
       </p:ext>
     </p:extLst>
   </p:cSld>
@@ -12350,7 +12642,7 @@
           <p:cNvPr id="6" name="glow">
             <a:extLst>
               <a:ext uri="{FF2B5EF4-FFF2-40B4-BE49-F238E27FC236}">
-                <a16:creationId xmlns:a16="http://schemas.microsoft.com/office/drawing/2014/main" id="{F09CD7E2-A7CF-09C9-0668-569A7E116BAD}"/>
+                <a16:creationId xmlns:a16="http://schemas.microsoft.com/office/drawing/2014/main" id="{4DDA5F15-B567-7CCC-2638-39A097465343}"/>
               </a:ext>
             </a:extLst>
           </p:cNvPr>
@@ -12369,11 +12661,15 @@
             <a:gsLst>
               <a:gs pos="0">
                 <a:schemeClr val="accent1">
+                  <a:lumMod val="70000"/>
+                  <a:lumOff val="30000"/>
                   <a:alpha val="28000"/>
                 </a:schemeClr>
               </a:gs>
               <a:gs pos="100000">
                 <a:schemeClr val="accent1">
+                  <a:lumMod val="70000"/>
+                  <a:lumOff val="30000"/>
                   <a:alpha val="0"/>
                 </a:schemeClr>
               </a:gs>
@@ -12532,9 +12828,9 @@
             </a:lvl1pPr>
           </a:lstStyle>
           <a:p>
-            <a:fld id="{E74088FC-AB1D-4731-A24C-F46EBDB0C5A7}" type="datetimeFigureOut">
+            <a:fld id="{F3B25E4A-609E-4439-9216-58A1FB513E4F}" type="datetimeFigureOut">
               <a:rPr lang="en-US" smtClean="0"/>
-              <a:t>10/3/2026</a:t>
+              <a:t>10/4/2026</a:t>
             </a:fld>
             <a:endParaRPr lang="en-US"/>
           </a:p>
@@ -12569,7 +12865,7 @@
             </a:lvl1pPr>
           </a:lstStyle>
           <a:p>
-            <a:fld id="{E4AD76C8-B1EB-4E10-9C29-0B8B3CD29BA6}" type="slidenum">
+            <a:fld id="{466CBC16-03F9-4EFF-A443-63D10023E700}" type="slidenum">
               <a:rPr lang="en-US" smtClean="0"/>
               <a:t>‹#›</a:t>
             </a:fld>
@@ -12582,7 +12878,7 @@
           <p:cNvPr id="7" name="body">
             <a:extLst>
               <a:ext uri="{FF2B5EF4-FFF2-40B4-BE49-F238E27FC236}">
-                <a16:creationId xmlns:a16="http://schemas.microsoft.com/office/drawing/2014/main" id="{C090B1E8-88DA-0434-5C0A-E73B3A9735EB}"/>
+                <a16:creationId xmlns:a16="http://schemas.microsoft.com/office/drawing/2014/main" id="{E34FACA7-609E-EC70-707D-D855724532DE}"/>
               </a:ext>
             </a:extLst>
           </p:cNvPr>
@@ -12624,7 +12920,7 @@
           <p:cNvPr id="8" name="kpi_value_1">
             <a:extLst>
               <a:ext uri="{FF2B5EF4-FFF2-40B4-BE49-F238E27FC236}">
-                <a16:creationId xmlns:a16="http://schemas.microsoft.com/office/drawing/2014/main" id="{9A4B9942-9DCE-E6F1-030F-25B6C0BFE719}"/>
+                <a16:creationId xmlns:a16="http://schemas.microsoft.com/office/drawing/2014/main" id="{0105022A-41A6-C800-36C6-37B5F5717FD0}"/>
               </a:ext>
             </a:extLst>
           </p:cNvPr>
@@ -12657,7 +12953,10 @@
               <a:buNone/>
               <a:defRPr sz="6000" b="1">
                 <a:solidFill>
-                  <a:schemeClr val="accent1"/>
+                  <a:schemeClr val="accent1">
+                    <a:lumMod val="70000"/>
+                    <a:lumOff val="30000"/>
+                  </a:schemeClr>
                 </a:solidFill>
                 <a:latin typeface="+mj-lt"/>
               </a:defRPr>
@@ -12677,7 +12976,7 @@
           <p:cNvPr id="9" name="kpi_label_1">
             <a:extLst>
               <a:ext uri="{FF2B5EF4-FFF2-40B4-BE49-F238E27FC236}">
-                <a16:creationId xmlns:a16="http://schemas.microsoft.com/office/drawing/2014/main" id="{EB822B31-C54A-B23D-4310-776D80618DF2}"/>
+                <a16:creationId xmlns:a16="http://schemas.microsoft.com/office/drawing/2014/main" id="{32C43DCD-DD5D-345E-6153-B124A4EB1371}"/>
               </a:ext>
             </a:extLst>
           </p:cNvPr>
@@ -12725,7 +13024,7 @@
           <p:cNvPr id="10" name="kpi_value_2">
             <a:extLst>
               <a:ext uri="{FF2B5EF4-FFF2-40B4-BE49-F238E27FC236}">
-                <a16:creationId xmlns:a16="http://schemas.microsoft.com/office/drawing/2014/main" id="{D7453D19-5472-437C-770B-170014189612}"/>
+                <a16:creationId xmlns:a16="http://schemas.microsoft.com/office/drawing/2014/main" id="{C80B6100-07FB-1DA5-CC46-B7040BA7F2DA}"/>
               </a:ext>
             </a:extLst>
           </p:cNvPr>
@@ -12758,7 +13057,10 @@
               <a:buNone/>
               <a:defRPr sz="6000" b="1">
                 <a:solidFill>
-                  <a:schemeClr val="accent1"/>
+                  <a:schemeClr val="accent1">
+                    <a:lumMod val="70000"/>
+                    <a:lumOff val="30000"/>
+                  </a:schemeClr>
                 </a:solidFill>
                 <a:latin typeface="+mj-lt"/>
               </a:defRPr>
@@ -12778,7 +13080,7 @@
           <p:cNvPr id="11" name="kpi_label_2">
             <a:extLst>
               <a:ext uri="{FF2B5EF4-FFF2-40B4-BE49-F238E27FC236}">
-                <a16:creationId xmlns:a16="http://schemas.microsoft.com/office/drawing/2014/main" id="{60849D5C-FA61-4926-5150-8E6F7DF23922}"/>
+                <a16:creationId xmlns:a16="http://schemas.microsoft.com/office/drawing/2014/main" id="{510BB60B-41CC-8587-A0F8-44948F0E28D6}"/>
               </a:ext>
             </a:extLst>
           </p:cNvPr>
@@ -12826,7 +13128,7 @@
           <p:cNvPr id="12" name="source">
             <a:extLst>
               <a:ext uri="{FF2B5EF4-FFF2-40B4-BE49-F238E27FC236}">
-                <a16:creationId xmlns:a16="http://schemas.microsoft.com/office/drawing/2014/main" id="{8D800A50-D0A0-A367-9852-1D7DD0068FA7}"/>
+                <a16:creationId xmlns:a16="http://schemas.microsoft.com/office/drawing/2014/main" id="{4BC840B7-4C44-6E60-652E-DF5340DA4AF5}"/>
               </a:ext>
             </a:extLst>
           </p:cNvPr>
@@ -12848,7 +13150,10 @@
             </a:avLst>
           </a:prstGeom>
           <a:solidFill>
-            <a:schemeClr val="accent1"/>
+            <a:schemeClr val="accent1">
+              <a:lumMod val="70000"/>
+              <a:lumOff val="30000"/>
+            </a:schemeClr>
           </a:solidFill>
         </p:spPr>
         <p:txBody>
@@ -12881,7 +13186,7 @@
     </p:spTree>
     <p:extLst>
       <p:ext uri="{BB962C8B-B14F-4D97-AF65-F5344CB8AC3E}">
-        <p14:creationId xmlns:p14="http://schemas.microsoft.com/office/powerpoint/2010/main" val="2950142666"/>
+        <p14:creationId xmlns:p14="http://schemas.microsoft.com/office/powerpoint/2010/main" val="355292089"/>
       </p:ext>
     </p:extLst>
   </p:cSld>
@@ -12913,7 +13218,7 @@
           <p:cNvPr id="6" name="glow">
             <a:extLst>
               <a:ext uri="{FF2B5EF4-FFF2-40B4-BE49-F238E27FC236}">
-                <a16:creationId xmlns:a16="http://schemas.microsoft.com/office/drawing/2014/main" id="{2C6E5876-4ABD-67DB-BA70-5BF169FE6147}"/>
+                <a16:creationId xmlns:a16="http://schemas.microsoft.com/office/drawing/2014/main" id="{CF02D864-1AEB-6DA9-4DE0-CAE41B7E1B43}"/>
               </a:ext>
             </a:extLst>
           </p:cNvPr>
@@ -12932,11 +13237,15 @@
             <a:gsLst>
               <a:gs pos="0">
                 <a:schemeClr val="accent1">
+                  <a:lumMod val="70000"/>
+                  <a:lumOff val="30000"/>
                   <a:alpha val="28000"/>
                 </a:schemeClr>
               </a:gs>
               <a:gs pos="100000">
                 <a:schemeClr val="accent1">
+                  <a:lumMod val="70000"/>
+                  <a:lumOff val="30000"/>
                   <a:alpha val="0"/>
                 </a:schemeClr>
               </a:gs>
@@ -13095,9 +13404,9 @@
             </a:lvl1pPr>
           </a:lstStyle>
           <a:p>
-            <a:fld id="{E74088FC-AB1D-4731-A24C-F46EBDB0C5A7}" type="datetimeFigureOut">
+            <a:fld id="{F3B25E4A-609E-4439-9216-58A1FB513E4F}" type="datetimeFigureOut">
               <a:rPr lang="en-US" smtClean="0"/>
-              <a:t>10/3/2026</a:t>
+              <a:t>10/4/2026</a:t>
             </a:fld>
             <a:endParaRPr lang="en-US"/>
           </a:p>
@@ -13132,7 +13441,7 @@
             </a:lvl1pPr>
           </a:lstStyle>
           <a:p>
-            <a:fld id="{E4AD76C8-B1EB-4E10-9C29-0B8B3CD29BA6}" type="slidenum">
+            <a:fld id="{466CBC16-03F9-4EFF-A443-63D10023E700}" type="slidenum">
               <a:rPr lang="en-US" smtClean="0"/>
               <a:t>‹#›</a:t>
             </a:fld>
@@ -13145,7 +13454,7 @@
           <p:cNvPr id="7" name="body">
             <a:extLst>
               <a:ext uri="{FF2B5EF4-FFF2-40B4-BE49-F238E27FC236}">
-                <a16:creationId xmlns:a16="http://schemas.microsoft.com/office/drawing/2014/main" id="{2AB3420B-4EE0-D02D-4BCF-8005018F69AA}"/>
+                <a16:creationId xmlns:a16="http://schemas.microsoft.com/office/drawing/2014/main" id="{D811D6AE-83C2-005F-CFCB-100D39174479}"/>
               </a:ext>
             </a:extLst>
           </p:cNvPr>
@@ -13187,7 +13496,7 @@
           <p:cNvPr id="8" name="kpi_value_1">
             <a:extLst>
               <a:ext uri="{FF2B5EF4-FFF2-40B4-BE49-F238E27FC236}">
-                <a16:creationId xmlns:a16="http://schemas.microsoft.com/office/drawing/2014/main" id="{2F14A230-2ABA-B355-9217-F93537D26B99}"/>
+                <a16:creationId xmlns:a16="http://schemas.microsoft.com/office/drawing/2014/main" id="{571CD2F7-7833-D1C3-9B60-DDF3306DEBF8}"/>
               </a:ext>
             </a:extLst>
           </p:cNvPr>
@@ -13220,7 +13529,10 @@
               <a:buNone/>
               <a:defRPr sz="6000" b="1">
                 <a:solidFill>
-                  <a:schemeClr val="accent1"/>
+                  <a:schemeClr val="accent1">
+                    <a:lumMod val="70000"/>
+                    <a:lumOff val="30000"/>
+                  </a:schemeClr>
                 </a:solidFill>
                 <a:latin typeface="+mj-lt"/>
               </a:defRPr>
@@ -13240,7 +13552,7 @@
           <p:cNvPr id="9" name="kpi_label_1">
             <a:extLst>
               <a:ext uri="{FF2B5EF4-FFF2-40B4-BE49-F238E27FC236}">
-                <a16:creationId xmlns:a16="http://schemas.microsoft.com/office/drawing/2014/main" id="{BE546E87-263B-DE2D-33D5-A300E2B8F906}"/>
+                <a16:creationId xmlns:a16="http://schemas.microsoft.com/office/drawing/2014/main" id="{9683189A-C64A-D270-1612-397224C22517}"/>
               </a:ext>
             </a:extLst>
           </p:cNvPr>
@@ -13288,7 +13600,7 @@
           <p:cNvPr id="10" name="kpi_value_2">
             <a:extLst>
               <a:ext uri="{FF2B5EF4-FFF2-40B4-BE49-F238E27FC236}">
-                <a16:creationId xmlns:a16="http://schemas.microsoft.com/office/drawing/2014/main" id="{EDC5A694-3766-5477-AA3D-E1A8ED985AE0}"/>
+                <a16:creationId xmlns:a16="http://schemas.microsoft.com/office/drawing/2014/main" id="{9A14FE42-111C-2953-7F5C-AB6B7A143649}"/>
               </a:ext>
             </a:extLst>
           </p:cNvPr>
@@ -13321,7 +13633,10 @@
               <a:buNone/>
               <a:defRPr sz="6000" b="1">
                 <a:solidFill>
-                  <a:schemeClr val="accent1"/>
+                  <a:schemeClr val="accent1">
+                    <a:lumMod val="70000"/>
+                    <a:lumOff val="30000"/>
+                  </a:schemeClr>
                 </a:solidFill>
                 <a:latin typeface="+mj-lt"/>
               </a:defRPr>
@@ -13341,7 +13656,7 @@
           <p:cNvPr id="11" name="kpi_label_2">
             <a:extLst>
               <a:ext uri="{FF2B5EF4-FFF2-40B4-BE49-F238E27FC236}">
-                <a16:creationId xmlns:a16="http://schemas.microsoft.com/office/drawing/2014/main" id="{E70BE909-934A-051E-4F02-51AF99B75DF7}"/>
+                <a16:creationId xmlns:a16="http://schemas.microsoft.com/office/drawing/2014/main" id="{B9C185B0-73FF-2517-98C7-6FACFEB462D9}"/>
               </a:ext>
             </a:extLst>
           </p:cNvPr>
@@ -13389,7 +13704,7 @@
           <p:cNvPr id="12" name="kpi_value_3">
             <a:extLst>
               <a:ext uri="{FF2B5EF4-FFF2-40B4-BE49-F238E27FC236}">
-                <a16:creationId xmlns:a16="http://schemas.microsoft.com/office/drawing/2014/main" id="{B93BCCB2-DAB1-5965-F92B-AA6072A973F4}"/>
+                <a16:creationId xmlns:a16="http://schemas.microsoft.com/office/drawing/2014/main" id="{DB54F76D-549E-67E9-C410-204EC8483969}"/>
               </a:ext>
             </a:extLst>
           </p:cNvPr>
@@ -13422,7 +13737,10 @@
               <a:buNone/>
               <a:defRPr sz="6000" b="1">
                 <a:solidFill>
-                  <a:schemeClr val="accent1"/>
+                  <a:schemeClr val="accent1">
+                    <a:lumMod val="70000"/>
+                    <a:lumOff val="30000"/>
+                  </a:schemeClr>
                 </a:solidFill>
                 <a:latin typeface="+mj-lt"/>
               </a:defRPr>
@@ -13442,7 +13760,7 @@
           <p:cNvPr id="13" name="kpi_label_3">
             <a:extLst>
               <a:ext uri="{FF2B5EF4-FFF2-40B4-BE49-F238E27FC236}">
-                <a16:creationId xmlns:a16="http://schemas.microsoft.com/office/drawing/2014/main" id="{C1FFA03D-C783-728D-5D84-BE7CCDF5B52A}"/>
+                <a16:creationId xmlns:a16="http://schemas.microsoft.com/office/drawing/2014/main" id="{DF601CA2-3ABF-5ABB-F050-5DAB47282197}"/>
               </a:ext>
             </a:extLst>
           </p:cNvPr>
@@ -13490,7 +13808,7 @@
           <p:cNvPr id="14" name="kpi_value_4">
             <a:extLst>
               <a:ext uri="{FF2B5EF4-FFF2-40B4-BE49-F238E27FC236}">
-                <a16:creationId xmlns:a16="http://schemas.microsoft.com/office/drawing/2014/main" id="{E13EFA3E-4F50-1304-3AC7-4FF14DD25D80}"/>
+                <a16:creationId xmlns:a16="http://schemas.microsoft.com/office/drawing/2014/main" id="{236EF99F-7A26-24AB-79D0-BA1EFDBEE5B3}"/>
               </a:ext>
             </a:extLst>
           </p:cNvPr>
@@ -13523,7 +13841,10 @@
               <a:buNone/>
               <a:defRPr sz="6000" b="1">
                 <a:solidFill>
-                  <a:schemeClr val="accent1"/>
+                  <a:schemeClr val="accent1">
+                    <a:lumMod val="70000"/>
+                    <a:lumOff val="30000"/>
+                  </a:schemeClr>
                 </a:solidFill>
                 <a:latin typeface="+mj-lt"/>
               </a:defRPr>
@@ -13543,7 +13864,7 @@
           <p:cNvPr id="15" name="kpi_label_4">
             <a:extLst>
               <a:ext uri="{FF2B5EF4-FFF2-40B4-BE49-F238E27FC236}">
-                <a16:creationId xmlns:a16="http://schemas.microsoft.com/office/drawing/2014/main" id="{682A7ADE-5D05-08A5-A79C-A4EE0273F289}"/>
+                <a16:creationId xmlns:a16="http://schemas.microsoft.com/office/drawing/2014/main" id="{1CA4FA00-DD55-70E5-5C26-7A1B09A7EC7E}"/>
               </a:ext>
             </a:extLst>
           </p:cNvPr>
@@ -13591,7 +13912,7 @@
           <p:cNvPr id="16" name="source">
             <a:extLst>
               <a:ext uri="{FF2B5EF4-FFF2-40B4-BE49-F238E27FC236}">
-                <a16:creationId xmlns:a16="http://schemas.microsoft.com/office/drawing/2014/main" id="{7D4FB8B1-E31A-BC1C-1638-F49998B6B70F}"/>
+                <a16:creationId xmlns:a16="http://schemas.microsoft.com/office/drawing/2014/main" id="{285029A4-8E54-45FB-D9C3-35DBD44F9948}"/>
               </a:ext>
             </a:extLst>
           </p:cNvPr>
@@ -13613,7 +13934,10 @@
             </a:avLst>
           </a:prstGeom>
           <a:solidFill>
-            <a:schemeClr val="accent1"/>
+            <a:schemeClr val="accent1">
+              <a:lumMod val="70000"/>
+              <a:lumOff val="30000"/>
+            </a:schemeClr>
           </a:solidFill>
         </p:spPr>
         <p:txBody>
@@ -13646,7 +13970,7 @@
     </p:spTree>
     <p:extLst>
       <p:ext uri="{BB962C8B-B14F-4D97-AF65-F5344CB8AC3E}">
-        <p14:creationId xmlns:p14="http://schemas.microsoft.com/office/powerpoint/2010/main" val="2813909209"/>
+        <p14:creationId xmlns:p14="http://schemas.microsoft.com/office/powerpoint/2010/main" val="2424934849"/>
       </p:ext>
     </p:extLst>
   </p:cSld>
@@ -13678,7 +14002,7 @@
           <p:cNvPr id="6" name="glow">
             <a:extLst>
               <a:ext uri="{FF2B5EF4-FFF2-40B4-BE49-F238E27FC236}">
-                <a16:creationId xmlns:a16="http://schemas.microsoft.com/office/drawing/2014/main" id="{5EA648AE-8B3B-8850-C9F4-C14934638D9E}"/>
+                <a16:creationId xmlns:a16="http://schemas.microsoft.com/office/drawing/2014/main" id="{F381D286-5836-477A-CDBF-4242BDF8EF31}"/>
               </a:ext>
             </a:extLst>
           </p:cNvPr>
@@ -13697,11 +14021,15 @@
             <a:gsLst>
               <a:gs pos="0">
                 <a:schemeClr val="accent1">
+                  <a:lumMod val="70000"/>
+                  <a:lumOff val="30000"/>
                   <a:alpha val="28000"/>
                 </a:schemeClr>
               </a:gs>
               <a:gs pos="100000">
                 <a:schemeClr val="accent1">
+                  <a:lumMod val="70000"/>
+                  <a:lumOff val="30000"/>
                   <a:alpha val="0"/>
                 </a:schemeClr>
               </a:gs>
@@ -13860,9 +14188,9 @@
             </a:lvl1pPr>
           </a:lstStyle>
           <a:p>
-            <a:fld id="{E74088FC-AB1D-4731-A24C-F46EBDB0C5A7}" type="datetimeFigureOut">
+            <a:fld id="{F3B25E4A-609E-4439-9216-58A1FB513E4F}" type="datetimeFigureOut">
               <a:rPr lang="en-US" smtClean="0"/>
-              <a:t>10/3/2026</a:t>
+              <a:t>10/4/2026</a:t>
             </a:fld>
             <a:endParaRPr lang="en-US"/>
           </a:p>
@@ -13897,7 +14225,7 @@
             </a:lvl1pPr>
           </a:lstStyle>
           <a:p>
-            <a:fld id="{E4AD76C8-B1EB-4E10-9C29-0B8B3CD29BA6}" type="slidenum">
+            <a:fld id="{466CBC16-03F9-4EFF-A443-63D10023E700}" type="slidenum">
               <a:rPr lang="en-US" smtClean="0"/>
               <a:t>‹#›</a:t>
             </a:fld>
@@ -13910,7 +14238,7 @@
           <p:cNvPr id="7" name="body">
             <a:extLst>
               <a:ext uri="{FF2B5EF4-FFF2-40B4-BE49-F238E27FC236}">
-                <a16:creationId xmlns:a16="http://schemas.microsoft.com/office/drawing/2014/main" id="{9FC2C685-1F8C-D1F2-214A-C10CBD3771BF}"/>
+                <a16:creationId xmlns:a16="http://schemas.microsoft.com/office/drawing/2014/main" id="{8E25DA22-CDBF-09CD-1DE4-BE62D80F6D19}"/>
               </a:ext>
             </a:extLst>
           </p:cNvPr>
@@ -13952,7 +14280,7 @@
           <p:cNvPr id="8" name="quote">
             <a:extLst>
               <a:ext uri="{FF2B5EF4-FFF2-40B4-BE49-F238E27FC236}">
-                <a16:creationId xmlns:a16="http://schemas.microsoft.com/office/drawing/2014/main" id="{2E261A82-AC60-E4C2-2CE0-19D97C75556A}"/>
+                <a16:creationId xmlns:a16="http://schemas.microsoft.com/office/drawing/2014/main" id="{CA1106DA-4ADF-E38A-2C43-1697C971F0B9}"/>
               </a:ext>
             </a:extLst>
           </p:cNvPr>
@@ -14002,7 +14330,7 @@
           <p:cNvPr id="9" name="attribution">
             <a:extLst>
               <a:ext uri="{FF2B5EF4-FFF2-40B4-BE49-F238E27FC236}">
-                <a16:creationId xmlns:a16="http://schemas.microsoft.com/office/drawing/2014/main" id="{508F1375-E3A6-7DBD-EDB5-087DD683DFEC}"/>
+                <a16:creationId xmlns:a16="http://schemas.microsoft.com/office/drawing/2014/main" id="{A5E284DC-D9D5-13EC-D051-3AFCFEDB8077}"/>
               </a:ext>
             </a:extLst>
           </p:cNvPr>
@@ -14050,7 +14378,7 @@
           <p:cNvPr id="10" name="source">
             <a:extLst>
               <a:ext uri="{FF2B5EF4-FFF2-40B4-BE49-F238E27FC236}">
-                <a16:creationId xmlns:a16="http://schemas.microsoft.com/office/drawing/2014/main" id="{B239C3C3-4A5E-B62F-6C2B-9D4FBD17A2E6}"/>
+                <a16:creationId xmlns:a16="http://schemas.microsoft.com/office/drawing/2014/main" id="{D81307F0-A006-638F-07A2-86BDEE822658}"/>
               </a:ext>
             </a:extLst>
           </p:cNvPr>
@@ -14072,7 +14400,10 @@
             </a:avLst>
           </a:prstGeom>
           <a:solidFill>
-            <a:schemeClr val="accent1"/>
+            <a:schemeClr val="accent1">
+              <a:lumMod val="70000"/>
+              <a:lumOff val="30000"/>
+            </a:schemeClr>
           </a:solidFill>
         </p:spPr>
         <p:txBody>
@@ -14105,7 +14436,7 @@
     </p:spTree>
     <p:extLst>
       <p:ext uri="{BB962C8B-B14F-4D97-AF65-F5344CB8AC3E}">
-        <p14:creationId xmlns:p14="http://schemas.microsoft.com/office/powerpoint/2010/main" val="3011324465"/>
+        <p14:creationId xmlns:p14="http://schemas.microsoft.com/office/powerpoint/2010/main" val="3357943554"/>
       </p:ext>
     </p:extLst>
   </p:cSld>
@@ -14137,7 +14468,7 @@
           <p:cNvPr id="6" name="glow">
             <a:extLst>
               <a:ext uri="{FF2B5EF4-FFF2-40B4-BE49-F238E27FC236}">
-                <a16:creationId xmlns:a16="http://schemas.microsoft.com/office/drawing/2014/main" id="{6254242D-09A8-17A3-C2EF-5C8F4FFD46B2}"/>
+                <a16:creationId xmlns:a16="http://schemas.microsoft.com/office/drawing/2014/main" id="{3A132B26-A9BB-ECDC-C8AA-BA1175554939}"/>
               </a:ext>
             </a:extLst>
           </p:cNvPr>
@@ -14156,11 +14487,15 @@
             <a:gsLst>
               <a:gs pos="0">
                 <a:schemeClr val="accent1">
+                  <a:lumMod val="70000"/>
+                  <a:lumOff val="30000"/>
                   <a:alpha val="28000"/>
                 </a:schemeClr>
               </a:gs>
               <a:gs pos="100000">
                 <a:schemeClr val="accent1">
+                  <a:lumMod val="70000"/>
+                  <a:lumOff val="30000"/>
                   <a:alpha val="0"/>
                 </a:schemeClr>
               </a:gs>
@@ -14319,9 +14654,9 @@
             </a:lvl1pPr>
           </a:lstStyle>
           <a:p>
-            <a:fld id="{E74088FC-AB1D-4731-A24C-F46EBDB0C5A7}" type="datetimeFigureOut">
+            <a:fld id="{F3B25E4A-609E-4439-9216-58A1FB513E4F}" type="datetimeFigureOut">
               <a:rPr lang="en-US" smtClean="0"/>
-              <a:t>10/3/2026</a:t>
+              <a:t>10/4/2026</a:t>
             </a:fld>
             <a:endParaRPr lang="en-US"/>
           </a:p>
@@ -14356,7 +14691,7 @@
             </a:lvl1pPr>
           </a:lstStyle>
           <a:p>
-            <a:fld id="{E4AD76C8-B1EB-4E10-9C29-0B8B3CD29BA6}" type="slidenum">
+            <a:fld id="{466CBC16-03F9-4EFF-A443-63D10023E700}" type="slidenum">
               <a:rPr lang="en-US" smtClean="0"/>
               <a:t>‹#›</a:t>
             </a:fld>
@@ -14369,7 +14704,7 @@
           <p:cNvPr id="7" name="item_1_title">
             <a:extLst>
               <a:ext uri="{FF2B5EF4-FFF2-40B4-BE49-F238E27FC236}">
-                <a16:creationId xmlns:a16="http://schemas.microsoft.com/office/drawing/2014/main" id="{F726CEFF-6178-B5A7-2A77-1E729850D963}"/>
+                <a16:creationId xmlns:a16="http://schemas.microsoft.com/office/drawing/2014/main" id="{CE983CE8-A27A-0D8E-CA99-1FCB2E2AB946}"/>
               </a:ext>
             </a:extLst>
           </p:cNvPr>
@@ -14399,7 +14734,10 @@
               <a:buNone/>
               <a:defRPr sz="2000" b="1">
                 <a:solidFill>
-                  <a:schemeClr val="accent1"/>
+                  <a:schemeClr val="accent1">
+                    <a:lumMod val="70000"/>
+                    <a:lumOff val="30000"/>
+                  </a:schemeClr>
                 </a:solidFill>
                 <a:latin typeface="+mj-lt"/>
               </a:defRPr>
@@ -14419,7 +14757,7 @@
           <p:cNvPr id="8" name="item_1">
             <a:extLst>
               <a:ext uri="{FF2B5EF4-FFF2-40B4-BE49-F238E27FC236}">
-                <a16:creationId xmlns:a16="http://schemas.microsoft.com/office/drawing/2014/main" id="{4879625A-CD36-1461-980D-B24B572D4B1B}"/>
+                <a16:creationId xmlns:a16="http://schemas.microsoft.com/office/drawing/2014/main" id="{E5F77229-CDAB-5994-54E0-B2843C17A9E9}"/>
               </a:ext>
             </a:extLst>
           </p:cNvPr>
@@ -14467,7 +14805,7 @@
           <p:cNvPr id="9" name="item_2_title">
             <a:extLst>
               <a:ext uri="{FF2B5EF4-FFF2-40B4-BE49-F238E27FC236}">
-                <a16:creationId xmlns:a16="http://schemas.microsoft.com/office/drawing/2014/main" id="{F6AAF314-CF39-5BA1-70A4-B7923AB559F0}"/>
+                <a16:creationId xmlns:a16="http://schemas.microsoft.com/office/drawing/2014/main" id="{2B1AD43C-882C-C1AD-EC3A-E0CFCB0BF6E6}"/>
               </a:ext>
             </a:extLst>
           </p:cNvPr>
@@ -14500,7 +14838,10 @@
               <a:buNone/>
               <a:defRPr sz="2000" b="1">
                 <a:solidFill>
-                  <a:schemeClr val="accent1"/>
+                  <a:schemeClr val="accent1">
+                    <a:lumMod val="70000"/>
+                    <a:lumOff val="30000"/>
+                  </a:schemeClr>
                 </a:solidFill>
                 <a:latin typeface="+mj-lt"/>
               </a:defRPr>
@@ -14520,7 +14861,7 @@
           <p:cNvPr id="10" name="item_2">
             <a:extLst>
               <a:ext uri="{FF2B5EF4-FFF2-40B4-BE49-F238E27FC236}">
-                <a16:creationId xmlns:a16="http://schemas.microsoft.com/office/drawing/2014/main" id="{7AB50CC2-C613-761B-D3F8-E4E0B5AD419A}"/>
+                <a16:creationId xmlns:a16="http://schemas.microsoft.com/office/drawing/2014/main" id="{40345D94-9B89-BF0E-CC37-26631A64A10D}"/>
               </a:ext>
             </a:extLst>
           </p:cNvPr>
@@ -14568,7 +14909,7 @@
           <p:cNvPr id="11" name="item_3_title">
             <a:extLst>
               <a:ext uri="{FF2B5EF4-FFF2-40B4-BE49-F238E27FC236}">
-                <a16:creationId xmlns:a16="http://schemas.microsoft.com/office/drawing/2014/main" id="{5572AE55-5D7B-99A6-3BFF-396519371FB6}"/>
+                <a16:creationId xmlns:a16="http://schemas.microsoft.com/office/drawing/2014/main" id="{7C7719BF-1B2E-6C9D-EB5C-E20400B550A8}"/>
               </a:ext>
             </a:extLst>
           </p:cNvPr>
@@ -14601,7 +14942,10 @@
               <a:buNone/>
               <a:defRPr sz="2000" b="1">
                 <a:solidFill>
-                  <a:schemeClr val="accent1"/>
+                  <a:schemeClr val="accent1">
+                    <a:lumMod val="70000"/>
+                    <a:lumOff val="30000"/>
+                  </a:schemeClr>
                 </a:solidFill>
                 <a:latin typeface="+mj-lt"/>
               </a:defRPr>
@@ -14621,7 +14965,7 @@
           <p:cNvPr id="12" name="item_3">
             <a:extLst>
               <a:ext uri="{FF2B5EF4-FFF2-40B4-BE49-F238E27FC236}">
-                <a16:creationId xmlns:a16="http://schemas.microsoft.com/office/drawing/2014/main" id="{90D4D100-063A-DE47-9367-CA9650D8532E}"/>
+                <a16:creationId xmlns:a16="http://schemas.microsoft.com/office/drawing/2014/main" id="{B29932E1-0051-8FF4-3ABC-B75F33DB2E4E}"/>
               </a:ext>
             </a:extLst>
           </p:cNvPr>
@@ -14669,7 +15013,7 @@
           <p:cNvPr id="13" name="source">
             <a:extLst>
               <a:ext uri="{FF2B5EF4-FFF2-40B4-BE49-F238E27FC236}">
-                <a16:creationId xmlns:a16="http://schemas.microsoft.com/office/drawing/2014/main" id="{EE99377C-59D5-C908-F99E-2BD0A082AF7C}"/>
+                <a16:creationId xmlns:a16="http://schemas.microsoft.com/office/drawing/2014/main" id="{69CDC0A3-EEA7-5BD5-ECB0-5ED6B3E3F829}"/>
               </a:ext>
             </a:extLst>
           </p:cNvPr>
@@ -14691,7 +15035,10 @@
             </a:avLst>
           </a:prstGeom>
           <a:solidFill>
-            <a:schemeClr val="accent1"/>
+            <a:schemeClr val="accent1">
+              <a:lumMod val="70000"/>
+              <a:lumOff val="30000"/>
+            </a:schemeClr>
           </a:solidFill>
         </p:spPr>
         <p:txBody>
@@ -14724,7 +15071,7 @@
     </p:spTree>
     <p:extLst>
       <p:ext uri="{BB962C8B-B14F-4D97-AF65-F5344CB8AC3E}">
-        <p14:creationId xmlns:p14="http://schemas.microsoft.com/office/powerpoint/2010/main" val="411975745"/>
+        <p14:creationId xmlns:p14="http://schemas.microsoft.com/office/powerpoint/2010/main" val="1687774393"/>
       </p:ext>
     </p:extLst>
   </p:cSld>
@@ -14756,7 +15103,7 @@
           <p:cNvPr id="6" name="glow">
             <a:extLst>
               <a:ext uri="{FF2B5EF4-FFF2-40B4-BE49-F238E27FC236}">
-                <a16:creationId xmlns:a16="http://schemas.microsoft.com/office/drawing/2014/main" id="{ADE49234-F5E5-858F-ABDB-A2B43ACD5A99}"/>
+                <a16:creationId xmlns:a16="http://schemas.microsoft.com/office/drawing/2014/main" id="{B8E8B0D5-CB06-65E2-BB9B-14B54CAB167B}"/>
               </a:ext>
             </a:extLst>
           </p:cNvPr>
@@ -14775,11 +15122,15 @@
             <a:gsLst>
               <a:gs pos="0">
                 <a:schemeClr val="accent1">
+                  <a:lumMod val="70000"/>
+                  <a:lumOff val="30000"/>
                   <a:alpha val="28000"/>
                 </a:schemeClr>
               </a:gs>
               <a:gs pos="100000">
                 <a:schemeClr val="accent1">
+                  <a:lumMod val="70000"/>
+                  <a:lumOff val="30000"/>
                   <a:alpha val="0"/>
                 </a:schemeClr>
               </a:gs>
@@ -14938,9 +15289,9 @@
             </a:lvl1pPr>
           </a:lstStyle>
           <a:p>
-            <a:fld id="{E74088FC-AB1D-4731-A24C-F46EBDB0C5A7}" type="datetimeFigureOut">
+            <a:fld id="{F3B25E4A-609E-4439-9216-58A1FB513E4F}" type="datetimeFigureOut">
               <a:rPr lang="en-US" smtClean="0"/>
-              <a:t>10/3/2026</a:t>
+              <a:t>10/4/2026</a:t>
             </a:fld>
             <a:endParaRPr lang="en-US"/>
           </a:p>
@@ -14975,7 +15326,7 @@
             </a:lvl1pPr>
           </a:lstStyle>
           <a:p>
-            <a:fld id="{E4AD76C8-B1EB-4E10-9C29-0B8B3CD29BA6}" type="slidenum">
+            <a:fld id="{466CBC16-03F9-4EFF-A443-63D10023E700}" type="slidenum">
               <a:rPr lang="en-US" smtClean="0"/>
               <a:t>‹#›</a:t>
             </a:fld>
@@ -14988,7 +15339,7 @@
           <p:cNvPr id="7" name="item_1_title">
             <a:extLst>
               <a:ext uri="{FF2B5EF4-FFF2-40B4-BE49-F238E27FC236}">
-                <a16:creationId xmlns:a16="http://schemas.microsoft.com/office/drawing/2014/main" id="{4AE22BE7-C3A5-D90B-A891-7BB9EEFC5548}"/>
+                <a16:creationId xmlns:a16="http://schemas.microsoft.com/office/drawing/2014/main" id="{21AA7C19-2D8C-0438-33A9-48527742A7DB}"/>
               </a:ext>
             </a:extLst>
           </p:cNvPr>
@@ -15018,7 +15369,10 @@
               <a:buNone/>
               <a:defRPr sz="2000" b="1">
                 <a:solidFill>
-                  <a:schemeClr val="accent1"/>
+                  <a:schemeClr val="accent1">
+                    <a:lumMod val="70000"/>
+                    <a:lumOff val="30000"/>
+                  </a:schemeClr>
                 </a:solidFill>
                 <a:latin typeface="+mj-lt"/>
               </a:defRPr>
@@ -15038,7 +15392,7 @@
           <p:cNvPr id="8" name="item_1">
             <a:extLst>
               <a:ext uri="{FF2B5EF4-FFF2-40B4-BE49-F238E27FC236}">
-                <a16:creationId xmlns:a16="http://schemas.microsoft.com/office/drawing/2014/main" id="{7E089502-BDB8-9E9B-257D-CDC5A3ED97EB}"/>
+                <a16:creationId xmlns:a16="http://schemas.microsoft.com/office/drawing/2014/main" id="{69B00258-3184-35B9-EA61-9B9B63F2E363}"/>
               </a:ext>
             </a:extLst>
           </p:cNvPr>
@@ -15086,7 +15440,7 @@
           <p:cNvPr id="9" name="item_2_title">
             <a:extLst>
               <a:ext uri="{FF2B5EF4-FFF2-40B4-BE49-F238E27FC236}">
-                <a16:creationId xmlns:a16="http://schemas.microsoft.com/office/drawing/2014/main" id="{D140DF33-D055-B6BB-874D-F86044B15C6E}"/>
+                <a16:creationId xmlns:a16="http://schemas.microsoft.com/office/drawing/2014/main" id="{85F3BA18-8E5E-90F6-2AE8-8DAB2E7E0603}"/>
               </a:ext>
             </a:extLst>
           </p:cNvPr>
@@ -15119,7 +15473,10 @@
               <a:buNone/>
               <a:defRPr sz="2000" b="1">
                 <a:solidFill>
-                  <a:schemeClr val="accent1"/>
+                  <a:schemeClr val="accent1">
+                    <a:lumMod val="70000"/>
+                    <a:lumOff val="30000"/>
+                  </a:schemeClr>
                 </a:solidFill>
                 <a:latin typeface="+mj-lt"/>
               </a:defRPr>
@@ -15139,7 +15496,7 @@
           <p:cNvPr id="10" name="item_2">
             <a:extLst>
               <a:ext uri="{FF2B5EF4-FFF2-40B4-BE49-F238E27FC236}">
-                <a16:creationId xmlns:a16="http://schemas.microsoft.com/office/drawing/2014/main" id="{45F7F21A-B5F2-5925-CEDC-C92A731A3032}"/>
+                <a16:creationId xmlns:a16="http://schemas.microsoft.com/office/drawing/2014/main" id="{8C6974E5-3E59-C716-2B09-AE380690DDF2}"/>
               </a:ext>
             </a:extLst>
           </p:cNvPr>
@@ -15187,7 +15544,7 @@
           <p:cNvPr id="11" name="source">
             <a:extLst>
               <a:ext uri="{FF2B5EF4-FFF2-40B4-BE49-F238E27FC236}">
-                <a16:creationId xmlns:a16="http://schemas.microsoft.com/office/drawing/2014/main" id="{009D0AB2-3AED-8542-F034-D774674B12E3}"/>
+                <a16:creationId xmlns:a16="http://schemas.microsoft.com/office/drawing/2014/main" id="{21ABE9FE-E9EF-9AF7-1A32-A1B00CD7E8CD}"/>
               </a:ext>
             </a:extLst>
           </p:cNvPr>
@@ -15209,7 +15566,10 @@
             </a:avLst>
           </a:prstGeom>
           <a:solidFill>
-            <a:schemeClr val="accent1"/>
+            <a:schemeClr val="accent1">
+              <a:lumMod val="70000"/>
+              <a:lumOff val="30000"/>
+            </a:schemeClr>
           </a:solidFill>
         </p:spPr>
         <p:txBody>
@@ -15242,7 +15602,7 @@
     </p:spTree>
     <p:extLst>
       <p:ext uri="{BB962C8B-B14F-4D97-AF65-F5344CB8AC3E}">
-        <p14:creationId xmlns:p14="http://schemas.microsoft.com/office/powerpoint/2010/main" val="3865704321"/>
+        <p14:creationId xmlns:p14="http://schemas.microsoft.com/office/powerpoint/2010/main" val="2577205504"/>
       </p:ext>
     </p:extLst>
   </p:cSld>
@@ -15274,7 +15634,7 @@
           <p:cNvPr id="6" name="glow">
             <a:extLst>
               <a:ext uri="{FF2B5EF4-FFF2-40B4-BE49-F238E27FC236}">
-                <a16:creationId xmlns:a16="http://schemas.microsoft.com/office/drawing/2014/main" id="{351D9A3B-0675-E211-AFB6-0A6A0073F36B}"/>
+                <a16:creationId xmlns:a16="http://schemas.microsoft.com/office/drawing/2014/main" id="{2AECC632-F972-32CB-99E4-DF0C2231F16D}"/>
               </a:ext>
             </a:extLst>
           </p:cNvPr>
@@ -15293,11 +15653,15 @@
             <a:gsLst>
               <a:gs pos="0">
                 <a:schemeClr val="accent1">
+                  <a:lumMod val="70000"/>
+                  <a:lumOff val="30000"/>
                   <a:alpha val="28000"/>
                 </a:schemeClr>
               </a:gs>
               <a:gs pos="100000">
                 <a:schemeClr val="accent1">
+                  <a:lumMod val="70000"/>
+                  <a:lumOff val="30000"/>
                   <a:alpha val="0"/>
                 </a:schemeClr>
               </a:gs>
@@ -15456,9 +15820,9 @@
             </a:lvl1pPr>
           </a:lstStyle>
           <a:p>
-            <a:fld id="{E74088FC-AB1D-4731-A24C-F46EBDB0C5A7}" type="datetimeFigureOut">
+            <a:fld id="{F3B25E4A-609E-4439-9216-58A1FB513E4F}" type="datetimeFigureOut">
               <a:rPr lang="en-US" smtClean="0"/>
-              <a:t>10/3/2026</a:t>
+              <a:t>10/4/2026</a:t>
             </a:fld>
             <a:endParaRPr lang="en-US"/>
           </a:p>
@@ -15493,7 +15857,7 @@
             </a:lvl1pPr>
           </a:lstStyle>
           <a:p>
-            <a:fld id="{E4AD76C8-B1EB-4E10-9C29-0B8B3CD29BA6}" type="slidenum">
+            <a:fld id="{466CBC16-03F9-4EFF-A443-63D10023E700}" type="slidenum">
               <a:rPr lang="en-US" smtClean="0"/>
               <a:t>‹#›</a:t>
             </a:fld>
@@ -15506,7 +15870,7 @@
           <p:cNvPr id="7" name="chart">
             <a:extLst>
               <a:ext uri="{FF2B5EF4-FFF2-40B4-BE49-F238E27FC236}">
-                <a16:creationId xmlns:a16="http://schemas.microsoft.com/office/drawing/2014/main" id="{83B61B7C-B0C7-5D90-DB5D-D4C4D1C0DB32}"/>
+                <a16:creationId xmlns:a16="http://schemas.microsoft.com/office/drawing/2014/main" id="{EE7AB4D9-FA17-FD17-BF51-A34F34F86257}"/>
               </a:ext>
             </a:extLst>
           </p:cNvPr>
@@ -15536,7 +15900,7 @@
           <p:cNvPr id="8" name="body">
             <a:extLst>
               <a:ext uri="{FF2B5EF4-FFF2-40B4-BE49-F238E27FC236}">
-                <a16:creationId xmlns:a16="http://schemas.microsoft.com/office/drawing/2014/main" id="{92C108B4-C461-9E2F-238E-078114CC34DC}"/>
+                <a16:creationId xmlns:a16="http://schemas.microsoft.com/office/drawing/2014/main" id="{8C231E10-B8CF-52FF-86FA-99E6558BDEE2}"/>
               </a:ext>
             </a:extLst>
           </p:cNvPr>
@@ -15581,7 +15945,7 @@
           <p:cNvPr id="9" name="source">
             <a:extLst>
               <a:ext uri="{FF2B5EF4-FFF2-40B4-BE49-F238E27FC236}">
-                <a16:creationId xmlns:a16="http://schemas.microsoft.com/office/drawing/2014/main" id="{70C0317D-456A-4381-8821-2BA030A23A6D}"/>
+                <a16:creationId xmlns:a16="http://schemas.microsoft.com/office/drawing/2014/main" id="{CF924BE5-16BE-A9F8-50F4-8BD8EB16C9CD}"/>
               </a:ext>
             </a:extLst>
           </p:cNvPr>
@@ -15603,7 +15967,10 @@
             </a:avLst>
           </a:prstGeom>
           <a:solidFill>
-            <a:schemeClr val="accent1"/>
+            <a:schemeClr val="accent1">
+              <a:lumMod val="70000"/>
+              <a:lumOff val="30000"/>
+            </a:schemeClr>
           </a:solidFill>
         </p:spPr>
         <p:txBody>
@@ -15636,7 +16003,7 @@
     </p:spTree>
     <p:extLst>
       <p:ext uri="{BB962C8B-B14F-4D97-AF65-F5344CB8AC3E}">
-        <p14:creationId xmlns:p14="http://schemas.microsoft.com/office/powerpoint/2010/main" val="2343747231"/>
+        <p14:creationId xmlns:p14="http://schemas.microsoft.com/office/powerpoint/2010/main" val="1643047078"/>
       </p:ext>
     </p:extLst>
   </p:cSld>
@@ -15668,7 +16035,7 @@
           <p:cNvPr id="6" name="glow">
             <a:extLst>
               <a:ext uri="{FF2B5EF4-FFF2-40B4-BE49-F238E27FC236}">
-                <a16:creationId xmlns:a16="http://schemas.microsoft.com/office/drawing/2014/main" id="{CBF85F44-6F30-83D5-17A0-1DC868E8EF91}"/>
+                <a16:creationId xmlns:a16="http://schemas.microsoft.com/office/drawing/2014/main" id="{9B3CD533-6697-16A5-60CF-E07A6E8E187A}"/>
               </a:ext>
             </a:extLst>
           </p:cNvPr>
@@ -15687,11 +16054,15 @@
             <a:gsLst>
               <a:gs pos="0">
                 <a:schemeClr val="accent1">
+                  <a:lumMod val="70000"/>
+                  <a:lumOff val="30000"/>
                   <a:alpha val="28000"/>
                 </a:schemeClr>
               </a:gs>
               <a:gs pos="100000">
                 <a:schemeClr val="accent1">
+                  <a:lumMod val="70000"/>
+                  <a:lumOff val="30000"/>
                   <a:alpha val="0"/>
                 </a:schemeClr>
               </a:gs>
@@ -15850,9 +16221,9 @@
             </a:lvl1pPr>
           </a:lstStyle>
           <a:p>
-            <a:fld id="{E74088FC-AB1D-4731-A24C-F46EBDB0C5A7}" type="datetimeFigureOut">
+            <a:fld id="{F3B25E4A-609E-4439-9216-58A1FB513E4F}" type="datetimeFigureOut">
               <a:rPr lang="en-US" smtClean="0"/>
-              <a:t>10/3/2026</a:t>
+              <a:t>10/4/2026</a:t>
             </a:fld>
             <a:endParaRPr lang="en-US"/>
           </a:p>
@@ -15887,7 +16258,7 @@
             </a:lvl1pPr>
           </a:lstStyle>
           <a:p>
-            <a:fld id="{E4AD76C8-B1EB-4E10-9C29-0B8B3CD29BA6}" type="slidenum">
+            <a:fld id="{466CBC16-03F9-4EFF-A443-63D10023E700}" type="slidenum">
               <a:rPr lang="en-US" smtClean="0"/>
               <a:t>‹#›</a:t>
             </a:fld>
@@ -15900,7 +16271,7 @@
           <p:cNvPr id="7" name="item_1_title">
             <a:extLst>
               <a:ext uri="{FF2B5EF4-FFF2-40B4-BE49-F238E27FC236}">
-                <a16:creationId xmlns:a16="http://schemas.microsoft.com/office/drawing/2014/main" id="{66BDFDEB-BDFB-78DE-E7BB-CDB8A1809E6F}"/>
+                <a16:creationId xmlns:a16="http://schemas.microsoft.com/office/drawing/2014/main" id="{B84041E4-5FE5-3122-4203-4FF8DF9F5A01}"/>
               </a:ext>
             </a:extLst>
           </p:cNvPr>
@@ -15930,7 +16301,10 @@
               <a:buNone/>
               <a:defRPr sz="2000" b="1">
                 <a:solidFill>
-                  <a:schemeClr val="accent1"/>
+                  <a:schemeClr val="accent1">
+                    <a:lumMod val="70000"/>
+                    <a:lumOff val="30000"/>
+                  </a:schemeClr>
                 </a:solidFill>
                 <a:latin typeface="+mj-lt"/>
               </a:defRPr>
@@ -15950,7 +16324,7 @@
           <p:cNvPr id="8" name="item_1">
             <a:extLst>
               <a:ext uri="{FF2B5EF4-FFF2-40B4-BE49-F238E27FC236}">
-                <a16:creationId xmlns:a16="http://schemas.microsoft.com/office/drawing/2014/main" id="{54A8D5D6-EF87-39B8-49E9-827F0C74BFB5}"/>
+                <a16:creationId xmlns:a16="http://schemas.microsoft.com/office/drawing/2014/main" id="{7054787D-5CC6-4502-49B6-E4C403A1827C}"/>
               </a:ext>
             </a:extLst>
           </p:cNvPr>
@@ -15998,7 +16372,7 @@
           <p:cNvPr id="9" name="item_2_title">
             <a:extLst>
               <a:ext uri="{FF2B5EF4-FFF2-40B4-BE49-F238E27FC236}">
-                <a16:creationId xmlns:a16="http://schemas.microsoft.com/office/drawing/2014/main" id="{318BB76A-50DE-E8C7-1DD4-787608D52B7D}"/>
+                <a16:creationId xmlns:a16="http://schemas.microsoft.com/office/drawing/2014/main" id="{DC2B5704-A963-96FA-CC0F-FCF8C2233F48}"/>
               </a:ext>
             </a:extLst>
           </p:cNvPr>
@@ -16031,7 +16405,10 @@
               <a:buNone/>
               <a:defRPr sz="2000" b="1">
                 <a:solidFill>
-                  <a:schemeClr val="accent1"/>
+                  <a:schemeClr val="accent1">
+                    <a:lumMod val="70000"/>
+                    <a:lumOff val="30000"/>
+                  </a:schemeClr>
                 </a:solidFill>
                 <a:latin typeface="+mj-lt"/>
               </a:defRPr>
@@ -16051,7 +16428,7 @@
           <p:cNvPr id="10" name="item_2">
             <a:extLst>
               <a:ext uri="{FF2B5EF4-FFF2-40B4-BE49-F238E27FC236}">
-                <a16:creationId xmlns:a16="http://schemas.microsoft.com/office/drawing/2014/main" id="{23B155FB-CA3B-C630-9825-3FADB984A438}"/>
+                <a16:creationId xmlns:a16="http://schemas.microsoft.com/office/drawing/2014/main" id="{3ADCEEE1-1620-3E67-2D88-49141F69BB8B}"/>
               </a:ext>
             </a:extLst>
           </p:cNvPr>
@@ -16099,7 +16476,7 @@
           <p:cNvPr id="11" name="item_3_title">
             <a:extLst>
               <a:ext uri="{FF2B5EF4-FFF2-40B4-BE49-F238E27FC236}">
-                <a16:creationId xmlns:a16="http://schemas.microsoft.com/office/drawing/2014/main" id="{F220A033-7D0D-9BA4-3642-4DFEB6AA271A}"/>
+                <a16:creationId xmlns:a16="http://schemas.microsoft.com/office/drawing/2014/main" id="{F1B54FF2-9E41-167C-CA7C-D9A6F10716C3}"/>
               </a:ext>
             </a:extLst>
           </p:cNvPr>
@@ -16132,7 +16509,10 @@
               <a:buNone/>
               <a:defRPr sz="2000" b="1">
                 <a:solidFill>
-                  <a:schemeClr val="accent1"/>
+                  <a:schemeClr val="accent1">
+                    <a:lumMod val="70000"/>
+                    <a:lumOff val="30000"/>
+                  </a:schemeClr>
                 </a:solidFill>
                 <a:latin typeface="+mj-lt"/>
               </a:defRPr>
@@ -16152,7 +16532,7 @@
           <p:cNvPr id="12" name="item_3">
             <a:extLst>
               <a:ext uri="{FF2B5EF4-FFF2-40B4-BE49-F238E27FC236}">
-                <a16:creationId xmlns:a16="http://schemas.microsoft.com/office/drawing/2014/main" id="{76DEF984-2B20-B396-8CC8-03D3B354479D}"/>
+                <a16:creationId xmlns:a16="http://schemas.microsoft.com/office/drawing/2014/main" id="{9C2147E5-890B-4A27-C642-4ACA9DD676B1}"/>
               </a:ext>
             </a:extLst>
           </p:cNvPr>
@@ -16200,7 +16580,7 @@
           <p:cNvPr id="13" name="item_4_title">
             <a:extLst>
               <a:ext uri="{FF2B5EF4-FFF2-40B4-BE49-F238E27FC236}">
-                <a16:creationId xmlns:a16="http://schemas.microsoft.com/office/drawing/2014/main" id="{80CB101F-181A-96A8-4189-229FD5D0A3C9}"/>
+                <a16:creationId xmlns:a16="http://schemas.microsoft.com/office/drawing/2014/main" id="{D45F5EEF-3A72-8AD4-11CB-1B2A6552FD0E}"/>
               </a:ext>
             </a:extLst>
           </p:cNvPr>
@@ -16233,7 +16613,10 @@
               <a:buNone/>
               <a:defRPr sz="2000" b="1">
                 <a:solidFill>
-                  <a:schemeClr val="accent1"/>
+                  <a:schemeClr val="accent1">
+                    <a:lumMod val="70000"/>
+                    <a:lumOff val="30000"/>
+                  </a:schemeClr>
                 </a:solidFill>
                 <a:latin typeface="+mj-lt"/>
               </a:defRPr>
@@ -16253,7 +16636,7 @@
           <p:cNvPr id="14" name="item_4">
             <a:extLst>
               <a:ext uri="{FF2B5EF4-FFF2-40B4-BE49-F238E27FC236}">
-                <a16:creationId xmlns:a16="http://schemas.microsoft.com/office/drawing/2014/main" id="{21271166-E1EC-76D0-D68C-D3511D2437A1}"/>
+                <a16:creationId xmlns:a16="http://schemas.microsoft.com/office/drawing/2014/main" id="{474A6A82-66F3-C0C0-A01A-549A201BAA5F}"/>
               </a:ext>
             </a:extLst>
           </p:cNvPr>
@@ -16301,7 +16684,7 @@
           <p:cNvPr id="15" name="source">
             <a:extLst>
               <a:ext uri="{FF2B5EF4-FFF2-40B4-BE49-F238E27FC236}">
-                <a16:creationId xmlns:a16="http://schemas.microsoft.com/office/drawing/2014/main" id="{FF646FA1-78C6-9EAC-30D2-3FA4ABACF078}"/>
+                <a16:creationId xmlns:a16="http://schemas.microsoft.com/office/drawing/2014/main" id="{782F8C3C-7D3B-163A-6C1F-98FA1FAD70D8}"/>
               </a:ext>
             </a:extLst>
           </p:cNvPr>
@@ -16323,7 +16706,10 @@
             </a:avLst>
           </a:prstGeom>
           <a:solidFill>
-            <a:schemeClr val="accent1"/>
+            <a:schemeClr val="accent1">
+              <a:lumMod val="70000"/>
+              <a:lumOff val="30000"/>
+            </a:schemeClr>
           </a:solidFill>
         </p:spPr>
         <p:txBody>
@@ -16356,7 +16742,7 @@
     </p:spTree>
     <p:extLst>
       <p:ext uri="{BB962C8B-B14F-4D97-AF65-F5344CB8AC3E}">
-        <p14:creationId xmlns:p14="http://schemas.microsoft.com/office/powerpoint/2010/main" val="1660263370"/>
+        <p14:creationId xmlns:p14="http://schemas.microsoft.com/office/powerpoint/2010/main" val="3434570295"/>
       </p:ext>
     </p:extLst>
   </p:cSld>
@@ -16573,9 +16959,9 @@
             </a:lvl1pPr>
           </a:lstStyle>
           <a:p>
-            <a:fld id="{E74088FC-AB1D-4731-A24C-F46EBDB0C5A7}" type="datetimeFigureOut">
+            <a:fld id="{F3B25E4A-609E-4439-9216-58A1FB513E4F}" type="datetimeFigureOut">
               <a:rPr lang="en-US" smtClean="0"/>
-              <a:t>10/3/2026</a:t>
+              <a:t>10/4/2026</a:t>
             </a:fld>
             <a:endParaRPr lang="en-US"/>
           </a:p>
@@ -16618,7 +17004,7 @@
             </a:lvl1pPr>
           </a:lstStyle>
           <a:p>
-            <a:fld id="{E4AD76C8-B1EB-4E10-9C29-0B8B3CD29BA6}" type="slidenum">
+            <a:fld id="{466CBC16-03F9-4EFF-A443-63D10023E700}" type="slidenum">
               <a:rPr lang="en-US" smtClean="0"/>
               <a:t>‹#›</a:t>
             </a:fld>
@@ -16629,7 +17015,7 @@
     </p:spTree>
     <p:extLst>
       <p:ext uri="{BB962C8B-B14F-4D97-AF65-F5344CB8AC3E}">
-        <p14:creationId xmlns:p14="http://schemas.microsoft.com/office/powerpoint/2010/main" val="3960044905"/>
+        <p14:creationId xmlns:p14="http://schemas.microsoft.com/office/powerpoint/2010/main" val="4108428204"/>
       </p:ext>
     </p:extLst>
   </p:cSld>
